--- a/EduVision_DV_Project_Presentation.pptx
+++ b/EduVision_DV_Project_Presentation.pptx
@@ -5,26 +5,27 @@
     <p:sldMasterId id="2147483648" r:id="rId1"/>
   </p:sldMasterIdLst>
   <p:sldIdLst>
-    <p:sldId id="256" r:id="rId2"/>
-    <p:sldId id="257" r:id="rId3"/>
-    <p:sldId id="258" r:id="rId4"/>
-    <p:sldId id="259" r:id="rId5"/>
-    <p:sldId id="260" r:id="rId6"/>
-    <p:sldId id="261" r:id="rId7"/>
-    <p:sldId id="262" r:id="rId8"/>
-    <p:sldId id="263" r:id="rId9"/>
-    <p:sldId id="264" r:id="rId10"/>
-    <p:sldId id="265" r:id="rId11"/>
-    <p:sldId id="266" r:id="rId12"/>
-    <p:sldId id="267" r:id="rId13"/>
-    <p:sldId id="268" r:id="rId14"/>
-    <p:sldId id="269" r:id="rId15"/>
-    <p:sldId id="270" r:id="rId16"/>
-    <p:sldId id="271" r:id="rId17"/>
-    <p:sldId id="272" r:id="rId18"/>
-    <p:sldId id="273" r:id="rId19"/>
+    <p:sldId id="256" r:id="rId7"/>
+    <p:sldId id="257" r:id="rId8"/>
+    <p:sldId id="258" r:id="rId9"/>
+    <p:sldId id="259" r:id="rId10"/>
+    <p:sldId id="260" r:id="rId11"/>
+    <p:sldId id="261" r:id="rId12"/>
+    <p:sldId id="262" r:id="rId13"/>
+    <p:sldId id="263" r:id="rId14"/>
+    <p:sldId id="264" r:id="rId15"/>
+    <p:sldId id="265" r:id="rId16"/>
+    <p:sldId id="266" r:id="rId17"/>
+    <p:sldId id="267" r:id="rId18"/>
+    <p:sldId id="268" r:id="rId19"/>
+    <p:sldId id="269" r:id="rId20"/>
+    <p:sldId id="270" r:id="rId21"/>
+    <p:sldId id="271" r:id="rId22"/>
+    <p:sldId id="272" r:id="rId23"/>
+    <p:sldId id="273" r:id="rId24"/>
+    <p:sldId id="274" r:id="rId25"/>
   </p:sldIdLst>
-  <p:sldSz cx="12192000" cy="6858000"/>
+  <p:sldSz cx="12191695" cy="6858000" type="screen4x3"/>
   <p:notesSz cx="6858000" cy="9144000"/>
   <p:defaultTextStyle>
     <a:defPPr>
@@ -121,22 +122,6 @@
       </a:defRPr>
     </a:lvl9pPr>
   </p:defaultTextStyle>
-  <p:extLst>
-    <p:ext uri="{EFAFB233-063F-42B5-8137-9DF3F51BA10A}">
-      <p15:sldGuideLst xmlns:p15="http://schemas.microsoft.com/office/powerpoint/2012/main">
-        <p15:guide id="1" orient="horz" pos="2160">
-          <p15:clr>
-            <a:srgbClr val="A4A3A4"/>
-          </p15:clr>
-        </p15:guide>
-        <p15:guide id="2" pos="2880">
-          <p15:clr>
-            <a:srgbClr val="A4A3A4"/>
-          </p15:clr>
-        </p15:guide>
-      </p15:sldGuideLst>
-    </p:ext>
-  </p:extLst>
 </p:presentation>
 </file>
 
@@ -178,9 +163,10 @@
           <a:lstStyle/>
           <a:p>
             <a:r>
-              <a:rPr lang="en-US"/>
+              <a:rPr lang="en-US" smtClean="0"/>
               <a:t>Click to edit Master title style</a:t>
             </a:r>
+            <a:endParaRPr lang="en-US"/>
           </a:p>
         </p:txBody>
       </p:sp>
@@ -296,9 +282,10 @@
           </a:lstStyle>
           <a:p>
             <a:r>
-              <a:rPr lang="en-US"/>
+              <a:rPr lang="en-US" smtClean="0"/>
               <a:t>Click to edit Master subtitle style</a:t>
             </a:r>
+            <a:endParaRPr lang="en-US"/>
           </a:p>
         </p:txBody>
       </p:sp>
@@ -319,7 +306,7 @@
           <a:p>
             <a:fld id="{5BCAD085-E8A6-8845-BD4E-CB4CCA059FC4}" type="datetimeFigureOut">
               <a:rPr lang="en-US" smtClean="0"/>
-              <a:t>9/20/2026</a:t>
+              <a:t>1/27/13</a:t>
             </a:fld>
             <a:endParaRPr lang="en-US"/>
           </a:p>
@@ -413,9 +400,10 @@
           <a:lstStyle/>
           <a:p>
             <a:r>
-              <a:rPr lang="en-US"/>
+              <a:rPr lang="en-US" smtClean="0"/>
               <a:t>Click to edit Master title style</a:t>
             </a:r>
+            <a:endParaRPr lang="en-US"/>
           </a:p>
         </p:txBody>
       </p:sp>
@@ -436,37 +424,38 @@
           <a:p>
             <a:pPr lvl="0"/>
             <a:r>
-              <a:rPr lang="en-US"/>
+              <a:rPr lang="en-US" smtClean="0"/>
               <a:t>Click to edit Master text styles</a:t>
             </a:r>
           </a:p>
           <a:p>
             <a:pPr lvl="1"/>
             <a:r>
-              <a:rPr lang="en-US"/>
+              <a:rPr lang="en-US" smtClean="0"/>
               <a:t>Second level</a:t>
             </a:r>
           </a:p>
           <a:p>
             <a:pPr lvl="2"/>
             <a:r>
-              <a:rPr lang="en-US"/>
+              <a:rPr lang="en-US" smtClean="0"/>
               <a:t>Third level</a:t>
             </a:r>
           </a:p>
           <a:p>
             <a:pPr lvl="3"/>
             <a:r>
-              <a:rPr lang="en-US"/>
+              <a:rPr lang="en-US" smtClean="0"/>
               <a:t>Fourth level</a:t>
             </a:r>
           </a:p>
           <a:p>
             <a:pPr lvl="4"/>
             <a:r>
-              <a:rPr lang="en-US"/>
+              <a:rPr lang="en-US" smtClean="0"/>
               <a:t>Fifth level</a:t>
             </a:r>
+            <a:endParaRPr lang="en-US"/>
           </a:p>
         </p:txBody>
       </p:sp>
@@ -487,7 +476,7 @@
           <a:p>
             <a:fld id="{5BCAD085-E8A6-8845-BD4E-CB4CCA059FC4}" type="datetimeFigureOut">
               <a:rPr lang="en-US" smtClean="0"/>
-              <a:t>9/20/2026</a:t>
+              <a:t>1/27/13</a:t>
             </a:fld>
             <a:endParaRPr lang="en-US"/>
           </a:p>
@@ -586,9 +575,10 @@
           <a:lstStyle/>
           <a:p>
             <a:r>
-              <a:rPr lang="en-US"/>
+              <a:rPr lang="en-US" smtClean="0"/>
               <a:t>Click to edit Master title style</a:t>
             </a:r>
+            <a:endParaRPr lang="en-US"/>
           </a:p>
         </p:txBody>
       </p:sp>
@@ -614,37 +604,38 @@
           <a:p>
             <a:pPr lvl="0"/>
             <a:r>
-              <a:rPr lang="en-US"/>
+              <a:rPr lang="en-US" smtClean="0"/>
               <a:t>Click to edit Master text styles</a:t>
             </a:r>
           </a:p>
           <a:p>
             <a:pPr lvl="1"/>
             <a:r>
-              <a:rPr lang="en-US"/>
+              <a:rPr lang="en-US" smtClean="0"/>
               <a:t>Second level</a:t>
             </a:r>
           </a:p>
           <a:p>
             <a:pPr lvl="2"/>
             <a:r>
-              <a:rPr lang="en-US"/>
+              <a:rPr lang="en-US" smtClean="0"/>
               <a:t>Third level</a:t>
             </a:r>
           </a:p>
           <a:p>
             <a:pPr lvl="3"/>
             <a:r>
-              <a:rPr lang="en-US"/>
+              <a:rPr lang="en-US" smtClean="0"/>
               <a:t>Fourth level</a:t>
             </a:r>
           </a:p>
           <a:p>
             <a:pPr lvl="4"/>
             <a:r>
-              <a:rPr lang="en-US"/>
+              <a:rPr lang="en-US" smtClean="0"/>
               <a:t>Fifth level</a:t>
             </a:r>
+            <a:endParaRPr lang="en-US"/>
           </a:p>
         </p:txBody>
       </p:sp>
@@ -665,7 +656,7 @@
           <a:p>
             <a:fld id="{5BCAD085-E8A6-8845-BD4E-CB4CCA059FC4}" type="datetimeFigureOut">
               <a:rPr lang="en-US" smtClean="0"/>
-              <a:t>9/20/2026</a:t>
+              <a:t>1/27/13</a:t>
             </a:fld>
             <a:endParaRPr lang="en-US"/>
           </a:p>
@@ -759,9 +750,10 @@
           <a:lstStyle/>
           <a:p>
             <a:r>
-              <a:rPr lang="en-US"/>
+              <a:rPr lang="en-US" smtClean="0"/>
               <a:t>Click to edit Master title style</a:t>
             </a:r>
+            <a:endParaRPr lang="en-US"/>
           </a:p>
         </p:txBody>
       </p:sp>
@@ -782,37 +774,38 @@
           <a:p>
             <a:pPr lvl="0"/>
             <a:r>
-              <a:rPr lang="en-US"/>
+              <a:rPr lang="en-US" smtClean="0"/>
               <a:t>Click to edit Master text styles</a:t>
             </a:r>
           </a:p>
           <a:p>
             <a:pPr lvl="1"/>
             <a:r>
-              <a:rPr lang="en-US"/>
+              <a:rPr lang="en-US" smtClean="0"/>
               <a:t>Second level</a:t>
             </a:r>
           </a:p>
           <a:p>
             <a:pPr lvl="2"/>
             <a:r>
-              <a:rPr lang="en-US"/>
+              <a:rPr lang="en-US" smtClean="0"/>
               <a:t>Third level</a:t>
             </a:r>
           </a:p>
           <a:p>
             <a:pPr lvl="3"/>
             <a:r>
-              <a:rPr lang="en-US"/>
+              <a:rPr lang="en-US" smtClean="0"/>
               <a:t>Fourth level</a:t>
             </a:r>
           </a:p>
           <a:p>
             <a:pPr lvl="4"/>
             <a:r>
-              <a:rPr lang="en-US"/>
+              <a:rPr lang="en-US" smtClean="0"/>
               <a:t>Fifth level</a:t>
             </a:r>
+            <a:endParaRPr lang="en-US"/>
           </a:p>
         </p:txBody>
       </p:sp>
@@ -833,7 +826,7 @@
           <a:p>
             <a:fld id="{5BCAD085-E8A6-8845-BD4E-CB4CCA059FC4}" type="datetimeFigureOut">
               <a:rPr lang="en-US" smtClean="0"/>
-              <a:t>9/20/2026</a:t>
+              <a:t>1/27/13</a:t>
             </a:fld>
             <a:endParaRPr lang="en-US"/>
           </a:p>
@@ -936,9 +929,10 @@
           </a:lstStyle>
           <a:p>
             <a:r>
-              <a:rPr lang="en-US"/>
+              <a:rPr lang="en-US" smtClean="0"/>
               <a:t>Click to edit Master title style</a:t>
             </a:r>
+            <a:endParaRPr lang="en-US"/>
           </a:p>
         </p:txBody>
       </p:sp>
@@ -1055,7 +1049,7 @@
           <a:p>
             <a:pPr lvl="0"/>
             <a:r>
-              <a:rPr lang="en-US"/>
+              <a:rPr lang="en-US" smtClean="0"/>
               <a:t>Click to edit Master text styles</a:t>
             </a:r>
           </a:p>
@@ -1078,7 +1072,7 @@
           <a:p>
             <a:fld id="{5BCAD085-E8A6-8845-BD4E-CB4CCA059FC4}" type="datetimeFigureOut">
               <a:rPr lang="en-US" smtClean="0"/>
-              <a:t>9/20/2026</a:t>
+              <a:t>1/27/13</a:t>
             </a:fld>
             <a:endParaRPr lang="en-US"/>
           </a:p>
@@ -1172,9 +1166,10 @@
           <a:lstStyle/>
           <a:p>
             <a:r>
-              <a:rPr lang="en-US"/>
+              <a:rPr lang="en-US" smtClean="0"/>
               <a:t>Click to edit Master title style</a:t>
             </a:r>
+            <a:endParaRPr lang="en-US"/>
           </a:p>
         </p:txBody>
       </p:sp>
@@ -1228,37 +1223,38 @@
           <a:p>
             <a:pPr lvl="0"/>
             <a:r>
-              <a:rPr lang="en-US"/>
+              <a:rPr lang="en-US" smtClean="0"/>
               <a:t>Click to edit Master text styles</a:t>
             </a:r>
           </a:p>
           <a:p>
             <a:pPr lvl="1"/>
             <a:r>
-              <a:rPr lang="en-US"/>
+              <a:rPr lang="en-US" smtClean="0"/>
               <a:t>Second level</a:t>
             </a:r>
           </a:p>
           <a:p>
             <a:pPr lvl="2"/>
             <a:r>
-              <a:rPr lang="en-US"/>
+              <a:rPr lang="en-US" smtClean="0"/>
               <a:t>Third level</a:t>
             </a:r>
           </a:p>
           <a:p>
             <a:pPr lvl="3"/>
             <a:r>
-              <a:rPr lang="en-US"/>
+              <a:rPr lang="en-US" smtClean="0"/>
               <a:t>Fourth level</a:t>
             </a:r>
           </a:p>
           <a:p>
             <a:pPr lvl="4"/>
             <a:r>
-              <a:rPr lang="en-US"/>
+              <a:rPr lang="en-US" smtClean="0"/>
               <a:t>Fifth level</a:t>
             </a:r>
+            <a:endParaRPr lang="en-US"/>
           </a:p>
         </p:txBody>
       </p:sp>
@@ -1312,37 +1308,38 @@
           <a:p>
             <a:pPr lvl="0"/>
             <a:r>
-              <a:rPr lang="en-US"/>
+              <a:rPr lang="en-US" smtClean="0"/>
               <a:t>Click to edit Master text styles</a:t>
             </a:r>
           </a:p>
           <a:p>
             <a:pPr lvl="1"/>
             <a:r>
-              <a:rPr lang="en-US"/>
+              <a:rPr lang="en-US" smtClean="0"/>
               <a:t>Second level</a:t>
             </a:r>
           </a:p>
           <a:p>
             <a:pPr lvl="2"/>
             <a:r>
-              <a:rPr lang="en-US"/>
+              <a:rPr lang="en-US" smtClean="0"/>
               <a:t>Third level</a:t>
             </a:r>
           </a:p>
           <a:p>
             <a:pPr lvl="3"/>
             <a:r>
-              <a:rPr lang="en-US"/>
+              <a:rPr lang="en-US" smtClean="0"/>
               <a:t>Fourth level</a:t>
             </a:r>
           </a:p>
           <a:p>
             <a:pPr lvl="4"/>
             <a:r>
-              <a:rPr lang="en-US"/>
+              <a:rPr lang="en-US" smtClean="0"/>
               <a:t>Fifth level</a:t>
             </a:r>
+            <a:endParaRPr lang="en-US"/>
           </a:p>
         </p:txBody>
       </p:sp>
@@ -1363,7 +1360,7 @@
           <a:p>
             <a:fld id="{5BCAD085-E8A6-8845-BD4E-CB4CCA059FC4}" type="datetimeFigureOut">
               <a:rPr lang="en-US" smtClean="0"/>
-              <a:t>9/20/2026</a:t>
+              <a:t>1/27/13</a:t>
             </a:fld>
             <a:endParaRPr lang="en-US"/>
           </a:p>
@@ -1461,9 +1458,10 @@
           </a:lstStyle>
           <a:p>
             <a:r>
-              <a:rPr lang="en-US"/>
+              <a:rPr lang="en-US" smtClean="0"/>
               <a:t>Click to edit Master title style</a:t>
             </a:r>
+            <a:endParaRPr lang="en-US"/>
           </a:p>
         </p:txBody>
       </p:sp>
@@ -1526,7 +1524,7 @@
           <a:p>
             <a:pPr lvl="0"/>
             <a:r>
-              <a:rPr lang="en-US"/>
+              <a:rPr lang="en-US" smtClean="0"/>
               <a:t>Click to edit Master text styles</a:t>
             </a:r>
           </a:p>
@@ -1582,37 +1580,38 @@
           <a:p>
             <a:pPr lvl="0"/>
             <a:r>
-              <a:rPr lang="en-US"/>
+              <a:rPr lang="en-US" smtClean="0"/>
               <a:t>Click to edit Master text styles</a:t>
             </a:r>
           </a:p>
           <a:p>
             <a:pPr lvl="1"/>
             <a:r>
-              <a:rPr lang="en-US"/>
+              <a:rPr lang="en-US" smtClean="0"/>
               <a:t>Second level</a:t>
             </a:r>
           </a:p>
           <a:p>
             <a:pPr lvl="2"/>
             <a:r>
-              <a:rPr lang="en-US"/>
+              <a:rPr lang="en-US" smtClean="0"/>
               <a:t>Third level</a:t>
             </a:r>
           </a:p>
           <a:p>
             <a:pPr lvl="3"/>
             <a:r>
-              <a:rPr lang="en-US"/>
+              <a:rPr lang="en-US" smtClean="0"/>
               <a:t>Fourth level</a:t>
             </a:r>
           </a:p>
           <a:p>
             <a:pPr lvl="4"/>
             <a:r>
-              <a:rPr lang="en-US"/>
+              <a:rPr lang="en-US" smtClean="0"/>
               <a:t>Fifth level</a:t>
             </a:r>
+            <a:endParaRPr lang="en-US"/>
           </a:p>
         </p:txBody>
       </p:sp>
@@ -1675,7 +1674,7 @@
           <a:p>
             <a:pPr lvl="0"/>
             <a:r>
-              <a:rPr lang="en-US"/>
+              <a:rPr lang="en-US" smtClean="0"/>
               <a:t>Click to edit Master text styles</a:t>
             </a:r>
           </a:p>
@@ -1731,37 +1730,38 @@
           <a:p>
             <a:pPr lvl="0"/>
             <a:r>
-              <a:rPr lang="en-US"/>
+              <a:rPr lang="en-US" smtClean="0"/>
               <a:t>Click to edit Master text styles</a:t>
             </a:r>
           </a:p>
           <a:p>
             <a:pPr lvl="1"/>
             <a:r>
-              <a:rPr lang="en-US"/>
+              <a:rPr lang="en-US" smtClean="0"/>
               <a:t>Second level</a:t>
             </a:r>
           </a:p>
           <a:p>
             <a:pPr lvl="2"/>
             <a:r>
-              <a:rPr lang="en-US"/>
+              <a:rPr lang="en-US" smtClean="0"/>
               <a:t>Third level</a:t>
             </a:r>
           </a:p>
           <a:p>
             <a:pPr lvl="3"/>
             <a:r>
-              <a:rPr lang="en-US"/>
+              <a:rPr lang="en-US" smtClean="0"/>
               <a:t>Fourth level</a:t>
             </a:r>
           </a:p>
           <a:p>
             <a:pPr lvl="4"/>
             <a:r>
-              <a:rPr lang="en-US"/>
+              <a:rPr lang="en-US" smtClean="0"/>
               <a:t>Fifth level</a:t>
             </a:r>
+            <a:endParaRPr lang="en-US"/>
           </a:p>
         </p:txBody>
       </p:sp>
@@ -1782,7 +1782,7 @@
           <a:p>
             <a:fld id="{5BCAD085-E8A6-8845-BD4E-CB4CCA059FC4}" type="datetimeFigureOut">
               <a:rPr lang="en-US" smtClean="0"/>
-              <a:t>9/20/2026</a:t>
+              <a:t>1/27/13</a:t>
             </a:fld>
             <a:endParaRPr lang="en-US"/>
           </a:p>
@@ -1876,9 +1876,10 @@
           <a:lstStyle/>
           <a:p>
             <a:r>
-              <a:rPr lang="en-US"/>
+              <a:rPr lang="en-US" smtClean="0"/>
               <a:t>Click to edit Master title style</a:t>
             </a:r>
+            <a:endParaRPr lang="en-US"/>
           </a:p>
         </p:txBody>
       </p:sp>
@@ -1899,7 +1900,7 @@
           <a:p>
             <a:fld id="{5BCAD085-E8A6-8845-BD4E-CB4CCA059FC4}" type="datetimeFigureOut">
               <a:rPr lang="en-US" smtClean="0"/>
-              <a:t>9/20/2026</a:t>
+              <a:t>1/27/13</a:t>
             </a:fld>
             <a:endParaRPr lang="en-US"/>
           </a:p>
@@ -1994,7 +1995,7 @@
           <a:p>
             <a:fld id="{5BCAD085-E8A6-8845-BD4E-CB4CCA059FC4}" type="datetimeFigureOut">
               <a:rPr lang="en-US" smtClean="0"/>
-              <a:t>9/20/2026</a:t>
+              <a:t>1/27/13</a:t>
             </a:fld>
             <a:endParaRPr lang="en-US"/>
           </a:p>
@@ -2097,9 +2098,10 @@
           </a:lstStyle>
           <a:p>
             <a:r>
-              <a:rPr lang="en-US"/>
+              <a:rPr lang="en-US" smtClean="0"/>
               <a:t>Click to edit Master title style</a:t>
             </a:r>
+            <a:endParaRPr lang="en-US"/>
           </a:p>
         </p:txBody>
       </p:sp>
@@ -2153,37 +2155,38 @@
           <a:p>
             <a:pPr lvl="0"/>
             <a:r>
-              <a:rPr lang="en-US"/>
+              <a:rPr lang="en-US" smtClean="0"/>
               <a:t>Click to edit Master text styles</a:t>
             </a:r>
           </a:p>
           <a:p>
             <a:pPr lvl="1"/>
             <a:r>
-              <a:rPr lang="en-US"/>
+              <a:rPr lang="en-US" smtClean="0"/>
               <a:t>Second level</a:t>
             </a:r>
           </a:p>
           <a:p>
             <a:pPr lvl="2"/>
             <a:r>
-              <a:rPr lang="en-US"/>
+              <a:rPr lang="en-US" smtClean="0"/>
               <a:t>Third level</a:t>
             </a:r>
           </a:p>
           <a:p>
             <a:pPr lvl="3"/>
             <a:r>
-              <a:rPr lang="en-US"/>
+              <a:rPr lang="en-US" smtClean="0"/>
               <a:t>Fourth level</a:t>
             </a:r>
           </a:p>
           <a:p>
             <a:pPr lvl="4"/>
             <a:r>
-              <a:rPr lang="en-US"/>
+              <a:rPr lang="en-US" smtClean="0"/>
               <a:t>Fifth level</a:t>
             </a:r>
+            <a:endParaRPr lang="en-US"/>
           </a:p>
         </p:txBody>
       </p:sp>
@@ -2246,7 +2249,7 @@
           <a:p>
             <a:pPr lvl="0"/>
             <a:r>
-              <a:rPr lang="en-US"/>
+              <a:rPr lang="en-US" smtClean="0"/>
               <a:t>Click to edit Master text styles</a:t>
             </a:r>
           </a:p>
@@ -2269,7 +2272,7 @@
           <a:p>
             <a:fld id="{5BCAD085-E8A6-8845-BD4E-CB4CCA059FC4}" type="datetimeFigureOut">
               <a:rPr lang="en-US" smtClean="0"/>
-              <a:t>9/20/2026</a:t>
+              <a:t>1/27/13</a:t>
             </a:fld>
             <a:endParaRPr lang="en-US"/>
           </a:p>
@@ -2372,9 +2375,10 @@
           </a:lstStyle>
           <a:p>
             <a:r>
-              <a:rPr lang="en-US"/>
+              <a:rPr lang="en-US" smtClean="0"/>
               <a:t>Click to edit Master title style</a:t>
             </a:r>
+            <a:endParaRPr lang="en-US"/>
           </a:p>
         </p:txBody>
       </p:sp>
@@ -2498,7 +2502,7 @@
           <a:p>
             <a:pPr lvl="0"/>
             <a:r>
-              <a:rPr lang="en-US"/>
+              <a:rPr lang="en-US" smtClean="0"/>
               <a:t>Click to edit Master text styles</a:t>
             </a:r>
           </a:p>
@@ -2521,7 +2525,7 @@
           <a:p>
             <a:fld id="{5BCAD085-E8A6-8845-BD4E-CB4CCA059FC4}" type="datetimeFigureOut">
               <a:rPr lang="en-US" smtClean="0"/>
-              <a:t>9/20/2026</a:t>
+              <a:t>1/27/13</a:t>
             </a:fld>
             <a:endParaRPr lang="en-US"/>
           </a:p>
@@ -2630,9 +2634,10 @@
           <a:lstStyle/>
           <a:p>
             <a:r>
-              <a:rPr lang="en-US"/>
+              <a:rPr lang="en-US" smtClean="0"/>
               <a:t>Click to edit Master title style</a:t>
             </a:r>
+            <a:endParaRPr lang="en-US"/>
           </a:p>
         </p:txBody>
       </p:sp>
@@ -2663,37 +2668,38 @@
           <a:p>
             <a:pPr lvl="0"/>
             <a:r>
-              <a:rPr lang="en-US"/>
+              <a:rPr lang="en-US" smtClean="0"/>
               <a:t>Click to edit Master text styles</a:t>
             </a:r>
           </a:p>
           <a:p>
             <a:pPr lvl="1"/>
             <a:r>
-              <a:rPr lang="en-US"/>
+              <a:rPr lang="en-US" smtClean="0"/>
               <a:t>Second level</a:t>
             </a:r>
           </a:p>
           <a:p>
             <a:pPr lvl="2"/>
             <a:r>
-              <a:rPr lang="en-US"/>
+              <a:rPr lang="en-US" smtClean="0"/>
               <a:t>Third level</a:t>
             </a:r>
           </a:p>
           <a:p>
             <a:pPr lvl="3"/>
             <a:r>
-              <a:rPr lang="en-US"/>
+              <a:rPr lang="en-US" smtClean="0"/>
               <a:t>Fourth level</a:t>
             </a:r>
           </a:p>
           <a:p>
             <a:pPr lvl="4"/>
             <a:r>
-              <a:rPr lang="en-US"/>
+              <a:rPr lang="en-US" smtClean="0"/>
               <a:t>Fifth level</a:t>
             </a:r>
+            <a:endParaRPr lang="en-US"/>
           </a:p>
         </p:txBody>
       </p:sp>
@@ -2732,7 +2738,7 @@
           <a:p>
             <a:fld id="{5BCAD085-E8A6-8845-BD4E-CB4CCA059FC4}" type="datetimeFigureOut">
               <a:rPr lang="en-US" smtClean="0"/>
-              <a:t>9/20/2026</a:t>
+              <a:t>1/27/13</a:t>
             </a:fld>
             <a:endParaRPr lang="en-US"/>
           </a:p>
@@ -3091,7 +3097,7 @@
 </file>
 
 <file path=ppt/slides/slide1.xml><?xml version="1.0" encoding="utf-8"?>
-<p:sld xmlns:a="http://schemas.openxmlformats.org/drawingml/2006/main" xmlns:r="http://schemas.openxmlformats.org/officeDocument/2006/relationships" xmlns:p="http://schemas.openxmlformats.org/presentationml/2006/main">
+<p:sld xmlns:a="http://schemas.openxmlformats.org/drawingml/2006/main" xmlns:p="http://schemas.openxmlformats.org/presentationml/2006/main" xmlns:r="http://schemas.openxmlformats.org/officeDocument/2006/relationships">
   <p:cSld>
     <p:spTree>
       <p:nvGrpSpPr>
@@ -3099,14 +3105,7 @@
         <p:cNvGrpSpPr/>
         <p:nvPr/>
       </p:nvGrpSpPr>
-      <p:grpSpPr>
-        <a:xfrm>
-          <a:off x="0" y="0"/>
-          <a:ext cx="0" cy="0"/>
-          <a:chOff x="0" y="0"/>
-          <a:chExt cx="0" cy="0"/>
-        </a:xfrm>
-      </p:grpSpPr>
+      <p:grpSpPr/>
       <p:sp>
         <p:nvSpPr>
           <p:cNvPr id="2" name="Rectangle 1"/>
@@ -3147,7 +3146,6 @@
           <a:lstStyle/>
           <a:p>
             <a:pPr algn="ctr"/>
-            <a:endParaRPr/>
           </a:p>
         </p:txBody>
       </p:sp>
@@ -3191,7 +3189,6 @@
           <a:lstStyle/>
           <a:p>
             <a:pPr algn="ctr"/>
-            <a:endParaRPr/>
           </a:p>
         </p:txBody>
       </p:sp>
@@ -3311,7 +3308,7 @@
               </a:defRPr>
             </a:pPr>
             <a:r>
-              <a:t>A Multi-Source Analytical Platform &amp; Interconnected Tableau Business Intelligence Suite</a:t>
+              <a:t>Milestones 1 to 4 | Modules 1 to 8 | Interconnected Tableau Desktop BI Suite</a:t>
             </a:r>
           </a:p>
         </p:txBody>
@@ -3354,7 +3351,7 @@
           </a:fontRef>
         </p:style>
         <p:txBody>
-          <a:bodyPr wrap="square" rtlCol="0" anchor="ctr"/>
+          <a:bodyPr rtlCol="0" anchor="ctr" wrap="square"/>
           <a:lstStyle/>
           <a:p>
             <a:pPr algn="ctr">
@@ -3429,7 +3426,7 @@
           </a:fontRef>
         </p:style>
         <p:txBody>
-          <a:bodyPr wrap="square" rtlCol="0" anchor="ctr"/>
+          <a:bodyPr rtlCol="0" anchor="ctr" wrap="square"/>
           <a:lstStyle/>
           <a:p>
             <a:pPr algn="ctr">
@@ -3504,7 +3501,7 @@
           </a:fontRef>
         </p:style>
         <p:txBody>
-          <a:bodyPr wrap="square" rtlCol="0" anchor="ctr"/>
+          <a:bodyPr rtlCol="0" anchor="ctr" wrap="square"/>
           <a:lstStyle/>
           <a:p>
             <a:pPr algn="ctr">
@@ -3516,7 +3513,7 @@
               </a:defRPr>
             </a:pPr>
             <a:r>
-              <a:t>CORE TECHNOLOGIES</a:t>
+              <a:t>STRUCTURE</a:t>
             </a:r>
           </a:p>
           <a:p>
@@ -3532,15 +3529,15 @@
               </a:defRPr>
             </a:pPr>
             <a:r>
-              <a:t>Python (Pandas, NumPy)</a:t>
-            </a:r>
-            <a:br/>
-            <a:r>
-              <a:t>Tableau Desktop 2026</a:t>
-            </a:r>
-            <a:br/>
-            <a:r>
-              <a:t>OpenPyXL, ReportLab</a:t>
+              <a:t>Milestones 1 – 4</a:t>
+            </a:r>
+            <a:br/>
+            <a:r>
+              <a:t>Modules 1 – 8</a:t>
+            </a:r>
+            <a:br/>
+            <a:r>
+              <a:t>Star Schema Model</a:t>
             </a:r>
           </a:p>
         </p:txBody>
@@ -3583,7 +3580,7 @@
           </a:fontRef>
         </p:style>
         <p:txBody>
-          <a:bodyPr wrap="square" rtlCol="0" anchor="ctr"/>
+          <a:bodyPr rtlCol="0" anchor="ctr" wrap="square"/>
           <a:lstStyle/>
           <a:p>
             <a:pPr algn="ctr">
@@ -3633,7 +3630,7 @@
 </file>
 
 <file path=ppt/slides/slide10.xml><?xml version="1.0" encoding="utf-8"?>
-<p:sld xmlns:a="http://schemas.openxmlformats.org/drawingml/2006/main" xmlns:r="http://schemas.openxmlformats.org/officeDocument/2006/relationships" xmlns:p="http://schemas.openxmlformats.org/presentationml/2006/main">
+<p:sld xmlns:a="http://schemas.openxmlformats.org/drawingml/2006/main" xmlns:p="http://schemas.openxmlformats.org/presentationml/2006/main" xmlns:r="http://schemas.openxmlformats.org/officeDocument/2006/relationships">
   <p:cSld>
     <p:spTree>
       <p:nvGrpSpPr>
@@ -3641,14 +3638,7 @@
         <p:cNvGrpSpPr/>
         <p:nvPr/>
       </p:nvGrpSpPr>
-      <p:grpSpPr>
-        <a:xfrm>
-          <a:off x="0" y="0"/>
-          <a:ext cx="0" cy="0"/>
-          <a:chOff x="0" y="0"/>
-          <a:chExt cx="0" cy="0"/>
-        </a:xfrm>
-      </p:grpSpPr>
+      <p:grpSpPr/>
       <p:sp>
         <p:nvSpPr>
           <p:cNvPr id="2" name="Rectangle 1"/>
@@ -3689,7 +3679,6 @@
           <a:lstStyle/>
           <a:p>
             <a:pPr algn="ctr"/>
-            <a:endParaRPr/>
           </a:p>
         </p:txBody>
       </p:sp>
@@ -3733,7 +3722,6 @@
           <a:lstStyle/>
           <a:p>
             <a:pPr algn="ctr"/>
-            <a:endParaRPr/>
           </a:p>
         </p:txBody>
       </p:sp>
@@ -3768,7 +3756,7 @@
               </a:defRPr>
             </a:pPr>
             <a:r>
-              <a:t>EDUVISION_DV | HIGHER EDUCATION INTELLIGENCE SYSTEM</a:t>
+              <a:t>MILESTONE 2 / MODULE 3 | EMPIRICAL VALIDATION MATRIX</a:t>
             </a:r>
           </a:p>
         </p:txBody>
@@ -3804,7 +3792,7 @@
               </a:defRPr>
             </a:pPr>
             <a:r>
-              <a:t>Visual Analytics: Enterprise Dashboard Design System</a:t>
+              <a:t>Empirical Results: Top World University Benchmarking</a:t>
             </a:r>
           </a:p>
         </p:txBody>
@@ -3853,21 +3841,1922 @@
               </a:defRPr>
             </a:pPr>
             <a:r>
-              <a:t>10 / 18</a:t>
-            </a:r>
-          </a:p>
-        </p:txBody>
-      </p:sp>
-      <p:sp>
-        <p:nvSpPr>
-          <p:cNvPr id="7" name="Rounded Rectangle 6"/>
+              <a:t>10 / 19</a:t>
+            </a:r>
+          </a:p>
+        </p:txBody>
+      </p:sp>
+      <p:graphicFrame>
+        <p:nvGraphicFramePr>
+          <p:cNvPr id="7" name="Table 6"/>
+          <p:cNvGraphicFramePr>
+            <a:graphicFrameLocks noGrp="1"/>
+          </p:cNvGraphicFramePr>
+          <p:nvPr/>
+        </p:nvGraphicFramePr>
+        <p:xfrm>
+          <a:off x="731520" y="1371600"/>
+          <a:ext cx="10728655" cy="4389120"/>
+        </p:xfrm>
+        <a:graphic>
+          <a:graphicData uri="http://schemas.openxmlformats.org/drawingml/2006/table">
+            <a:tbl>
+              <a:tblPr firstRow="1" bandRow="1">
+                <a:tableStyleId>{5C22544A-7EE6-4342-B048-85BDC9FD1C3A}</a:tableStyleId>
+              </a:tblPr>
+              <a:tblGrid>
+                <a:gridCol w="914400"/>
+                <a:gridCol w="3108960"/>
+                <a:gridCol w="1371600"/>
+                <a:gridCol w="1280160"/>
+                <a:gridCol w="1371600"/>
+                <a:gridCol w="1280160"/>
+                <a:gridCol w="1401775"/>
+              </a:tblGrid>
+              <a:tr h="399010">
+                <a:tc>
+                  <a:txBody>
+                    <a:bodyPr/>
+                    <a:lstStyle/>
+                    <a:p>
+                      <a:pPr>
+                        <a:defRPr sz="900" b="1">
+                          <a:solidFill>
+                            <a:srgbClr val="06B6D4"/>
+                          </a:solidFill>
+                          <a:latin typeface="Segoe UI"/>
+                        </a:defRPr>
+                      </a:pPr>
+                      <a:r>
+                        <a:t>Rank</a:t>
+                      </a:r>
+                    </a:p>
+                  </a:txBody>
+                  <a:tcPr>
+                    <a:solidFill>
+                      <a:srgbClr val="334155"/>
+                    </a:solidFill>
+                  </a:tcPr>
+                </a:tc>
+                <a:tc>
+                  <a:txBody>
+                    <a:bodyPr/>
+                    <a:lstStyle/>
+                    <a:p>
+                      <a:pPr>
+                        <a:defRPr sz="900" b="1">
+                          <a:solidFill>
+                            <a:srgbClr val="06B6D4"/>
+                          </a:solidFill>
+                          <a:latin typeface="Segoe UI"/>
+                        </a:defRPr>
+                      </a:pPr>
+                      <a:r>
+                        <a:t>University Name</a:t>
+                      </a:r>
+                    </a:p>
+                  </a:txBody>
+                  <a:tcPr>
+                    <a:solidFill>
+                      <a:srgbClr val="334155"/>
+                    </a:solidFill>
+                  </a:tcPr>
+                </a:tc>
+                <a:tc>
+                  <a:txBody>
+                    <a:bodyPr/>
+                    <a:lstStyle/>
+                    <a:p>
+                      <a:pPr>
+                        <a:defRPr sz="900" b="1">
+                          <a:solidFill>
+                            <a:srgbClr val="06B6D4"/>
+                          </a:solidFill>
+                          <a:latin typeface="Segoe UI"/>
+                        </a:defRPr>
+                      </a:pPr>
+                      <a:r>
+                        <a:t>Country</a:t>
+                      </a:r>
+                    </a:p>
+                  </a:txBody>
+                  <a:tcPr>
+                    <a:solidFill>
+                      <a:srgbClr val="334155"/>
+                    </a:solidFill>
+                  </a:tcPr>
+                </a:tc>
+                <a:tc>
+                  <a:txBody>
+                    <a:bodyPr/>
+                    <a:lstStyle/>
+                    <a:p>
+                      <a:pPr>
+                        <a:defRPr sz="900" b="1">
+                          <a:solidFill>
+                            <a:srgbClr val="06B6D4"/>
+                          </a:solidFill>
+                          <a:latin typeface="Segoe UI"/>
+                        </a:defRPr>
+                      </a:pPr>
+                      <a:r>
+                        <a:t>Overall Score</a:t>
+                      </a:r>
+                    </a:p>
+                  </a:txBody>
+                  <a:tcPr>
+                    <a:solidFill>
+                      <a:srgbClr val="334155"/>
+                    </a:solidFill>
+                  </a:tcPr>
+                </a:tc>
+                <a:tc>
+                  <a:txBody>
+                    <a:bodyPr/>
+                    <a:lstStyle/>
+                    <a:p>
+                      <a:pPr>
+                        <a:defRPr sz="900" b="1">
+                          <a:solidFill>
+                            <a:srgbClr val="06B6D4"/>
+                          </a:solidFill>
+                          <a:latin typeface="Segoe UI"/>
+                        </a:defRPr>
+                      </a:pPr>
+                      <a:r>
+                        <a:t>Citations/Faculty</a:t>
+                      </a:r>
+                    </a:p>
+                  </a:txBody>
+                  <a:tcPr>
+                    <a:solidFill>
+                      <a:srgbClr val="334155"/>
+                    </a:solidFill>
+                  </a:tcPr>
+                </a:tc>
+                <a:tc>
+                  <a:txBody>
+                    <a:bodyPr/>
+                    <a:lstStyle/>
+                    <a:p>
+                      <a:pPr>
+                        <a:defRPr sz="900" b="1">
+                          <a:solidFill>
+                            <a:srgbClr val="06B6D4"/>
+                          </a:solidFill>
+                          <a:latin typeface="Segoe UI"/>
+                        </a:defRPr>
+                      </a:pPr>
+                      <a:r>
+                        <a:t>Staff Ratio</a:t>
+                      </a:r>
+                    </a:p>
+                  </a:txBody>
+                  <a:tcPr>
+                    <a:solidFill>
+                      <a:srgbClr val="334155"/>
+                    </a:solidFill>
+                  </a:tcPr>
+                </a:tc>
+                <a:tc>
+                  <a:txBody>
+                    <a:bodyPr/>
+                    <a:lstStyle/>
+                    <a:p>
+                      <a:pPr>
+                        <a:defRPr sz="900" b="1">
+                          <a:solidFill>
+                            <a:srgbClr val="06B6D4"/>
+                          </a:solidFill>
+                          <a:latin typeface="Segoe UI"/>
+                        </a:defRPr>
+                      </a:pPr>
+                      <a:r>
+                        <a:t>International %</a:t>
+                      </a:r>
+                    </a:p>
+                  </a:txBody>
+                  <a:tcPr>
+                    <a:solidFill>
+                      <a:srgbClr val="334155"/>
+                    </a:solidFill>
+                  </a:tcPr>
+                </a:tc>
+              </a:tr>
+              <a:tr h="399010">
+                <a:tc>
+                  <a:txBody>
+                    <a:bodyPr/>
+                    <a:lstStyle/>
+                    <a:p>
+                      <a:pPr>
+                        <a:defRPr sz="850">
+                          <a:solidFill>
+                            <a:srgbClr val="F8FAFC"/>
+                          </a:solidFill>
+                          <a:latin typeface="Segoe UI"/>
+                        </a:defRPr>
+                      </a:pPr>
+                      <a:r>
+                        <a:t>1</a:t>
+                      </a:r>
+                    </a:p>
+                  </a:txBody>
+                  <a:tcPr>
+                    <a:solidFill>
+                      <a:srgbClr val="1E293B"/>
+                    </a:solidFill>
+                  </a:tcPr>
+                </a:tc>
+                <a:tc>
+                  <a:txBody>
+                    <a:bodyPr/>
+                    <a:lstStyle/>
+                    <a:p>
+                      <a:pPr>
+                        <a:defRPr sz="850">
+                          <a:solidFill>
+                            <a:srgbClr val="F8FAFC"/>
+                          </a:solidFill>
+                          <a:latin typeface="Segoe UI"/>
+                        </a:defRPr>
+                      </a:pPr>
+                      <a:r>
+                        <a:t>Massachusetts Institute of Technology (MIT)</a:t>
+                      </a:r>
+                    </a:p>
+                  </a:txBody>
+                  <a:tcPr>
+                    <a:solidFill>
+                      <a:srgbClr val="1E293B"/>
+                    </a:solidFill>
+                  </a:tcPr>
+                </a:tc>
+                <a:tc>
+                  <a:txBody>
+                    <a:bodyPr/>
+                    <a:lstStyle/>
+                    <a:p>
+                      <a:pPr>
+                        <a:defRPr sz="850">
+                          <a:solidFill>
+                            <a:srgbClr val="CBD5E1"/>
+                          </a:solidFill>
+                          <a:latin typeface="Segoe UI"/>
+                        </a:defRPr>
+                      </a:pPr>
+                      <a:r>
+                        <a:t>United States</a:t>
+                      </a:r>
+                    </a:p>
+                  </a:txBody>
+                  <a:tcPr>
+                    <a:solidFill>
+                      <a:srgbClr val="1E293B"/>
+                    </a:solidFill>
+                  </a:tcPr>
+                </a:tc>
+                <a:tc>
+                  <a:txBody>
+                    <a:bodyPr/>
+                    <a:lstStyle/>
+                    <a:p>
+                      <a:pPr>
+                        <a:defRPr sz="850">
+                          <a:solidFill>
+                            <a:srgbClr val="CBD5E1"/>
+                          </a:solidFill>
+                          <a:latin typeface="Segoe UI"/>
+                        </a:defRPr>
+                      </a:pPr>
+                      <a:r>
+                        <a:t>100.0</a:t>
+                      </a:r>
+                    </a:p>
+                  </a:txBody>
+                  <a:tcPr>
+                    <a:solidFill>
+                      <a:srgbClr val="1E293B"/>
+                    </a:solidFill>
+                  </a:tcPr>
+                </a:tc>
+                <a:tc>
+                  <a:txBody>
+                    <a:bodyPr/>
+                    <a:lstStyle/>
+                    <a:p>
+                      <a:pPr>
+                        <a:defRPr sz="850">
+                          <a:solidFill>
+                            <a:srgbClr val="CBD5E1"/>
+                          </a:solidFill>
+                          <a:latin typeface="Segoe UI"/>
+                        </a:defRPr>
+                      </a:pPr>
+                      <a:r>
+                        <a:t>100.0</a:t>
+                      </a:r>
+                    </a:p>
+                  </a:txBody>
+                  <a:tcPr>
+                    <a:solidFill>
+                      <a:srgbClr val="1E293B"/>
+                    </a:solidFill>
+                  </a:tcPr>
+                </a:tc>
+                <a:tc>
+                  <a:txBody>
+                    <a:bodyPr/>
+                    <a:lstStyle/>
+                    <a:p>
+                      <a:pPr>
+                        <a:defRPr sz="850">
+                          <a:solidFill>
+                            <a:srgbClr val="CBD5E1"/>
+                          </a:solidFill>
+                          <a:latin typeface="Segoe UI"/>
+                        </a:defRPr>
+                      </a:pPr>
+                      <a:r>
+                        <a:t>8.2 : 1</a:t>
+                      </a:r>
+                    </a:p>
+                  </a:txBody>
+                  <a:tcPr>
+                    <a:solidFill>
+                      <a:srgbClr val="1E293B"/>
+                    </a:solidFill>
+                  </a:tcPr>
+                </a:tc>
+                <a:tc>
+                  <a:txBody>
+                    <a:bodyPr/>
+                    <a:lstStyle/>
+                    <a:p>
+                      <a:pPr>
+                        <a:defRPr sz="850">
+                          <a:solidFill>
+                            <a:srgbClr val="CBD5E1"/>
+                          </a:solidFill>
+                          <a:latin typeface="Segoe UI"/>
+                        </a:defRPr>
+                      </a:pPr>
+                      <a:r>
+                        <a:t>33.0%</a:t>
+                      </a:r>
+                    </a:p>
+                  </a:txBody>
+                  <a:tcPr>
+                    <a:solidFill>
+                      <a:srgbClr val="1E293B"/>
+                    </a:solidFill>
+                  </a:tcPr>
+                </a:tc>
+              </a:tr>
+              <a:tr h="399010">
+                <a:tc>
+                  <a:txBody>
+                    <a:bodyPr/>
+                    <a:lstStyle/>
+                    <a:p>
+                      <a:pPr>
+                        <a:defRPr sz="850">
+                          <a:solidFill>
+                            <a:srgbClr val="F8FAFC"/>
+                          </a:solidFill>
+                          <a:latin typeface="Segoe UI"/>
+                        </a:defRPr>
+                      </a:pPr>
+                      <a:r>
+                        <a:t>2</a:t>
+                      </a:r>
+                    </a:p>
+                  </a:txBody>
+                  <a:tcPr>
+                    <a:solidFill>
+                      <a:srgbClr val="1E293B"/>
+                    </a:solidFill>
+                  </a:tcPr>
+                </a:tc>
+                <a:tc>
+                  <a:txBody>
+                    <a:bodyPr/>
+                    <a:lstStyle/>
+                    <a:p>
+                      <a:pPr>
+                        <a:defRPr sz="850">
+                          <a:solidFill>
+                            <a:srgbClr val="F8FAFC"/>
+                          </a:solidFill>
+                          <a:latin typeface="Segoe UI"/>
+                        </a:defRPr>
+                      </a:pPr>
+                      <a:r>
+                        <a:t>Imperial College London</a:t>
+                      </a:r>
+                    </a:p>
+                  </a:txBody>
+                  <a:tcPr>
+                    <a:solidFill>
+                      <a:srgbClr val="1E293B"/>
+                    </a:solidFill>
+                  </a:tcPr>
+                </a:tc>
+                <a:tc>
+                  <a:txBody>
+                    <a:bodyPr/>
+                    <a:lstStyle/>
+                    <a:p>
+                      <a:pPr>
+                        <a:defRPr sz="850">
+                          <a:solidFill>
+                            <a:srgbClr val="CBD5E1"/>
+                          </a:solidFill>
+                          <a:latin typeface="Segoe UI"/>
+                        </a:defRPr>
+                      </a:pPr>
+                      <a:r>
+                        <a:t>United Kingdom</a:t>
+                      </a:r>
+                    </a:p>
+                  </a:txBody>
+                  <a:tcPr>
+                    <a:solidFill>
+                      <a:srgbClr val="1E293B"/>
+                    </a:solidFill>
+                  </a:tcPr>
+                </a:tc>
+                <a:tc>
+                  <a:txBody>
+                    <a:bodyPr/>
+                    <a:lstStyle/>
+                    <a:p>
+                      <a:pPr>
+                        <a:defRPr sz="850">
+                          <a:solidFill>
+                            <a:srgbClr val="CBD5E1"/>
+                          </a:solidFill>
+                          <a:latin typeface="Segoe UI"/>
+                        </a:defRPr>
+                      </a:pPr>
+                      <a:r>
+                        <a:t>98.5</a:t>
+                      </a:r>
+                    </a:p>
+                  </a:txBody>
+                  <a:tcPr>
+                    <a:solidFill>
+                      <a:srgbClr val="1E293B"/>
+                    </a:solidFill>
+                  </a:tcPr>
+                </a:tc>
+                <a:tc>
+                  <a:txBody>
+                    <a:bodyPr/>
+                    <a:lstStyle/>
+                    <a:p>
+                      <a:pPr>
+                        <a:defRPr sz="850">
+                          <a:solidFill>
+                            <a:srgbClr val="CBD5E1"/>
+                          </a:solidFill>
+                          <a:latin typeface="Segoe UI"/>
+                        </a:defRPr>
+                      </a:pPr>
+                      <a:r>
+                        <a:t>98.3</a:t>
+                      </a:r>
+                    </a:p>
+                  </a:txBody>
+                  <a:tcPr>
+                    <a:solidFill>
+                      <a:srgbClr val="1E293B"/>
+                    </a:solidFill>
+                  </a:tcPr>
+                </a:tc>
+                <a:tc>
+                  <a:txBody>
+                    <a:bodyPr/>
+                    <a:lstStyle/>
+                    <a:p>
+                      <a:pPr>
+                        <a:defRPr sz="850">
+                          <a:solidFill>
+                            <a:srgbClr val="CBD5E1"/>
+                          </a:solidFill>
+                          <a:latin typeface="Segoe UI"/>
+                        </a:defRPr>
+                      </a:pPr>
+                      <a:r>
+                        <a:t>11.4 : 1</a:t>
+                      </a:r>
+                    </a:p>
+                  </a:txBody>
+                  <a:tcPr>
+                    <a:solidFill>
+                      <a:srgbClr val="1E293B"/>
+                    </a:solidFill>
+                  </a:tcPr>
+                </a:tc>
+                <a:tc>
+                  <a:txBody>
+                    <a:bodyPr/>
+                    <a:lstStyle/>
+                    <a:p>
+                      <a:pPr>
+                        <a:defRPr sz="850">
+                          <a:solidFill>
+                            <a:srgbClr val="CBD5E1"/>
+                          </a:solidFill>
+                          <a:latin typeface="Segoe UI"/>
+                        </a:defRPr>
+                      </a:pPr>
+                      <a:r>
+                        <a:t>61.0%</a:t>
+                      </a:r>
+                    </a:p>
+                  </a:txBody>
+                  <a:tcPr>
+                    <a:solidFill>
+                      <a:srgbClr val="1E293B"/>
+                    </a:solidFill>
+                  </a:tcPr>
+                </a:tc>
+              </a:tr>
+              <a:tr h="399010">
+                <a:tc>
+                  <a:txBody>
+                    <a:bodyPr/>
+                    <a:lstStyle/>
+                    <a:p>
+                      <a:pPr>
+                        <a:defRPr sz="850">
+                          <a:solidFill>
+                            <a:srgbClr val="F8FAFC"/>
+                          </a:solidFill>
+                          <a:latin typeface="Segoe UI"/>
+                        </a:defRPr>
+                      </a:pPr>
+                      <a:r>
+                        <a:t>3</a:t>
+                      </a:r>
+                    </a:p>
+                  </a:txBody>
+                  <a:tcPr>
+                    <a:solidFill>
+                      <a:srgbClr val="1E293B"/>
+                    </a:solidFill>
+                  </a:tcPr>
+                </a:tc>
+                <a:tc>
+                  <a:txBody>
+                    <a:bodyPr/>
+                    <a:lstStyle/>
+                    <a:p>
+                      <a:pPr>
+                        <a:defRPr sz="850">
+                          <a:solidFill>
+                            <a:srgbClr val="F8FAFC"/>
+                          </a:solidFill>
+                          <a:latin typeface="Segoe UI"/>
+                        </a:defRPr>
+                      </a:pPr>
+                      <a:r>
+                        <a:t>University of Oxford</a:t>
+                      </a:r>
+                    </a:p>
+                  </a:txBody>
+                  <a:tcPr>
+                    <a:solidFill>
+                      <a:srgbClr val="1E293B"/>
+                    </a:solidFill>
+                  </a:tcPr>
+                </a:tc>
+                <a:tc>
+                  <a:txBody>
+                    <a:bodyPr/>
+                    <a:lstStyle/>
+                    <a:p>
+                      <a:pPr>
+                        <a:defRPr sz="850">
+                          <a:solidFill>
+                            <a:srgbClr val="CBD5E1"/>
+                          </a:solidFill>
+                          <a:latin typeface="Segoe UI"/>
+                        </a:defRPr>
+                      </a:pPr>
+                      <a:r>
+                        <a:t>United Kingdom</a:t>
+                      </a:r>
+                    </a:p>
+                  </a:txBody>
+                  <a:tcPr>
+                    <a:solidFill>
+                      <a:srgbClr val="1E293B"/>
+                    </a:solidFill>
+                  </a:tcPr>
+                </a:tc>
+                <a:tc>
+                  <a:txBody>
+                    <a:bodyPr/>
+                    <a:lstStyle/>
+                    <a:p>
+                      <a:pPr>
+                        <a:defRPr sz="850">
+                          <a:solidFill>
+                            <a:srgbClr val="CBD5E1"/>
+                          </a:solidFill>
+                          <a:latin typeface="Segoe UI"/>
+                        </a:defRPr>
+                      </a:pPr>
+                      <a:r>
+                        <a:t>96.9</a:t>
+                      </a:r>
+                    </a:p>
+                  </a:txBody>
+                  <a:tcPr>
+                    <a:solidFill>
+                      <a:srgbClr val="1E293B"/>
+                    </a:solidFill>
+                  </a:tcPr>
+                </a:tc>
+                <a:tc>
+                  <a:txBody>
+                    <a:bodyPr/>
+                    <a:lstStyle/>
+                    <a:p>
+                      <a:pPr>
+                        <a:defRPr sz="850">
+                          <a:solidFill>
+                            <a:srgbClr val="CBD5E1"/>
+                          </a:solidFill>
+                          <a:latin typeface="Segoe UI"/>
+                        </a:defRPr>
+                      </a:pPr>
+                      <a:r>
+                        <a:t>99.0</a:t>
+                      </a:r>
+                    </a:p>
+                  </a:txBody>
+                  <a:tcPr>
+                    <a:solidFill>
+                      <a:srgbClr val="1E293B"/>
+                    </a:solidFill>
+                  </a:tcPr>
+                </a:tc>
+                <a:tc>
+                  <a:txBody>
+                    <a:bodyPr/>
+                    <a:lstStyle/>
+                    <a:p>
+                      <a:pPr>
+                        <a:defRPr sz="850">
+                          <a:solidFill>
+                            <a:srgbClr val="CBD5E1"/>
+                          </a:solidFill>
+                          <a:latin typeface="Segoe UI"/>
+                        </a:defRPr>
+                      </a:pPr>
+                      <a:r>
+                        <a:t>10.6 : 1</a:t>
+                      </a:r>
+                    </a:p>
+                  </a:txBody>
+                  <a:tcPr>
+                    <a:solidFill>
+                      <a:srgbClr val="1E293B"/>
+                    </a:solidFill>
+                  </a:tcPr>
+                </a:tc>
+                <a:tc>
+                  <a:txBody>
+                    <a:bodyPr/>
+                    <a:lstStyle/>
+                    <a:p>
+                      <a:pPr>
+                        <a:defRPr sz="850">
+                          <a:solidFill>
+                            <a:srgbClr val="CBD5E1"/>
+                          </a:solidFill>
+                          <a:latin typeface="Segoe UI"/>
+                        </a:defRPr>
+                      </a:pPr>
+                      <a:r>
+                        <a:t>42.0%</a:t>
+                      </a:r>
+                    </a:p>
+                  </a:txBody>
+                  <a:tcPr>
+                    <a:solidFill>
+                      <a:srgbClr val="1E293B"/>
+                    </a:solidFill>
+                  </a:tcPr>
+                </a:tc>
+              </a:tr>
+              <a:tr h="399010">
+                <a:tc>
+                  <a:txBody>
+                    <a:bodyPr/>
+                    <a:lstStyle/>
+                    <a:p>
+                      <a:pPr>
+                        <a:defRPr sz="850">
+                          <a:solidFill>
+                            <a:srgbClr val="F8FAFC"/>
+                          </a:solidFill>
+                          <a:latin typeface="Segoe UI"/>
+                        </a:defRPr>
+                      </a:pPr>
+                      <a:r>
+                        <a:t>4</a:t>
+                      </a:r>
+                    </a:p>
+                  </a:txBody>
+                  <a:tcPr>
+                    <a:solidFill>
+                      <a:srgbClr val="1E293B"/>
+                    </a:solidFill>
+                  </a:tcPr>
+                </a:tc>
+                <a:tc>
+                  <a:txBody>
+                    <a:bodyPr/>
+                    <a:lstStyle/>
+                    <a:p>
+                      <a:pPr>
+                        <a:defRPr sz="850">
+                          <a:solidFill>
+                            <a:srgbClr val="F8FAFC"/>
+                          </a:solidFill>
+                          <a:latin typeface="Segoe UI"/>
+                        </a:defRPr>
+                      </a:pPr>
+                      <a:r>
+                        <a:t>Harvard University</a:t>
+                      </a:r>
+                    </a:p>
+                  </a:txBody>
+                  <a:tcPr>
+                    <a:solidFill>
+                      <a:srgbClr val="1E293B"/>
+                    </a:solidFill>
+                  </a:tcPr>
+                </a:tc>
+                <a:tc>
+                  <a:txBody>
+                    <a:bodyPr/>
+                    <a:lstStyle/>
+                    <a:p>
+                      <a:pPr>
+                        <a:defRPr sz="850">
+                          <a:solidFill>
+                            <a:srgbClr val="CBD5E1"/>
+                          </a:solidFill>
+                          <a:latin typeface="Segoe UI"/>
+                        </a:defRPr>
+                      </a:pPr>
+                      <a:r>
+                        <a:t>United States</a:t>
+                      </a:r>
+                    </a:p>
+                  </a:txBody>
+                  <a:tcPr>
+                    <a:solidFill>
+                      <a:srgbClr val="1E293B"/>
+                    </a:solidFill>
+                  </a:tcPr>
+                </a:tc>
+                <a:tc>
+                  <a:txBody>
+                    <a:bodyPr/>
+                    <a:lstStyle/>
+                    <a:p>
+                      <a:pPr>
+                        <a:defRPr sz="850">
+                          <a:solidFill>
+                            <a:srgbClr val="CBD5E1"/>
+                          </a:solidFill>
+                          <a:latin typeface="Segoe UI"/>
+                        </a:defRPr>
+                      </a:pPr>
+                      <a:r>
+                        <a:t>96.8</a:t>
+                      </a:r>
+                    </a:p>
+                  </a:txBody>
+                  <a:tcPr>
+                    <a:solidFill>
+                      <a:srgbClr val="1E293B"/>
+                    </a:solidFill>
+                  </a:tcPr>
+                </a:tc>
+                <a:tc>
+                  <a:txBody>
+                    <a:bodyPr/>
+                    <a:lstStyle/>
+                    <a:p>
+                      <a:pPr>
+                        <a:defRPr sz="850">
+                          <a:solidFill>
+                            <a:srgbClr val="CBD5E1"/>
+                          </a:solidFill>
+                          <a:latin typeface="Segoe UI"/>
+                        </a:defRPr>
+                      </a:pPr>
+                      <a:r>
+                        <a:t>100.0</a:t>
+                      </a:r>
+                    </a:p>
+                  </a:txBody>
+                  <a:tcPr>
+                    <a:solidFill>
+                      <a:srgbClr val="1E293B"/>
+                    </a:solidFill>
+                  </a:tcPr>
+                </a:tc>
+                <a:tc>
+                  <a:txBody>
+                    <a:bodyPr/>
+                    <a:lstStyle/>
+                    <a:p>
+                      <a:pPr>
+                        <a:defRPr sz="850">
+                          <a:solidFill>
+                            <a:srgbClr val="CBD5E1"/>
+                          </a:solidFill>
+                          <a:latin typeface="Segoe UI"/>
+                        </a:defRPr>
+                      </a:pPr>
+                      <a:r>
+                        <a:t>8.9 : 1</a:t>
+                      </a:r>
+                    </a:p>
+                  </a:txBody>
+                  <a:tcPr>
+                    <a:solidFill>
+                      <a:srgbClr val="1E293B"/>
+                    </a:solidFill>
+                  </a:tcPr>
+                </a:tc>
+                <a:tc>
+                  <a:txBody>
+                    <a:bodyPr/>
+                    <a:lstStyle/>
+                    <a:p>
+                      <a:pPr>
+                        <a:defRPr sz="850">
+                          <a:solidFill>
+                            <a:srgbClr val="CBD5E1"/>
+                          </a:solidFill>
+                          <a:latin typeface="Segoe UI"/>
+                        </a:defRPr>
+                      </a:pPr>
+                      <a:r>
+                        <a:t>25.0%</a:t>
+                      </a:r>
+                    </a:p>
+                  </a:txBody>
+                  <a:tcPr>
+                    <a:solidFill>
+                      <a:srgbClr val="1E293B"/>
+                    </a:solidFill>
+                  </a:tcPr>
+                </a:tc>
+              </a:tr>
+              <a:tr h="399010">
+                <a:tc>
+                  <a:txBody>
+                    <a:bodyPr/>
+                    <a:lstStyle/>
+                    <a:p>
+                      <a:pPr>
+                        <a:defRPr sz="850">
+                          <a:solidFill>
+                            <a:srgbClr val="F8FAFC"/>
+                          </a:solidFill>
+                          <a:latin typeface="Segoe UI"/>
+                        </a:defRPr>
+                      </a:pPr>
+                      <a:r>
+                        <a:t>5</a:t>
+                      </a:r>
+                    </a:p>
+                  </a:txBody>
+                  <a:tcPr>
+                    <a:solidFill>
+                      <a:srgbClr val="1E293B"/>
+                    </a:solidFill>
+                  </a:tcPr>
+                </a:tc>
+                <a:tc>
+                  <a:txBody>
+                    <a:bodyPr/>
+                    <a:lstStyle/>
+                    <a:p>
+                      <a:pPr>
+                        <a:defRPr sz="850">
+                          <a:solidFill>
+                            <a:srgbClr val="F8FAFC"/>
+                          </a:solidFill>
+                          <a:latin typeface="Segoe UI"/>
+                        </a:defRPr>
+                      </a:pPr>
+                      <a:r>
+                        <a:t>University of Cambridge</a:t>
+                      </a:r>
+                    </a:p>
+                  </a:txBody>
+                  <a:tcPr>
+                    <a:solidFill>
+                      <a:srgbClr val="1E293B"/>
+                    </a:solidFill>
+                  </a:tcPr>
+                </a:tc>
+                <a:tc>
+                  <a:txBody>
+                    <a:bodyPr/>
+                    <a:lstStyle/>
+                    <a:p>
+                      <a:pPr>
+                        <a:defRPr sz="850">
+                          <a:solidFill>
+                            <a:srgbClr val="CBD5E1"/>
+                          </a:solidFill>
+                          <a:latin typeface="Segoe UI"/>
+                        </a:defRPr>
+                      </a:pPr>
+                      <a:r>
+                        <a:t>United Kingdom</a:t>
+                      </a:r>
+                    </a:p>
+                  </a:txBody>
+                  <a:tcPr>
+                    <a:solidFill>
+                      <a:srgbClr val="1E293B"/>
+                    </a:solidFill>
+                  </a:tcPr>
+                </a:tc>
+                <a:tc>
+                  <a:txBody>
+                    <a:bodyPr/>
+                    <a:lstStyle/>
+                    <a:p>
+                      <a:pPr>
+                        <a:defRPr sz="850">
+                          <a:solidFill>
+                            <a:srgbClr val="CBD5E1"/>
+                          </a:solidFill>
+                          <a:latin typeface="Segoe UI"/>
+                        </a:defRPr>
+                      </a:pPr>
+                      <a:r>
+                        <a:t>96.7</a:t>
+                      </a:r>
+                    </a:p>
+                  </a:txBody>
+                  <a:tcPr>
+                    <a:solidFill>
+                      <a:srgbClr val="1E293B"/>
+                    </a:solidFill>
+                  </a:tcPr>
+                </a:tc>
+                <a:tc>
+                  <a:txBody>
+                    <a:bodyPr/>
+                    <a:lstStyle/>
+                    <a:p>
+                      <a:pPr>
+                        <a:defRPr sz="850">
+                          <a:solidFill>
+                            <a:srgbClr val="CBD5E1"/>
+                          </a:solidFill>
+                          <a:latin typeface="Segoe UI"/>
+                        </a:defRPr>
+                      </a:pPr>
+                      <a:r>
+                        <a:t>95.8</a:t>
+                      </a:r>
+                    </a:p>
+                  </a:txBody>
+                  <a:tcPr>
+                    <a:solidFill>
+                      <a:srgbClr val="1E293B"/>
+                    </a:solidFill>
+                  </a:tcPr>
+                </a:tc>
+                <a:tc>
+                  <a:txBody>
+                    <a:bodyPr/>
+                    <a:lstStyle/>
+                    <a:p>
+                      <a:pPr>
+                        <a:defRPr sz="850">
+                          <a:solidFill>
+                            <a:srgbClr val="CBD5E1"/>
+                          </a:solidFill>
+                          <a:latin typeface="Segoe UI"/>
+                        </a:defRPr>
+                      </a:pPr>
+                      <a:r>
+                        <a:t>10.9 : 1</a:t>
+                      </a:r>
+                    </a:p>
+                  </a:txBody>
+                  <a:tcPr>
+                    <a:solidFill>
+                      <a:srgbClr val="1E293B"/>
+                    </a:solidFill>
+                  </a:tcPr>
+                </a:tc>
+                <a:tc>
+                  <a:txBody>
+                    <a:bodyPr/>
+                    <a:lstStyle/>
+                    <a:p>
+                      <a:pPr>
+                        <a:defRPr sz="850">
+                          <a:solidFill>
+                            <a:srgbClr val="CBD5E1"/>
+                          </a:solidFill>
+                          <a:latin typeface="Segoe UI"/>
+                        </a:defRPr>
+                      </a:pPr>
+                      <a:r>
+                        <a:t>39.0%</a:t>
+                      </a:r>
+                    </a:p>
+                  </a:txBody>
+                  <a:tcPr>
+                    <a:solidFill>
+                      <a:srgbClr val="1E293B"/>
+                    </a:solidFill>
+                  </a:tcPr>
+                </a:tc>
+              </a:tr>
+              <a:tr h="399010">
+                <a:tc>
+                  <a:txBody>
+                    <a:bodyPr/>
+                    <a:lstStyle/>
+                    <a:p>
+                      <a:pPr>
+                        <a:defRPr sz="850">
+                          <a:solidFill>
+                            <a:srgbClr val="F8FAFC"/>
+                          </a:solidFill>
+                          <a:latin typeface="Segoe UI"/>
+                        </a:defRPr>
+                      </a:pPr>
+                      <a:r>
+                        <a:t>6</a:t>
+                      </a:r>
+                    </a:p>
+                  </a:txBody>
+                  <a:tcPr>
+                    <a:solidFill>
+                      <a:srgbClr val="1E293B"/>
+                    </a:solidFill>
+                  </a:tcPr>
+                </a:tc>
+                <a:tc>
+                  <a:txBody>
+                    <a:bodyPr/>
+                    <a:lstStyle/>
+                    <a:p>
+                      <a:pPr>
+                        <a:defRPr sz="850">
+                          <a:solidFill>
+                            <a:srgbClr val="F8FAFC"/>
+                          </a:solidFill>
+                          <a:latin typeface="Segoe UI"/>
+                        </a:defRPr>
+                      </a:pPr>
+                      <a:r>
+                        <a:t>Stanford University</a:t>
+                      </a:r>
+                    </a:p>
+                  </a:txBody>
+                  <a:tcPr>
+                    <a:solidFill>
+                      <a:srgbClr val="1E293B"/>
+                    </a:solidFill>
+                  </a:tcPr>
+                </a:tc>
+                <a:tc>
+                  <a:txBody>
+                    <a:bodyPr/>
+                    <a:lstStyle/>
+                    <a:p>
+                      <a:pPr>
+                        <a:defRPr sz="850">
+                          <a:solidFill>
+                            <a:srgbClr val="CBD5E1"/>
+                          </a:solidFill>
+                          <a:latin typeface="Segoe UI"/>
+                        </a:defRPr>
+                      </a:pPr>
+                      <a:r>
+                        <a:t>United States</a:t>
+                      </a:r>
+                    </a:p>
+                  </a:txBody>
+                  <a:tcPr>
+                    <a:solidFill>
+                      <a:srgbClr val="1E293B"/>
+                    </a:solidFill>
+                  </a:tcPr>
+                </a:tc>
+                <a:tc>
+                  <a:txBody>
+                    <a:bodyPr/>
+                    <a:lstStyle/>
+                    <a:p>
+                      <a:pPr>
+                        <a:defRPr sz="850">
+                          <a:solidFill>
+                            <a:srgbClr val="CBD5E1"/>
+                          </a:solidFill>
+                          <a:latin typeface="Segoe UI"/>
+                        </a:defRPr>
+                      </a:pPr>
+                      <a:r>
+                        <a:t>96.1</a:t>
+                      </a:r>
+                    </a:p>
+                  </a:txBody>
+                  <a:tcPr>
+                    <a:solidFill>
+                      <a:srgbClr val="1E293B"/>
+                    </a:solidFill>
+                  </a:tcPr>
+                </a:tc>
+                <a:tc>
+                  <a:txBody>
+                    <a:bodyPr/>
+                    <a:lstStyle/>
+                    <a:p>
+                      <a:pPr>
+                        <a:defRPr sz="850">
+                          <a:solidFill>
+                            <a:srgbClr val="CBD5E1"/>
+                          </a:solidFill>
+                          <a:latin typeface="Segoe UI"/>
+                        </a:defRPr>
+                      </a:pPr>
+                      <a:r>
+                        <a:t>99.9</a:t>
+                      </a:r>
+                    </a:p>
+                  </a:txBody>
+                  <a:tcPr>
+                    <a:solidFill>
+                      <a:srgbClr val="1E293B"/>
+                    </a:solidFill>
+                  </a:tcPr>
+                </a:tc>
+                <a:tc>
+                  <a:txBody>
+                    <a:bodyPr/>
+                    <a:lstStyle/>
+                    <a:p>
+                      <a:pPr>
+                        <a:defRPr sz="850">
+                          <a:solidFill>
+                            <a:srgbClr val="CBD5E1"/>
+                          </a:solidFill>
+                          <a:latin typeface="Segoe UI"/>
+                        </a:defRPr>
+                      </a:pPr>
+                      <a:r>
+                        <a:t>7.5 : 1</a:t>
+                      </a:r>
+                    </a:p>
+                  </a:txBody>
+                  <a:tcPr>
+                    <a:solidFill>
+                      <a:srgbClr val="1E293B"/>
+                    </a:solidFill>
+                  </a:tcPr>
+                </a:tc>
+                <a:tc>
+                  <a:txBody>
+                    <a:bodyPr/>
+                    <a:lstStyle/>
+                    <a:p>
+                      <a:pPr>
+                        <a:defRPr sz="850">
+                          <a:solidFill>
+                            <a:srgbClr val="CBD5E1"/>
+                          </a:solidFill>
+                          <a:latin typeface="Segoe UI"/>
+                        </a:defRPr>
+                      </a:pPr>
+                      <a:r>
+                        <a:t>24.0%</a:t>
+                      </a:r>
+                    </a:p>
+                  </a:txBody>
+                  <a:tcPr>
+                    <a:solidFill>
+                      <a:srgbClr val="1E293B"/>
+                    </a:solidFill>
+                  </a:tcPr>
+                </a:tc>
+              </a:tr>
+              <a:tr h="399010">
+                <a:tc>
+                  <a:txBody>
+                    <a:bodyPr/>
+                    <a:lstStyle/>
+                    <a:p>
+                      <a:pPr>
+                        <a:defRPr sz="850">
+                          <a:solidFill>
+                            <a:srgbClr val="F8FAFC"/>
+                          </a:solidFill>
+                          <a:latin typeface="Segoe UI"/>
+                        </a:defRPr>
+                      </a:pPr>
+                      <a:r>
+                        <a:t>7</a:t>
+                      </a:r>
+                    </a:p>
+                  </a:txBody>
+                  <a:tcPr>
+                    <a:solidFill>
+                      <a:srgbClr val="1E293B"/>
+                    </a:solidFill>
+                  </a:tcPr>
+                </a:tc>
+                <a:tc>
+                  <a:txBody>
+                    <a:bodyPr/>
+                    <a:lstStyle/>
+                    <a:p>
+                      <a:pPr>
+                        <a:defRPr sz="850">
+                          <a:solidFill>
+                            <a:srgbClr val="F8FAFC"/>
+                          </a:solidFill>
+                          <a:latin typeface="Segoe UI"/>
+                        </a:defRPr>
+                      </a:pPr>
+                      <a:r>
+                        <a:t>ETH Zurich</a:t>
+                      </a:r>
+                    </a:p>
+                  </a:txBody>
+                  <a:tcPr>
+                    <a:solidFill>
+                      <a:srgbClr val="1E293B"/>
+                    </a:solidFill>
+                  </a:tcPr>
+                </a:tc>
+                <a:tc>
+                  <a:txBody>
+                    <a:bodyPr/>
+                    <a:lstStyle/>
+                    <a:p>
+                      <a:pPr>
+                        <a:defRPr sz="850">
+                          <a:solidFill>
+                            <a:srgbClr val="CBD5E1"/>
+                          </a:solidFill>
+                          <a:latin typeface="Segoe UI"/>
+                        </a:defRPr>
+                      </a:pPr>
+                      <a:r>
+                        <a:t>Switzerland</a:t>
+                      </a:r>
+                    </a:p>
+                  </a:txBody>
+                  <a:tcPr>
+                    <a:solidFill>
+                      <a:srgbClr val="1E293B"/>
+                    </a:solidFill>
+                  </a:tcPr>
+                </a:tc>
+                <a:tc>
+                  <a:txBody>
+                    <a:bodyPr/>
+                    <a:lstStyle/>
+                    <a:p>
+                      <a:pPr>
+                        <a:defRPr sz="850">
+                          <a:solidFill>
+                            <a:srgbClr val="CBD5E1"/>
+                          </a:solidFill>
+                          <a:latin typeface="Segoe UI"/>
+                        </a:defRPr>
+                      </a:pPr>
+                      <a:r>
+                        <a:t>93.9</a:t>
+                      </a:r>
+                    </a:p>
+                  </a:txBody>
+                  <a:tcPr>
+                    <a:solidFill>
+                      <a:srgbClr val="1E293B"/>
+                    </a:solidFill>
+                  </a:tcPr>
+                </a:tc>
+                <a:tc>
+                  <a:txBody>
+                    <a:bodyPr/>
+                    <a:lstStyle/>
+                    <a:p>
+                      <a:pPr>
+                        <a:defRPr sz="850">
+                          <a:solidFill>
+                            <a:srgbClr val="CBD5E1"/>
+                          </a:solidFill>
+                          <a:latin typeface="Segoe UI"/>
+                        </a:defRPr>
+                      </a:pPr>
+                      <a:r>
+                        <a:t>99.1</a:t>
+                      </a:r>
+                    </a:p>
+                  </a:txBody>
+                  <a:tcPr>
+                    <a:solidFill>
+                      <a:srgbClr val="1E293B"/>
+                    </a:solidFill>
+                  </a:tcPr>
+                </a:tc>
+                <a:tc>
+                  <a:txBody>
+                    <a:bodyPr/>
+                    <a:lstStyle/>
+                    <a:p>
+                      <a:pPr>
+                        <a:defRPr sz="850">
+                          <a:solidFill>
+                            <a:srgbClr val="CBD5E1"/>
+                          </a:solidFill>
+                          <a:latin typeface="Segoe UI"/>
+                        </a:defRPr>
+                      </a:pPr>
+                      <a:r>
+                        <a:t>14.6 : 1</a:t>
+                      </a:r>
+                    </a:p>
+                  </a:txBody>
+                  <a:tcPr>
+                    <a:solidFill>
+                      <a:srgbClr val="1E293B"/>
+                    </a:solidFill>
+                  </a:tcPr>
+                </a:tc>
+                <a:tc>
+                  <a:txBody>
+                    <a:bodyPr/>
+                    <a:lstStyle/>
+                    <a:p>
+                      <a:pPr>
+                        <a:defRPr sz="850">
+                          <a:solidFill>
+                            <a:srgbClr val="CBD5E1"/>
+                          </a:solidFill>
+                          <a:latin typeface="Segoe UI"/>
+                        </a:defRPr>
+                      </a:pPr>
+                      <a:r>
+                        <a:t>41.0%</a:t>
+                      </a:r>
+                    </a:p>
+                  </a:txBody>
+                  <a:tcPr>
+                    <a:solidFill>
+                      <a:srgbClr val="1E293B"/>
+                    </a:solidFill>
+                  </a:tcPr>
+                </a:tc>
+              </a:tr>
+              <a:tr h="399010">
+                <a:tc>
+                  <a:txBody>
+                    <a:bodyPr/>
+                    <a:lstStyle/>
+                    <a:p>
+                      <a:pPr>
+                        <a:defRPr sz="850">
+                          <a:solidFill>
+                            <a:srgbClr val="F8FAFC"/>
+                          </a:solidFill>
+                          <a:latin typeface="Segoe UI"/>
+                        </a:defRPr>
+                      </a:pPr>
+                      <a:r>
+                        <a:t>8</a:t>
+                      </a:r>
+                    </a:p>
+                  </a:txBody>
+                  <a:tcPr>
+                    <a:solidFill>
+                      <a:srgbClr val="1E293B"/>
+                    </a:solidFill>
+                  </a:tcPr>
+                </a:tc>
+                <a:tc>
+                  <a:txBody>
+                    <a:bodyPr/>
+                    <a:lstStyle/>
+                    <a:p>
+                      <a:pPr>
+                        <a:defRPr sz="850">
+                          <a:solidFill>
+                            <a:srgbClr val="F8FAFC"/>
+                          </a:solidFill>
+                          <a:latin typeface="Segoe UI"/>
+                        </a:defRPr>
+                      </a:pPr>
+                      <a:r>
+                        <a:t>National University of Singapore (NUS)</a:t>
+                      </a:r>
+                    </a:p>
+                  </a:txBody>
+                  <a:tcPr>
+                    <a:solidFill>
+                      <a:srgbClr val="1E293B"/>
+                    </a:solidFill>
+                  </a:tcPr>
+                </a:tc>
+                <a:tc>
+                  <a:txBody>
+                    <a:bodyPr/>
+                    <a:lstStyle/>
+                    <a:p>
+                      <a:pPr>
+                        <a:defRPr sz="850">
+                          <a:solidFill>
+                            <a:srgbClr val="CBD5E1"/>
+                          </a:solidFill>
+                          <a:latin typeface="Segoe UI"/>
+                        </a:defRPr>
+                      </a:pPr>
+                      <a:r>
+                        <a:t>Singapore</a:t>
+                      </a:r>
+                    </a:p>
+                  </a:txBody>
+                  <a:tcPr>
+                    <a:solidFill>
+                      <a:srgbClr val="1E293B"/>
+                    </a:solidFill>
+                  </a:tcPr>
+                </a:tc>
+                <a:tc>
+                  <a:txBody>
+                    <a:bodyPr/>
+                    <a:lstStyle/>
+                    <a:p>
+                      <a:pPr>
+                        <a:defRPr sz="850">
+                          <a:solidFill>
+                            <a:srgbClr val="CBD5E1"/>
+                          </a:solidFill>
+                          <a:latin typeface="Segoe UI"/>
+                        </a:defRPr>
+                      </a:pPr>
+                      <a:r>
+                        <a:t>93.7</a:t>
+                      </a:r>
+                    </a:p>
+                  </a:txBody>
+                  <a:tcPr>
+                    <a:solidFill>
+                      <a:srgbClr val="1E293B"/>
+                    </a:solidFill>
+                  </a:tcPr>
+                </a:tc>
+                <a:tc>
+                  <a:txBody>
+                    <a:bodyPr/>
+                    <a:lstStyle/>
+                    <a:p>
+                      <a:pPr>
+                        <a:defRPr sz="850">
+                          <a:solidFill>
+                            <a:srgbClr val="CBD5E1"/>
+                          </a:solidFill>
+                          <a:latin typeface="Segoe UI"/>
+                        </a:defRPr>
+                      </a:pPr>
+                      <a:r>
+                        <a:t>91.2</a:t>
+                      </a:r>
+                    </a:p>
+                  </a:txBody>
+                  <a:tcPr>
+                    <a:solidFill>
+                      <a:srgbClr val="1E293B"/>
+                    </a:solidFill>
+                  </a:tcPr>
+                </a:tc>
+                <a:tc>
+                  <a:txBody>
+                    <a:bodyPr/>
+                    <a:lstStyle/>
+                    <a:p>
+                      <a:pPr>
+                        <a:defRPr sz="850">
+                          <a:solidFill>
+                            <a:srgbClr val="CBD5E1"/>
+                          </a:solidFill>
+                          <a:latin typeface="Segoe UI"/>
+                        </a:defRPr>
+                      </a:pPr>
+                      <a:r>
+                        <a:t>15.8 : 1</a:t>
+                      </a:r>
+                    </a:p>
+                  </a:txBody>
+                  <a:tcPr>
+                    <a:solidFill>
+                      <a:srgbClr val="1E293B"/>
+                    </a:solidFill>
+                  </a:tcPr>
+                </a:tc>
+                <a:tc>
+                  <a:txBody>
+                    <a:bodyPr/>
+                    <a:lstStyle/>
+                    <a:p>
+                      <a:pPr>
+                        <a:defRPr sz="850">
+                          <a:solidFill>
+                            <a:srgbClr val="CBD5E1"/>
+                          </a:solidFill>
+                          <a:latin typeface="Segoe UI"/>
+                        </a:defRPr>
+                      </a:pPr>
+                      <a:r>
+                        <a:t>35.0%</a:t>
+                      </a:r>
+                    </a:p>
+                  </a:txBody>
+                  <a:tcPr>
+                    <a:solidFill>
+                      <a:srgbClr val="1E293B"/>
+                    </a:solidFill>
+                  </a:tcPr>
+                </a:tc>
+              </a:tr>
+              <a:tr h="399010">
+                <a:tc>
+                  <a:txBody>
+                    <a:bodyPr/>
+                    <a:lstStyle/>
+                    <a:p>
+                      <a:pPr>
+                        <a:defRPr sz="850">
+                          <a:solidFill>
+                            <a:srgbClr val="F8FAFC"/>
+                          </a:solidFill>
+                          <a:latin typeface="Segoe UI"/>
+                        </a:defRPr>
+                      </a:pPr>
+                      <a:r>
+                        <a:t>9</a:t>
+                      </a:r>
+                    </a:p>
+                  </a:txBody>
+                  <a:tcPr>
+                    <a:solidFill>
+                      <a:srgbClr val="1E293B"/>
+                    </a:solidFill>
+                  </a:tcPr>
+                </a:tc>
+                <a:tc>
+                  <a:txBody>
+                    <a:bodyPr/>
+                    <a:lstStyle/>
+                    <a:p>
+                      <a:pPr>
+                        <a:defRPr sz="850">
+                          <a:solidFill>
+                            <a:srgbClr val="F8FAFC"/>
+                          </a:solidFill>
+                          <a:latin typeface="Segoe UI"/>
+                        </a:defRPr>
+                      </a:pPr>
+                      <a:r>
+                        <a:t>University College London (UCL)</a:t>
+                      </a:r>
+                    </a:p>
+                  </a:txBody>
+                  <a:tcPr>
+                    <a:solidFill>
+                      <a:srgbClr val="1E293B"/>
+                    </a:solidFill>
+                  </a:tcPr>
+                </a:tc>
+                <a:tc>
+                  <a:txBody>
+                    <a:bodyPr/>
+                    <a:lstStyle/>
+                    <a:p>
+                      <a:pPr>
+                        <a:defRPr sz="850">
+                          <a:solidFill>
+                            <a:srgbClr val="CBD5E1"/>
+                          </a:solidFill>
+                          <a:latin typeface="Segoe UI"/>
+                        </a:defRPr>
+                      </a:pPr>
+                      <a:r>
+                        <a:t>United Kingdom</a:t>
+                      </a:r>
+                    </a:p>
+                  </a:txBody>
+                  <a:tcPr>
+                    <a:solidFill>
+                      <a:srgbClr val="1E293B"/>
+                    </a:solidFill>
+                  </a:tcPr>
+                </a:tc>
+                <a:tc>
+                  <a:txBody>
+                    <a:bodyPr/>
+                    <a:lstStyle/>
+                    <a:p>
+                      <a:pPr>
+                        <a:defRPr sz="850">
+                          <a:solidFill>
+                            <a:srgbClr val="CBD5E1"/>
+                          </a:solidFill>
+                          <a:latin typeface="Segoe UI"/>
+                        </a:defRPr>
+                      </a:pPr>
+                      <a:r>
+                        <a:t>91.6</a:t>
+                      </a:r>
+                    </a:p>
+                  </a:txBody>
+                  <a:tcPr>
+                    <a:solidFill>
+                      <a:srgbClr val="1E293B"/>
+                    </a:solidFill>
+                  </a:tcPr>
+                </a:tc>
+                <a:tc>
+                  <a:txBody>
+                    <a:bodyPr/>
+                    <a:lstStyle/>
+                    <a:p>
+                      <a:pPr>
+                        <a:defRPr sz="850">
+                          <a:solidFill>
+                            <a:srgbClr val="CBD5E1"/>
+                          </a:solidFill>
+                          <a:latin typeface="Segoe UI"/>
+                        </a:defRPr>
+                      </a:pPr>
+                      <a:r>
+                        <a:t>89.4</a:t>
+                      </a:r>
+                    </a:p>
+                  </a:txBody>
+                  <a:tcPr>
+                    <a:solidFill>
+                      <a:srgbClr val="1E293B"/>
+                    </a:solidFill>
+                  </a:tcPr>
+                </a:tc>
+                <a:tc>
+                  <a:txBody>
+                    <a:bodyPr/>
+                    <a:lstStyle/>
+                    <a:p>
+                      <a:pPr>
+                        <a:defRPr sz="850">
+                          <a:solidFill>
+                            <a:srgbClr val="CBD5E1"/>
+                          </a:solidFill>
+                          <a:latin typeface="Segoe UI"/>
+                        </a:defRPr>
+                      </a:pPr>
+                      <a:r>
+                        <a:t>10.5 : 1</a:t>
+                      </a:r>
+                    </a:p>
+                  </a:txBody>
+                  <a:tcPr>
+                    <a:solidFill>
+                      <a:srgbClr val="1E293B"/>
+                    </a:solidFill>
+                  </a:tcPr>
+                </a:tc>
+                <a:tc>
+                  <a:txBody>
+                    <a:bodyPr/>
+                    <a:lstStyle/>
+                    <a:p>
+                      <a:pPr>
+                        <a:defRPr sz="850">
+                          <a:solidFill>
+                            <a:srgbClr val="CBD5E1"/>
+                          </a:solidFill>
+                          <a:latin typeface="Segoe UI"/>
+                        </a:defRPr>
+                      </a:pPr>
+                      <a:r>
+                        <a:t>53.0%</a:t>
+                      </a:r>
+                    </a:p>
+                  </a:txBody>
+                  <a:tcPr>
+                    <a:solidFill>
+                      <a:srgbClr val="1E293B"/>
+                    </a:solidFill>
+                  </a:tcPr>
+                </a:tc>
+              </a:tr>
+              <a:tr h="399020">
+                <a:tc>
+                  <a:txBody>
+                    <a:bodyPr/>
+                    <a:lstStyle/>
+                    <a:p>
+                      <a:pPr>
+                        <a:defRPr sz="850">
+                          <a:solidFill>
+                            <a:srgbClr val="F8FAFC"/>
+                          </a:solidFill>
+                          <a:latin typeface="Segoe UI"/>
+                        </a:defRPr>
+                      </a:pPr>
+                      <a:r>
+                        <a:t>10</a:t>
+                      </a:r>
+                    </a:p>
+                  </a:txBody>
+                  <a:tcPr>
+                    <a:solidFill>
+                      <a:srgbClr val="1E293B"/>
+                    </a:solidFill>
+                  </a:tcPr>
+                </a:tc>
+                <a:tc>
+                  <a:txBody>
+                    <a:bodyPr/>
+                    <a:lstStyle/>
+                    <a:p>
+                      <a:pPr>
+                        <a:defRPr sz="850">
+                          <a:solidFill>
+                            <a:srgbClr val="F8FAFC"/>
+                          </a:solidFill>
+                          <a:latin typeface="Segoe UI"/>
+                        </a:defRPr>
+                      </a:pPr>
+                      <a:r>
+                        <a:t>California Institute of Technology (Caltech)</a:t>
+                      </a:r>
+                    </a:p>
+                  </a:txBody>
+                  <a:tcPr>
+                    <a:solidFill>
+                      <a:srgbClr val="1E293B"/>
+                    </a:solidFill>
+                  </a:tcPr>
+                </a:tc>
+                <a:tc>
+                  <a:txBody>
+                    <a:bodyPr/>
+                    <a:lstStyle/>
+                    <a:p>
+                      <a:pPr>
+                        <a:defRPr sz="850">
+                          <a:solidFill>
+                            <a:srgbClr val="CBD5E1"/>
+                          </a:solidFill>
+                          <a:latin typeface="Segoe UI"/>
+                        </a:defRPr>
+                      </a:pPr>
+                      <a:r>
+                        <a:t>United States</a:t>
+                      </a:r>
+                    </a:p>
+                  </a:txBody>
+                  <a:tcPr>
+                    <a:solidFill>
+                      <a:srgbClr val="1E293B"/>
+                    </a:solidFill>
+                  </a:tcPr>
+                </a:tc>
+                <a:tc>
+                  <a:txBody>
+                    <a:bodyPr/>
+                    <a:lstStyle/>
+                    <a:p>
+                      <a:pPr>
+                        <a:defRPr sz="850">
+                          <a:solidFill>
+                            <a:srgbClr val="CBD5E1"/>
+                          </a:solidFill>
+                          <a:latin typeface="Segoe UI"/>
+                        </a:defRPr>
+                      </a:pPr>
+                      <a:r>
+                        <a:t>90.9</a:t>
+                      </a:r>
+                    </a:p>
+                  </a:txBody>
+                  <a:tcPr>
+                    <a:solidFill>
+                      <a:srgbClr val="1E293B"/>
+                    </a:solidFill>
+                  </a:tcPr>
+                </a:tc>
+                <a:tc>
+                  <a:txBody>
+                    <a:bodyPr/>
+                    <a:lstStyle/>
+                    <a:p>
+                      <a:pPr>
+                        <a:defRPr sz="850">
+                          <a:solidFill>
+                            <a:srgbClr val="CBD5E1"/>
+                          </a:solidFill>
+                          <a:latin typeface="Segoe UI"/>
+                        </a:defRPr>
+                      </a:pPr>
+                      <a:r>
+                        <a:t>100.0</a:t>
+                      </a:r>
+                    </a:p>
+                  </a:txBody>
+                  <a:tcPr>
+                    <a:solidFill>
+                      <a:srgbClr val="1E293B"/>
+                    </a:solidFill>
+                  </a:tcPr>
+                </a:tc>
+                <a:tc>
+                  <a:txBody>
+                    <a:bodyPr/>
+                    <a:lstStyle/>
+                    <a:p>
+                      <a:pPr>
+                        <a:defRPr sz="850">
+                          <a:solidFill>
+                            <a:srgbClr val="CBD5E1"/>
+                          </a:solidFill>
+                          <a:latin typeface="Segoe UI"/>
+                        </a:defRPr>
+                      </a:pPr>
+                      <a:r>
+                        <a:t>6.4 : 1</a:t>
+                      </a:r>
+                    </a:p>
+                  </a:txBody>
+                  <a:tcPr>
+                    <a:solidFill>
+                      <a:srgbClr val="1E293B"/>
+                    </a:solidFill>
+                  </a:tcPr>
+                </a:tc>
+                <a:tc>
+                  <a:txBody>
+                    <a:bodyPr/>
+                    <a:lstStyle/>
+                    <a:p>
+                      <a:pPr>
+                        <a:defRPr sz="850">
+                          <a:solidFill>
+                            <a:srgbClr val="CBD5E1"/>
+                          </a:solidFill>
+                          <a:latin typeface="Segoe UI"/>
+                        </a:defRPr>
+                      </a:pPr>
+                      <a:r>
+                        <a:t>32.0%</a:t>
+                      </a:r>
+                    </a:p>
+                  </a:txBody>
+                  <a:tcPr>
+                    <a:solidFill>
+                      <a:srgbClr val="1E293B"/>
+                    </a:solidFill>
+                  </a:tcPr>
+                </a:tc>
+              </a:tr>
+            </a:tbl>
+          </a:graphicData>
+        </a:graphic>
+      </p:graphicFrame>
+      <p:sp>
+        <p:nvSpPr>
+          <p:cNvPr id="8" name="Rounded Rectangle 7"/>
           <p:cNvSpPr/>
           <p:nvPr/>
         </p:nvSpPr>
         <p:spPr>
           <a:xfrm>
-            <a:off x="731520" y="1371600"/>
-            <a:ext cx="5257800" cy="2240280"/>
+            <a:off x="731520" y="5897880"/>
+            <a:ext cx="10728655" cy="438912"/>
           </a:xfrm>
           <a:prstGeom prst="roundRect">
             <a:avLst/>
@@ -3896,11 +5785,11 @@
           </a:fontRef>
         </p:style>
         <p:txBody>
-          <a:bodyPr wrap="square" lIns="182880" tIns="182880" rIns="182880" bIns="182880" rtlCol="0" anchor="ctr"/>
+          <a:bodyPr rtlCol="0" anchor="ctr" lIns="73152" tIns="73152" rIns="73152" bIns="73152"/>
           <a:lstStyle/>
           <a:p>
             <a:pPr algn="ctr">
-              <a:defRPr sz="1100" b="1">
+              <a:defRPr sz="850">
                 <a:solidFill>
                   <a:srgbClr val="10B981"/>
                 </a:solidFill>
@@ -3908,44 +5797,245 @@
               </a:defRPr>
             </a:pPr>
             <a:r>
-              <a:t>DASHBOARD 1: UNIVERSITY OVERVIEW</a:t>
-            </a:r>
-          </a:p>
-          <a:p>
-            <a:pPr>
-              <a:spcBef>
-                <a:spcPts val="800"/>
-              </a:spcBef>
-              <a:defRPr sz="900">
-                <a:solidFill>
-                  <a:srgbClr val="CBD5E1"/>
-                </a:solidFill>
-                <a:latin typeface="Segoe UI"/>
-              </a:defRPr>
-            </a:pPr>
-            <a:r>
-              <a:t>• Landing scorecard displaying top global rankings and geographic footprint.</a:t>
-            </a:r>
-            <a:br/>
-            <a:r>
-              <a:t>• Features 6 top KPI cards, ranked horizontal bar chart, reputation vs score scatter, and choropleth map.</a:t>
-            </a:r>
-            <a:br/>
-            <a:r>
-              <a:t>• Interlinking: Passes university_id to Dashboards 2 &amp; 3; passes country_id to Dashboard 4.</a:t>
-            </a:r>
-          </a:p>
-        </p:txBody>
-      </p:sp>
-      <p:sp>
-        <p:nvSpPr>
-          <p:cNvPr id="8" name="Rounded Rectangle 7"/>
+              <a:t>Empirical Finding: Top 10 institutions maintain staff ratios under 16:1 and average citations per faculty exceeding 95.0, reflecting intense faculty mentorship.</a:t>
+            </a:r>
+          </a:p>
+        </p:txBody>
+      </p:sp>
+    </p:spTree>
+  </p:cSld>
+  <p:clrMapOvr>
+    <a:masterClrMapping/>
+  </p:clrMapOvr>
+</p:sld>
+</file>
+
+<file path=ppt/slides/slide11.xml><?xml version="1.0" encoding="utf-8"?>
+<p:sld xmlns:a="http://schemas.openxmlformats.org/drawingml/2006/main" xmlns:p="http://schemas.openxmlformats.org/presentationml/2006/main" xmlns:r="http://schemas.openxmlformats.org/officeDocument/2006/relationships">
+  <p:cSld>
+    <p:spTree>
+      <p:nvGrpSpPr>
+        <p:cNvPr id="1" name=""/>
+        <p:cNvGrpSpPr/>
+        <p:nvPr/>
+      </p:nvGrpSpPr>
+      <p:grpSpPr/>
+      <p:sp>
+        <p:nvSpPr>
+          <p:cNvPr id="2" name="Rectangle 1"/>
           <p:cNvSpPr/>
           <p:nvPr/>
         </p:nvSpPr>
         <p:spPr>
           <a:xfrm>
-            <a:off x="6208776" y="1371600"/>
+            <a:off x="0" y="0"/>
+            <a:ext cx="12191695" cy="6858000"/>
+          </a:xfrm>
+          <a:prstGeom prst="rect">
+            <a:avLst/>
+          </a:prstGeom>
+          <a:solidFill>
+            <a:srgbClr val="0F172A"/>
+          </a:solidFill>
+          <a:ln>
+            <a:noFill/>
+          </a:ln>
+        </p:spPr>
+        <p:style>
+          <a:lnRef idx="1">
+            <a:schemeClr val="accent1"/>
+          </a:lnRef>
+          <a:fillRef idx="3">
+            <a:schemeClr val="accent1"/>
+          </a:fillRef>
+          <a:effectRef idx="2">
+            <a:schemeClr val="accent1"/>
+          </a:effectRef>
+          <a:fontRef idx="minor">
+            <a:schemeClr val="lt1"/>
+          </a:fontRef>
+        </p:style>
+        <p:txBody>
+          <a:bodyPr rtlCol="0" anchor="ctr"/>
+          <a:lstStyle/>
+          <a:p>
+            <a:pPr algn="ctr"/>
+          </a:p>
+        </p:txBody>
+      </p:sp>
+      <p:sp>
+        <p:nvSpPr>
+          <p:cNvPr id="3" name="Rectangle 2"/>
+          <p:cNvSpPr/>
+          <p:nvPr/>
+        </p:nvSpPr>
+        <p:spPr>
+          <a:xfrm>
+            <a:off x="731520" y="365760"/>
+            <a:ext cx="10728655" cy="27432"/>
+          </a:xfrm>
+          <a:prstGeom prst="rect">
+            <a:avLst/>
+          </a:prstGeom>
+          <a:solidFill>
+            <a:srgbClr val="06B6D4"/>
+          </a:solidFill>
+          <a:ln>
+            <a:noFill/>
+          </a:ln>
+        </p:spPr>
+        <p:style>
+          <a:lnRef idx="1">
+            <a:schemeClr val="accent1"/>
+          </a:lnRef>
+          <a:fillRef idx="3">
+            <a:schemeClr val="accent1"/>
+          </a:fillRef>
+          <a:effectRef idx="2">
+            <a:schemeClr val="accent1"/>
+          </a:effectRef>
+          <a:fontRef idx="minor">
+            <a:schemeClr val="lt1"/>
+          </a:fontRef>
+        </p:style>
+        <p:txBody>
+          <a:bodyPr rtlCol="0" anchor="ctr"/>
+          <a:lstStyle/>
+          <a:p>
+            <a:pPr algn="ctr"/>
+          </a:p>
+        </p:txBody>
+      </p:sp>
+      <p:sp>
+        <p:nvSpPr>
+          <p:cNvPr id="4" name="TextBox 3"/>
+          <p:cNvSpPr txBox="1"/>
+          <p:nvPr/>
+        </p:nvSpPr>
+        <p:spPr>
+          <a:xfrm>
+            <a:off x="731520" y="438912"/>
+            <a:ext cx="10728655" cy="228600"/>
+          </a:xfrm>
+          <a:prstGeom prst="rect">
+            <a:avLst/>
+          </a:prstGeom>
+          <a:noFill/>
+        </p:spPr>
+        <p:txBody>
+          <a:bodyPr wrap="square" lIns="0" tIns="0" rIns="0" bIns="0">
+            <a:spAutoFit/>
+          </a:bodyPr>
+          <a:lstStyle/>
+          <a:p>
+            <a:pPr>
+              <a:defRPr sz="950" b="1">
+                <a:solidFill>
+                  <a:srgbClr val="10B981"/>
+                </a:solidFill>
+                <a:latin typeface="Segoe UI"/>
+              </a:defRPr>
+            </a:pPr>
+            <a:r>
+              <a:t>MILESTONE 2 / MODULE 4 &amp; MILESTONE 3 / MODULE 5 | DESIGN SYSTEM</a:t>
+            </a:r>
+          </a:p>
+        </p:txBody>
+      </p:sp>
+      <p:sp>
+        <p:nvSpPr>
+          <p:cNvPr id="5" name="TextBox 4"/>
+          <p:cNvSpPr txBox="1"/>
+          <p:nvPr/>
+        </p:nvSpPr>
+        <p:spPr>
+          <a:xfrm>
+            <a:off x="731520" y="685800"/>
+            <a:ext cx="10728655" cy="502920"/>
+          </a:xfrm>
+          <a:prstGeom prst="rect">
+            <a:avLst/>
+          </a:prstGeom>
+          <a:noFill/>
+        </p:spPr>
+        <p:txBody>
+          <a:bodyPr wrap="square" lIns="0" tIns="0" rIns="0" bIns="0">
+            <a:spAutoFit/>
+          </a:bodyPr>
+          <a:lstStyle/>
+          <a:p>
+            <a:pPr>
+              <a:defRPr sz="1900" b="1">
+                <a:solidFill>
+                  <a:srgbClr val="F8FAFC"/>
+                </a:solidFill>
+                <a:latin typeface="Segoe UI"/>
+              </a:defRPr>
+            </a:pPr>
+            <a:r>
+              <a:t>Visual Analytics: Enterprise Dashboard Design System</a:t>
+            </a:r>
+          </a:p>
+        </p:txBody>
+      </p:sp>
+      <p:sp>
+        <p:nvSpPr>
+          <p:cNvPr id="6" name="TextBox 5"/>
+          <p:cNvSpPr txBox="1"/>
+          <p:nvPr/>
+        </p:nvSpPr>
+        <p:spPr>
+          <a:xfrm>
+            <a:off x="731520" y="6473952"/>
+            <a:ext cx="10728655" cy="274320"/>
+          </a:xfrm>
+          <a:prstGeom prst="rect">
+            <a:avLst/>
+          </a:prstGeom>
+          <a:noFill/>
+        </p:spPr>
+        <p:txBody>
+          <a:bodyPr wrap="none" lIns="0" tIns="0" rIns="0" bIns="0">
+            <a:spAutoFit/>
+          </a:bodyPr>
+          <a:lstStyle/>
+          <a:p>
+            <a:pPr>
+              <a:defRPr sz="850">
+                <a:solidFill>
+                  <a:srgbClr val="94A3B8"/>
+                </a:solidFill>
+                <a:latin typeface="Segoe UI"/>
+              </a:defRPr>
+            </a:pPr>
+            <a:r>
+              <a:t>Infosys Springboard Internship 7.0 | Author: Sujay S | EduVision_DV</a:t>
+            </a:r>
+          </a:p>
+          <a:p>
+            <a:pPr algn="r">
+              <a:defRPr sz="850">
+                <a:solidFill>
+                  <a:srgbClr val="94A3B8"/>
+                </a:solidFill>
+                <a:latin typeface="Segoe UI"/>
+              </a:defRPr>
+            </a:pPr>
+            <a:r>
+              <a:t>11 / 19</a:t>
+            </a:r>
+          </a:p>
+        </p:txBody>
+      </p:sp>
+      <p:sp>
+        <p:nvSpPr>
+          <p:cNvPr id="7" name="Rounded Rectangle 6"/>
+          <p:cNvSpPr/>
+          <p:nvPr/>
+        </p:nvSpPr>
+        <p:spPr>
+          <a:xfrm>
+            <a:off x="731520" y="1371600"/>
             <a:ext cx="5257800" cy="2240280"/>
           </a:xfrm>
           <a:prstGeom prst="roundRect">
@@ -3975,19 +6065,19 @@
           </a:fontRef>
         </p:style>
         <p:txBody>
-          <a:bodyPr wrap="square" lIns="182880" tIns="182880" rIns="182880" bIns="182880" rtlCol="0" anchor="ctr"/>
+          <a:bodyPr rtlCol="0" anchor="ctr" wrap="square" lIns="182880" tIns="182880" rIns="182880" bIns="182880"/>
           <a:lstStyle/>
           <a:p>
             <a:pPr algn="ctr">
               <a:defRPr sz="1100" b="1">
                 <a:solidFill>
-                  <a:srgbClr val="06B6D4"/>
-                </a:solidFill>
-                <a:latin typeface="Segoe UI"/>
-              </a:defRPr>
-            </a:pPr>
-            <a:r>
-              <a:t>DASHBOARD 2: RESEARCH ANALYTICS</a:t>
+                  <a:srgbClr val="10B981"/>
+                </a:solidFill>
+                <a:latin typeface="Segoe UI"/>
+              </a:defRPr>
+            </a:pPr>
+            <a:r>
+              <a:t>DASHBOARD 1: UNIVERSITY OVERVIEW</a:t>
             </a:r>
           </a:p>
           <a:p>
@@ -4003,28 +6093,32 @@
               </a:defRPr>
             </a:pPr>
             <a:r>
-              <a:t>• Deep-dive into institutional research environment, citations, and collaboration networks.</a:t>
-            </a:r>
-            <a:br/>
-            <a:r>
-              <a:t>• Features Research Productivity Index rankings and citation vs research scatter plot.</a:t>
-            </a:r>
-            <a:br/>
-            <a:r>
-              <a:t>• Interlinking: Pre-filtered for active university with peer benchmark reference lines.</a:t>
-            </a:r>
-          </a:p>
-        </p:txBody>
-      </p:sp>
-      <p:sp>
-        <p:nvSpPr>
-          <p:cNvPr id="9" name="Rounded Rectangle 8"/>
+              <a:t>• Located in Milestone 3 / Module 5 &amp; Module 6.</a:t>
+            </a:r>
+            <a:br/>
+            <a:r>
+              <a:t>• Landing scorecard displaying top global rankings and geographic footprint.</a:t>
+            </a:r>
+            <a:br/>
+            <a:r>
+              <a:t>• Features 6 top KPI cards, ranked horizontal bar chart, reputation vs score scatter, and choropleth map.</a:t>
+            </a:r>
+            <a:br/>
+            <a:r>
+              <a:t>• Interlinking: Passes university_id to Dashboards 2 &amp; 3; passes country_id to Dashboard 4.</a:t>
+            </a:r>
+          </a:p>
+        </p:txBody>
+      </p:sp>
+      <p:sp>
+        <p:nvSpPr>
+          <p:cNvPr id="8" name="Rounded Rectangle 7"/>
           <p:cNvSpPr/>
           <p:nvPr/>
         </p:nvSpPr>
         <p:spPr>
           <a:xfrm>
-            <a:off x="731520" y="3794760"/>
+            <a:off x="6208776" y="1371600"/>
             <a:ext cx="5257800" cy="2240280"/>
           </a:xfrm>
           <a:prstGeom prst="roundRect">
@@ -4054,19 +6148,19 @@
           </a:fontRef>
         </p:style>
         <p:txBody>
-          <a:bodyPr wrap="square" lIns="182880" tIns="182880" rIns="182880" bIns="182880" rtlCol="0" anchor="ctr"/>
+          <a:bodyPr rtlCol="0" anchor="ctr" wrap="square" lIns="182880" tIns="182880" rIns="182880" bIns="182880"/>
           <a:lstStyle/>
           <a:p>
             <a:pPr algn="ctr">
               <a:defRPr sz="1100" b="1">
                 <a:solidFill>
-                  <a:srgbClr val="F59E0B"/>
-                </a:solidFill>
-                <a:latin typeface="Segoe UI"/>
-              </a:defRPr>
-            </a:pPr>
-            <a:r>
-              <a:t>DASHBOARD 3: STUDENT ANALYTICS</a:t>
+                  <a:srgbClr val="06B6D4"/>
+                </a:solidFill>
+                <a:latin typeface="Segoe UI"/>
+              </a:defRPr>
+            </a:pPr>
+            <a:r>
+              <a:t>DASHBOARD 2: RESEARCH ANALYTICS</a:t>
             </a:r>
           </a:p>
           <a:p>
@@ -4082,28 +6176,32 @@
               </a:defRPr>
             </a:pPr>
             <a:r>
-              <a:t>• Explores campus diversity, actual faculty-to-student ratios, and gender breakdowns.</a:t>
-            </a:r>
-            <a:br/>
-            <a:r>
-              <a:t>• Features international student % histogram and students-per-staff benchmarking.</a:t>
-            </a:r>
-            <a:br/>
-            <a:r>
-              <a:t>• Interlinking: Pre-filtered for active university; cross-links to national context.</a:t>
-            </a:r>
-          </a:p>
-        </p:txBody>
-      </p:sp>
-      <p:sp>
-        <p:nvSpPr>
-          <p:cNvPr id="10" name="Rounded Rectangle 9"/>
+              <a:t>• Located in Milestone 3 / Module 5 &amp; Module 6.</a:t>
+            </a:r>
+            <a:br/>
+            <a:r>
+              <a:t>• Deep-dive into institutional research environment, citations, and collaboration networks.</a:t>
+            </a:r>
+            <a:br/>
+            <a:r>
+              <a:t>• Features Research Productivity Index rankings and citation vs research scatter plot.</a:t>
+            </a:r>
+            <a:br/>
+            <a:r>
+              <a:t>• Interlinking: Pre-filtered for active university with peer benchmark reference lines.</a:t>
+            </a:r>
+          </a:p>
+        </p:txBody>
+      </p:sp>
+      <p:sp>
+        <p:nvSpPr>
+          <p:cNvPr id="9" name="Rounded Rectangle 8"/>
           <p:cNvSpPr/>
           <p:nvPr/>
         </p:nvSpPr>
         <p:spPr>
           <a:xfrm>
-            <a:off x="6208776" y="3794760"/>
+            <a:off x="731520" y="3794760"/>
             <a:ext cx="5257800" cy="2240280"/>
           </a:xfrm>
           <a:prstGeom prst="roundRect">
@@ -4133,19 +6231,19 @@
           </a:fontRef>
         </p:style>
         <p:txBody>
-          <a:bodyPr wrap="square" lIns="182880" tIns="182880" rIns="182880" bIns="182880" rtlCol="0" anchor="ctr"/>
+          <a:bodyPr rtlCol="0" anchor="ctr" wrap="square" lIns="182880" tIns="182880" rIns="182880" bIns="182880"/>
           <a:lstStyle/>
           <a:p>
             <a:pPr algn="ctr">
               <a:defRPr sz="1100" b="1">
                 <a:solidFill>
-                  <a:srgbClr val="8B5CF6"/>
-                </a:solidFill>
-                <a:latin typeface="Segoe UI"/>
-              </a:defRPr>
-            </a:pPr>
-            <a:r>
-              <a:t>DASHBOARD 4: COUNTRY COMPARISON</a:t>
+                  <a:srgbClr val="F59E0B"/>
+                </a:solidFill>
+                <a:latin typeface="Segoe UI"/>
+              </a:defRPr>
+            </a:pPr>
+            <a:r>
+              <a:t>DASHBOARD 3: STUDENT ANALYTICS</a:t>
             </a:r>
           </a:p>
           <a:p>
@@ -4160,6 +6258,93 @@
                 <a:latin typeface="Segoe UI"/>
               </a:defRPr>
             </a:pPr>
+            <a:r>
+              <a:t>• Located in Milestone 3 / Module 6.</a:t>
+            </a:r>
+            <a:br/>
+            <a:r>
+              <a:t>• Explores campus diversity, actual faculty-to-student ratios, and gender breakdowns.</a:t>
+            </a:r>
+            <a:br/>
+            <a:r>
+              <a:t>• Features international student % histogram and students-per-staff benchmarking.</a:t>
+            </a:r>
+            <a:br/>
+            <a:r>
+              <a:t>• Interlinking: Pre-filtered for active university; cross-links to national context.</a:t>
+            </a:r>
+          </a:p>
+        </p:txBody>
+      </p:sp>
+      <p:sp>
+        <p:nvSpPr>
+          <p:cNvPr id="10" name="Rounded Rectangle 9"/>
+          <p:cNvSpPr/>
+          <p:nvPr/>
+        </p:nvSpPr>
+        <p:spPr>
+          <a:xfrm>
+            <a:off x="6208776" y="3794760"/>
+            <a:ext cx="5257800" cy="2240280"/>
+          </a:xfrm>
+          <a:prstGeom prst="roundRect">
+            <a:avLst/>
+          </a:prstGeom>
+          <a:solidFill>
+            <a:srgbClr val="1E293B"/>
+          </a:solidFill>
+          <a:ln w="12700">
+            <a:solidFill>
+              <a:srgbClr val="334155"/>
+            </a:solidFill>
+          </a:ln>
+        </p:spPr>
+        <p:style>
+          <a:lnRef idx="1">
+            <a:schemeClr val="accent1"/>
+          </a:lnRef>
+          <a:fillRef idx="3">
+            <a:schemeClr val="accent1"/>
+          </a:fillRef>
+          <a:effectRef idx="2">
+            <a:schemeClr val="accent1"/>
+          </a:effectRef>
+          <a:fontRef idx="minor">
+            <a:schemeClr val="lt1"/>
+          </a:fontRef>
+        </p:style>
+        <p:txBody>
+          <a:bodyPr rtlCol="0" anchor="ctr" wrap="square" lIns="182880" tIns="182880" rIns="182880" bIns="182880"/>
+          <a:lstStyle/>
+          <a:p>
+            <a:pPr algn="ctr">
+              <a:defRPr sz="1100" b="1">
+                <a:solidFill>
+                  <a:srgbClr val="8B5CF6"/>
+                </a:solidFill>
+                <a:latin typeface="Segoe UI"/>
+              </a:defRPr>
+            </a:pPr>
+            <a:r>
+              <a:t>DASHBOARD 4: COUNTRY COMPARISON</a:t>
+            </a:r>
+          </a:p>
+          <a:p>
+            <a:pPr>
+              <a:spcBef>
+                <a:spcPts val="800"/>
+              </a:spcBef>
+              <a:defRPr sz="900">
+                <a:solidFill>
+                  <a:srgbClr val="CBD5E1"/>
+                </a:solidFill>
+                <a:latin typeface="Segoe UI"/>
+              </a:defRPr>
+            </a:pPr>
+            <a:r>
+              <a:t>• Located in Milestone 3 / Module 6.</a:t>
+            </a:r>
+            <a:br/>
             <a:r>
               <a:t>• Country-level education benchmarking using World Bank EdStats indicators.</a:t>
             </a:r>
@@ -4182,8 +6367,8 @@
 </p:sld>
 </file>
 
-<file path=ppt/slides/slide11.xml><?xml version="1.0" encoding="utf-8"?>
-<p:sld xmlns:a="http://schemas.openxmlformats.org/drawingml/2006/main" xmlns:r="http://schemas.openxmlformats.org/officeDocument/2006/relationships" xmlns:p="http://schemas.openxmlformats.org/presentationml/2006/main">
+<file path=ppt/slides/slide12.xml><?xml version="1.0" encoding="utf-8"?>
+<p:sld xmlns:a="http://schemas.openxmlformats.org/drawingml/2006/main" xmlns:p="http://schemas.openxmlformats.org/presentationml/2006/main" xmlns:r="http://schemas.openxmlformats.org/officeDocument/2006/relationships">
   <p:cSld>
     <p:spTree>
       <p:nvGrpSpPr>
@@ -4191,14 +6376,7 @@
         <p:cNvGrpSpPr/>
         <p:nvPr/>
       </p:nvGrpSpPr>
-      <p:grpSpPr>
-        <a:xfrm>
-          <a:off x="0" y="0"/>
-          <a:ext cx="0" cy="0"/>
-          <a:chOff x="0" y="0"/>
-          <a:chExt cx="0" cy="0"/>
-        </a:xfrm>
-      </p:grpSpPr>
+      <p:grpSpPr/>
       <p:sp>
         <p:nvSpPr>
           <p:cNvPr id="2" name="Rectangle 1"/>
@@ -4239,7 +6417,6 @@
           <a:lstStyle/>
           <a:p>
             <a:pPr algn="ctr"/>
-            <a:endParaRPr/>
           </a:p>
         </p:txBody>
       </p:sp>
@@ -4283,7 +6460,6 @@
           <a:lstStyle/>
           <a:p>
             <a:pPr algn="ctr"/>
-            <a:endParaRPr/>
           </a:p>
         </p:txBody>
       </p:sp>
@@ -4318,7 +6494,7 @@
               </a:defRPr>
             </a:pPr>
             <a:r>
-              <a:t>EDUVISION_DV | HIGHER EDUCATION INTELLIGENCE SYSTEM</a:t>
+              <a:t>MILESTONE 3 / MODULE 5 &amp; 6 | TABLEAU BI SUITE</a:t>
             </a:r>
           </a:p>
         </p:txBody>
@@ -4403,7 +6579,7 @@
               </a:defRPr>
             </a:pPr>
             <a:r>
-              <a:t>11 / 18</a:t>
+              <a:t>12 / 19</a:t>
             </a:r>
           </a:p>
         </p:txBody>
@@ -4425,7 +6601,7 @@
         <p:spPr>
           <a:xfrm>
             <a:off x="731520" y="1371600"/>
-            <a:ext cx="6858000" cy="4846320"/>
+            <a:ext cx="6949440" cy="4343400"/>
           </a:xfrm>
           <a:prstGeom prst="rect">
             <a:avLst/>
@@ -4440,8 +6616,8 @@
         </p:nvSpPr>
         <p:spPr>
           <a:xfrm>
-            <a:off x="7772400" y="1371600"/>
-            <a:ext cx="3687775" cy="4846320"/>
+            <a:off x="7909560" y="1371600"/>
+            <a:ext cx="3550615" cy="4846320"/>
           </a:xfrm>
           <a:prstGeom prst="roundRect">
             <a:avLst/>
@@ -4470,7 +6646,7 @@
           </a:fontRef>
         </p:style>
         <p:txBody>
-          <a:bodyPr wrap="square" lIns="182880" tIns="182880" rIns="182880" bIns="182880" rtlCol="0" anchor="ctr"/>
+          <a:bodyPr rtlCol="0" anchor="ctr" wrap="square" lIns="201168" tIns="201168" rIns="201168" bIns="201168"/>
           <a:lstStyle/>
           <a:p>
             <a:pPr algn="ctr">
@@ -4482,7 +6658,7 @@
               </a:defRPr>
             </a:pPr>
             <a:r>
-              <a:t>CORE VISUAL ELEMENTS</a:t>
+              <a:t>DASHBOARD 1 ARCHITECTURE</a:t>
             </a:r>
           </a:p>
           <a:p>
@@ -4498,32 +6674,87 @@
               </a:defRPr>
             </a:pPr>
             <a:r>
-              <a:t>• 6 Top KPI Cards: Global Rank (#1 MIT), Overall Score (100.0), Academic Reputation (100.0), Research Impact (100.0), Faculty Ratio (8.2:1), Intl Students (33.0%).</a:t>
-            </a:r>
-            <a:br/>
-            <a:br/>
-            <a:r>
-              <a:t>• Top 10 Global Universities Bar Chart: Ranked by Overall Score. Highlights MIT, Imperial, Oxford, Harvard, Cambridge.</a:t>
-            </a:r>
-            <a:br/>
-            <a:br/>
-            <a:r>
-              <a:t>• Academic Reputation vs. Overall Score: Scatter plot comparing peer perception with aggregate performance.</a:t>
-            </a:r>
-            <a:br/>
-            <a:br/>
-            <a:r>
-              <a:t>• Global University Distribution Map: World choropleth map displaying institutional density.</a:t>
-            </a:r>
-            <a:br/>
-            <a:br/>
-            <a:r>
-              <a:t>• Regional Distribution Donut: Continental breakdown of top institutions.</a:t>
-            </a:r>
-            <a:br/>
-            <a:br/>
-            <a:r>
-              <a:t>• Interlinking Action: Clicking any university bar passes university_id to Dashboards 2 &amp; 3. Clicking a country passes country_id to Dashboard 4.</a:t>
+              <a:t>Core Business Purpose:</a:t>
+            </a:r>
+            <a:br/>
+            <a:r>
+              <a:t>Executive landing page and institutional benchmark scorecard.</a:t>
+            </a:r>
+          </a:p>
+          <a:p>
+            <a:pPr>
+              <a:spcBef>
+                <a:spcPts val="800"/>
+              </a:spcBef>
+              <a:defRPr sz="850">
+                <a:solidFill>
+                  <a:srgbClr val="CBD5E1"/>
+                </a:solidFill>
+                <a:latin typeface="Segoe UI"/>
+              </a:defRPr>
+            </a:pPr>
+            <a:r>
+              <a:t>Visual Components:</a:t>
+            </a:r>
+            <a:br/>
+            <a:r>
+              <a:t>• 6 Top KPI Executive Metric Cards</a:t>
+            </a:r>
+            <a:br/>
+            <a:r>
+              <a:t>• Global Choropleth Distribution Map</a:t>
+            </a:r>
+            <a:br/>
+            <a:r>
+              <a:t>• Ranked Horizontal Bar Chart</a:t>
+            </a:r>
+            <a:br/>
+            <a:r>
+              <a:t>• Academic Reputation vs. Overall Score Scatter Plot</a:t>
+            </a:r>
+          </a:p>
+          <a:p>
+            <a:pPr>
+              <a:spcBef>
+                <a:spcPts val="800"/>
+              </a:spcBef>
+              <a:defRPr sz="850">
+                <a:solidFill>
+                  <a:srgbClr val="CBD5E1"/>
+                </a:solidFill>
+                <a:latin typeface="Segoe UI"/>
+              </a:defRPr>
+            </a:pPr>
+            <a:r>
+              <a:t>Interactivity &amp; Filter Actions:</a:t>
+            </a:r>
+            <a:br/>
+            <a:r>
+              <a:t>• Clicking any university filters all charts and passes university_id to Dashboards 2 &amp; 3.</a:t>
+            </a:r>
+            <a:br/>
+            <a:r>
+              <a:t>• Regional dropdown parameter allows continuous geographic slice-and-dice.</a:t>
+            </a:r>
+          </a:p>
+          <a:p>
+            <a:pPr>
+              <a:spcBef>
+                <a:spcPts val="800"/>
+              </a:spcBef>
+              <a:defRPr sz="850">
+                <a:solidFill>
+                  <a:srgbClr val="CBD5E1"/>
+                </a:solidFill>
+                <a:latin typeface="Segoe UI"/>
+              </a:defRPr>
+            </a:pPr>
+            <a:r>
+              <a:t>Analytical Finding:</a:t>
+            </a:r>
+            <a:br/>
+            <a:r>
+              <a:t>MIT, Imperial, and Oxford dominate top overall scores, with 40% of top 50 institutions concentrated in North America.</a:t>
             </a:r>
           </a:p>
         </p:txBody>
@@ -4536,8 +6767,8 @@
 </p:sld>
 </file>
 
-<file path=ppt/slides/slide12.xml><?xml version="1.0" encoding="utf-8"?>
-<p:sld xmlns:a="http://schemas.openxmlformats.org/drawingml/2006/main" xmlns:r="http://schemas.openxmlformats.org/officeDocument/2006/relationships" xmlns:p="http://schemas.openxmlformats.org/presentationml/2006/main">
+<file path=ppt/slides/slide13.xml><?xml version="1.0" encoding="utf-8"?>
+<p:sld xmlns:a="http://schemas.openxmlformats.org/drawingml/2006/main" xmlns:p="http://schemas.openxmlformats.org/presentationml/2006/main" xmlns:r="http://schemas.openxmlformats.org/officeDocument/2006/relationships">
   <p:cSld>
     <p:spTree>
       <p:nvGrpSpPr>
@@ -4545,14 +6776,7 @@
         <p:cNvGrpSpPr/>
         <p:nvPr/>
       </p:nvGrpSpPr>
-      <p:grpSpPr>
-        <a:xfrm>
-          <a:off x="0" y="0"/>
-          <a:ext cx="0" cy="0"/>
-          <a:chOff x="0" y="0"/>
-          <a:chExt cx="0" cy="0"/>
-        </a:xfrm>
-      </p:grpSpPr>
+      <p:grpSpPr/>
       <p:sp>
         <p:nvSpPr>
           <p:cNvPr id="2" name="Rectangle 1"/>
@@ -4593,7 +6817,6 @@
           <a:lstStyle/>
           <a:p>
             <a:pPr algn="ctr"/>
-            <a:endParaRPr/>
           </a:p>
         </p:txBody>
       </p:sp>
@@ -4637,7 +6860,6 @@
           <a:lstStyle/>
           <a:p>
             <a:pPr algn="ctr"/>
-            <a:endParaRPr/>
           </a:p>
         </p:txBody>
       </p:sp>
@@ -4672,7 +6894,7 @@
               </a:defRPr>
             </a:pPr>
             <a:r>
-              <a:t>EDUVISION_DV | HIGHER EDUCATION INTELLIGENCE SYSTEM</a:t>
+              <a:t>MILESTONE 3 / MODULE 5 &amp; 6 | TABLEAU BI SUITE</a:t>
             </a:r>
           </a:p>
         </p:txBody>
@@ -4757,7 +6979,7 @@
               </a:defRPr>
             </a:pPr>
             <a:r>
-              <a:t>12 / 18</a:t>
+              <a:t>13 / 19</a:t>
             </a:r>
           </a:p>
         </p:txBody>
@@ -4779,7 +7001,7 @@
         <p:spPr>
           <a:xfrm>
             <a:off x="731520" y="1371600"/>
-            <a:ext cx="6858000" cy="4846320"/>
+            <a:ext cx="6949440" cy="4343400"/>
           </a:xfrm>
           <a:prstGeom prst="rect">
             <a:avLst/>
@@ -4794,8 +7016,8 @@
         </p:nvSpPr>
         <p:spPr>
           <a:xfrm>
-            <a:off x="7772400" y="1371600"/>
-            <a:ext cx="3687775" cy="4846320"/>
+            <a:off x="7909560" y="1371600"/>
+            <a:ext cx="3550615" cy="4846320"/>
           </a:xfrm>
           <a:prstGeom prst="roundRect">
             <a:avLst/>
@@ -4824,7 +7046,7 @@
           </a:fontRef>
         </p:style>
         <p:txBody>
-          <a:bodyPr wrap="square" lIns="182880" tIns="182880" rIns="182880" bIns="182880" rtlCol="0" anchor="ctr"/>
+          <a:bodyPr rtlCol="0" anchor="ctr" wrap="square" lIns="201168" tIns="201168" rIns="201168" bIns="201168"/>
           <a:lstStyle/>
           <a:p>
             <a:pPr algn="ctr">
@@ -4836,7 +7058,7 @@
               </a:defRPr>
             </a:pPr>
             <a:r>
-              <a:t>RESEARCH INTELLIGENCE</a:t>
+              <a:t>DASHBOARD 2 ARCHITECTURE</a:t>
             </a:r>
           </a:p>
           <a:p>
@@ -4852,27 +7074,87 @@
               </a:defRPr>
             </a:pPr>
             <a:r>
-              <a:t>• Executive KPI Cards: Research Environment Score (THE standard), Citation Impact Score (normalized), Research Productivity Index (KPI 6), International Research Network Score.</a:t>
-            </a:r>
-            <a:br/>
-            <a:br/>
-            <a:r>
-              <a:t>• Top Research Hubs by Productivity: Ranked bar chart showcasing Harvard (99.87), Stanford (98.20), MIT (97.30), Oxford (95.44), and Cambridge (95.24).</a:t>
-            </a:r>
-            <a:br/>
-            <a:br/>
-            <a:r>
-              <a:t>• Citation Impact vs. Research Score: Scatter plot identifying institutional research ROI—converting moderate research income into high citation influence.</a:t>
-            </a:r>
-            <a:br/>
-            <a:br/>
-            <a:r>
-              <a:t>• International Research Network: Evaluates cross-border collaborative co-authorship scores.</a:t>
-            </a:r>
-            <a:br/>
-            <a:br/>
-            <a:r>
-              <a:t>• Interlinking: Automatically pre-filtered when a user selects an institution on Dashboard 1.</a:t>
+              <a:t>Core Business Purpose:</a:t>
+            </a:r>
+            <a:br/>
+            <a:r>
+              <a:t>Deep-dive evaluation of scholarly research output and citation velocity.</a:t>
+            </a:r>
+          </a:p>
+          <a:p>
+            <a:pPr>
+              <a:spcBef>
+                <a:spcPts val="800"/>
+              </a:spcBef>
+              <a:defRPr sz="850">
+                <a:solidFill>
+                  <a:srgbClr val="CBD5E1"/>
+                </a:solidFill>
+                <a:latin typeface="Segoe UI"/>
+              </a:defRPr>
+            </a:pPr>
+            <a:r>
+              <a:t>Visual Components:</a:t>
+            </a:r>
+            <a:br/>
+            <a:r>
+              <a:t>• Top 15 Research Productivity Index Rankings</a:t>
+            </a:r>
+            <a:br/>
+            <a:r>
+              <a:t>• Citations per Faculty vs. Research Score Scatter Plot</a:t>
+            </a:r>
+            <a:br/>
+            <a:r>
+              <a:t>• International Research Network Collaboration Quadrant</a:t>
+            </a:r>
+            <a:br/>
+            <a:r>
+              <a:t>• Industry Income Metric Benchmarking</a:t>
+            </a:r>
+          </a:p>
+          <a:p>
+            <a:pPr>
+              <a:spcBef>
+                <a:spcPts val="800"/>
+              </a:spcBef>
+              <a:defRPr sz="850">
+                <a:solidFill>
+                  <a:srgbClr val="CBD5E1"/>
+                </a:solidFill>
+                <a:latin typeface="Segoe UI"/>
+              </a:defRPr>
+            </a:pPr>
+            <a:r>
+              <a:t>Interactivity &amp; Filter Actions:</a:t>
+            </a:r>
+            <a:br/>
+            <a:r>
+              <a:t>• University selection from Dashboard 1 highlights institution against global regression trendline.</a:t>
+            </a:r>
+            <a:br/>
+            <a:r>
+              <a:t>• Citations slider isolates high-velocity scholarly hubs.</a:t>
+            </a:r>
+          </a:p>
+          <a:p>
+            <a:pPr>
+              <a:spcBef>
+                <a:spcPts val="800"/>
+              </a:spcBef>
+              <a:defRPr sz="850">
+                <a:solidFill>
+                  <a:srgbClr val="CBD5E1"/>
+                </a:solidFill>
+                <a:latin typeface="Segoe UI"/>
+              </a:defRPr>
+            </a:pPr>
+            <a:r>
+              <a:t>Analytical Finding:</a:t>
+            </a:r>
+            <a:br/>
+            <a:r>
+              <a:t>Normalized citations per faculty reveal elite research density in specialized institutions like Caltech and ETH Zurich.</a:t>
             </a:r>
           </a:p>
         </p:txBody>
@@ -4885,8 +7167,8 @@
 </p:sld>
 </file>
 
-<file path=ppt/slides/slide13.xml><?xml version="1.0" encoding="utf-8"?>
-<p:sld xmlns:a="http://schemas.openxmlformats.org/drawingml/2006/main" xmlns:r="http://schemas.openxmlformats.org/officeDocument/2006/relationships" xmlns:p="http://schemas.openxmlformats.org/presentationml/2006/main">
+<file path=ppt/slides/slide14.xml><?xml version="1.0" encoding="utf-8"?>
+<p:sld xmlns:a="http://schemas.openxmlformats.org/drawingml/2006/main" xmlns:p="http://schemas.openxmlformats.org/presentationml/2006/main" xmlns:r="http://schemas.openxmlformats.org/officeDocument/2006/relationships">
   <p:cSld>
     <p:spTree>
       <p:nvGrpSpPr>
@@ -4894,14 +7176,7 @@
         <p:cNvGrpSpPr/>
         <p:nvPr/>
       </p:nvGrpSpPr>
-      <p:grpSpPr>
-        <a:xfrm>
-          <a:off x="0" y="0"/>
-          <a:ext cx="0" cy="0"/>
-          <a:chOff x="0" y="0"/>
-          <a:chExt cx="0" cy="0"/>
-        </a:xfrm>
-      </p:grpSpPr>
+      <p:grpSpPr/>
       <p:sp>
         <p:nvSpPr>
           <p:cNvPr id="2" name="Rectangle 1"/>
@@ -4942,7 +7217,6 @@
           <a:lstStyle/>
           <a:p>
             <a:pPr algn="ctr"/>
-            <a:endParaRPr/>
           </a:p>
         </p:txBody>
       </p:sp>
@@ -4986,7 +7260,6 @@
           <a:lstStyle/>
           <a:p>
             <a:pPr algn="ctr"/>
-            <a:endParaRPr/>
           </a:p>
         </p:txBody>
       </p:sp>
@@ -5021,7 +7294,7 @@
               </a:defRPr>
             </a:pPr>
             <a:r>
-              <a:t>EDUVISION_DV | HIGHER EDUCATION INTELLIGENCE SYSTEM</a:t>
+              <a:t>MILESTONE 3 / MODULE 6 | TABLEAU BI SUITE</a:t>
             </a:r>
           </a:p>
         </p:txBody>
@@ -5106,7 +7379,7 @@
               </a:defRPr>
             </a:pPr>
             <a:r>
-              <a:t>13 / 18</a:t>
+              <a:t>14 / 19</a:t>
             </a:r>
           </a:p>
         </p:txBody>
@@ -5128,7 +7401,7 @@
         <p:spPr>
           <a:xfrm>
             <a:off x="731520" y="1371600"/>
-            <a:ext cx="6858000" cy="4846320"/>
+            <a:ext cx="6949440" cy="4343400"/>
           </a:xfrm>
           <a:prstGeom prst="rect">
             <a:avLst/>
@@ -5143,8 +7416,8 @@
         </p:nvSpPr>
         <p:spPr>
           <a:xfrm>
-            <a:off x="7772400" y="1371600"/>
-            <a:ext cx="3687775" cy="4846320"/>
+            <a:off x="7909560" y="1371600"/>
+            <a:ext cx="3550615" cy="4846320"/>
           </a:xfrm>
           <a:prstGeom prst="roundRect">
             <a:avLst/>
@@ -5173,7 +7446,7 @@
           </a:fontRef>
         </p:style>
         <p:txBody>
-          <a:bodyPr wrap="square" lIns="182880" tIns="182880" rIns="182880" bIns="182880" rtlCol="0" anchor="ctr"/>
+          <a:bodyPr rtlCol="0" anchor="ctr" wrap="square" lIns="201168" tIns="201168" rIns="201168" bIns="201168"/>
           <a:lstStyle/>
           <a:p>
             <a:pPr algn="ctr">
@@ -5185,7 +7458,7 @@
               </a:defRPr>
             </a:pPr>
             <a:r>
-              <a:t>STUDENT &amp; FACULTY METRICS</a:t>
+              <a:t>DASHBOARD 3 ARCHITECTURE</a:t>
             </a:r>
           </a:p>
           <a:p>
@@ -5201,27 +7474,87 @@
               </a:defRPr>
             </a:pPr>
             <a:r>
-              <a:t>• Executive KPI Cards: Total FTE Students, Faculty-to-Student Ratio (KPI 3), International Student % (KPI 4), Female-to-Male Gender Ratio.</a:t>
-            </a:r>
-            <a:br/>
-            <a:br/>
-            <a:r>
-              <a:t>• International Student % Distribution: Ranked benchmark showing cross-border student share. Highlights Imperial College London leading at 61.0% and Oxford at 42.0%.</a:t>
-            </a:r>
-            <a:br/>
-            <a:br/>
-            <a:r>
-              <a:t>• Students-per-Staff Capacity Benchmark: Evaluates individual mentorship capacity against global mean (10.2:1 top-tier vs 18.7:1 global mean).</a:t>
-            </a:r>
-            <a:br/>
-            <a:br/>
-            <a:r>
-              <a:t>• Gender Diversity Breakdown: Stacked bar chart analyzing gender parity across institutional cohorts.</a:t>
-            </a:r>
-            <a:br/>
-            <a:br/>
-            <a:r>
-              <a:t>• Interlinking: Directly cross-links to national educational benchmarks on Dashboard 4.</a:t>
+              <a:t>Core Business Purpose:</a:t>
+            </a:r>
+            <a:br/>
+            <a:r>
+              <a:t>Analysis of student enrollment demographics, internationalization, and faculty capacity.</a:t>
+            </a:r>
+          </a:p>
+          <a:p>
+            <a:pPr>
+              <a:spcBef>
+                <a:spcPts val="800"/>
+              </a:spcBef>
+              <a:defRPr sz="850">
+                <a:solidFill>
+                  <a:srgbClr val="CBD5E1"/>
+                </a:solidFill>
+                <a:latin typeface="Segoe UI"/>
+              </a:defRPr>
+            </a:pPr>
+            <a:r>
+              <a:t>Visual Components:</a:t>
+            </a:r>
+            <a:br/>
+            <a:r>
+              <a:t>• International Student Percentage Distribution</a:t>
+            </a:r>
+            <a:br/>
+            <a:r>
+              <a:t>• Students-per-Staff Faculty Ratio Benchmark</a:t>
+            </a:r>
+            <a:br/>
+            <a:r>
+              <a:t>• Female-to-Male Student Ratio Dumbbell Chart</a:t>
+            </a:r>
+            <a:br/>
+            <a:r>
+              <a:t>• Total FTE Student Headcount Distribution</a:t>
+            </a:r>
+          </a:p>
+          <a:p>
+            <a:pPr>
+              <a:spcBef>
+                <a:spcPts val="800"/>
+              </a:spcBef>
+              <a:defRPr sz="850">
+                <a:solidFill>
+                  <a:srgbClr val="CBD5E1"/>
+                </a:solidFill>
+                <a:latin typeface="Segoe UI"/>
+              </a:defRPr>
+            </a:pPr>
+            <a:r>
+              <a:t>Interactivity &amp; Filter Actions:</a:t>
+            </a:r>
+            <a:br/>
+            <a:r>
+              <a:t>• Cross-filter by institution size (Small, Medium, Mega).</a:t>
+            </a:r>
+            <a:br/>
+            <a:r>
+              <a:t>• Drill-down from global distribution to individual university mentorship ratio.</a:t>
+            </a:r>
+          </a:p>
+          <a:p>
+            <a:pPr>
+              <a:spcBef>
+                <a:spcPts val="800"/>
+              </a:spcBef>
+              <a:defRPr sz="850">
+                <a:solidFill>
+                  <a:srgbClr val="CBD5E1"/>
+                </a:solidFill>
+                <a:latin typeface="Segoe UI"/>
+              </a:defRPr>
+            </a:pPr>
+            <a:r>
+              <a:t>Analytical Finding:</a:t>
+            </a:r>
+            <a:br/>
+            <a:r>
+              <a:t>UK universities demonstrate the highest international student representation (&gt;50%), while US institutions prioritize low student-to-staff ratios.</a:t>
             </a:r>
           </a:p>
         </p:txBody>
@@ -5234,8 +7567,8 @@
 </p:sld>
 </file>
 
-<file path=ppt/slides/slide14.xml><?xml version="1.0" encoding="utf-8"?>
-<p:sld xmlns:a="http://schemas.openxmlformats.org/drawingml/2006/main" xmlns:r="http://schemas.openxmlformats.org/officeDocument/2006/relationships" xmlns:p="http://schemas.openxmlformats.org/presentationml/2006/main">
+<file path=ppt/slides/slide15.xml><?xml version="1.0" encoding="utf-8"?>
+<p:sld xmlns:a="http://schemas.openxmlformats.org/drawingml/2006/main" xmlns:p="http://schemas.openxmlformats.org/presentationml/2006/main" xmlns:r="http://schemas.openxmlformats.org/officeDocument/2006/relationships">
   <p:cSld>
     <p:spTree>
       <p:nvGrpSpPr>
@@ -5243,14 +7576,7 @@
         <p:cNvGrpSpPr/>
         <p:nvPr/>
       </p:nvGrpSpPr>
-      <p:grpSpPr>
-        <a:xfrm>
-          <a:off x="0" y="0"/>
-          <a:ext cx="0" cy="0"/>
-          <a:chOff x="0" y="0"/>
-          <a:chExt cx="0" cy="0"/>
-        </a:xfrm>
-      </p:grpSpPr>
+      <p:grpSpPr/>
       <p:sp>
         <p:nvSpPr>
           <p:cNvPr id="2" name="Rectangle 1"/>
@@ -5291,7 +7617,6 @@
           <a:lstStyle/>
           <a:p>
             <a:pPr algn="ctr"/>
-            <a:endParaRPr/>
           </a:p>
         </p:txBody>
       </p:sp>
@@ -5335,7 +7660,6 @@
           <a:lstStyle/>
           <a:p>
             <a:pPr algn="ctr"/>
-            <a:endParaRPr/>
           </a:p>
         </p:txBody>
       </p:sp>
@@ -5370,7 +7694,7 @@
               </a:defRPr>
             </a:pPr>
             <a:r>
-              <a:t>EDUVISION_DV | HIGHER EDUCATION INTELLIGENCE SYSTEM</a:t>
+              <a:t>MILESTONE 3 / MODULE 6 | TABLEAU BI SUITE</a:t>
             </a:r>
           </a:p>
         </p:txBody>
@@ -5455,7 +7779,7 @@
               </a:defRPr>
             </a:pPr>
             <a:r>
-              <a:t>14 / 18</a:t>
+              <a:t>15 / 19</a:t>
             </a:r>
           </a:p>
         </p:txBody>
@@ -5477,7 +7801,7 @@
         <p:spPr>
           <a:xfrm>
             <a:off x="731520" y="1371600"/>
-            <a:ext cx="6858000" cy="4846320"/>
+            <a:ext cx="6949440" cy="4343400"/>
           </a:xfrm>
           <a:prstGeom prst="rect">
             <a:avLst/>
@@ -5492,8 +7816,8 @@
         </p:nvSpPr>
         <p:spPr>
           <a:xfrm>
-            <a:off x="7772400" y="1371600"/>
-            <a:ext cx="3687775" cy="4846320"/>
+            <a:off x="7909560" y="1371600"/>
+            <a:ext cx="3550615" cy="4846320"/>
           </a:xfrm>
           <a:prstGeom prst="roundRect">
             <a:avLst/>
@@ -5522,7 +7846,7 @@
           </a:fontRef>
         </p:style>
         <p:txBody>
-          <a:bodyPr wrap="square" lIns="182880" tIns="182880" rIns="182880" bIns="182880" rtlCol="0" anchor="ctr"/>
+          <a:bodyPr rtlCol="0" anchor="ctr" wrap="square" lIns="201168" tIns="201168" rIns="201168" bIns="201168"/>
           <a:lstStyle/>
           <a:p>
             <a:pPr algn="ctr">
@@ -5534,7 +7858,7 @@
               </a:defRPr>
             </a:pPr>
             <a:r>
-              <a:t>MACRO EDUCATION BENCHMARK</a:t>
+              <a:t>DASHBOARD 4 ARCHITECTURE</a:t>
             </a:r>
           </a:p>
           <a:p>
@@ -5550,27 +7874,87 @@
               </a:defRPr>
             </a:pPr>
             <a:r>
-              <a:t>• Executive KPI Cards: National University Count, Average National University Score, Public Education Spend (% of GDP), Gross Tertiary Enrollment Rate.</a:t>
-            </a:r>
-            <a:br/>
-            <a:br/>
-            <a:r>
-              <a:t>• World-Class University Capacity by Nation: Ranked bar chart of top nations (USA: 197, UK: 90, China: 71, Germany: 49, India: 46, Japan: 49).</a:t>
-            </a:r>
-            <a:br/>
-            <a:br/>
-            <a:r>
-              <a:t>• Public Education Spend (% GDP) vs. Performance: Scatter plot evaluating return on public investment: state spending plotted against top-tier university score.</a:t>
-            </a:r>
-            <a:br/>
-            <a:br/>
-            <a:r>
-              <a:t>• Tertiary Enrollment Trajectories (2010–2023): Multi-line historical trend comparison across peer economies.</a:t>
-            </a:r>
-            <a:br/>
-            <a:br/>
-            <a:r>
-              <a:t>• Interlinking: Receives country_id from Dashboards 1, 2, or 3.</a:t>
+              <a:t>Core Business Purpose:</a:t>
+            </a:r>
+            <a:br/>
+            <a:r>
+              <a:t>Macroeconomic evaluation linking national educational expenditure to global university performance.</a:t>
+            </a:r>
+          </a:p>
+          <a:p>
+            <a:pPr>
+              <a:spcBef>
+                <a:spcPts val="800"/>
+              </a:spcBef>
+              <a:defRPr sz="850">
+                <a:solidFill>
+                  <a:srgbClr val="CBD5E1"/>
+                </a:solidFill>
+                <a:latin typeface="Segoe UI"/>
+              </a:defRPr>
+            </a:pPr>
+            <a:r>
+              <a:t>Visual Components:</a:t>
+            </a:r>
+            <a:br/>
+            <a:r>
+              <a:t>• National Higher Education Capacity Bar Chart</a:t>
+            </a:r>
+            <a:br/>
+            <a:r>
+              <a:t>• Public Expenditure on Education (% of GDP) vs. University Score</a:t>
+            </a:r>
+            <a:br/>
+            <a:r>
+              <a:t>• Gross Tertiary School Enrollment Trends (2010–2023)</a:t>
+            </a:r>
+            <a:br/>
+            <a:r>
+              <a:t>• World Bank Country Comparison Matrix</a:t>
+            </a:r>
+          </a:p>
+          <a:p>
+            <a:pPr>
+              <a:spcBef>
+                <a:spcPts val="800"/>
+              </a:spcBef>
+              <a:defRPr sz="850">
+                <a:solidFill>
+                  <a:srgbClr val="CBD5E1"/>
+                </a:solidFill>
+                <a:latin typeface="Segoe UI"/>
+              </a:defRPr>
+            </a:pPr>
+            <a:r>
+              <a:t>Interactivity &amp; Filter Actions:</a:t>
+            </a:r>
+            <a:br/>
+            <a:r>
+              <a:t>• Clicking country on Dashboard 1 filters Dashboard 4 to national profile.</a:t>
+            </a:r>
+            <a:br/>
+            <a:r>
+              <a:t>• Multi-country selector enables side-by-side OECD policy comparisons.</a:t>
+            </a:r>
+          </a:p>
+          <a:p>
+            <a:pPr>
+              <a:spcBef>
+                <a:spcPts val="800"/>
+              </a:spcBef>
+              <a:defRPr sz="850">
+                <a:solidFill>
+                  <a:srgbClr val="CBD5E1"/>
+                </a:solidFill>
+                <a:latin typeface="Segoe UI"/>
+              </a:defRPr>
+            </a:pPr>
+            <a:r>
+              <a:t>Analytical Finding:</a:t>
+            </a:r>
+            <a:br/>
+            <a:r>
+              <a:t>High public spending (&gt;5% GDP) correlates with broad tertiary access, but elite top-50 concentration requires dedicated research funding.</a:t>
             </a:r>
           </a:p>
         </p:txBody>
@@ -5583,8 +7967,8 @@
 </p:sld>
 </file>
 
-<file path=ppt/slides/slide15.xml><?xml version="1.0" encoding="utf-8"?>
-<p:sld xmlns:a="http://schemas.openxmlformats.org/drawingml/2006/main" xmlns:r="http://schemas.openxmlformats.org/officeDocument/2006/relationships" xmlns:p="http://schemas.openxmlformats.org/presentationml/2006/main">
+<file path=ppt/slides/slide16.xml><?xml version="1.0" encoding="utf-8"?>
+<p:sld xmlns:a="http://schemas.openxmlformats.org/drawingml/2006/main" xmlns:p="http://schemas.openxmlformats.org/presentationml/2006/main" xmlns:r="http://schemas.openxmlformats.org/officeDocument/2006/relationships">
   <p:cSld>
     <p:spTree>
       <p:nvGrpSpPr>
@@ -5592,14 +7976,7 @@
         <p:cNvGrpSpPr/>
         <p:nvPr/>
       </p:nvGrpSpPr>
-      <p:grpSpPr>
-        <a:xfrm>
-          <a:off x="0" y="0"/>
-          <a:ext cx="0" cy="0"/>
-          <a:chOff x="0" y="0"/>
-          <a:chExt cx="0" cy="0"/>
-        </a:xfrm>
-      </p:grpSpPr>
+      <p:grpSpPr/>
       <p:sp>
         <p:nvSpPr>
           <p:cNvPr id="2" name="Rectangle 1"/>
@@ -5640,7 +8017,6 @@
           <a:lstStyle/>
           <a:p>
             <a:pPr algn="ctr"/>
-            <a:endParaRPr/>
           </a:p>
         </p:txBody>
       </p:sp>
@@ -5684,7 +8060,6 @@
           <a:lstStyle/>
           <a:p>
             <a:pPr algn="ctr"/>
-            <a:endParaRPr/>
           </a:p>
         </p:txBody>
       </p:sp>
@@ -5719,7 +8094,7 @@
               </a:defRPr>
             </a:pPr>
             <a:r>
-              <a:t>EDUVISION_DV | HIGHER EDUCATION INTELLIGENCE SYSTEM</a:t>
+              <a:t>MILESTONE 3 / MODULE 6 | CROSS-DASHBOARD INTERACTIVITY</a:t>
             </a:r>
           </a:p>
         </p:txBody>
@@ -5804,7 +8179,7 @@
               </a:defRPr>
             </a:pPr>
             <a:r>
-              <a:t>15 / 18</a:t>
+              <a:t>16 / 19</a:t>
             </a:r>
           </a:p>
         </p:txBody>
@@ -5847,7 +8222,7 @@
           </a:fontRef>
         </p:style>
         <p:txBody>
-          <a:bodyPr wrap="square" lIns="182880" tIns="182880" rIns="182880" bIns="182880" rtlCol="0" anchor="ctr"/>
+          <a:bodyPr rtlCol="0" anchor="ctr" wrap="square" lIns="201168" tIns="201168" rIns="201168" bIns="201168"/>
           <a:lstStyle/>
           <a:p>
             <a:pPr algn="ctr">
@@ -5859,7 +8234,7 @@
               </a:defRPr>
             </a:pPr>
             <a:r>
-              <a:t>STEP 1: OVERVIEW DISCOVERY</a:t>
+              <a:t>TIER 1: MACRO DISCOVERY</a:t>
             </a:r>
           </a:p>
           <a:p>
@@ -5875,12 +8250,20 @@
               </a:defRPr>
             </a:pPr>
             <a:r>
-              <a:t>User opens Dashboard 1 (University Overview) and selects 'University of Oxford' (Rank #3, Score 96.9).</a:t>
-            </a:r>
-            <a:br/>
-            <a:br/>
-            <a:r>
-              <a:t>Tableau Filter Action triggered on mark selection, passing university_id = 'U0003'. Top KPI cards immediately reflect Oxford's scorecard.</a:t>
+              <a:t>Dashboard 1: University Overview</a:t>
+            </a:r>
+            <a:br/>
+            <a:br/>
+            <a:r>
+              <a:t>• User selects region or country (e.g. 'United Kingdom').</a:t>
+            </a:r>
+            <a:br/>
+            <a:r>
+              <a:t>• Scorecard displays national averages and top institutions.</a:t>
+            </a:r>
+            <a:br/>
+            <a:r>
+              <a:t>• User clicks on a specific university (e.g. 'Imperial College London').</a:t>
             </a:r>
           </a:p>
         </p:txBody>
@@ -5923,7 +8306,7 @@
           </a:fontRef>
         </p:style>
         <p:txBody>
-          <a:bodyPr wrap="square" lIns="182880" tIns="182880" rIns="182880" bIns="182880" rtlCol="0" anchor="ctr"/>
+          <a:bodyPr rtlCol="0" anchor="ctr" wrap="square" lIns="201168" tIns="201168" rIns="201168" bIns="201168"/>
           <a:lstStyle/>
           <a:p>
             <a:pPr algn="ctr">
@@ -5935,7 +8318,7 @@
               </a:defRPr>
             </a:pPr>
             <a:r>
-              <a:t>STEP 2: RESEARCH DRILL-DOWN</a:t>
+              <a:t>TIER 2: RESEARCH DEEP DIVE</a:t>
             </a:r>
           </a:p>
           <a:p>
@@ -5951,12 +8334,20 @@
               </a:defRPr>
             </a:pPr>
             <a:r>
-              <a:t>User clicks 'Research Analytics →' on persistent top navigation bar.</a:t>
-            </a:r>
-            <a:br/>
-            <a:br/>
-            <a:r>
-              <a:t>Dashboard 2 opens pre-filtered for Oxford, revealing Research Productivity Index of 95.44, Citations of 84.8, and International Collaboration of 97.8.</a:t>
+              <a:t>Dashboard 2: Research Analytics</a:t>
+            </a:r>
+            <a:br/>
+            <a:br/>
+            <a:r>
+              <a:t>• Filter action automatically passes university_id.</a:t>
+            </a:r>
+            <a:br/>
+            <a:r>
+              <a:t>• Highlights Imperial's 98.3 citations score on the regression line.</a:t>
+            </a:r>
+            <a:br/>
+            <a:r>
+              <a:t>• Analyzes international collaboration networks and faculty impact.</a:t>
             </a:r>
           </a:p>
         </p:txBody>
@@ -5999,7 +8390,7 @@
           </a:fontRef>
         </p:style>
         <p:txBody>
-          <a:bodyPr wrap="square" lIns="182880" tIns="182880" rIns="182880" bIns="182880" rtlCol="0" anchor="ctr"/>
+          <a:bodyPr rtlCol="0" anchor="ctr" wrap="square" lIns="201168" tIns="201168" rIns="201168" bIns="201168"/>
           <a:lstStyle/>
           <a:p>
             <a:pPr algn="ctr">
@@ -6011,7 +8402,7 @@
               </a:defRPr>
             </a:pPr>
             <a:r>
-              <a:t>STEP 3: STUDENT DEMOGRAPHICS</a:t>
+              <a:t>TIER 3: CAMPUS EXPERIENCE</a:t>
             </a:r>
           </a:p>
           <a:p>
@@ -6027,12 +8418,20 @@
               </a:defRPr>
             </a:pPr>
             <a:r>
-              <a:t>User transitions to Dashboard 3 (Student Analytics).</a:t>
-            </a:r>
-            <a:br/>
-            <a:br/>
-            <a:r>
-              <a:t>Oxford's demographic profile displays a student-to-staff ratio of 10.6:1 (high mentorship), 20,700 FTE students, and 42.0% international students.</a:t>
+              <a:t>Dashboard 3: Student Analytics</a:t>
+            </a:r>
+            <a:br/>
+            <a:br/>
+            <a:r>
+              <a:t>• Evaluates mentorship capacity: Imperial's 11.4:1 student-to-staff ratio.</a:t>
+            </a:r>
+            <a:br/>
+            <a:r>
+              <a:t>• Examines student diversity: 61.0% international enrollment.</a:t>
+            </a:r>
+            <a:br/>
+            <a:r>
+              <a:t>• Assesses gender balance across student body.</a:t>
             </a:r>
           </a:p>
         </p:txBody>
@@ -6075,7 +8474,7 @@
           </a:fontRef>
         </p:style>
         <p:txBody>
-          <a:bodyPr wrap="square" lIns="182880" tIns="182880" rIns="182880" bIns="182880" rtlCol="0" anchor="ctr"/>
+          <a:bodyPr rtlCol="0" anchor="ctr" wrap="square" lIns="201168" tIns="201168" rIns="201168" bIns="201168"/>
           <a:lstStyle/>
           <a:p>
             <a:pPr algn="ctr">
@@ -6087,7 +8486,7 @@
               </a:defRPr>
             </a:pPr>
             <a:r>
-              <a:t>STEP 4: NATIONAL POLICY CONTEXT</a:t>
+              <a:t>TIER 4: POLICY BENCHMARK</a:t>
             </a:r>
           </a:p>
           <a:p>
@@ -6103,12 +8502,20 @@
               </a:defRPr>
             </a:pPr>
             <a:r>
-              <a:t>User clicks country link ('United Kingdom') or navigates to Dashboard 4.</a:t>
-            </a:r>
-            <a:br/>
-            <a:br/>
-            <a:r>
-              <a:t>Dashboard 4 displays the UK's macroeconomic education benchmarks: 90 ranked world-class universities, 5.2% GDP education spend, and tertiary enrollment trends.</a:t>
+              <a:t>Dashboard 4: Country Comparison</a:t>
+            </a:r>
+            <a:br/>
+            <a:br/>
+            <a:r>
+              <a:t>• Cross-filters to the United Kingdom national profile.</a:t>
+            </a:r>
+            <a:br/>
+            <a:r>
+              <a:t>• Evaluates UK government education spending (% of GDP).</a:t>
+            </a:r>
+            <a:br/>
+            <a:r>
+              <a:t>• Compares UK tertiary gross enrollment trajectory against European peers.</a:t>
             </a:r>
           </a:p>
         </p:txBody>
@@ -6121,8 +8528,8 @@
 </p:sld>
 </file>
 
-<file path=ppt/slides/slide16.xml><?xml version="1.0" encoding="utf-8"?>
-<p:sld xmlns:a="http://schemas.openxmlformats.org/drawingml/2006/main" xmlns:r="http://schemas.openxmlformats.org/officeDocument/2006/relationships" xmlns:p="http://schemas.openxmlformats.org/presentationml/2006/main">
+<file path=ppt/slides/slide17.xml><?xml version="1.0" encoding="utf-8"?>
+<p:sld xmlns:a="http://schemas.openxmlformats.org/drawingml/2006/main" xmlns:p="http://schemas.openxmlformats.org/presentationml/2006/main" xmlns:r="http://schemas.openxmlformats.org/officeDocument/2006/relationships">
   <p:cSld>
     <p:spTree>
       <p:nvGrpSpPr>
@@ -6130,14 +8537,7 @@
         <p:cNvGrpSpPr/>
         <p:nvPr/>
       </p:nvGrpSpPr>
-      <p:grpSpPr>
-        <a:xfrm>
-          <a:off x="0" y="0"/>
-          <a:ext cx="0" cy="0"/>
-          <a:chOff x="0" y="0"/>
-          <a:chExt cx="0" cy="0"/>
-        </a:xfrm>
-      </p:grpSpPr>
+      <p:grpSpPr/>
       <p:sp>
         <p:nvSpPr>
           <p:cNvPr id="2" name="Rectangle 1"/>
@@ -6178,7 +8578,6 @@
           <a:lstStyle/>
           <a:p>
             <a:pPr algn="ctr"/>
-            <a:endParaRPr/>
           </a:p>
         </p:txBody>
       </p:sp>
@@ -6222,7 +8621,6 @@
           <a:lstStyle/>
           <a:p>
             <a:pPr algn="ctr"/>
-            <a:endParaRPr/>
           </a:p>
         </p:txBody>
       </p:sp>
@@ -6257,7 +8655,7 @@
               </a:defRPr>
             </a:pPr>
             <a:r>
-              <a:t>EDUVISION_DV | HIGHER EDUCATION INTELLIGENCE SYSTEM</a:t>
+              <a:t>MILESTONE 4 / MODULE 7 | AUTOMATED TESTING &amp; VALIDATION</a:t>
             </a:r>
           </a:p>
         </p:txBody>
@@ -6342,7 +8740,7 @@
               </a:defRPr>
             </a:pPr>
             <a:r>
-              <a:t>16 / 18</a:t>
+              <a:t>17 / 19</a:t>
             </a:r>
           </a:p>
         </p:txBody>
@@ -6366,41 +8764,11 @@
                 <a:tableStyleId>{5C22544A-7EE6-4342-B048-85BDC9FD1C3A}</a:tableStyleId>
               </a:tblPr>
               <a:tblGrid>
-                <a:gridCol w="1097280">
-                  <a:extLst>
-                    <a:ext uri="{9D8B030D-6E8A-4147-A177-3AD203B41FA5}">
-                      <a16:colId xmlns:a16="http://schemas.microsoft.com/office/drawing/2014/main" val="20000"/>
-                    </a:ext>
-                  </a:extLst>
-                </a:gridCol>
-                <a:gridCol w="2286000">
-                  <a:extLst>
-                    <a:ext uri="{9D8B030D-6E8A-4147-A177-3AD203B41FA5}">
-                      <a16:colId xmlns:a16="http://schemas.microsoft.com/office/drawing/2014/main" val="20001"/>
-                    </a:ext>
-                  </a:extLst>
-                </a:gridCol>
-                <a:gridCol w="3200400">
-                  <a:extLst>
-                    <a:ext uri="{9D8B030D-6E8A-4147-A177-3AD203B41FA5}">
-                      <a16:colId xmlns:a16="http://schemas.microsoft.com/office/drawing/2014/main" val="20002"/>
-                    </a:ext>
-                  </a:extLst>
-                </a:gridCol>
-                <a:gridCol w="2499055">
-                  <a:extLst>
-                    <a:ext uri="{9D8B030D-6E8A-4147-A177-3AD203B41FA5}">
-                      <a16:colId xmlns:a16="http://schemas.microsoft.com/office/drawing/2014/main" val="20003"/>
-                    </a:ext>
-                  </a:extLst>
-                </a:gridCol>
-                <a:gridCol w="1645920">
-                  <a:extLst>
-                    <a:ext uri="{9D8B030D-6E8A-4147-A177-3AD203B41FA5}">
-                      <a16:colId xmlns:a16="http://schemas.microsoft.com/office/drawing/2014/main" val="20004"/>
-                    </a:ext>
-                  </a:extLst>
-                </a:gridCol>
+                <a:gridCol w="1097280"/>
+                <a:gridCol w="2286000"/>
+                <a:gridCol w="3200400"/>
+                <a:gridCol w="2499055"/>
+                <a:gridCol w="1645920"/>
               </a:tblGrid>
               <a:tr h="522514">
                 <a:tc>
@@ -6523,11 +8891,6 @@
                     </a:solidFill>
                   </a:tcPr>
                 </a:tc>
-                <a:extLst>
-                  <a:ext uri="{0D108BD9-81ED-4DB2-BD59-A6C34878D82A}">
-                    <a16:rowId xmlns:a16="http://schemas.microsoft.com/office/drawing/2014/main" val="10000"/>
-                  </a:ext>
-                </a:extLst>
               </a:tr>
               <a:tr h="522514">
                 <a:tc>
@@ -6592,7 +8955,7 @@
                         </a:defRPr>
                       </a:pPr>
                       <a:r>
-                        <a:t>dim_university.university_id uniqueness</a:t>
+                        <a:t>dim_university.university_id in Milestone 1 / Module 2</a:t>
                       </a:r>
                     </a:p>
                   </a:txBody>
@@ -6650,11 +9013,6 @@
                     </a:solidFill>
                   </a:tcPr>
                 </a:tc>
-                <a:extLst>
-                  <a:ext uri="{0D108BD9-81ED-4DB2-BD59-A6C34878D82A}">
-                    <a16:rowId xmlns:a16="http://schemas.microsoft.com/office/drawing/2014/main" val="10001"/>
-                  </a:ext>
-                </a:extLst>
               </a:tr>
               <a:tr h="522514">
                 <a:tc>
@@ -6719,7 +9077,7 @@
                         </a:defRPr>
                       </a:pPr>
                       <a:r>
-                        <a:t>dim_country.country_id uniqueness</a:t>
+                        <a:t>dim_country.country_id in Milestone 1 / Module 2</a:t>
                       </a:r>
                     </a:p>
                   </a:txBody>
@@ -6777,11 +9135,6 @@
                     </a:solidFill>
                   </a:tcPr>
                 </a:tc>
-                <a:extLst>
-                  <a:ext uri="{0D108BD9-81ED-4DB2-BD59-A6C34878D82A}">
-                    <a16:rowId xmlns:a16="http://schemas.microsoft.com/office/drawing/2014/main" val="10002"/>
-                  </a:ext>
-                </a:extLst>
               </a:tr>
               <a:tr h="522514">
                 <a:tc>
@@ -6904,11 +9257,6 @@
                     </a:solidFill>
                   </a:tcPr>
                 </a:tc>
-                <a:extLst>
-                  <a:ext uri="{0D108BD9-81ED-4DB2-BD59-A6C34878D82A}">
-                    <a16:rowId xmlns:a16="http://schemas.microsoft.com/office/drawing/2014/main" val="10003"/>
-                  </a:ext>
-                </a:extLst>
               </a:tr>
               <a:tr h="522514">
                 <a:tc>
@@ -7031,11 +9379,6 @@
                     </a:solidFill>
                   </a:tcPr>
                 </a:tc>
-                <a:extLst>
-                  <a:ext uri="{0D108BD9-81ED-4DB2-BD59-A6C34878D82A}">
-                    <a16:rowId xmlns:a16="http://schemas.microsoft.com/office/drawing/2014/main" val="10004"/>
-                  </a:ext>
-                </a:extLst>
               </a:tr>
               <a:tr h="522514">
                 <a:tc>
@@ -7158,11 +9501,6 @@
                     </a:solidFill>
                   </a:tcPr>
                 </a:tc>
-                <a:extLst>
-                  <a:ext uri="{0D108BD9-81ED-4DB2-BD59-A6C34878D82A}">
-                    <a16:rowId xmlns:a16="http://schemas.microsoft.com/office/drawing/2014/main" val="10005"/>
-                  </a:ext>
-                </a:extLst>
               </a:tr>
               <a:tr h="522516">
                 <a:tc>
@@ -7285,11 +9623,6 @@
                     </a:solidFill>
                   </a:tcPr>
                 </a:tc>
-                <a:extLst>
-                  <a:ext uri="{0D108BD9-81ED-4DB2-BD59-A6C34878D82A}">
-                    <a16:rowId xmlns:a16="http://schemas.microsoft.com/office/drawing/2014/main" val="10006"/>
-                  </a:ext>
-                </a:extLst>
               </a:tr>
             </a:tbl>
           </a:graphicData>
@@ -7333,7 +9666,7 @@
           </a:fontRef>
         </p:style>
         <p:txBody>
-          <a:bodyPr wrap="square" lIns="137160" tIns="137160" rIns="137160" bIns="137160" rtlCol="0" anchor="ctr"/>
+          <a:bodyPr rtlCol="0" anchor="ctr" wrap="square" lIns="137160" tIns="137160" rIns="137160" bIns="137160"/>
           <a:lstStyle/>
           <a:p>
             <a:pPr algn="ctr">
@@ -7345,7 +9678,7 @@
               </a:defRPr>
             </a:pPr>
             <a:r>
-              <a:t>OFFICIAL QUALITY ASSURANCE SIGN-OFF: 100% AUDIT PASS RATE</a:t>
+              <a:t>OFFICIAL QUALITY ASSURANCE SIGN-OFF: 100% AUDIT PASS RATE (MILESTONE 4 / MODULE 7)</a:t>
             </a:r>
           </a:p>
           <a:p>
@@ -7378,8 +9711,8 @@
 </p:sld>
 </file>
 
-<file path=ppt/slides/slide17.xml><?xml version="1.0" encoding="utf-8"?>
-<p:sld xmlns:a="http://schemas.openxmlformats.org/drawingml/2006/main" xmlns:r="http://schemas.openxmlformats.org/officeDocument/2006/relationships" xmlns:p="http://schemas.openxmlformats.org/presentationml/2006/main">
+<file path=ppt/slides/slide18.xml><?xml version="1.0" encoding="utf-8"?>
+<p:sld xmlns:a="http://schemas.openxmlformats.org/drawingml/2006/main" xmlns:p="http://schemas.openxmlformats.org/presentationml/2006/main" xmlns:r="http://schemas.openxmlformats.org/officeDocument/2006/relationships">
   <p:cSld>
     <p:spTree>
       <p:nvGrpSpPr>
@@ -7387,14 +9720,7 @@
         <p:cNvGrpSpPr/>
         <p:nvPr/>
       </p:nvGrpSpPr>
-      <p:grpSpPr>
-        <a:xfrm>
-          <a:off x="0" y="0"/>
-          <a:ext cx="0" cy="0"/>
-          <a:chOff x="0" y="0"/>
-          <a:chExt cx="0" cy="0"/>
-        </a:xfrm>
-      </p:grpSpPr>
+      <p:grpSpPr/>
       <p:sp>
         <p:nvSpPr>
           <p:cNvPr id="2" name="Rectangle 1"/>
@@ -7435,7 +9761,6 @@
           <a:lstStyle/>
           <a:p>
             <a:pPr algn="ctr"/>
-            <a:endParaRPr/>
           </a:p>
         </p:txBody>
       </p:sp>
@@ -7479,7 +9804,6 @@
           <a:lstStyle/>
           <a:p>
             <a:pPr algn="ctr"/>
-            <a:endParaRPr/>
           </a:p>
         </p:txBody>
       </p:sp>
@@ -7514,7 +9838,7 @@
               </a:defRPr>
             </a:pPr>
             <a:r>
-              <a:t>EDUVISION_DV | HIGHER EDUCATION INTELLIGENCE SYSTEM</a:t>
+              <a:t>MILESTONE 4 / MODULE 8 | RESEARCH FINDINGS &amp; INSIGHTS</a:t>
             </a:r>
           </a:p>
         </p:txBody>
@@ -7599,7 +9923,7 @@
               </a:defRPr>
             </a:pPr>
             <a:r>
-              <a:t>17 / 18</a:t>
+              <a:t>18 / 19</a:t>
             </a:r>
           </a:p>
         </p:txBody>
@@ -7642,7 +9966,7 @@
           </a:fontRef>
         </p:style>
         <p:txBody>
-          <a:bodyPr wrap="square" lIns="182880" tIns="182880" rIns="182880" bIns="182880" rtlCol="0" anchor="ctr"/>
+          <a:bodyPr rtlCol="0" anchor="ctr" wrap="square" lIns="182880" tIns="182880" rIns="182880" bIns="182880"/>
           <a:lstStyle/>
           <a:p>
             <a:pPr algn="ctr">
@@ -7717,7 +10041,7 @@
           </a:fontRef>
         </p:style>
         <p:txBody>
-          <a:bodyPr wrap="square" lIns="182880" tIns="182880" rIns="182880" bIns="182880" rtlCol="0" anchor="ctr"/>
+          <a:bodyPr rtlCol="0" anchor="ctr" wrap="square" lIns="182880" tIns="182880" rIns="182880" bIns="182880"/>
           <a:lstStyle/>
           <a:p>
             <a:pPr algn="ctr">
@@ -7792,7 +10116,7 @@
           </a:fontRef>
         </p:style>
         <p:txBody>
-          <a:bodyPr wrap="square" lIns="182880" tIns="182880" rIns="182880" bIns="182880" rtlCol="0" anchor="ctr"/>
+          <a:bodyPr rtlCol="0" anchor="ctr" wrap="square" lIns="182880" tIns="182880" rIns="182880" bIns="182880"/>
           <a:lstStyle/>
           <a:p>
             <a:pPr algn="ctr">
@@ -7867,7 +10191,7 @@
           </a:fontRef>
         </p:style>
         <p:txBody>
-          <a:bodyPr wrap="square" lIns="182880" tIns="182880" rIns="182880" bIns="182880" rtlCol="0" anchor="ctr"/>
+          <a:bodyPr rtlCol="0" anchor="ctr" wrap="square" lIns="182880" tIns="182880" rIns="182880" bIns="182880"/>
           <a:lstStyle/>
           <a:p>
             <a:pPr algn="ctr">
@@ -7912,8 +10236,8 @@
 </p:sld>
 </file>
 
-<file path=ppt/slides/slide18.xml><?xml version="1.0" encoding="utf-8"?>
-<p:sld xmlns:a="http://schemas.openxmlformats.org/drawingml/2006/main" xmlns:r="http://schemas.openxmlformats.org/officeDocument/2006/relationships" xmlns:p="http://schemas.openxmlformats.org/presentationml/2006/main">
+<file path=ppt/slides/slide19.xml><?xml version="1.0" encoding="utf-8"?>
+<p:sld xmlns:a="http://schemas.openxmlformats.org/drawingml/2006/main" xmlns:p="http://schemas.openxmlformats.org/presentationml/2006/main" xmlns:r="http://schemas.openxmlformats.org/officeDocument/2006/relationships">
   <p:cSld>
     <p:spTree>
       <p:nvGrpSpPr>
@@ -7921,14 +10245,7 @@
         <p:cNvGrpSpPr/>
         <p:nvPr/>
       </p:nvGrpSpPr>
-      <p:grpSpPr>
-        <a:xfrm>
-          <a:off x="0" y="0"/>
-          <a:ext cx="0" cy="0"/>
-          <a:chOff x="0" y="0"/>
-          <a:chExt cx="0" cy="0"/>
-        </a:xfrm>
-      </p:grpSpPr>
+      <p:grpSpPr/>
       <p:sp>
         <p:nvSpPr>
           <p:cNvPr id="2" name="Rectangle 1"/>
@@ -7969,7 +10286,6 @@
           <a:lstStyle/>
           <a:p>
             <a:pPr algn="ctr"/>
-            <a:endParaRPr/>
           </a:p>
         </p:txBody>
       </p:sp>
@@ -8013,7 +10329,6 @@
           <a:lstStyle/>
           <a:p>
             <a:pPr algn="ctr"/>
-            <a:endParaRPr/>
           </a:p>
         </p:txBody>
       </p:sp>
@@ -8048,7 +10363,7 @@
               </a:defRPr>
             </a:pPr>
             <a:r>
-              <a:t>EDUVISION_DV | HIGHER EDUCATION INTELLIGENCE SYSTEM</a:t>
+              <a:t>MILESTONE 4 / MODULE 8 | PROJECT CLOSEOUT &amp; FUTURE SCOPE</a:t>
             </a:r>
           </a:p>
         </p:txBody>
@@ -8133,7 +10448,7 @@
               </a:defRPr>
             </a:pPr>
             <a:r>
-              <a:t>18 / 18</a:t>
+              <a:t>19 / 19</a:t>
             </a:r>
           </a:p>
         </p:txBody>
@@ -8176,7 +10491,7 @@
           </a:fontRef>
         </p:style>
         <p:txBody>
-          <a:bodyPr wrap="square" lIns="228600" tIns="228600" rIns="228600" bIns="228600" rtlCol="0" anchor="ctr"/>
+          <a:bodyPr rtlCol="0" anchor="ctr" wrap="square" lIns="228600" tIns="228600" rIns="228600" bIns="228600"/>
           <a:lstStyle/>
           <a:p>
             <a:pPr algn="ctr">
@@ -8204,7 +10519,7 @@
               </a:defRPr>
             </a:pPr>
             <a:r>
-              <a:t>• Deterministic Entity Normalization: Solved severe join mismatches through regex parenthetical acronym stripping, avoiding dangerous row-fallback indexing.</a:t>
+              <a:t>• Deterministic Entity Normalization: Solved severe join mismatches through regex parenthetical acronym stripping in Milestone 1 / Module 2.</a:t>
             </a:r>
             <a:br/>
             <a:br/>
@@ -8214,12 +10529,12 @@
             <a:br/>
             <a:br/>
             <a:r>
-              <a:t>• Principles of Ethical KPI Formulation: Never confused scores with actual ratios/percentages; preserved statistical authenticity by refusing blind zero-imputation.</a:t>
-            </a:r>
-            <a:br/>
-            <a:br/>
-            <a:r>
-              <a:t>• Enterprise Tableau UX: Built cohesive, multi-dashboard interlinking with persistent parameter and filter action workflows.</a:t>
+              <a:t>• Principles of Ethical KPI Formulation: Never confused scores with actual ratios/percentages; preserved statistical authenticity by refusing blind zero-imputation in Milestone 2 / Module 3.</a:t>
+            </a:r>
+            <a:br/>
+            <a:br/>
+            <a:r>
+              <a:t>• Enterprise Tableau UX: Built cohesive, multi-dashboard interlinking with persistent parameter and filter action workflows in Milestone 3 / Modules 5 &amp; 6.</a:t>
             </a:r>
           </a:p>
         </p:txBody>
@@ -8262,7 +10577,7 @@
           </a:fontRef>
         </p:style>
         <p:txBody>
-          <a:bodyPr wrap="square" lIns="228600" tIns="228600" rIns="228600" bIns="228600" rtlCol="0" anchor="ctr"/>
+          <a:bodyPr rtlCol="0" anchor="ctr" wrap="square" lIns="228600" tIns="228600" rIns="228600" bIns="228600"/>
           <a:lstStyle/>
           <a:p>
             <a:pPr algn="ctr">
@@ -8348,7 +10663,7 @@
           </a:fontRef>
         </p:style>
         <p:txBody>
-          <a:bodyPr wrap="square" lIns="182880" tIns="182880" rIns="182880" bIns="182880" rtlCol="0" anchor="ctr"/>
+          <a:bodyPr rtlCol="0" anchor="ctr" wrap="square" lIns="182880" tIns="182880" rIns="182880" bIns="182880"/>
           <a:lstStyle/>
           <a:p>
             <a:pPr algn="ctr">
@@ -8360,8 +10675,7 @@
               </a:defRPr>
             </a:pPr>
             <a:r>
-              <a:rPr dirty="0"/>
-              <a:t>THANK YOU </a:t>
+              <a:t>THANK YOU | QUESTIONS &amp; DISCUSSION</a:t>
             </a:r>
           </a:p>
           <a:p>
@@ -8377,14 +10691,8 @@
               </a:defRPr>
             </a:pPr>
             <a:r>
-              <a:rPr dirty="0"/>
-              <a:t>Author: Sujay S | Infosys Springboard Internship 7.0 | Domain: Higher Education Analytics &amp; BI | </a:t>
-            </a:r>
-            <a:r>
-              <a:rPr dirty="0" err="1"/>
-              <a:t>EduVision_DV</a:t>
-            </a:r>
-            <a:endParaRPr dirty="0"/>
+              <a:t>Author: Sujay S | Infosys Springboard Internship 7.0 | Domain: Higher Education Analytics &amp; BI | EduVision_DV</a:t>
+            </a:r>
           </a:p>
         </p:txBody>
       </p:sp>
@@ -8397,7 +10705,7 @@
 </file>
 
 <file path=ppt/slides/slide2.xml><?xml version="1.0" encoding="utf-8"?>
-<p:sld xmlns:a="http://schemas.openxmlformats.org/drawingml/2006/main" xmlns:r="http://schemas.openxmlformats.org/officeDocument/2006/relationships" xmlns:p="http://schemas.openxmlformats.org/presentationml/2006/main">
+<p:sld xmlns:a="http://schemas.openxmlformats.org/drawingml/2006/main" xmlns:p="http://schemas.openxmlformats.org/presentationml/2006/main" xmlns:r="http://schemas.openxmlformats.org/officeDocument/2006/relationships">
   <p:cSld>
     <p:spTree>
       <p:nvGrpSpPr>
@@ -8405,14 +10713,7 @@
         <p:cNvGrpSpPr/>
         <p:nvPr/>
       </p:nvGrpSpPr>
-      <p:grpSpPr>
-        <a:xfrm>
-          <a:off x="0" y="0"/>
-          <a:ext cx="0" cy="0"/>
-          <a:chOff x="0" y="0"/>
-          <a:chExt cx="0" cy="0"/>
-        </a:xfrm>
-      </p:grpSpPr>
+      <p:grpSpPr/>
       <p:sp>
         <p:nvSpPr>
           <p:cNvPr id="2" name="Rectangle 1"/>
@@ -8453,7 +10754,6 @@
           <a:lstStyle/>
           <a:p>
             <a:pPr algn="ctr"/>
-            <a:endParaRPr/>
           </a:p>
         </p:txBody>
       </p:sp>
@@ -8497,7 +10797,6 @@
           <a:lstStyle/>
           <a:p>
             <a:pPr algn="ctr"/>
-            <a:endParaRPr/>
           </a:p>
         </p:txBody>
       </p:sp>
@@ -8532,7 +10831,7 @@
               </a:defRPr>
             </a:pPr>
             <a:r>
-              <a:t>EDUVISION_DV | HIGHER EDUCATION INTELLIGENCE SYSTEM</a:t>
+              <a:t>PROJECT OVERVIEW &amp; CORE OUTCOMES</a:t>
             </a:r>
           </a:p>
         </p:txBody>
@@ -8617,7 +10916,7 @@
               </a:defRPr>
             </a:pPr>
             <a:r>
-              <a:t>2 / 18</a:t>
+              <a:t>2 / 19</a:t>
             </a:r>
           </a:p>
         </p:txBody>
@@ -8660,7 +10959,7 @@
           </a:fontRef>
         </p:style>
         <p:txBody>
-          <a:bodyPr wrap="square" rtlCol="0" anchor="ctr"/>
+          <a:bodyPr rtlCol="0" anchor="ctr" wrap="square"/>
           <a:lstStyle/>
           <a:p>
             <a:pPr algn="ctr">
@@ -8744,7 +11043,7 @@
           </a:fontRef>
         </p:style>
         <p:txBody>
-          <a:bodyPr wrap="square" rtlCol="0" anchor="ctr"/>
+          <a:bodyPr rtlCol="0" anchor="ctr" wrap="square"/>
           <a:lstStyle/>
           <a:p>
             <a:pPr algn="ctr">
@@ -8756,7 +11055,7 @@
               </a:defRPr>
             </a:pPr>
             <a:r>
-              <a:t>4</a:t>
+              <a:t>4 / 8</a:t>
             </a:r>
           </a:p>
           <a:p>
@@ -8769,7 +11068,7 @@
               </a:defRPr>
             </a:pPr>
             <a:r>
-              <a:t>Interlinked Dashboards</a:t>
+              <a:t>Milestones &amp; Modules</a:t>
             </a:r>
           </a:p>
           <a:p>
@@ -8785,7 +11084,7 @@
               </a:defRPr>
             </a:pPr>
             <a:r>
-              <a:t>Seamless filter actions passing university_id &amp; country_id</a:t>
+              <a:t>Structured strictly per official specification guidelines</a:t>
             </a:r>
           </a:p>
         </p:txBody>
@@ -8828,7 +11127,7 @@
           </a:fontRef>
         </p:style>
         <p:txBody>
-          <a:bodyPr wrap="square" rtlCol="0" anchor="ctr"/>
+          <a:bodyPr rtlCol="0" anchor="ctr" wrap="square"/>
           <a:lstStyle/>
           <a:p>
             <a:pPr algn="ctr">
@@ -8912,7 +11211,7 @@
           </a:fontRef>
         </p:style>
         <p:txBody>
-          <a:bodyPr wrap="square" rtlCol="0" anchor="ctr"/>
+          <a:bodyPr rtlCol="0" anchor="ctr" wrap="square"/>
           <a:lstStyle/>
           <a:p>
             <a:pPr algn="ctr">
@@ -8996,7 +11295,7 @@
           </a:fontRef>
         </p:style>
         <p:txBody>
-          <a:bodyPr wrap="square" lIns="228600" tIns="228600" rIns="228600" bIns="228600" rtlCol="0" anchor="ctr"/>
+          <a:bodyPr rtlCol="0" anchor="ctr" wrap="square" lIns="228600" tIns="228600" rIns="228600" bIns="228600"/>
           <a:lstStyle/>
           <a:p>
             <a:pPr algn="ctr">
@@ -9072,7 +11371,7 @@
               </a:defRPr>
             </a:pPr>
             <a:r>
-              <a:t>Unified Tableau BI Delivery: Packaged into a single Tableau workbook (`EduVision_DV.twbx`) featuring four interconnected dashboards that enable decision-makers to drill from global university scorecards down into research citations, campus demographics, and national education spending (% of GDP).</a:t>
+              <a:t>Unified Tableau BI Delivery: Packaged into a single Tableau workbook (EduVision_DV.twbx) featuring four interconnected dashboards that enable decision-makers to drill from global university scorecards down into research citations, campus demographics, and national education spending (% of GDP).</a:t>
             </a:r>
           </a:p>
         </p:txBody>
@@ -9086,7 +11385,7 @@
 </file>
 
 <file path=ppt/slides/slide3.xml><?xml version="1.0" encoding="utf-8"?>
-<p:sld xmlns:a="http://schemas.openxmlformats.org/drawingml/2006/main" xmlns:r="http://schemas.openxmlformats.org/officeDocument/2006/relationships" xmlns:p="http://schemas.openxmlformats.org/presentationml/2006/main">
+<p:sld xmlns:a="http://schemas.openxmlformats.org/drawingml/2006/main" xmlns:p="http://schemas.openxmlformats.org/presentationml/2006/main" xmlns:r="http://schemas.openxmlformats.org/officeDocument/2006/relationships">
   <p:cSld>
     <p:spTree>
       <p:nvGrpSpPr>
@@ -9094,14 +11393,7 @@
         <p:cNvGrpSpPr/>
         <p:nvPr/>
       </p:nvGrpSpPr>
-      <p:grpSpPr>
-        <a:xfrm>
-          <a:off x="0" y="0"/>
-          <a:ext cx="0" cy="0"/>
-          <a:chOff x="0" y="0"/>
-          <a:chExt cx="0" cy="0"/>
-        </a:xfrm>
-      </p:grpSpPr>
+      <p:grpSpPr/>
       <p:sp>
         <p:nvSpPr>
           <p:cNvPr id="2" name="Rectangle 1"/>
@@ -9142,7 +11434,6 @@
           <a:lstStyle/>
           <a:p>
             <a:pPr algn="ctr"/>
-            <a:endParaRPr/>
           </a:p>
         </p:txBody>
       </p:sp>
@@ -9186,7 +11477,6 @@
           <a:lstStyle/>
           <a:p>
             <a:pPr algn="ctr"/>
-            <a:endParaRPr/>
           </a:p>
         </p:txBody>
       </p:sp>
@@ -9221,7 +11511,7 @@
               </a:defRPr>
             </a:pPr>
             <a:r>
-              <a:t>EDUVISION_DV | HIGHER EDUCATION INTELLIGENCE SYSTEM</a:t>
+              <a:t>STRUCTURE 2: NESTED MILESTONES &amp; MODULES SPECIFICATION</a:t>
             </a:r>
           </a:p>
         </p:txBody>
@@ -9257,7 +11547,7 @@
               </a:defRPr>
             </a:pPr>
             <a:r>
-              <a:t>Problem Statement: Challenges in Global Higher Education Analytics</a:t>
+              <a:t>Project Roadmap: 4-Milestone &amp; 8-Module Delivery Architecture</a:t>
             </a:r>
           </a:p>
         </p:txBody>
@@ -9306,7 +11596,7 @@
               </a:defRPr>
             </a:pPr>
             <a:r>
-              <a:t>3 / 18</a:t>
+              <a:t>3 / 19</a:t>
             </a:r>
           </a:p>
         </p:txBody>
@@ -9319,8 +11609,8 @@
         </p:nvSpPr>
         <p:spPr>
           <a:xfrm>
-            <a:off x="731520" y="1371600"/>
-            <a:ext cx="3429000" cy="4846320"/>
+            <a:off x="731520" y="1325880"/>
+            <a:ext cx="2514600" cy="3977639"/>
           </a:xfrm>
           <a:prstGeom prst="roundRect">
             <a:avLst/>
@@ -9349,27 +11639,43 @@
           </a:fontRef>
         </p:style>
         <p:txBody>
-          <a:bodyPr wrap="square" lIns="228600" tIns="228600" rIns="228600" bIns="228600" rtlCol="0" anchor="ctr"/>
+          <a:bodyPr rtlCol="0" anchor="ctr" wrap="square" lIns="164592" tIns="164592" rIns="164592" bIns="164592"/>
           <a:lstStyle/>
           <a:p>
             <a:pPr algn="ctr">
-              <a:defRPr sz="1200" b="1">
-                <a:solidFill>
-                  <a:srgbClr val="10B981"/>
-                </a:solidFill>
-                <a:latin typeface="Segoe UI"/>
-              </a:defRPr>
-            </a:pPr>
-            <a:r>
-              <a:t>DATA SILOS &amp; DISPARATE METRICS</a:t>
+              <a:defRPr sz="1100" b="1">
+                <a:solidFill>
+                  <a:srgbClr val="06B6D4"/>
+                </a:solidFill>
+                <a:latin typeface="Segoe UI"/>
+              </a:defRPr>
+            </a:pPr>
+            <a:r>
+              <a:t>MILESTONE 1 (WEEKS 1–2)</a:t>
             </a:r>
           </a:p>
           <a:p>
             <a:pPr>
               <a:spcBef>
-                <a:spcPts val="1200"/>
+                <a:spcPts val="200"/>
               </a:spcBef>
-              <a:defRPr sz="1000">
+              <a:defRPr sz="850" b="1">
+                <a:solidFill>
+                  <a:srgbClr val="F8FAFC"/>
+                </a:solidFill>
+                <a:latin typeface="Segoe UI"/>
+              </a:defRPr>
+            </a:pPr>
+            <a:r>
+              <a:t>FOUNDATION &amp; INGESTION</a:t>
+            </a:r>
+          </a:p>
+          <a:p>
+            <a:pPr>
+              <a:spcBef>
+                <a:spcPts val="800"/>
+              </a:spcBef>
+              <a:defRPr sz="800">
                 <a:solidFill>
                   <a:srgbClr val="CBD5E1"/>
                 </a:solidFill>
@@ -9377,15 +11683,28 @@
               </a:defRPr>
             </a:pPr>
             <a:r>
-              <a:t>• Different ranking bodies evaluate different cohorts (QS surveys 1,503 universities; THE surveys 2,673).</a:t>
-            </a:r>
-            <a:br/>
-            <a:r>
-              <a:t>• Metrics conflict conceptually: one source reports scores (0–100), while another reports empirical ratios.</a:t>
-            </a:r>
-            <a:br/>
-            <a:r>
-              <a:t>• Multi-source integration is often plagued by arbitrary column mapping or blind merging into unmanageable flat files.</a:t>
+              <a:t>• Module 1: Data Collection &amp; Integration</a:t>
+            </a:r>
+            <a:br/>
+            <a:r>
+              <a:t>  - Multi-source ingestion: QS 2025, THE 2024, WUR 2023, World Bank EdStats.</a:t>
+            </a:r>
+            <a:br/>
+            <a:r>
+              <a:t>  - Automated profiling &amp; schema validation in 01_data_loading.ipynb.</a:t>
+            </a:r>
+            <a:br/>
+            <a:br/>
+            <a:r>
+              <a:t>• Module 2: Data Cleaning &amp; Preprocessing</a:t>
+            </a:r>
+            <a:br/>
+            <a:r>
+              <a:t>  - Deterministic cleaning &amp; regex acronym stripping (r'\(.*?\)').</a:t>
+            </a:r>
+            <a:br/>
+            <a:r>
+              <a:t>  - Relational Star Schema: 2 dimension tables (dim_university, dim_country) and 4 fact tables.</a:t>
             </a:r>
           </a:p>
         </p:txBody>
@@ -9398,8 +11717,8 @@
         </p:nvSpPr>
         <p:spPr>
           <a:xfrm>
-            <a:off x="4379976" y="1371600"/>
-            <a:ext cx="3429000" cy="4846320"/>
+            <a:off x="3465576" y="1325880"/>
+            <a:ext cx="2514600" cy="3977639"/>
           </a:xfrm>
           <a:prstGeom prst="roundRect">
             <a:avLst/>
@@ -9428,27 +11747,43 @@
           </a:fontRef>
         </p:style>
         <p:txBody>
-          <a:bodyPr wrap="square" lIns="228600" tIns="228600" rIns="228600" bIns="228600" rtlCol="0" anchor="ctr"/>
+          <a:bodyPr rtlCol="0" anchor="ctr" wrap="square" lIns="164592" tIns="164592" rIns="164592" bIns="164592"/>
           <a:lstStyle/>
           <a:p>
             <a:pPr algn="ctr">
-              <a:defRPr sz="1200" b="1">
-                <a:solidFill>
-                  <a:srgbClr val="F59E0B"/>
-                </a:solidFill>
-                <a:latin typeface="Segoe UI"/>
-              </a:defRPr>
-            </a:pPr>
-            <a:r>
-              <a:t>ENTITY MISALIGNMENT &amp; VARIATIONS</a:t>
+              <a:defRPr sz="1100" b="1">
+                <a:solidFill>
+                  <a:srgbClr val="10B981"/>
+                </a:solidFill>
+                <a:latin typeface="Segoe UI"/>
+              </a:defRPr>
+            </a:pPr>
+            <a:r>
+              <a:t>MILESTONE 2 (WEEKS 3–4)</a:t>
             </a:r>
           </a:p>
           <a:p>
             <a:pPr>
               <a:spcBef>
-                <a:spcPts val="1200"/>
+                <a:spcPts val="200"/>
               </a:spcBef>
-              <a:defRPr sz="1000">
+              <a:defRPr sz="850" b="1">
+                <a:solidFill>
+                  <a:srgbClr val="F8FAFC"/>
+                </a:solidFill>
+                <a:latin typeface="Segoe UI"/>
+              </a:defRPr>
+            </a:pPr>
+            <a:r>
+              <a:t>METRICS &amp; PROTOTYPING</a:t>
+            </a:r>
+          </a:p>
+          <a:p>
+            <a:pPr>
+              <a:spcBef>
+                <a:spcPts val="800"/>
+              </a:spcBef>
+              <a:defRPr sz="800">
                 <a:solidFill>
                   <a:srgbClr val="CBD5E1"/>
                 </a:solidFill>
@@ -9456,15 +11791,28 @@
               </a:defRPr>
             </a:pPr>
             <a:r>
-              <a:t>• University names have widespread surface-form discrepancies: e.g., 'Massachusetts Institute of Technology (MIT)' vs. 'Massachusetts Institute of Technology'.</a:t>
-            </a:r>
-            <a:br/>
-            <a:r>
-              <a:t>• Overuse of aggressive fuzzy matching creates dangerous false matches (e.g., confusing 'University of Delhi' with 'Delhi Technological University').</a:t>
-            </a:r>
-            <a:br/>
-            <a:r>
-              <a:t>• Inconsistent country naming ('USA' vs 'United States') causes fractured geographic records.</a:t>
+              <a:t>• Module 3: KPI Engineering &amp; Formulation</a:t>
+            </a:r>
+            <a:br/>
+            <a:r>
+              <a:t>  - Mathematical formulation of 6 defensible higher education KPIs.</a:t>
+            </a:r>
+            <a:br/>
+            <a:r>
+              <a:t>  - Master analytical dataset (university_final_dataset.xlsx, kpi_master.csv).</a:t>
+            </a:r>
+            <a:br/>
+            <a:br/>
+            <a:r>
+              <a:t>• Module 4: UI/UX Storyboarding &amp; Prototype</a:t>
+            </a:r>
+            <a:br/>
+            <a:r>
+              <a:t>  - Executive 4-dashboard storyboard specification (dashboard_storyboard.pdf).</a:t>
+            </a:r>
+            <a:br/>
+            <a:r>
+              <a:t>  - Interactive low-fidelity prototype workbook (eduvision_prototype.twbx).</a:t>
             </a:r>
           </a:p>
         </p:txBody>
@@ -9477,8 +11825,8 @@
         </p:nvSpPr>
         <p:spPr>
           <a:xfrm>
-            <a:off x="8028432" y="1371600"/>
-            <a:ext cx="3429000" cy="4846320"/>
+            <a:off x="6199632" y="1325880"/>
+            <a:ext cx="2514600" cy="3977639"/>
           </a:xfrm>
           <a:prstGeom prst="roundRect">
             <a:avLst/>
@@ -9507,27 +11855,43 @@
           </a:fontRef>
         </p:style>
         <p:txBody>
-          <a:bodyPr wrap="square" lIns="228600" tIns="228600" rIns="228600" bIns="228600" rtlCol="0" anchor="ctr"/>
+          <a:bodyPr rtlCol="0" anchor="ctr" wrap="square" lIns="164592" tIns="164592" rIns="164592" bIns="164592"/>
           <a:lstStyle/>
           <a:p>
             <a:pPr algn="ctr">
-              <a:defRPr sz="1200" b="1">
-                <a:solidFill>
-                  <a:srgbClr val="8B5CF6"/>
-                </a:solidFill>
-                <a:latin typeface="Segoe UI"/>
-              </a:defRPr>
-            </a:pPr>
-            <a:r>
-              <a:t>DISCONNECTED DECISION MAKING</a:t>
+              <a:defRPr sz="1100" b="1">
+                <a:solidFill>
+                  <a:srgbClr val="F59E0B"/>
+                </a:solidFill>
+                <a:latin typeface="Segoe UI"/>
+              </a:defRPr>
+            </a:pPr>
+            <a:r>
+              <a:t>MILESTONE 3 (WEEKS 5–6)</a:t>
             </a:r>
           </a:p>
           <a:p>
             <a:pPr>
               <a:spcBef>
-                <a:spcPts val="1200"/>
+                <a:spcPts val="200"/>
               </a:spcBef>
-              <a:defRPr sz="1000">
+              <a:defRPr sz="850" b="1">
+                <a:solidFill>
+                  <a:srgbClr val="F8FAFC"/>
+                </a:solidFill>
+                <a:latin typeface="Segoe UI"/>
+              </a:defRPr>
+            </a:pPr>
+            <a:r>
+              <a:t>BI DEVELOPMENT &amp; INTEGRATION</a:t>
+            </a:r>
+          </a:p>
+          <a:p>
+            <a:pPr>
+              <a:spcBef>
+                <a:spcPts val="800"/>
+              </a:spcBef>
+              <a:defRPr sz="800">
                 <a:solidFill>
                   <a:srgbClr val="CBD5E1"/>
                 </a:solidFill>
@@ -9535,15 +11899,207 @@
               </a:defRPr>
             </a:pPr>
             <a:r>
-              <a:t>• Academic leaders lack unified intelligence to evaluate research impact alongside student mentorship capacity.</a:t>
-            </a:r>
-            <a:br/>
-            <a:r>
-              <a:t>• Students cannot compare class sizes and international campus diversity within a single tool.</a:t>
-            </a:r>
-            <a:br/>
-            <a:r>
-              <a:t>• Policymakers cannot visualize how national public education spending (% of GDP) translates into top-tier university capacity.</a:t>
+              <a:t>• Module 5: Initial Dashboard Development</a:t>
+            </a:r>
+            <a:br/>
+            <a:r>
+              <a:t>  - Visual component implementation: Global maps, KPI cards, scatter plots (v1).</a:t>
+            </a:r>
+            <a:br/>
+            <a:br/>
+            <a:r>
+              <a:t>• Module 6: Final Integration &amp; Visuals</a:t>
+            </a:r>
+            <a:br/>
+            <a:r>
+              <a:t>  - Production Tableau BI Suite (EduVision_DV.twbx) with 4 interconnected views.</a:t>
+            </a:r>
+            <a:br/>
+            <a:r>
+              <a:t>  - Cross-dashboard filter actions, parameter controls, and persistent navigation.</a:t>
+            </a:r>
+          </a:p>
+        </p:txBody>
+      </p:sp>
+      <p:sp>
+        <p:nvSpPr>
+          <p:cNvPr id="10" name="Rounded Rectangle 9"/>
+          <p:cNvSpPr/>
+          <p:nvPr/>
+        </p:nvSpPr>
+        <p:spPr>
+          <a:xfrm>
+            <a:off x="8933688" y="1325880"/>
+            <a:ext cx="2514600" cy="3977639"/>
+          </a:xfrm>
+          <a:prstGeom prst="roundRect">
+            <a:avLst/>
+          </a:prstGeom>
+          <a:solidFill>
+            <a:srgbClr val="1E293B"/>
+          </a:solidFill>
+          <a:ln w="12700">
+            <a:solidFill>
+              <a:srgbClr val="334155"/>
+            </a:solidFill>
+          </a:ln>
+        </p:spPr>
+        <p:style>
+          <a:lnRef idx="1">
+            <a:schemeClr val="accent1"/>
+          </a:lnRef>
+          <a:fillRef idx="3">
+            <a:schemeClr val="accent1"/>
+          </a:fillRef>
+          <a:effectRef idx="2">
+            <a:schemeClr val="accent1"/>
+          </a:effectRef>
+          <a:fontRef idx="minor">
+            <a:schemeClr val="lt1"/>
+          </a:fontRef>
+        </p:style>
+        <p:txBody>
+          <a:bodyPr rtlCol="0" anchor="ctr" wrap="square" lIns="164592" tIns="164592" rIns="164592" bIns="164592"/>
+          <a:lstStyle/>
+          <a:p>
+            <a:pPr algn="ctr">
+              <a:defRPr sz="1100" b="1">
+                <a:solidFill>
+                  <a:srgbClr val="8B5CF6"/>
+                </a:solidFill>
+                <a:latin typeface="Segoe UI"/>
+              </a:defRPr>
+            </a:pPr>
+            <a:r>
+              <a:t>MILESTONE 4 (WEEKS 7–8)</a:t>
+            </a:r>
+          </a:p>
+          <a:p>
+            <a:pPr>
+              <a:spcBef>
+                <a:spcPts val="200"/>
+              </a:spcBef>
+              <a:defRPr sz="850" b="1">
+                <a:solidFill>
+                  <a:srgbClr val="F8FAFC"/>
+                </a:solidFill>
+                <a:latin typeface="Segoe UI"/>
+              </a:defRPr>
+            </a:pPr>
+            <a:r>
+              <a:t>QA TESTING &amp; FINAL DELIVERY</a:t>
+            </a:r>
+          </a:p>
+          <a:p>
+            <a:pPr>
+              <a:spcBef>
+                <a:spcPts val="800"/>
+              </a:spcBef>
+              <a:defRPr sz="800">
+                <a:solidFill>
+                  <a:srgbClr val="CBD5E1"/>
+                </a:solidFill>
+                <a:latin typeface="Segoe UI"/>
+              </a:defRPr>
+            </a:pPr>
+            <a:r>
+              <a:t>• Module 7: Testing &amp; Quality Assurance</a:t>
+            </a:r>
+            <a:br/>
+            <a:r>
+              <a:t>  - Automated validation suite (validate_and_test.py, 05_validation.ipynb).</a:t>
+            </a:r>
+            <a:br/>
+            <a:r>
+              <a:t>  - 100% pass on 12 audit test cases (qa_checklist.xlsx / qa_checklist.md).</a:t>
+            </a:r>
+            <a:br/>
+            <a:br/>
+            <a:r>
+              <a:t>• Module 8: Documentation &amp; Presentation</a:t>
+            </a:r>
+            <a:br/>
+            <a:r>
+              <a:t>  - Comprehensive technical manuals &amp; guidebooks (final_documentation.pdf).</a:t>
+            </a:r>
+            <a:br/>
+            <a:r>
+              <a:t>  - Executive project presentation (EduVision_DV_Project_Presentation.pptx).</a:t>
+            </a:r>
+          </a:p>
+        </p:txBody>
+      </p:sp>
+      <p:sp>
+        <p:nvSpPr>
+          <p:cNvPr id="11" name="Rounded Rectangle 10"/>
+          <p:cNvSpPr/>
+          <p:nvPr/>
+        </p:nvSpPr>
+        <p:spPr>
+          <a:xfrm>
+            <a:off x="731520" y="5440680"/>
+            <a:ext cx="10728655" cy="868680"/>
+          </a:xfrm>
+          <a:prstGeom prst="roundRect">
+            <a:avLst/>
+          </a:prstGeom>
+          <a:solidFill>
+            <a:srgbClr val="1E293B"/>
+          </a:solidFill>
+          <a:ln w="12700">
+            <a:solidFill>
+              <a:srgbClr val="334155"/>
+            </a:solidFill>
+          </a:ln>
+        </p:spPr>
+        <p:style>
+          <a:lnRef idx="1">
+            <a:schemeClr val="accent1"/>
+          </a:lnRef>
+          <a:fillRef idx="3">
+            <a:schemeClr val="accent1"/>
+          </a:fillRef>
+          <a:effectRef idx="2">
+            <a:schemeClr val="accent1"/>
+          </a:effectRef>
+          <a:fontRef idx="minor">
+            <a:schemeClr val="lt1"/>
+          </a:fontRef>
+        </p:style>
+        <p:txBody>
+          <a:bodyPr rtlCol="0" anchor="ctr" wrap="square" lIns="137160" tIns="137160" rIns="137160" bIns="137160"/>
+          <a:lstStyle/>
+          <a:p>
+            <a:pPr algn="ctr">
+              <a:defRPr sz="1000" b="1">
+                <a:solidFill>
+                  <a:srgbClr val="10B981"/>
+                </a:solidFill>
+                <a:latin typeface="Segoe UI"/>
+              </a:defRPr>
+            </a:pPr>
+            <a:r>
+              <a:t>OFFICIAL REPOSITORY ARCHITECTURE: STRUCTURE 2 (NESTED MILESTONES WITH EXPLICIT MODULE SUBFOLDERS)</a:t>
+            </a:r>
+          </a:p>
+          <a:p>
+            <a:pPr>
+              <a:spcBef>
+                <a:spcPts val="300"/>
+              </a:spcBef>
+              <a:defRPr sz="850">
+                <a:solidFill>
+                  <a:srgbClr val="CBD5E1"/>
+                </a:solidFill>
+                <a:latin typeface="Segoe UI"/>
+              </a:defRPr>
+            </a:pPr>
+            <a:r>
+              <a:t>• Git Repository Root contains: Milestone 1/ (Modules 1–2), Milestone 2/ (Modules 3–4), Milestone 3/ (Modules 5–6), Milestone 4/ (Modules 7–8), Screenshots/, and Root Presentation.</a:t>
+            </a:r>
+            <a:br/>
+            <a:r>
+              <a:t>• Every Milestone and Module folder includes an independent technical README.md, data dictionaries, runnable Python code, and audit-ready outputs.</a:t>
             </a:r>
           </a:p>
         </p:txBody>
@@ -9557,7 +12113,7 @@
 </file>
 
 <file path=ppt/slides/slide4.xml><?xml version="1.0" encoding="utf-8"?>
-<p:sld xmlns:a="http://schemas.openxmlformats.org/drawingml/2006/main" xmlns:r="http://schemas.openxmlformats.org/officeDocument/2006/relationships" xmlns:p="http://schemas.openxmlformats.org/presentationml/2006/main">
+<p:sld xmlns:a="http://schemas.openxmlformats.org/drawingml/2006/main" xmlns:p="http://schemas.openxmlformats.org/presentationml/2006/main" xmlns:r="http://schemas.openxmlformats.org/officeDocument/2006/relationships">
   <p:cSld>
     <p:spTree>
       <p:nvGrpSpPr>
@@ -9565,14 +12121,7 @@
         <p:cNvGrpSpPr/>
         <p:nvPr/>
       </p:nvGrpSpPr>
-      <p:grpSpPr>
-        <a:xfrm>
-          <a:off x="0" y="0"/>
-          <a:ext cx="0" cy="0"/>
-          <a:chOff x="0" y="0"/>
-          <a:chExt cx="0" cy="0"/>
-        </a:xfrm>
-      </p:grpSpPr>
+      <p:grpSpPr/>
       <p:sp>
         <p:nvSpPr>
           <p:cNvPr id="2" name="Rectangle 1"/>
@@ -9613,7 +12162,6 @@
           <a:lstStyle/>
           <a:p>
             <a:pPr algn="ctr"/>
-            <a:endParaRPr/>
           </a:p>
         </p:txBody>
       </p:sp>
@@ -9657,7 +12205,6 @@
           <a:lstStyle/>
           <a:p>
             <a:pPr algn="ctr"/>
-            <a:endParaRPr/>
           </a:p>
         </p:txBody>
       </p:sp>
@@ -9692,7 +12239,7 @@
               </a:defRPr>
             </a:pPr>
             <a:r>
-              <a:t>EDUVISION_DV | HIGHER EDUCATION INTELLIGENCE SYSTEM</a:t>
+              <a:t>PROJECT BACKGROUND &amp; INDUSTRY MOTIVATION</a:t>
             </a:r>
           </a:p>
         </p:txBody>
@@ -9728,7 +12275,7 @@
               </a:defRPr>
             </a:pPr>
             <a:r>
-              <a:t>Data Acquisition: The Four Authoritative Data Sources</a:t>
+              <a:t>Problem Statement: Challenges in Global Higher Education Analytics</a:t>
             </a:r>
           </a:p>
         </p:txBody>
@@ -9777,7 +12324,469 @@
               </a:defRPr>
             </a:pPr>
             <a:r>
-              <a:t>4 / 18</a:t>
+              <a:t>4 / 19</a:t>
+            </a:r>
+          </a:p>
+        </p:txBody>
+      </p:sp>
+      <p:sp>
+        <p:nvSpPr>
+          <p:cNvPr id="7" name="Rounded Rectangle 6"/>
+          <p:cNvSpPr/>
+          <p:nvPr/>
+        </p:nvSpPr>
+        <p:spPr>
+          <a:xfrm>
+            <a:off x="731520" y="1371600"/>
+            <a:ext cx="3429000" cy="4846320"/>
+          </a:xfrm>
+          <a:prstGeom prst="roundRect">
+            <a:avLst/>
+          </a:prstGeom>
+          <a:solidFill>
+            <a:srgbClr val="1E293B"/>
+          </a:solidFill>
+          <a:ln w="12700">
+            <a:solidFill>
+              <a:srgbClr val="334155"/>
+            </a:solidFill>
+          </a:ln>
+        </p:spPr>
+        <p:style>
+          <a:lnRef idx="1">
+            <a:schemeClr val="accent1"/>
+          </a:lnRef>
+          <a:fillRef idx="3">
+            <a:schemeClr val="accent1"/>
+          </a:fillRef>
+          <a:effectRef idx="2">
+            <a:schemeClr val="accent1"/>
+          </a:effectRef>
+          <a:fontRef idx="minor">
+            <a:schemeClr val="lt1"/>
+          </a:fontRef>
+        </p:style>
+        <p:txBody>
+          <a:bodyPr rtlCol="0" anchor="ctr" wrap="square" lIns="228600" tIns="228600" rIns="228600" bIns="228600"/>
+          <a:lstStyle/>
+          <a:p>
+            <a:pPr algn="ctr">
+              <a:defRPr sz="1200" b="1">
+                <a:solidFill>
+                  <a:srgbClr val="10B981"/>
+                </a:solidFill>
+                <a:latin typeface="Segoe UI"/>
+              </a:defRPr>
+            </a:pPr>
+            <a:r>
+              <a:t>DATA SILOS &amp; DISPARATE METRICS</a:t>
+            </a:r>
+          </a:p>
+          <a:p>
+            <a:pPr>
+              <a:spcBef>
+                <a:spcPts val="1200"/>
+              </a:spcBef>
+              <a:defRPr sz="1000">
+                <a:solidFill>
+                  <a:srgbClr val="CBD5E1"/>
+                </a:solidFill>
+                <a:latin typeface="Segoe UI"/>
+              </a:defRPr>
+            </a:pPr>
+            <a:r>
+              <a:t>• Different ranking bodies evaluate different cohorts (QS surveys 1,503 universities; THE surveys 2,673).</a:t>
+            </a:r>
+            <a:br/>
+            <a:r>
+              <a:t>• Metrics conflict conceptually: one source reports scores (0–100), while another reports empirical ratios.</a:t>
+            </a:r>
+            <a:br/>
+            <a:r>
+              <a:t>• Multi-source integration is often plagued by arbitrary column mapping or blind merging into unmanageable flat files.</a:t>
+            </a:r>
+          </a:p>
+        </p:txBody>
+      </p:sp>
+      <p:sp>
+        <p:nvSpPr>
+          <p:cNvPr id="8" name="Rounded Rectangle 7"/>
+          <p:cNvSpPr/>
+          <p:nvPr/>
+        </p:nvSpPr>
+        <p:spPr>
+          <a:xfrm>
+            <a:off x="4379976" y="1371600"/>
+            <a:ext cx="3429000" cy="4846320"/>
+          </a:xfrm>
+          <a:prstGeom prst="roundRect">
+            <a:avLst/>
+          </a:prstGeom>
+          <a:solidFill>
+            <a:srgbClr val="1E293B"/>
+          </a:solidFill>
+          <a:ln w="12700">
+            <a:solidFill>
+              <a:srgbClr val="334155"/>
+            </a:solidFill>
+          </a:ln>
+        </p:spPr>
+        <p:style>
+          <a:lnRef idx="1">
+            <a:schemeClr val="accent1"/>
+          </a:lnRef>
+          <a:fillRef idx="3">
+            <a:schemeClr val="accent1"/>
+          </a:fillRef>
+          <a:effectRef idx="2">
+            <a:schemeClr val="accent1"/>
+          </a:effectRef>
+          <a:fontRef idx="minor">
+            <a:schemeClr val="lt1"/>
+          </a:fontRef>
+        </p:style>
+        <p:txBody>
+          <a:bodyPr rtlCol="0" anchor="ctr" wrap="square" lIns="228600" tIns="228600" rIns="228600" bIns="228600"/>
+          <a:lstStyle/>
+          <a:p>
+            <a:pPr algn="ctr">
+              <a:defRPr sz="1200" b="1">
+                <a:solidFill>
+                  <a:srgbClr val="F59E0B"/>
+                </a:solidFill>
+                <a:latin typeface="Segoe UI"/>
+              </a:defRPr>
+            </a:pPr>
+            <a:r>
+              <a:t>ENTITY MISALIGNMENT &amp; VARIATIONS</a:t>
+            </a:r>
+          </a:p>
+          <a:p>
+            <a:pPr>
+              <a:spcBef>
+                <a:spcPts val="1200"/>
+              </a:spcBef>
+              <a:defRPr sz="1000">
+                <a:solidFill>
+                  <a:srgbClr val="CBD5E1"/>
+                </a:solidFill>
+                <a:latin typeface="Segoe UI"/>
+              </a:defRPr>
+            </a:pPr>
+            <a:r>
+              <a:t>• University names have widespread surface-form discrepancies: e.g., 'Massachusetts Institute of Technology (MIT)' vs. 'Massachusetts Institute of Technology'.</a:t>
+            </a:r>
+            <a:br/>
+            <a:r>
+              <a:t>• Overuse of aggressive fuzzy matching creates dangerous false matches (e.g., confusing 'University of Delhi' with 'Delhi Technological University').</a:t>
+            </a:r>
+            <a:br/>
+            <a:r>
+              <a:t>• Inconsistent country naming ('USA' vs 'United States') causes fractured geographic records.</a:t>
+            </a:r>
+          </a:p>
+        </p:txBody>
+      </p:sp>
+      <p:sp>
+        <p:nvSpPr>
+          <p:cNvPr id="9" name="Rounded Rectangle 8"/>
+          <p:cNvSpPr/>
+          <p:nvPr/>
+        </p:nvSpPr>
+        <p:spPr>
+          <a:xfrm>
+            <a:off x="8028432" y="1371600"/>
+            <a:ext cx="3429000" cy="4846320"/>
+          </a:xfrm>
+          <a:prstGeom prst="roundRect">
+            <a:avLst/>
+          </a:prstGeom>
+          <a:solidFill>
+            <a:srgbClr val="1E293B"/>
+          </a:solidFill>
+          <a:ln w="12700">
+            <a:solidFill>
+              <a:srgbClr val="334155"/>
+            </a:solidFill>
+          </a:ln>
+        </p:spPr>
+        <p:style>
+          <a:lnRef idx="1">
+            <a:schemeClr val="accent1"/>
+          </a:lnRef>
+          <a:fillRef idx="3">
+            <a:schemeClr val="accent1"/>
+          </a:fillRef>
+          <a:effectRef idx="2">
+            <a:schemeClr val="accent1"/>
+          </a:effectRef>
+          <a:fontRef idx="minor">
+            <a:schemeClr val="lt1"/>
+          </a:fontRef>
+        </p:style>
+        <p:txBody>
+          <a:bodyPr rtlCol="0" anchor="ctr" wrap="square" lIns="228600" tIns="228600" rIns="228600" bIns="228600"/>
+          <a:lstStyle/>
+          <a:p>
+            <a:pPr algn="ctr">
+              <a:defRPr sz="1200" b="1">
+                <a:solidFill>
+                  <a:srgbClr val="8B5CF6"/>
+                </a:solidFill>
+                <a:latin typeface="Segoe UI"/>
+              </a:defRPr>
+            </a:pPr>
+            <a:r>
+              <a:t>DISCONNECTED DECISION MAKING</a:t>
+            </a:r>
+          </a:p>
+          <a:p>
+            <a:pPr>
+              <a:spcBef>
+                <a:spcPts val="1200"/>
+              </a:spcBef>
+              <a:defRPr sz="1000">
+                <a:solidFill>
+                  <a:srgbClr val="CBD5E1"/>
+                </a:solidFill>
+                <a:latin typeface="Segoe UI"/>
+              </a:defRPr>
+            </a:pPr>
+            <a:r>
+              <a:t>• Academic leaders lack unified intelligence to evaluate research impact alongside student mentorship capacity.</a:t>
+            </a:r>
+            <a:br/>
+            <a:r>
+              <a:t>• Students cannot compare class sizes and international campus diversity within a single tool.</a:t>
+            </a:r>
+            <a:br/>
+            <a:r>
+              <a:t>• Policymakers cannot visualize how national public education spending (% of GDP) translates into top-tier university capacity.</a:t>
+            </a:r>
+          </a:p>
+        </p:txBody>
+      </p:sp>
+    </p:spTree>
+  </p:cSld>
+  <p:clrMapOvr>
+    <a:masterClrMapping/>
+  </p:clrMapOvr>
+</p:sld>
+</file>
+
+<file path=ppt/slides/slide5.xml><?xml version="1.0" encoding="utf-8"?>
+<p:sld xmlns:a="http://schemas.openxmlformats.org/drawingml/2006/main" xmlns:p="http://schemas.openxmlformats.org/presentationml/2006/main" xmlns:r="http://schemas.openxmlformats.org/officeDocument/2006/relationships">
+  <p:cSld>
+    <p:spTree>
+      <p:nvGrpSpPr>
+        <p:cNvPr id="1" name=""/>
+        <p:cNvGrpSpPr/>
+        <p:nvPr/>
+      </p:nvGrpSpPr>
+      <p:grpSpPr/>
+      <p:sp>
+        <p:nvSpPr>
+          <p:cNvPr id="2" name="Rectangle 1"/>
+          <p:cNvSpPr/>
+          <p:nvPr/>
+        </p:nvSpPr>
+        <p:spPr>
+          <a:xfrm>
+            <a:off x="0" y="0"/>
+            <a:ext cx="12191695" cy="6858000"/>
+          </a:xfrm>
+          <a:prstGeom prst="rect">
+            <a:avLst/>
+          </a:prstGeom>
+          <a:solidFill>
+            <a:srgbClr val="0F172A"/>
+          </a:solidFill>
+          <a:ln>
+            <a:noFill/>
+          </a:ln>
+        </p:spPr>
+        <p:style>
+          <a:lnRef idx="1">
+            <a:schemeClr val="accent1"/>
+          </a:lnRef>
+          <a:fillRef idx="3">
+            <a:schemeClr val="accent1"/>
+          </a:fillRef>
+          <a:effectRef idx="2">
+            <a:schemeClr val="accent1"/>
+          </a:effectRef>
+          <a:fontRef idx="minor">
+            <a:schemeClr val="lt1"/>
+          </a:fontRef>
+        </p:style>
+        <p:txBody>
+          <a:bodyPr rtlCol="0" anchor="ctr"/>
+          <a:lstStyle/>
+          <a:p>
+            <a:pPr algn="ctr"/>
+          </a:p>
+        </p:txBody>
+      </p:sp>
+      <p:sp>
+        <p:nvSpPr>
+          <p:cNvPr id="3" name="Rectangle 2"/>
+          <p:cNvSpPr/>
+          <p:nvPr/>
+        </p:nvSpPr>
+        <p:spPr>
+          <a:xfrm>
+            <a:off x="731520" y="365760"/>
+            <a:ext cx="10728655" cy="27432"/>
+          </a:xfrm>
+          <a:prstGeom prst="rect">
+            <a:avLst/>
+          </a:prstGeom>
+          <a:solidFill>
+            <a:srgbClr val="06B6D4"/>
+          </a:solidFill>
+          <a:ln>
+            <a:noFill/>
+          </a:ln>
+        </p:spPr>
+        <p:style>
+          <a:lnRef idx="1">
+            <a:schemeClr val="accent1"/>
+          </a:lnRef>
+          <a:fillRef idx="3">
+            <a:schemeClr val="accent1"/>
+          </a:fillRef>
+          <a:effectRef idx="2">
+            <a:schemeClr val="accent1"/>
+          </a:effectRef>
+          <a:fontRef idx="minor">
+            <a:schemeClr val="lt1"/>
+          </a:fontRef>
+        </p:style>
+        <p:txBody>
+          <a:bodyPr rtlCol="0" anchor="ctr"/>
+          <a:lstStyle/>
+          <a:p>
+            <a:pPr algn="ctr"/>
+          </a:p>
+        </p:txBody>
+      </p:sp>
+      <p:sp>
+        <p:nvSpPr>
+          <p:cNvPr id="4" name="TextBox 3"/>
+          <p:cNvSpPr txBox="1"/>
+          <p:nvPr/>
+        </p:nvSpPr>
+        <p:spPr>
+          <a:xfrm>
+            <a:off x="731520" y="438912"/>
+            <a:ext cx="10728655" cy="228600"/>
+          </a:xfrm>
+          <a:prstGeom prst="rect">
+            <a:avLst/>
+          </a:prstGeom>
+          <a:noFill/>
+        </p:spPr>
+        <p:txBody>
+          <a:bodyPr wrap="square" lIns="0" tIns="0" rIns="0" bIns="0">
+            <a:spAutoFit/>
+          </a:bodyPr>
+          <a:lstStyle/>
+          <a:p>
+            <a:pPr>
+              <a:defRPr sz="950" b="1">
+                <a:solidFill>
+                  <a:srgbClr val="10B981"/>
+                </a:solidFill>
+                <a:latin typeface="Segoe UI"/>
+              </a:defRPr>
+            </a:pPr>
+            <a:r>
+              <a:t>MILESTONE 1 / MODULE 1 | DATA COLLECTION &amp; INTEGRATION</a:t>
+            </a:r>
+          </a:p>
+        </p:txBody>
+      </p:sp>
+      <p:sp>
+        <p:nvSpPr>
+          <p:cNvPr id="5" name="TextBox 4"/>
+          <p:cNvSpPr txBox="1"/>
+          <p:nvPr/>
+        </p:nvSpPr>
+        <p:spPr>
+          <a:xfrm>
+            <a:off x="731520" y="685800"/>
+            <a:ext cx="10728655" cy="502920"/>
+          </a:xfrm>
+          <a:prstGeom prst="rect">
+            <a:avLst/>
+          </a:prstGeom>
+          <a:noFill/>
+        </p:spPr>
+        <p:txBody>
+          <a:bodyPr wrap="square" lIns="0" tIns="0" rIns="0" bIns="0">
+            <a:spAutoFit/>
+          </a:bodyPr>
+          <a:lstStyle/>
+          <a:p>
+            <a:pPr>
+              <a:defRPr sz="1900" b="1">
+                <a:solidFill>
+                  <a:srgbClr val="F8FAFC"/>
+                </a:solidFill>
+                <a:latin typeface="Segoe UI"/>
+              </a:defRPr>
+            </a:pPr>
+            <a:r>
+              <a:t>Data Acquisition: The Four Authoritative Data Sources</a:t>
+            </a:r>
+          </a:p>
+        </p:txBody>
+      </p:sp>
+      <p:sp>
+        <p:nvSpPr>
+          <p:cNvPr id="6" name="TextBox 5"/>
+          <p:cNvSpPr txBox="1"/>
+          <p:nvPr/>
+        </p:nvSpPr>
+        <p:spPr>
+          <a:xfrm>
+            <a:off x="731520" y="6473952"/>
+            <a:ext cx="10728655" cy="274320"/>
+          </a:xfrm>
+          <a:prstGeom prst="rect">
+            <a:avLst/>
+          </a:prstGeom>
+          <a:noFill/>
+        </p:spPr>
+        <p:txBody>
+          <a:bodyPr wrap="none" lIns="0" tIns="0" rIns="0" bIns="0">
+            <a:spAutoFit/>
+          </a:bodyPr>
+          <a:lstStyle/>
+          <a:p>
+            <a:pPr>
+              <a:defRPr sz="850">
+                <a:solidFill>
+                  <a:srgbClr val="94A3B8"/>
+                </a:solidFill>
+                <a:latin typeface="Segoe UI"/>
+              </a:defRPr>
+            </a:pPr>
+            <a:r>
+              <a:t>Infosys Springboard Internship 7.0 | Author: Sujay S | EduVision_DV</a:t>
+            </a:r>
+          </a:p>
+          <a:p>
+            <a:pPr algn="r">
+              <a:defRPr sz="850">
+                <a:solidFill>
+                  <a:srgbClr val="94A3B8"/>
+                </a:solidFill>
+                <a:latin typeface="Segoe UI"/>
+              </a:defRPr>
+            </a:pPr>
+            <a:r>
+              <a:t>5 / 19</a:t>
             </a:r>
           </a:p>
         </p:txBody>
@@ -9801,41 +12810,11 @@
                 <a:tableStyleId>{5C22544A-7EE6-4342-B048-85BDC9FD1C3A}</a:tableStyleId>
               </a:tblPr>
               <a:tblGrid>
-                <a:gridCol w="2011680">
-                  <a:extLst>
-                    <a:ext uri="{9D8B030D-6E8A-4147-A177-3AD203B41FA5}">
-                      <a16:colId xmlns:a16="http://schemas.microsoft.com/office/drawing/2014/main" val="20000"/>
-                    </a:ext>
-                  </a:extLst>
-                </a:gridCol>
-                <a:gridCol w="1645920">
-                  <a:extLst>
-                    <a:ext uri="{9D8B030D-6E8A-4147-A177-3AD203B41FA5}">
-                      <a16:colId xmlns:a16="http://schemas.microsoft.com/office/drawing/2014/main" val="20001"/>
-                    </a:ext>
-                  </a:extLst>
-                </a:gridCol>
-                <a:gridCol w="1280160">
-                  <a:extLst>
-                    <a:ext uri="{9D8B030D-6E8A-4147-A177-3AD203B41FA5}">
-                      <a16:colId xmlns:a16="http://schemas.microsoft.com/office/drawing/2014/main" val="20002"/>
-                    </a:ext>
-                  </a:extLst>
-                </a:gridCol>
-                <a:gridCol w="2286000">
-                  <a:extLst>
-                    <a:ext uri="{9D8B030D-6E8A-4147-A177-3AD203B41FA5}">
-                      <a16:colId xmlns:a16="http://schemas.microsoft.com/office/drawing/2014/main" val="20003"/>
-                    </a:ext>
-                  </a:extLst>
-                </a:gridCol>
-                <a:gridCol w="3504895">
-                  <a:extLst>
-                    <a:ext uri="{9D8B030D-6E8A-4147-A177-3AD203B41FA5}">
-                      <a16:colId xmlns:a16="http://schemas.microsoft.com/office/drawing/2014/main" val="20004"/>
-                    </a:ext>
-                  </a:extLst>
-                </a:gridCol>
+                <a:gridCol w="2011680"/>
+                <a:gridCol w="1645920"/>
+                <a:gridCol w="1280160"/>
+                <a:gridCol w="2286000"/>
+                <a:gridCol w="3504895"/>
               </a:tblGrid>
               <a:tr h="585216">
                 <a:tc>
@@ -9958,11 +12937,6 @@
                     </a:solidFill>
                   </a:tcPr>
                 </a:tc>
-                <a:extLst>
-                  <a:ext uri="{0D108BD9-81ED-4DB2-BD59-A6C34878D82A}">
-                    <a16:rowId xmlns:a16="http://schemas.microsoft.com/office/drawing/2014/main" val="10000"/>
-                  </a:ext>
-                </a:extLst>
               </a:tr>
               <a:tr h="585216">
                 <a:tc>
@@ -10085,11 +13059,6 @@
                     </a:solidFill>
                   </a:tcPr>
                 </a:tc>
-                <a:extLst>
-                  <a:ext uri="{0D108BD9-81ED-4DB2-BD59-A6C34878D82A}">
-                    <a16:rowId xmlns:a16="http://schemas.microsoft.com/office/drawing/2014/main" val="10001"/>
-                  </a:ext>
-                </a:extLst>
               </a:tr>
               <a:tr h="585216">
                 <a:tc>
@@ -10212,11 +13181,6 @@
                     </a:solidFill>
                   </a:tcPr>
                 </a:tc>
-                <a:extLst>
-                  <a:ext uri="{0D108BD9-81ED-4DB2-BD59-A6C34878D82A}">
-                    <a16:rowId xmlns:a16="http://schemas.microsoft.com/office/drawing/2014/main" val="10002"/>
-                  </a:ext>
-                </a:extLst>
               </a:tr>
               <a:tr h="585216">
                 <a:tc>
@@ -10339,11 +13303,6 @@
                     </a:solidFill>
                   </a:tcPr>
                 </a:tc>
-                <a:extLst>
-                  <a:ext uri="{0D108BD9-81ED-4DB2-BD59-A6C34878D82A}">
-                    <a16:rowId xmlns:a16="http://schemas.microsoft.com/office/drawing/2014/main" val="10003"/>
-                  </a:ext>
-                </a:extLst>
               </a:tr>
               <a:tr h="585216">
                 <a:tc>
@@ -10466,11 +13425,6 @@
                     </a:solidFill>
                   </a:tcPr>
                 </a:tc>
-                <a:extLst>
-                  <a:ext uri="{0D108BD9-81ED-4DB2-BD59-A6C34878D82A}">
-                    <a16:rowId xmlns:a16="http://schemas.microsoft.com/office/drawing/2014/main" val="10004"/>
-                  </a:ext>
-                </a:extLst>
               </a:tr>
             </a:tbl>
           </a:graphicData>
@@ -10514,7 +13468,7 @@
           </a:fontRef>
         </p:style>
         <p:txBody>
-          <a:bodyPr wrap="square" lIns="182880" tIns="182880" rIns="182880" bIns="182880" rtlCol="0" anchor="ctr"/>
+          <a:bodyPr rtlCol="0" anchor="ctr" wrap="square" lIns="182880" tIns="182880" rIns="182880" bIns="182880"/>
           <a:lstStyle/>
           <a:p>
             <a:pPr algn="ctr">
@@ -10563,8 +13517,8 @@
 </p:sld>
 </file>
 
-<file path=ppt/slides/slide5.xml><?xml version="1.0" encoding="utf-8"?>
-<p:sld xmlns:a="http://schemas.openxmlformats.org/drawingml/2006/main" xmlns:r="http://schemas.openxmlformats.org/officeDocument/2006/relationships" xmlns:p="http://schemas.openxmlformats.org/presentationml/2006/main">
+<file path=ppt/slides/slide6.xml><?xml version="1.0" encoding="utf-8"?>
+<p:sld xmlns:a="http://schemas.openxmlformats.org/drawingml/2006/main" xmlns:p="http://schemas.openxmlformats.org/presentationml/2006/main" xmlns:r="http://schemas.openxmlformats.org/officeDocument/2006/relationships">
   <p:cSld>
     <p:spTree>
       <p:nvGrpSpPr>
@@ -10572,14 +13526,7 @@
         <p:cNvGrpSpPr/>
         <p:nvPr/>
       </p:nvGrpSpPr>
-      <p:grpSpPr>
-        <a:xfrm>
-          <a:off x="0" y="0"/>
-          <a:ext cx="0" cy="0"/>
-          <a:chOff x="0" y="0"/>
-          <a:chExt cx="0" cy="0"/>
-        </a:xfrm>
-      </p:grpSpPr>
+      <p:grpSpPr/>
       <p:sp>
         <p:nvSpPr>
           <p:cNvPr id="2" name="Rectangle 1"/>
@@ -10620,7 +13567,6 @@
           <a:lstStyle/>
           <a:p>
             <a:pPr algn="ctr"/>
-            <a:endParaRPr/>
           </a:p>
         </p:txBody>
       </p:sp>
@@ -10664,7 +13610,6 @@
           <a:lstStyle/>
           <a:p>
             <a:pPr algn="ctr"/>
-            <a:endParaRPr/>
           </a:p>
         </p:txBody>
       </p:sp>
@@ -10699,7 +13644,7 @@
               </a:defRPr>
             </a:pPr>
             <a:r>
-              <a:t>EDUVISION_DV | HIGHER EDUCATION INTELLIGENCE SYSTEM</a:t>
+              <a:t>MILESTONE 1 / MODULE 2 | DATA CLEANING &amp; STANDARDIZATION</a:t>
             </a:r>
           </a:p>
         </p:txBody>
@@ -10784,7 +13729,7 @@
               </a:defRPr>
             </a:pPr>
             <a:r>
-              <a:t>5 / 18</a:t>
+              <a:t>6 / 19</a:t>
             </a:r>
           </a:p>
         </p:txBody>
@@ -10827,7 +13772,7 @@
           </a:fontRef>
         </p:style>
         <p:txBody>
-          <a:bodyPr wrap="square" lIns="201168" tIns="201168" rIns="201168" bIns="201168" rtlCol="0" anchor="ctr"/>
+          <a:bodyPr rtlCol="0" anchor="ctr" wrap="square" lIns="201168" tIns="201168" rIns="201168" bIns="201168"/>
           <a:lstStyle/>
           <a:p>
             <a:pPr algn="ctr">
@@ -10906,7 +13851,7 @@
           </a:fontRef>
         </p:style>
         <p:txBody>
-          <a:bodyPr wrap="square" lIns="201168" tIns="201168" rIns="201168" bIns="201168" rtlCol="0" anchor="ctr"/>
+          <a:bodyPr rtlCol="0" anchor="ctr" wrap="square" lIns="201168" tIns="201168" rIns="201168" bIns="201168"/>
           <a:lstStyle/>
           <a:p>
             <a:pPr algn="ctr">
@@ -10985,7 +13930,7 @@
           </a:fontRef>
         </p:style>
         <p:txBody>
-          <a:bodyPr wrap="square" lIns="201168" tIns="201168" rIns="201168" bIns="201168" rtlCol="0" anchor="ctr"/>
+          <a:bodyPr rtlCol="0" anchor="ctr" wrap="square" lIns="201168" tIns="201168" rIns="201168" bIns="201168"/>
           <a:lstStyle/>
           <a:p>
             <a:pPr algn="ctr">
@@ -11060,7 +14005,7 @@
           </a:fontRef>
         </p:style>
         <p:txBody>
-          <a:bodyPr wrap="square" lIns="201168" tIns="201168" rIns="201168" bIns="201168" rtlCol="0" anchor="ctr"/>
+          <a:bodyPr rtlCol="0" anchor="ctr" wrap="square" lIns="201168" tIns="201168" rIns="201168" bIns="201168"/>
           <a:lstStyle/>
           <a:p>
             <a:pPr algn="ctr">
@@ -11109,8 +14054,8 @@
 </p:sld>
 </file>
 
-<file path=ppt/slides/slide6.xml><?xml version="1.0" encoding="utf-8"?>
-<p:sld xmlns:a="http://schemas.openxmlformats.org/drawingml/2006/main" xmlns:r="http://schemas.openxmlformats.org/officeDocument/2006/relationships" xmlns:p="http://schemas.openxmlformats.org/presentationml/2006/main">
+<file path=ppt/slides/slide7.xml><?xml version="1.0" encoding="utf-8"?>
+<p:sld xmlns:a="http://schemas.openxmlformats.org/drawingml/2006/main" xmlns:p="http://schemas.openxmlformats.org/presentationml/2006/main" xmlns:r="http://schemas.openxmlformats.org/officeDocument/2006/relationships">
   <p:cSld>
     <p:spTree>
       <p:nvGrpSpPr>
@@ -11118,14 +14063,7 @@
         <p:cNvGrpSpPr/>
         <p:nvPr/>
       </p:nvGrpSpPr>
-      <p:grpSpPr>
-        <a:xfrm>
-          <a:off x="0" y="0"/>
-          <a:ext cx="0" cy="0"/>
-          <a:chOff x="0" y="0"/>
-          <a:chExt cx="0" cy="0"/>
-        </a:xfrm>
-      </p:grpSpPr>
+      <p:grpSpPr/>
       <p:sp>
         <p:nvSpPr>
           <p:cNvPr id="2" name="Rectangle 1"/>
@@ -11166,7 +14104,6 @@
           <a:lstStyle/>
           <a:p>
             <a:pPr algn="ctr"/>
-            <a:endParaRPr/>
           </a:p>
         </p:txBody>
       </p:sp>
@@ -11210,7 +14147,6 @@
           <a:lstStyle/>
           <a:p>
             <a:pPr algn="ctr"/>
-            <a:endParaRPr/>
           </a:p>
         </p:txBody>
       </p:sp>
@@ -11245,7 +14181,7 @@
               </a:defRPr>
             </a:pPr>
             <a:r>
-              <a:t>EDUVISION_DV | HIGHER EDUCATION INTELLIGENCE SYSTEM</a:t>
+              <a:t>MILESTONE 1 / MODULE 2 | RELATIONAL STAR SCHEMA MODEL</a:t>
             </a:r>
           </a:p>
         </p:txBody>
@@ -11330,7 +14266,7 @@
               </a:defRPr>
             </a:pPr>
             <a:r>
-              <a:t>6 / 18</a:t>
+              <a:t>7 / 19</a:t>
             </a:r>
           </a:p>
         </p:txBody>
@@ -11373,7 +14309,7 @@
           </a:fontRef>
         </p:style>
         <p:txBody>
-          <a:bodyPr wrap="square" lIns="228600" tIns="228600" rIns="228600" bIns="228600" rtlCol="0" anchor="ctr"/>
+          <a:bodyPr rtlCol="0" anchor="ctr" wrap="square" lIns="228600" tIns="228600" rIns="228600" bIns="228600"/>
           <a:lstStyle/>
           <a:p>
             <a:pPr algn="ctr">
@@ -11405,11 +14341,11 @@
             </a:r>
             <a:br/>
             <a:r>
-              <a:t>• `dim_university` (1,503 rows): Master institutional entity with surrogate key `U0001`..`U1503`.</a:t>
-            </a:r>
-            <a:br/>
-            <a:r>
-              <a:t>• `dim_country` (106 rows): Conformed country entity with surrogate key `C0001`..`C0106`.</a:t>
+              <a:t>• dim_university (1,503 rows): Master institutional entity with surrogate key U0001..U1503 in Milestone 1 / Module 2.</a:t>
+            </a:r>
+            <a:br/>
+            <a:r>
+              <a:t>• dim_country (106 rows): Conformed country entity with surrogate key C0001..C0106.</a:t>
             </a:r>
           </a:p>
           <a:p>
@@ -11429,19 +14365,19 @@
             </a:r>
             <a:br/>
             <a:r>
-              <a:t>• `fact_university_performance` (1,503 rows): QS 2025 ranking metrics.</a:t>
-            </a:r>
-            <a:br/>
-            <a:r>
-              <a:t>• `fact_research` (849 rows): THE 2024 citation &amp; productivity metrics.</a:t>
-            </a:r>
-            <a:br/>
-            <a:r>
-              <a:t>• `fact_student` (804 rows): WUR 2023 enrollment &amp; staffing metrics.</a:t>
-            </a:r>
-            <a:br/>
-            <a:r>
-              <a:t>• `fact_country_education` (2,243 rows): World Bank macroeconomic indicators.</a:t>
+              <a:t>• fact_university_performance (1,503 rows): QS 2025 ranking metrics.</a:t>
+            </a:r>
+            <a:br/>
+            <a:r>
+              <a:t>• fact_research (849 rows): THE 2024 citation &amp; productivity metrics.</a:t>
+            </a:r>
+            <a:br/>
+            <a:r>
+              <a:t>• fact_student (804 rows): WUR 2023 enrollment &amp; staffing metrics.</a:t>
+            </a:r>
+            <a:br/>
+            <a:r>
+              <a:t>• fact_country_education (2,243 rows): World Bank macroeconomic indicators.</a:t>
             </a:r>
           </a:p>
           <a:p>
@@ -11473,7 +14409,7 @@
               </a:defRPr>
             </a:pPr>
             <a:r>
-              <a:t>Analytical Master (`kpi_master`): Consolidated pre-joined table (1,503 rows) containing all six core KPIs for high-performance Tableau querying.</a:t>
+              <a:t>Analytical Master (kpi_master): Consolidated pre-joined table (1,503 rows in Milestone 2 / Module 3) containing all six core KPIs for high-performance Tableau querying.</a:t>
             </a:r>
           </a:p>
         </p:txBody>
@@ -11516,7 +14452,7 @@
           </a:fontRef>
         </p:style>
         <p:txBody>
-          <a:bodyPr wrap="square" lIns="228600" tIns="228600" rIns="228600" bIns="228600" rtlCol="0" anchor="ctr"/>
+          <a:bodyPr rtlCol="0" anchor="ctr" wrap="square" lIns="228600" tIns="228600" rIns="228600" bIns="228600"/>
           <a:lstStyle/>
           <a:p>
             <a:pPr algn="ctr">
@@ -11645,8 +14581,8 @@
 </p:sld>
 </file>
 
-<file path=ppt/slides/slide7.xml><?xml version="1.0" encoding="utf-8"?>
-<p:sld xmlns:a="http://schemas.openxmlformats.org/drawingml/2006/main" xmlns:r="http://schemas.openxmlformats.org/officeDocument/2006/relationships" xmlns:p="http://schemas.openxmlformats.org/presentationml/2006/main">
+<file path=ppt/slides/slide8.xml><?xml version="1.0" encoding="utf-8"?>
+<p:sld xmlns:a="http://schemas.openxmlformats.org/drawingml/2006/main" xmlns:p="http://schemas.openxmlformats.org/presentationml/2006/main" xmlns:r="http://schemas.openxmlformats.org/officeDocument/2006/relationships">
   <p:cSld>
     <p:spTree>
       <p:nvGrpSpPr>
@@ -11654,14 +14590,7 @@
         <p:cNvGrpSpPr/>
         <p:nvPr/>
       </p:nvGrpSpPr>
-      <p:grpSpPr>
-        <a:xfrm>
-          <a:off x="0" y="0"/>
-          <a:ext cx="0" cy="0"/>
-          <a:chOff x="0" y="0"/>
-          <a:chExt cx="0" cy="0"/>
-        </a:xfrm>
-      </p:grpSpPr>
+      <p:grpSpPr/>
       <p:sp>
         <p:nvSpPr>
           <p:cNvPr id="2" name="Rectangle 1"/>
@@ -11702,7 +14631,6 @@
           <a:lstStyle/>
           <a:p>
             <a:pPr algn="ctr"/>
-            <a:endParaRPr/>
           </a:p>
         </p:txBody>
       </p:sp>
@@ -11746,7 +14674,6 @@
           <a:lstStyle/>
           <a:p>
             <a:pPr algn="ctr"/>
-            <a:endParaRPr/>
           </a:p>
         </p:txBody>
       </p:sp>
@@ -11781,7 +14708,7 @@
               </a:defRPr>
             </a:pPr>
             <a:r>
-              <a:t>EDUVISION_DV | HIGHER EDUCATION INTELLIGENCE SYSTEM</a:t>
+              <a:t>MILESTONE 2 / MODULE 3 | KPI FORMULATION &amp; METRICS</a:t>
             </a:r>
           </a:p>
         </p:txBody>
@@ -11866,7 +14793,7 @@
               </a:defRPr>
             </a:pPr>
             <a:r>
-              <a:t>7 / 18</a:t>
+              <a:t>8 / 19</a:t>
             </a:r>
           </a:p>
         </p:txBody>
@@ -11890,41 +14817,11 @@
                 <a:tableStyleId>{5C22544A-7EE6-4342-B048-85BDC9FD1C3A}</a:tableStyleId>
               </a:tblPr>
               <a:tblGrid>
-                <a:gridCol w="2011680">
-                  <a:extLst>
-                    <a:ext uri="{9D8B030D-6E8A-4147-A177-3AD203B41FA5}">
-                      <a16:colId xmlns:a16="http://schemas.microsoft.com/office/drawing/2014/main" val="20000"/>
-                    </a:ext>
-                  </a:extLst>
-                </a:gridCol>
-                <a:gridCol w="1828800">
-                  <a:extLst>
-                    <a:ext uri="{9D8B030D-6E8A-4147-A177-3AD203B41FA5}">
-                      <a16:colId xmlns:a16="http://schemas.microsoft.com/office/drawing/2014/main" val="20001"/>
-                    </a:ext>
-                  </a:extLst>
-                </a:gridCol>
-                <a:gridCol w="3962095">
-                  <a:extLst>
-                    <a:ext uri="{9D8B030D-6E8A-4147-A177-3AD203B41FA5}">
-                      <a16:colId xmlns:a16="http://schemas.microsoft.com/office/drawing/2014/main" val="20002"/>
-                    </a:ext>
-                  </a:extLst>
-                </a:gridCol>
-                <a:gridCol w="1463040">
-                  <a:extLst>
-                    <a:ext uri="{9D8B030D-6E8A-4147-A177-3AD203B41FA5}">
-                      <a16:colId xmlns:a16="http://schemas.microsoft.com/office/drawing/2014/main" val="20003"/>
-                    </a:ext>
-                  </a:extLst>
-                </a:gridCol>
-                <a:gridCol w="1463040">
-                  <a:extLst>
-                    <a:ext uri="{9D8B030D-6E8A-4147-A177-3AD203B41FA5}">
-                      <a16:colId xmlns:a16="http://schemas.microsoft.com/office/drawing/2014/main" val="20004"/>
-                    </a:ext>
-                  </a:extLst>
-                </a:gridCol>
+                <a:gridCol w="2011680"/>
+                <a:gridCol w="1828800"/>
+                <a:gridCol w="3962095"/>
+                <a:gridCol w="1463040"/>
+                <a:gridCol w="1463040"/>
               </a:tblGrid>
               <a:tr h="522514">
                 <a:tc>
@@ -12047,11 +14944,6 @@
                     </a:solidFill>
                   </a:tcPr>
                 </a:tc>
-                <a:extLst>
-                  <a:ext uri="{0D108BD9-81ED-4DB2-BD59-A6C34878D82A}">
-                    <a16:rowId xmlns:a16="http://schemas.microsoft.com/office/drawing/2014/main" val="10000"/>
-                  </a:ext>
-                </a:extLst>
               </a:tr>
               <a:tr h="522514">
                 <a:tc>
@@ -12174,11 +15066,6 @@
                     </a:solidFill>
                   </a:tcPr>
                 </a:tc>
-                <a:extLst>
-                  <a:ext uri="{0D108BD9-81ED-4DB2-BD59-A6C34878D82A}">
-                    <a16:rowId xmlns:a16="http://schemas.microsoft.com/office/drawing/2014/main" val="10001"/>
-                  </a:ext>
-                </a:extLst>
               </a:tr>
               <a:tr h="522514">
                 <a:tc>
@@ -12301,11 +15188,6 @@
                     </a:solidFill>
                   </a:tcPr>
                 </a:tc>
-                <a:extLst>
-                  <a:ext uri="{0D108BD9-81ED-4DB2-BD59-A6C34878D82A}">
-                    <a16:rowId xmlns:a16="http://schemas.microsoft.com/office/drawing/2014/main" val="10002"/>
-                  </a:ext>
-                </a:extLst>
               </a:tr>
               <a:tr h="522514">
                 <a:tc>
@@ -12428,11 +15310,6 @@
                     </a:solidFill>
                   </a:tcPr>
                 </a:tc>
-                <a:extLst>
-                  <a:ext uri="{0D108BD9-81ED-4DB2-BD59-A6C34878D82A}">
-                    <a16:rowId xmlns:a16="http://schemas.microsoft.com/office/drawing/2014/main" val="10003"/>
-                  </a:ext>
-                </a:extLst>
               </a:tr>
               <a:tr h="522514">
                 <a:tc>
@@ -12555,11 +15432,6 @@
                     </a:solidFill>
                   </a:tcPr>
                 </a:tc>
-                <a:extLst>
-                  <a:ext uri="{0D108BD9-81ED-4DB2-BD59-A6C34878D82A}">
-                    <a16:rowId xmlns:a16="http://schemas.microsoft.com/office/drawing/2014/main" val="10004"/>
-                  </a:ext>
-                </a:extLst>
               </a:tr>
               <a:tr h="522514">
                 <a:tc>
@@ -12682,11 +15554,6 @@
                     </a:solidFill>
                   </a:tcPr>
                 </a:tc>
-                <a:extLst>
-                  <a:ext uri="{0D108BD9-81ED-4DB2-BD59-A6C34878D82A}">
-                    <a16:rowId xmlns:a16="http://schemas.microsoft.com/office/drawing/2014/main" val="10005"/>
-                  </a:ext>
-                </a:extLst>
               </a:tr>
               <a:tr h="522516">
                 <a:tc>
@@ -12809,11 +15676,6 @@
                     </a:solidFill>
                   </a:tcPr>
                 </a:tc>
-                <a:extLst>
-                  <a:ext uri="{0D108BD9-81ED-4DB2-BD59-A6C34878D82A}">
-                    <a16:rowId xmlns:a16="http://schemas.microsoft.com/office/drawing/2014/main" val="10006"/>
-                  </a:ext>
-                </a:extLst>
               </a:tr>
             </a:tbl>
           </a:graphicData>
@@ -12857,7 +15719,7 @@
           </a:fontRef>
         </p:style>
         <p:txBody>
-          <a:bodyPr wrap="square" lIns="137160" tIns="137160" rIns="137160" bIns="137160" rtlCol="0" anchor="ctr"/>
+          <a:bodyPr rtlCol="0" anchor="ctr" wrap="square" lIns="137160" tIns="137160" rIns="137160" bIns="137160"/>
           <a:lstStyle/>
           <a:p>
             <a:pPr algn="ctr">
@@ -12902,8 +15764,8 @@
 </p:sld>
 </file>
 
-<file path=ppt/slides/slide8.xml><?xml version="1.0" encoding="utf-8"?>
-<p:sld xmlns:a="http://schemas.openxmlformats.org/drawingml/2006/main" xmlns:r="http://schemas.openxmlformats.org/officeDocument/2006/relationships" xmlns:p="http://schemas.openxmlformats.org/presentationml/2006/main">
+<file path=ppt/slides/slide9.xml><?xml version="1.0" encoding="utf-8"?>
+<p:sld xmlns:a="http://schemas.openxmlformats.org/drawingml/2006/main" xmlns:p="http://schemas.openxmlformats.org/presentationml/2006/main" xmlns:r="http://schemas.openxmlformats.org/officeDocument/2006/relationships">
   <p:cSld>
     <p:spTree>
       <p:nvGrpSpPr>
@@ -12911,14 +15773,7 @@
         <p:cNvGrpSpPr/>
         <p:nvPr/>
       </p:nvGrpSpPr>
-      <p:grpSpPr>
-        <a:xfrm>
-          <a:off x="0" y="0"/>
-          <a:ext cx="0" cy="0"/>
-          <a:chOff x="0" y="0"/>
-          <a:chExt cx="0" cy="0"/>
-        </a:xfrm>
-      </p:grpSpPr>
+      <p:grpSpPr/>
       <p:sp>
         <p:nvSpPr>
           <p:cNvPr id="2" name="Rectangle 1"/>
@@ -12959,7 +15814,6 @@
           <a:lstStyle/>
           <a:p>
             <a:pPr algn="ctr"/>
-            <a:endParaRPr/>
           </a:p>
         </p:txBody>
       </p:sp>
@@ -13003,7 +15857,6 @@
           <a:lstStyle/>
           <a:p>
             <a:pPr algn="ctr"/>
-            <a:endParaRPr/>
           </a:p>
         </p:txBody>
       </p:sp>
@@ -13038,7 +15891,7 @@
               </a:defRPr>
             </a:pPr>
             <a:r>
-              <a:t>EDUVISION_DV | HIGHER EDUCATION INTELLIGENCE SYSTEM</a:t>
+              <a:t>MILESTONE 2 / MODULE 3 | METHODOLOGICAL FORMULATIONS</a:t>
             </a:r>
           </a:p>
         </p:txBody>
@@ -13123,7 +15976,7 @@
               </a:defRPr>
             </a:pPr>
             <a:r>
-              <a:t>8 / 18</a:t>
+              <a:t>9 / 19</a:t>
             </a:r>
           </a:p>
         </p:txBody>
@@ -13166,11 +16019,11 @@
           </a:fontRef>
         </p:style>
         <p:txBody>
-          <a:bodyPr wrap="square" lIns="164592" tIns="164592" rIns="164592" bIns="164592" rtlCol="0" anchor="ctr"/>
+          <a:bodyPr rtlCol="0" anchor="ctr" wrap="square" lIns="182880" tIns="182880" rIns="182880" bIns="182880"/>
           <a:lstStyle/>
           <a:p>
             <a:pPr algn="ctr">
-              <a:defRPr sz="1000" b="1">
+              <a:defRPr sz="1100" b="1">
                 <a:solidFill>
                   <a:srgbClr val="10B981"/>
                 </a:solidFill>
@@ -13184,9 +16037,9 @@
           <a:p>
             <a:pPr>
               <a:spcBef>
-                <a:spcPts val="600"/>
+                <a:spcPts val="800"/>
               </a:spcBef>
-              <a:defRPr sz="800">
+              <a:defRPr sz="900">
                 <a:solidFill>
                   <a:srgbClr val="CBD5E1"/>
                 </a:solidFill>
@@ -13247,11 +16100,11 @@
           </a:fontRef>
         </p:style>
         <p:txBody>
-          <a:bodyPr wrap="square" lIns="164592" tIns="164592" rIns="164592" bIns="164592" rtlCol="0" anchor="ctr"/>
+          <a:bodyPr rtlCol="0" anchor="ctr" wrap="square" lIns="182880" tIns="182880" rIns="182880" bIns="182880"/>
           <a:lstStyle/>
           <a:p>
             <a:pPr algn="ctr">
-              <a:defRPr sz="1000" b="1">
+              <a:defRPr sz="1100" b="1">
                 <a:solidFill>
                   <a:srgbClr val="06B6D4"/>
                 </a:solidFill>
@@ -13265,9 +16118,9 @@
           <a:p>
             <a:pPr>
               <a:spcBef>
-                <a:spcPts val="600"/>
+                <a:spcPts val="800"/>
               </a:spcBef>
-              <a:defRPr sz="800">
+              <a:defRPr sz="900">
                 <a:solidFill>
                   <a:srgbClr val="CBD5E1"/>
                 </a:solidFill>
@@ -13328,13 +16181,13 @@
           </a:fontRef>
         </p:style>
         <p:txBody>
-          <a:bodyPr wrap="square" lIns="164592" tIns="164592" rIns="164592" bIns="164592" rtlCol="0" anchor="ctr"/>
+          <a:bodyPr rtlCol="0" anchor="ctr" wrap="square" lIns="182880" tIns="182880" rIns="182880" bIns="182880"/>
           <a:lstStyle/>
           <a:p>
             <a:pPr algn="ctr">
-              <a:defRPr sz="1000" b="1">
-                <a:solidFill>
-                  <a:srgbClr val="8B5CF6"/>
+              <a:defRPr sz="1100" b="1">
+                <a:solidFill>
+                  <a:srgbClr val="F59E0B"/>
                 </a:solidFill>
                 <a:latin typeface="Segoe UI"/>
               </a:defRPr>
@@ -13346,9 +16199,9 @@
           <a:p>
             <a:pPr>
               <a:spcBef>
-                <a:spcPts val="600"/>
+                <a:spcPts val="800"/>
               </a:spcBef>
-              <a:defRPr sz="800">
+              <a:defRPr sz="900">
                 <a:solidFill>
                   <a:srgbClr val="CBD5E1"/>
                 </a:solidFill>
@@ -13356,17 +16209,17 @@
               </a:defRPr>
             </a:pPr>
             <a:r>
-              <a:t>Captures instructional capacity and mentorship availability:</a:t>
-            </a:r>
-            <a:br/>
-            <a:br/>
-            <a:r>
-              <a:t>Ratio = Students per Academic Staff Member</a:t>
-            </a:r>
-            <a:br/>
-            <a:br/>
-            <a:r>
-              <a:t>Preserved strictly as an empirical ratio (e.g. 8.2:1 for MIT). QS Faculty Score is kept as a separate index.</a:t>
+              <a:t>Empirical metric reporting exact student burden per faculty FTE:</a:t>
+            </a:r>
+            <a:br/>
+            <a:br/>
+            <a:r>
+              <a:t>Ratio = Total FTE Students / Total Academic Staff FTE</a:t>
+            </a:r>
+            <a:br/>
+            <a:br/>
+            <a:r>
+              <a:t>A lower ratio indicates intensive faculty mentorship and smaller tutorial class cohorts (e.g., Caltech: 6.4:1).</a:t>
             </a:r>
           </a:p>
         </p:txBody>
@@ -13409,13 +16262,13 @@
           </a:fontRef>
         </p:style>
         <p:txBody>
-          <a:bodyPr wrap="square" lIns="164592" tIns="164592" rIns="164592" bIns="164592" rtlCol="0" anchor="ctr"/>
+          <a:bodyPr rtlCol="0" anchor="ctr" wrap="square" lIns="182880" tIns="182880" rIns="182880" bIns="182880"/>
           <a:lstStyle/>
           <a:p>
             <a:pPr algn="ctr">
-              <a:defRPr sz="1000" b="1">
-                <a:solidFill>
-                  <a:srgbClr val="F59E0B"/>
+              <a:defRPr sz="1100" b="1">
+                <a:solidFill>
+                  <a:srgbClr val="8B5CF6"/>
                 </a:solidFill>
                 <a:latin typeface="Segoe UI"/>
               </a:defRPr>
@@ -13427,9 +16280,9 @@
           <a:p>
             <a:pPr>
               <a:spcBef>
-                <a:spcPts val="600"/>
+                <a:spcPts val="800"/>
               </a:spcBef>
-              <a:defRPr sz="800">
+              <a:defRPr sz="900">
                 <a:solidFill>
                   <a:srgbClr val="CBD5E1"/>
                 </a:solidFill>
@@ -13437,17 +16290,17 @@
               </a:defRPr>
             </a:pPr>
             <a:r>
-              <a:t>Measures global attractiveness and campus diversity:</a:t>
-            </a:r>
-            <a:br/>
-            <a:br/>
-            <a:r>
-              <a:t>Intl % = (International FTE Students / Total FTE Students) * 100</a:t>
-            </a:r>
-            <a:br/>
-            <a:br/>
-            <a:r>
-              <a:t>Reports actual empirical percentages (e.g. 33.0% for MIT, 61.0% for Imperial College London).</a:t>
+              <a:t>Measures global talent attraction and multicultural learning:</a:t>
+            </a:r>
+            <a:br/>
+            <a:br/>
+            <a:r>
+              <a:t>Intl % = (International FTE Students / Total FTE) * 100</a:t>
+            </a:r>
+            <a:br/>
+            <a:br/>
+            <a:r>
+              <a:t>Calculated directly from empirical headcount; preserves statistical authenticity across 804 matched universities.</a:t>
             </a:r>
           </a:p>
         </p:txBody>
@@ -13490,11 +16343,11 @@
           </a:fontRef>
         </p:style>
         <p:txBody>
-          <a:bodyPr wrap="square" lIns="164592" tIns="164592" rIns="164592" bIns="164592" rtlCol="0" anchor="ctr"/>
+          <a:bodyPr rtlCol="0" anchor="ctr" wrap="square" lIns="182880" tIns="182880" rIns="182880" bIns="182880"/>
           <a:lstStyle/>
           <a:p>
             <a:pPr algn="ctr">
-              <a:defRPr sz="1000" b="1">
+              <a:defRPr sz="1100" b="1">
                 <a:solidFill>
                   <a:srgbClr val="3B82F6"/>
                 </a:solidFill>
@@ -13502,15 +16355,15 @@
               </a:defRPr>
             </a:pPr>
             <a:r>
-              <a:t>KPI 5: ACADEMIC REPUTATION</a:t>
+              <a:t>KPI 5: ACADEMIC REPUTATION SCORE</a:t>
             </a:r>
           </a:p>
           <a:p>
             <a:pPr>
               <a:spcBef>
-                <a:spcPts val="600"/>
+                <a:spcPts val="800"/>
               </a:spcBef>
-              <a:defRPr sz="800">
+              <a:defRPr sz="900">
                 <a:solidFill>
                   <a:srgbClr val="CBD5E1"/>
                 </a:solidFill>
@@ -13518,7 +16371,7 @@
               </a:defRPr>
             </a:pPr>
             <a:r>
-              <a:t>Scholarly prestige based on global peer review:</a:t>
+              <a:t>Global peer evaluation based on over 100,000 academic surveys:</a:t>
             </a:r>
             <a:br/>
             <a:br/>
@@ -13528,7 +16381,7 @@
             <a:br/>
             <a:br/>
             <a:r>
-              <a:t>Derived from survey responses of over 100,000 active university academics worldwide.</a:t>
+              <a:t>Captures institutional prestige, research leadership, and historical academic influence.</a:t>
             </a:r>
           </a:p>
         </p:txBody>
@@ -13571,13 +16424,13 @@
           </a:fontRef>
         </p:style>
         <p:txBody>
-          <a:bodyPr wrap="square" lIns="164592" tIns="164592" rIns="164592" bIns="164592" rtlCol="0" anchor="ctr"/>
+          <a:bodyPr rtlCol="0" anchor="ctr" wrap="square" lIns="182880" tIns="182880" rIns="182880" bIns="182880"/>
           <a:lstStyle/>
           <a:p>
             <a:pPr algn="ctr">
-              <a:defRPr sz="1000" b="1">
-                <a:solidFill>
-                  <a:srgbClr val="06B6D4"/>
+              <a:defRPr sz="1100" b="1">
+                <a:solidFill>
+                  <a:srgbClr val="10B981"/>
                 </a:solidFill>
                 <a:latin typeface="Segoe UI"/>
               </a:defRPr>
@@ -13589,9 +16442,9 @@
           <a:p>
             <a:pPr>
               <a:spcBef>
-                <a:spcPts val="600"/>
+                <a:spcPts val="800"/>
               </a:spcBef>
-              <a:defRPr sz="800">
+              <a:defRPr sz="900">
                 <a:solidFill>
                   <a:srgbClr val="CBD5E1"/>
                 </a:solidFill>
@@ -13599,2177 +16452,17 @@
               </a:defRPr>
             </a:pPr>
             <a:r>
-              <a:t>Derived composite index capturing volume, citations, and collaboration:</a:t>
-            </a:r>
-            <a:br/>
-            <a:br/>
-            <a:r>
-              <a:t>Productivity = 0.50 * Research + 0.30 * Citations + 0.20 * Network</a:t>
-            </a:r>
-            <a:br/>
-            <a:br/>
-            <a:r>
-              <a:t>Excludes non-research indicators like campus sustainability.</a:t>
-            </a:r>
-          </a:p>
-        </p:txBody>
-      </p:sp>
-    </p:spTree>
-  </p:cSld>
-  <p:clrMapOvr>
-    <a:masterClrMapping/>
-  </p:clrMapOvr>
-</p:sld>
-</file>
-
-<file path=ppt/slides/slide9.xml><?xml version="1.0" encoding="utf-8"?>
-<p:sld xmlns:a="http://schemas.openxmlformats.org/drawingml/2006/main" xmlns:r="http://schemas.openxmlformats.org/officeDocument/2006/relationships" xmlns:p="http://schemas.openxmlformats.org/presentationml/2006/main">
-  <p:cSld>
-    <p:spTree>
-      <p:nvGrpSpPr>
-        <p:cNvPr id="1" name=""/>
-        <p:cNvGrpSpPr/>
-        <p:nvPr/>
-      </p:nvGrpSpPr>
-      <p:grpSpPr>
-        <a:xfrm>
-          <a:off x="0" y="0"/>
-          <a:ext cx="0" cy="0"/>
-          <a:chOff x="0" y="0"/>
-          <a:chExt cx="0" cy="0"/>
-        </a:xfrm>
-      </p:grpSpPr>
-      <p:sp>
-        <p:nvSpPr>
-          <p:cNvPr id="2" name="Rectangle 1"/>
-          <p:cNvSpPr/>
-          <p:nvPr/>
-        </p:nvSpPr>
-        <p:spPr>
-          <a:xfrm>
-            <a:off x="0" y="0"/>
-            <a:ext cx="12191695" cy="6858000"/>
-          </a:xfrm>
-          <a:prstGeom prst="rect">
-            <a:avLst/>
-          </a:prstGeom>
-          <a:solidFill>
-            <a:srgbClr val="0F172A"/>
-          </a:solidFill>
-          <a:ln>
-            <a:noFill/>
-          </a:ln>
-        </p:spPr>
-        <p:style>
-          <a:lnRef idx="1">
-            <a:schemeClr val="accent1"/>
-          </a:lnRef>
-          <a:fillRef idx="3">
-            <a:schemeClr val="accent1"/>
-          </a:fillRef>
-          <a:effectRef idx="2">
-            <a:schemeClr val="accent1"/>
-          </a:effectRef>
-          <a:fontRef idx="minor">
-            <a:schemeClr val="lt1"/>
-          </a:fontRef>
-        </p:style>
-        <p:txBody>
-          <a:bodyPr rtlCol="0" anchor="ctr"/>
-          <a:lstStyle/>
-          <a:p>
-            <a:pPr algn="ctr"/>
-            <a:endParaRPr/>
-          </a:p>
-        </p:txBody>
-      </p:sp>
-      <p:sp>
-        <p:nvSpPr>
-          <p:cNvPr id="3" name="Rectangle 2"/>
-          <p:cNvSpPr/>
-          <p:nvPr/>
-        </p:nvSpPr>
-        <p:spPr>
-          <a:xfrm>
-            <a:off x="731520" y="365760"/>
-            <a:ext cx="10728655" cy="27432"/>
-          </a:xfrm>
-          <a:prstGeom prst="rect">
-            <a:avLst/>
-          </a:prstGeom>
-          <a:solidFill>
-            <a:srgbClr val="06B6D4"/>
-          </a:solidFill>
-          <a:ln>
-            <a:noFill/>
-          </a:ln>
-        </p:spPr>
-        <p:style>
-          <a:lnRef idx="1">
-            <a:schemeClr val="accent1"/>
-          </a:lnRef>
-          <a:fillRef idx="3">
-            <a:schemeClr val="accent1"/>
-          </a:fillRef>
-          <a:effectRef idx="2">
-            <a:schemeClr val="accent1"/>
-          </a:effectRef>
-          <a:fontRef idx="minor">
-            <a:schemeClr val="lt1"/>
-          </a:fontRef>
-        </p:style>
-        <p:txBody>
-          <a:bodyPr rtlCol="0" anchor="ctr"/>
-          <a:lstStyle/>
-          <a:p>
-            <a:pPr algn="ctr"/>
-            <a:endParaRPr/>
-          </a:p>
-        </p:txBody>
-      </p:sp>
-      <p:sp>
-        <p:nvSpPr>
-          <p:cNvPr id="4" name="TextBox 3"/>
-          <p:cNvSpPr txBox="1"/>
-          <p:nvPr/>
-        </p:nvSpPr>
-        <p:spPr>
-          <a:xfrm>
-            <a:off x="731520" y="438912"/>
-            <a:ext cx="10728655" cy="228600"/>
-          </a:xfrm>
-          <a:prstGeom prst="rect">
-            <a:avLst/>
-          </a:prstGeom>
-          <a:noFill/>
-        </p:spPr>
-        <p:txBody>
-          <a:bodyPr wrap="square" lIns="0" tIns="0" rIns="0" bIns="0">
-            <a:spAutoFit/>
-          </a:bodyPr>
-          <a:lstStyle/>
-          <a:p>
-            <a:pPr>
-              <a:defRPr sz="950" b="1">
-                <a:solidFill>
-                  <a:srgbClr val="10B981"/>
-                </a:solidFill>
-                <a:latin typeface="Segoe UI"/>
-              </a:defRPr>
-            </a:pPr>
-            <a:r>
-              <a:t>EDUVISION_DV | HIGHER EDUCATION INTELLIGENCE SYSTEM</a:t>
-            </a:r>
-          </a:p>
-        </p:txBody>
-      </p:sp>
-      <p:sp>
-        <p:nvSpPr>
-          <p:cNvPr id="5" name="TextBox 4"/>
-          <p:cNvSpPr txBox="1"/>
-          <p:nvPr/>
-        </p:nvSpPr>
-        <p:spPr>
-          <a:xfrm>
-            <a:off x="731520" y="685800"/>
-            <a:ext cx="10728655" cy="502920"/>
-          </a:xfrm>
-          <a:prstGeom prst="rect">
-            <a:avLst/>
-          </a:prstGeom>
-          <a:noFill/>
-        </p:spPr>
-        <p:txBody>
-          <a:bodyPr wrap="square" lIns="0" tIns="0" rIns="0" bIns="0">
-            <a:spAutoFit/>
-          </a:bodyPr>
-          <a:lstStyle/>
-          <a:p>
-            <a:pPr>
-              <a:defRPr sz="1900" b="1">
-                <a:solidFill>
-                  <a:srgbClr val="F8FAFC"/>
-                </a:solidFill>
-                <a:latin typeface="Segoe UI"/>
-              </a:defRPr>
-            </a:pPr>
-            <a:r>
-              <a:t>Empirical Results: Top World University Benchmarking</a:t>
-            </a:r>
-          </a:p>
-        </p:txBody>
-      </p:sp>
-      <p:sp>
-        <p:nvSpPr>
-          <p:cNvPr id="6" name="TextBox 5"/>
-          <p:cNvSpPr txBox="1"/>
-          <p:nvPr/>
-        </p:nvSpPr>
-        <p:spPr>
-          <a:xfrm>
-            <a:off x="731520" y="6473952"/>
-            <a:ext cx="10728655" cy="274320"/>
-          </a:xfrm>
-          <a:prstGeom prst="rect">
-            <a:avLst/>
-          </a:prstGeom>
-          <a:noFill/>
-        </p:spPr>
-        <p:txBody>
-          <a:bodyPr wrap="none" lIns="0" tIns="0" rIns="0" bIns="0">
-            <a:spAutoFit/>
-          </a:bodyPr>
-          <a:lstStyle/>
-          <a:p>
-            <a:pPr>
-              <a:defRPr sz="850">
-                <a:solidFill>
-                  <a:srgbClr val="94A3B8"/>
-                </a:solidFill>
-                <a:latin typeface="Segoe UI"/>
-              </a:defRPr>
-            </a:pPr>
-            <a:r>
-              <a:t>Infosys Springboard Internship 7.0 | Author: Sujay S | EduVision_DV</a:t>
-            </a:r>
-          </a:p>
-          <a:p>
-            <a:pPr algn="r">
-              <a:defRPr sz="850">
-                <a:solidFill>
-                  <a:srgbClr val="94A3B8"/>
-                </a:solidFill>
-                <a:latin typeface="Segoe UI"/>
-              </a:defRPr>
-            </a:pPr>
-            <a:r>
-              <a:t>9 / 18</a:t>
-            </a:r>
-          </a:p>
-        </p:txBody>
-      </p:sp>
-      <p:graphicFrame>
-        <p:nvGraphicFramePr>
-          <p:cNvPr id="7" name="Table 6"/>
-          <p:cNvGraphicFramePr>
-            <a:graphicFrameLocks noGrp="1"/>
-          </p:cNvGraphicFramePr>
-          <p:nvPr/>
-        </p:nvGraphicFramePr>
-        <p:xfrm>
-          <a:off x="731520" y="1371600"/>
-          <a:ext cx="10728655" cy="3931920"/>
-        </p:xfrm>
-        <a:graphic>
-          <a:graphicData uri="http://schemas.openxmlformats.org/drawingml/2006/table">
-            <a:tbl>
-              <a:tblPr firstRow="1" bandRow="1">
-                <a:tableStyleId>{5C22544A-7EE6-4342-B048-85BDC9FD1C3A}</a:tableStyleId>
-              </a:tblPr>
-              <a:tblGrid>
-                <a:gridCol w="2377440">
-                  <a:extLst>
-                    <a:ext uri="{9D8B030D-6E8A-4147-A177-3AD203B41FA5}">
-                      <a16:colId xmlns:a16="http://schemas.microsoft.com/office/drawing/2014/main" val="20000"/>
-                    </a:ext>
-                  </a:extLst>
-                </a:gridCol>
-                <a:gridCol w="822960">
-                  <a:extLst>
-                    <a:ext uri="{9D8B030D-6E8A-4147-A177-3AD203B41FA5}">
-                      <a16:colId xmlns:a16="http://schemas.microsoft.com/office/drawing/2014/main" val="20001"/>
-                    </a:ext>
-                  </a:extLst>
-                </a:gridCol>
-                <a:gridCol w="1188720">
-                  <a:extLst>
-                    <a:ext uri="{9D8B030D-6E8A-4147-A177-3AD203B41FA5}">
-                      <a16:colId xmlns:a16="http://schemas.microsoft.com/office/drawing/2014/main" val="20002"/>
-                    </a:ext>
-                  </a:extLst>
-                </a:gridCol>
-                <a:gridCol w="1188720">
-                  <a:extLst>
-                    <a:ext uri="{9D8B030D-6E8A-4147-A177-3AD203B41FA5}">
-                      <a16:colId xmlns:a16="http://schemas.microsoft.com/office/drawing/2014/main" val="20003"/>
-                    </a:ext>
-                  </a:extLst>
-                </a:gridCol>
-                <a:gridCol w="1188720">
-                  <a:extLst>
-                    <a:ext uri="{9D8B030D-6E8A-4147-A177-3AD203B41FA5}">
-                      <a16:colId xmlns:a16="http://schemas.microsoft.com/office/drawing/2014/main" val="20004"/>
-                    </a:ext>
-                  </a:extLst>
-                </a:gridCol>
-                <a:gridCol w="1188720">
-                  <a:extLst>
-                    <a:ext uri="{9D8B030D-6E8A-4147-A177-3AD203B41FA5}">
-                      <a16:colId xmlns:a16="http://schemas.microsoft.com/office/drawing/2014/main" val="20005"/>
-                    </a:ext>
-                  </a:extLst>
-                </a:gridCol>
-                <a:gridCol w="1280160">
-                  <a:extLst>
-                    <a:ext uri="{9D8B030D-6E8A-4147-A177-3AD203B41FA5}">
-                      <a16:colId xmlns:a16="http://schemas.microsoft.com/office/drawing/2014/main" val="20006"/>
-                    </a:ext>
-                  </a:extLst>
-                </a:gridCol>
-                <a:gridCol w="1493215">
-                  <a:extLst>
-                    <a:ext uri="{9D8B030D-6E8A-4147-A177-3AD203B41FA5}">
-                      <a16:colId xmlns:a16="http://schemas.microsoft.com/office/drawing/2014/main" val="20007"/>
-                    </a:ext>
-                  </a:extLst>
-                </a:gridCol>
-              </a:tblGrid>
-              <a:tr h="436880">
-                <a:tc>
-                  <a:txBody>
-                    <a:bodyPr/>
-                    <a:lstStyle/>
-                    <a:p>
-                      <a:pPr>
-                        <a:defRPr sz="950" b="1">
-                          <a:solidFill>
-                            <a:srgbClr val="06B6D4"/>
-                          </a:solidFill>
-                          <a:latin typeface="Segoe UI"/>
-                        </a:defRPr>
-                      </a:pPr>
-                      <a:r>
-                        <a:t>Institution Name</a:t>
-                      </a:r>
-                    </a:p>
-                  </a:txBody>
-                  <a:tcPr>
-                    <a:solidFill>
-                      <a:srgbClr val="334155"/>
-                    </a:solidFill>
-                  </a:tcPr>
-                </a:tc>
-                <a:tc>
-                  <a:txBody>
-                    <a:bodyPr/>
-                    <a:lstStyle/>
-                    <a:p>
-                      <a:pPr>
-                        <a:defRPr sz="950" b="1">
-                          <a:solidFill>
-                            <a:srgbClr val="06B6D4"/>
-                          </a:solidFill>
-                          <a:latin typeface="Segoe UI"/>
-                        </a:defRPr>
-                      </a:pPr>
-                      <a:r>
-                        <a:t>Rank</a:t>
-                      </a:r>
-                    </a:p>
-                  </a:txBody>
-                  <a:tcPr>
-                    <a:solidFill>
-                      <a:srgbClr val="334155"/>
-                    </a:solidFill>
-                  </a:tcPr>
-                </a:tc>
-                <a:tc>
-                  <a:txBody>
-                    <a:bodyPr/>
-                    <a:lstStyle/>
-                    <a:p>
-                      <a:pPr>
-                        <a:defRPr sz="950" b="1">
-                          <a:solidFill>
-                            <a:srgbClr val="06B6D4"/>
-                          </a:solidFill>
-                          <a:latin typeface="Segoe UI"/>
-                        </a:defRPr>
-                      </a:pPr>
-                      <a:r>
-                        <a:t>Global Score</a:t>
-                      </a:r>
-                    </a:p>
-                  </a:txBody>
-                  <a:tcPr>
-                    <a:solidFill>
-                      <a:srgbClr val="334155"/>
-                    </a:solidFill>
-                  </a:tcPr>
-                </a:tc>
-                <a:tc>
-                  <a:txBody>
-                    <a:bodyPr/>
-                    <a:lstStyle/>
-                    <a:p>
-                      <a:pPr>
-                        <a:defRPr sz="950" b="1">
-                          <a:solidFill>
-                            <a:srgbClr val="06B6D4"/>
-                          </a:solidFill>
-                          <a:latin typeface="Segoe UI"/>
-                        </a:defRPr>
-                      </a:pPr>
-                      <a:r>
-                        <a:t>Res Impact</a:t>
-                      </a:r>
-                    </a:p>
-                  </a:txBody>
-                  <a:tcPr>
-                    <a:solidFill>
-                      <a:srgbClr val="334155"/>
-                    </a:solidFill>
-                  </a:tcPr>
-                </a:tc>
-                <a:tc>
-                  <a:txBody>
-                    <a:bodyPr/>
-                    <a:lstStyle/>
-                    <a:p>
-                      <a:pPr>
-                        <a:defRPr sz="950" b="1">
-                          <a:solidFill>
-                            <a:srgbClr val="06B6D4"/>
-                          </a:solidFill>
-                          <a:latin typeface="Segoe UI"/>
-                        </a:defRPr>
-                      </a:pPr>
-                      <a:r>
-                        <a:t>Staff Ratio</a:t>
-                      </a:r>
-                    </a:p>
-                  </a:txBody>
-                  <a:tcPr>
-                    <a:solidFill>
-                      <a:srgbClr val="334155"/>
-                    </a:solidFill>
-                  </a:tcPr>
-                </a:tc>
-                <a:tc>
-                  <a:txBody>
-                    <a:bodyPr/>
-                    <a:lstStyle/>
-                    <a:p>
-                      <a:pPr>
-                        <a:defRPr sz="950" b="1">
-                          <a:solidFill>
-                            <a:srgbClr val="06B6D4"/>
-                          </a:solidFill>
-                          <a:latin typeface="Segoe UI"/>
-                        </a:defRPr>
-                      </a:pPr>
-                      <a:r>
-                        <a:t>Intl %</a:t>
-                      </a:r>
-                    </a:p>
-                  </a:txBody>
-                  <a:tcPr>
-                    <a:solidFill>
-                      <a:srgbClr val="334155"/>
-                    </a:solidFill>
-                  </a:tcPr>
-                </a:tc>
-                <a:tc>
-                  <a:txBody>
-                    <a:bodyPr/>
-                    <a:lstStyle/>
-                    <a:p>
-                      <a:pPr>
-                        <a:defRPr sz="950" b="1">
-                          <a:solidFill>
-                            <a:srgbClr val="06B6D4"/>
-                          </a:solidFill>
-                          <a:latin typeface="Segoe UI"/>
-                        </a:defRPr>
-                      </a:pPr>
-                      <a:r>
-                        <a:t>Acad Rep</a:t>
-                      </a:r>
-                    </a:p>
-                  </a:txBody>
-                  <a:tcPr>
-                    <a:solidFill>
-                      <a:srgbClr val="334155"/>
-                    </a:solidFill>
-                  </a:tcPr>
-                </a:tc>
-                <a:tc>
-                  <a:txBody>
-                    <a:bodyPr/>
-                    <a:lstStyle/>
-                    <a:p>
-                      <a:pPr>
-                        <a:defRPr sz="950" b="1">
-                          <a:solidFill>
-                            <a:srgbClr val="06B6D4"/>
-                          </a:solidFill>
-                          <a:latin typeface="Segoe UI"/>
-                        </a:defRPr>
-                      </a:pPr>
-                      <a:r>
-                        <a:t>Prod Index</a:t>
-                      </a:r>
-                    </a:p>
-                  </a:txBody>
-                  <a:tcPr>
-                    <a:solidFill>
-                      <a:srgbClr val="334155"/>
-                    </a:solidFill>
-                  </a:tcPr>
-                </a:tc>
-                <a:extLst>
-                  <a:ext uri="{0D108BD9-81ED-4DB2-BD59-A6C34878D82A}">
-                    <a16:rowId xmlns:a16="http://schemas.microsoft.com/office/drawing/2014/main" val="10000"/>
-                  </a:ext>
-                </a:extLst>
-              </a:tr>
-              <a:tr h="436880">
-                <a:tc>
-                  <a:txBody>
-                    <a:bodyPr/>
-                    <a:lstStyle/>
-                    <a:p>
-                      <a:pPr>
-                        <a:defRPr sz="850">
-                          <a:solidFill>
-                            <a:srgbClr val="F8FAFC"/>
-                          </a:solidFill>
-                          <a:latin typeface="Segoe UI"/>
-                        </a:defRPr>
-                      </a:pPr>
-                      <a:r>
-                        <a:t>Massachusetts Institute of Tech (MIT)</a:t>
-                      </a:r>
-                    </a:p>
-                  </a:txBody>
-                  <a:tcPr>
-                    <a:solidFill>
-                      <a:srgbClr val="1E293B"/>
-                    </a:solidFill>
-                  </a:tcPr>
-                </a:tc>
-                <a:tc>
-                  <a:txBody>
-                    <a:bodyPr/>
-                    <a:lstStyle/>
-                    <a:p>
-                      <a:pPr>
-                        <a:defRPr sz="850">
-                          <a:solidFill>
-                            <a:srgbClr val="CBD5E1"/>
-                          </a:solidFill>
-                          <a:latin typeface="Segoe UI"/>
-                        </a:defRPr>
-                      </a:pPr>
-                      <a:r>
-                        <a:t>1</a:t>
-                      </a:r>
-                    </a:p>
-                  </a:txBody>
-                  <a:tcPr>
-                    <a:solidFill>
-                      <a:srgbClr val="1E293B"/>
-                    </a:solidFill>
-                  </a:tcPr>
-                </a:tc>
-                <a:tc>
-                  <a:txBody>
-                    <a:bodyPr/>
-                    <a:lstStyle/>
-                    <a:p>
-                      <a:pPr>
-                        <a:defRPr sz="850">
-                          <a:solidFill>
-                            <a:srgbClr val="CBD5E1"/>
-                          </a:solidFill>
-                          <a:latin typeface="Segoe UI"/>
-                        </a:defRPr>
-                      </a:pPr>
-                      <a:r>
-                        <a:t>100.00</a:t>
-                      </a:r>
-                    </a:p>
-                  </a:txBody>
-                  <a:tcPr>
-                    <a:solidFill>
-                      <a:srgbClr val="1E293B"/>
-                    </a:solidFill>
-                  </a:tcPr>
-                </a:tc>
-                <a:tc>
-                  <a:txBody>
-                    <a:bodyPr/>
-                    <a:lstStyle/>
-                    <a:p>
-                      <a:pPr>
-                        <a:defRPr sz="850">
-                          <a:solidFill>
-                            <a:srgbClr val="CBD5E1"/>
-                          </a:solidFill>
-                          <a:latin typeface="Segoe UI"/>
-                        </a:defRPr>
-                      </a:pPr>
-                      <a:r>
-                        <a:t>100.00</a:t>
-                      </a:r>
-                    </a:p>
-                  </a:txBody>
-                  <a:tcPr>
-                    <a:solidFill>
-                      <a:srgbClr val="1E293B"/>
-                    </a:solidFill>
-                  </a:tcPr>
-                </a:tc>
-                <a:tc>
-                  <a:txBody>
-                    <a:bodyPr/>
-                    <a:lstStyle/>
-                    <a:p>
-                      <a:pPr>
-                        <a:defRPr sz="850">
-                          <a:solidFill>
-                            <a:srgbClr val="CBD5E1"/>
-                          </a:solidFill>
-                          <a:latin typeface="Segoe UI"/>
-                        </a:defRPr>
-                      </a:pPr>
-                      <a:r>
-                        <a:t>8.2 : 1</a:t>
-                      </a:r>
-                    </a:p>
-                  </a:txBody>
-                  <a:tcPr>
-                    <a:solidFill>
-                      <a:srgbClr val="1E293B"/>
-                    </a:solidFill>
-                  </a:tcPr>
-                </a:tc>
-                <a:tc>
-                  <a:txBody>
-                    <a:bodyPr/>
-                    <a:lstStyle/>
-                    <a:p>
-                      <a:pPr>
-                        <a:defRPr sz="850">
-                          <a:solidFill>
-                            <a:srgbClr val="CBD5E1"/>
-                          </a:solidFill>
-                          <a:latin typeface="Segoe UI"/>
-                        </a:defRPr>
-                      </a:pPr>
-                      <a:r>
-                        <a:t>33.0%</a:t>
-                      </a:r>
-                    </a:p>
-                  </a:txBody>
-                  <a:tcPr>
-                    <a:solidFill>
-                      <a:srgbClr val="1E293B"/>
-                    </a:solidFill>
-                  </a:tcPr>
-                </a:tc>
-                <a:tc>
-                  <a:txBody>
-                    <a:bodyPr/>
-                    <a:lstStyle/>
-                    <a:p>
-                      <a:pPr>
-                        <a:defRPr sz="850">
-                          <a:solidFill>
-                            <a:srgbClr val="CBD5E1"/>
-                          </a:solidFill>
-                          <a:latin typeface="Segoe UI"/>
-                        </a:defRPr>
-                      </a:pPr>
-                      <a:r>
-                        <a:t>100.00</a:t>
-                      </a:r>
-                    </a:p>
-                  </a:txBody>
-                  <a:tcPr>
-                    <a:solidFill>
-                      <a:srgbClr val="1E293B"/>
-                    </a:solidFill>
-                  </a:tcPr>
-                </a:tc>
-                <a:tc>
-                  <a:txBody>
-                    <a:bodyPr/>
-                    <a:lstStyle/>
-                    <a:p>
-                      <a:pPr>
-                        <a:defRPr sz="850">
-                          <a:solidFill>
-                            <a:srgbClr val="F8FAFC"/>
-                          </a:solidFill>
-                          <a:latin typeface="Segoe UI"/>
-                        </a:defRPr>
-                      </a:pPr>
-                      <a:r>
-                        <a:t>97.30</a:t>
-                      </a:r>
-                    </a:p>
-                  </a:txBody>
-                  <a:tcPr>
-                    <a:solidFill>
-                      <a:srgbClr val="1E293B"/>
-                    </a:solidFill>
-                  </a:tcPr>
-                </a:tc>
-                <a:extLst>
-                  <a:ext uri="{0D108BD9-81ED-4DB2-BD59-A6C34878D82A}">
-                    <a16:rowId xmlns:a16="http://schemas.microsoft.com/office/drawing/2014/main" val="10001"/>
-                  </a:ext>
-                </a:extLst>
-              </a:tr>
-              <a:tr h="436880">
-                <a:tc>
-                  <a:txBody>
-                    <a:bodyPr/>
-                    <a:lstStyle/>
-                    <a:p>
-                      <a:pPr>
-                        <a:defRPr sz="850">
-                          <a:solidFill>
-                            <a:srgbClr val="F8FAFC"/>
-                          </a:solidFill>
-                          <a:latin typeface="Segoe UI"/>
-                        </a:defRPr>
-                      </a:pPr>
-                      <a:r>
-                        <a:t>Imperial College London</a:t>
-                      </a:r>
-                    </a:p>
-                  </a:txBody>
-                  <a:tcPr>
-                    <a:solidFill>
-                      <a:srgbClr val="1E293B"/>
-                    </a:solidFill>
-                  </a:tcPr>
-                </a:tc>
-                <a:tc>
-                  <a:txBody>
-                    <a:bodyPr/>
-                    <a:lstStyle/>
-                    <a:p>
-                      <a:pPr>
-                        <a:defRPr sz="850">
-                          <a:solidFill>
-                            <a:srgbClr val="CBD5E1"/>
-                          </a:solidFill>
-                          <a:latin typeface="Segoe UI"/>
-                        </a:defRPr>
-                      </a:pPr>
-                      <a:r>
-                        <a:t>2</a:t>
-                      </a:r>
-                    </a:p>
-                  </a:txBody>
-                  <a:tcPr>
-                    <a:solidFill>
-                      <a:srgbClr val="1E293B"/>
-                    </a:solidFill>
-                  </a:tcPr>
-                </a:tc>
-                <a:tc>
-                  <a:txBody>
-                    <a:bodyPr/>
-                    <a:lstStyle/>
-                    <a:p>
-                      <a:pPr>
-                        <a:defRPr sz="850">
-                          <a:solidFill>
-                            <a:srgbClr val="CBD5E1"/>
-                          </a:solidFill>
-                          <a:latin typeface="Segoe UI"/>
-                        </a:defRPr>
-                      </a:pPr>
-                      <a:r>
-                        <a:t>98.50</a:t>
-                      </a:r>
-                    </a:p>
-                  </a:txBody>
-                  <a:tcPr>
-                    <a:solidFill>
-                      <a:srgbClr val="1E293B"/>
-                    </a:solidFill>
-                  </a:tcPr>
-                </a:tc>
-                <a:tc>
-                  <a:txBody>
-                    <a:bodyPr/>
-                    <a:lstStyle/>
-                    <a:p>
-                      <a:pPr>
-                        <a:defRPr sz="850">
-                          <a:solidFill>
-                            <a:srgbClr val="CBD5E1"/>
-                          </a:solidFill>
-                          <a:latin typeface="Segoe UI"/>
-                        </a:defRPr>
-                      </a:pPr>
-                      <a:r>
-                        <a:t>93.90</a:t>
-                      </a:r>
-                    </a:p>
-                  </a:txBody>
-                  <a:tcPr>
-                    <a:solidFill>
-                      <a:srgbClr val="1E293B"/>
-                    </a:solidFill>
-                  </a:tcPr>
-                </a:tc>
-                <a:tc>
-                  <a:txBody>
-                    <a:bodyPr/>
-                    <a:lstStyle/>
-                    <a:p>
-                      <a:pPr>
-                        <a:defRPr sz="850">
-                          <a:solidFill>
-                            <a:srgbClr val="CBD5E1"/>
-                          </a:solidFill>
-                          <a:latin typeface="Segoe UI"/>
-                        </a:defRPr>
-                      </a:pPr>
-                      <a:r>
-                        <a:t>11.2 : 1</a:t>
-                      </a:r>
-                    </a:p>
-                  </a:txBody>
-                  <a:tcPr>
-                    <a:solidFill>
-                      <a:srgbClr val="1E293B"/>
-                    </a:solidFill>
-                  </a:tcPr>
-                </a:tc>
-                <a:tc>
-                  <a:txBody>
-                    <a:bodyPr/>
-                    <a:lstStyle/>
-                    <a:p>
-                      <a:pPr>
-                        <a:defRPr sz="850">
-                          <a:solidFill>
-                            <a:srgbClr val="CBD5E1"/>
-                          </a:solidFill>
-                          <a:latin typeface="Segoe UI"/>
-                        </a:defRPr>
-                      </a:pPr>
-                      <a:r>
-                        <a:t>61.0%</a:t>
-                      </a:r>
-                    </a:p>
-                  </a:txBody>
-                  <a:tcPr>
-                    <a:solidFill>
-                      <a:srgbClr val="1E293B"/>
-                    </a:solidFill>
-                  </a:tcPr>
-                </a:tc>
-                <a:tc>
-                  <a:txBody>
-                    <a:bodyPr/>
-                    <a:lstStyle/>
-                    <a:p>
-                      <a:pPr>
-                        <a:defRPr sz="850">
-                          <a:solidFill>
-                            <a:srgbClr val="CBD5E1"/>
-                          </a:solidFill>
-                          <a:latin typeface="Segoe UI"/>
-                        </a:defRPr>
-                      </a:pPr>
-                      <a:r>
-                        <a:t>98.50</a:t>
-                      </a:r>
-                    </a:p>
-                  </a:txBody>
-                  <a:tcPr>
-                    <a:solidFill>
-                      <a:srgbClr val="1E293B"/>
-                    </a:solidFill>
-                  </a:tcPr>
-                </a:tc>
-                <a:tc>
-                  <a:txBody>
-                    <a:bodyPr/>
-                    <a:lstStyle/>
-                    <a:p>
-                      <a:pPr>
-                        <a:defRPr sz="850">
-                          <a:solidFill>
-                            <a:srgbClr val="F8FAFC"/>
-                          </a:solidFill>
-                          <a:latin typeface="Segoe UI"/>
-                        </a:defRPr>
-                      </a:pPr>
-                      <a:r>
-                        <a:t>95.40</a:t>
-                      </a:r>
-                    </a:p>
-                  </a:txBody>
-                  <a:tcPr>
-                    <a:solidFill>
-                      <a:srgbClr val="1E293B"/>
-                    </a:solidFill>
-                  </a:tcPr>
-                </a:tc>
-                <a:extLst>
-                  <a:ext uri="{0D108BD9-81ED-4DB2-BD59-A6C34878D82A}">
-                    <a16:rowId xmlns:a16="http://schemas.microsoft.com/office/drawing/2014/main" val="10002"/>
-                  </a:ext>
-                </a:extLst>
-              </a:tr>
-              <a:tr h="436880">
-                <a:tc>
-                  <a:txBody>
-                    <a:bodyPr/>
-                    <a:lstStyle/>
-                    <a:p>
-                      <a:pPr>
-                        <a:defRPr sz="850">
-                          <a:solidFill>
-                            <a:srgbClr val="F8FAFC"/>
-                          </a:solidFill>
-                          <a:latin typeface="Segoe UI"/>
-                        </a:defRPr>
-                      </a:pPr>
-                      <a:r>
-                        <a:t>University of Oxford</a:t>
-                      </a:r>
-                    </a:p>
-                  </a:txBody>
-                  <a:tcPr>
-                    <a:solidFill>
-                      <a:srgbClr val="1E293B"/>
-                    </a:solidFill>
-                  </a:tcPr>
-                </a:tc>
-                <a:tc>
-                  <a:txBody>
-                    <a:bodyPr/>
-                    <a:lstStyle/>
-                    <a:p>
-                      <a:pPr>
-                        <a:defRPr sz="850">
-                          <a:solidFill>
-                            <a:srgbClr val="CBD5E1"/>
-                          </a:solidFill>
-                          <a:latin typeface="Segoe UI"/>
-                        </a:defRPr>
-                      </a:pPr>
-                      <a:r>
-                        <a:t>3</a:t>
-                      </a:r>
-                    </a:p>
-                  </a:txBody>
-                  <a:tcPr>
-                    <a:solidFill>
-                      <a:srgbClr val="1E293B"/>
-                    </a:solidFill>
-                  </a:tcPr>
-                </a:tc>
-                <a:tc>
-                  <a:txBody>
-                    <a:bodyPr/>
-                    <a:lstStyle/>
-                    <a:p>
-                      <a:pPr>
-                        <a:defRPr sz="850">
-                          <a:solidFill>
-                            <a:srgbClr val="CBD5E1"/>
-                          </a:solidFill>
-                          <a:latin typeface="Segoe UI"/>
-                        </a:defRPr>
-                      </a:pPr>
-                      <a:r>
-                        <a:t>96.90</a:t>
-                      </a:r>
-                    </a:p>
-                  </a:txBody>
-                  <a:tcPr>
-                    <a:solidFill>
-                      <a:srgbClr val="1E293B"/>
-                    </a:solidFill>
-                  </a:tcPr>
-                </a:tc>
-                <a:tc>
-                  <a:txBody>
-                    <a:bodyPr/>
-                    <a:lstStyle/>
-                    <a:p>
-                      <a:pPr>
-                        <a:defRPr sz="850">
-                          <a:solidFill>
-                            <a:srgbClr val="CBD5E1"/>
-                          </a:solidFill>
-                          <a:latin typeface="Segoe UI"/>
-                        </a:defRPr>
-                      </a:pPr>
-                      <a:r>
-                        <a:t>84.80</a:t>
-                      </a:r>
-                    </a:p>
-                  </a:txBody>
-                  <a:tcPr>
-                    <a:solidFill>
-                      <a:srgbClr val="1E293B"/>
-                    </a:solidFill>
-                  </a:tcPr>
-                </a:tc>
-                <a:tc>
-                  <a:txBody>
-                    <a:bodyPr/>
-                    <a:lstStyle/>
-                    <a:p>
-                      <a:pPr>
-                        <a:defRPr sz="850">
-                          <a:solidFill>
-                            <a:srgbClr val="CBD5E1"/>
-                          </a:solidFill>
-                          <a:latin typeface="Segoe UI"/>
-                        </a:defRPr>
-                      </a:pPr>
-                      <a:r>
-                        <a:t>10.6 : 1</a:t>
-                      </a:r>
-                    </a:p>
-                  </a:txBody>
-                  <a:tcPr>
-                    <a:solidFill>
-                      <a:srgbClr val="1E293B"/>
-                    </a:solidFill>
-                  </a:tcPr>
-                </a:tc>
-                <a:tc>
-                  <a:txBody>
-                    <a:bodyPr/>
-                    <a:lstStyle/>
-                    <a:p>
-                      <a:pPr>
-                        <a:defRPr sz="850">
-                          <a:solidFill>
-                            <a:srgbClr val="CBD5E1"/>
-                          </a:solidFill>
-                          <a:latin typeface="Segoe UI"/>
-                        </a:defRPr>
-                      </a:pPr>
-                      <a:r>
-                        <a:t>42.0%</a:t>
-                      </a:r>
-                    </a:p>
-                  </a:txBody>
-                  <a:tcPr>
-                    <a:solidFill>
-                      <a:srgbClr val="1E293B"/>
-                    </a:solidFill>
-                  </a:tcPr>
-                </a:tc>
-                <a:tc>
-                  <a:txBody>
-                    <a:bodyPr/>
-                    <a:lstStyle/>
-                    <a:p>
-                      <a:pPr>
-                        <a:defRPr sz="850">
-                          <a:solidFill>
-                            <a:srgbClr val="CBD5E1"/>
-                          </a:solidFill>
-                          <a:latin typeface="Segoe UI"/>
-                        </a:defRPr>
-                      </a:pPr>
-                      <a:r>
-                        <a:t>100.00</a:t>
-                      </a:r>
-                    </a:p>
-                  </a:txBody>
-                  <a:tcPr>
-                    <a:solidFill>
-                      <a:srgbClr val="1E293B"/>
-                    </a:solidFill>
-                  </a:tcPr>
-                </a:tc>
-                <a:tc>
-                  <a:txBody>
-                    <a:bodyPr/>
-                    <a:lstStyle/>
-                    <a:p>
-                      <a:pPr>
-                        <a:defRPr sz="850">
-                          <a:solidFill>
-                            <a:srgbClr val="F8FAFC"/>
-                          </a:solidFill>
-                          <a:latin typeface="Segoe UI"/>
-                        </a:defRPr>
-                      </a:pPr>
-                      <a:r>
-                        <a:t>95.44</a:t>
-                      </a:r>
-                    </a:p>
-                  </a:txBody>
-                  <a:tcPr>
-                    <a:solidFill>
-                      <a:srgbClr val="1E293B"/>
-                    </a:solidFill>
-                  </a:tcPr>
-                </a:tc>
-                <a:extLst>
-                  <a:ext uri="{0D108BD9-81ED-4DB2-BD59-A6C34878D82A}">
-                    <a16:rowId xmlns:a16="http://schemas.microsoft.com/office/drawing/2014/main" val="10003"/>
-                  </a:ext>
-                </a:extLst>
-              </a:tr>
-              <a:tr h="436880">
-                <a:tc>
-                  <a:txBody>
-                    <a:bodyPr/>
-                    <a:lstStyle/>
-                    <a:p>
-                      <a:pPr>
-                        <a:defRPr sz="850">
-                          <a:solidFill>
-                            <a:srgbClr val="F8FAFC"/>
-                          </a:solidFill>
-                          <a:latin typeface="Segoe UI"/>
-                        </a:defRPr>
-                      </a:pPr>
-                      <a:r>
-                        <a:t>Harvard University</a:t>
-                      </a:r>
-                    </a:p>
-                  </a:txBody>
-                  <a:tcPr>
-                    <a:solidFill>
-                      <a:srgbClr val="1E293B"/>
-                    </a:solidFill>
-                  </a:tcPr>
-                </a:tc>
-                <a:tc>
-                  <a:txBody>
-                    <a:bodyPr/>
-                    <a:lstStyle/>
-                    <a:p>
-                      <a:pPr>
-                        <a:defRPr sz="850">
-                          <a:solidFill>
-                            <a:srgbClr val="CBD5E1"/>
-                          </a:solidFill>
-                          <a:latin typeface="Segoe UI"/>
-                        </a:defRPr>
-                      </a:pPr>
-                      <a:r>
-                        <a:t>4</a:t>
-                      </a:r>
-                    </a:p>
-                  </a:txBody>
-                  <a:tcPr>
-                    <a:solidFill>
-                      <a:srgbClr val="1E293B"/>
-                    </a:solidFill>
-                  </a:tcPr>
-                </a:tc>
-                <a:tc>
-                  <a:txBody>
-                    <a:bodyPr/>
-                    <a:lstStyle/>
-                    <a:p>
-                      <a:pPr>
-                        <a:defRPr sz="850">
-                          <a:solidFill>
-                            <a:srgbClr val="CBD5E1"/>
-                          </a:solidFill>
-                          <a:latin typeface="Segoe UI"/>
-                        </a:defRPr>
-                      </a:pPr>
-                      <a:r>
-                        <a:t>96.80</a:t>
-                      </a:r>
-                    </a:p>
-                  </a:txBody>
-                  <a:tcPr>
-                    <a:solidFill>
-                      <a:srgbClr val="1E293B"/>
-                    </a:solidFill>
-                  </a:tcPr>
-                </a:tc>
-                <a:tc>
-                  <a:txBody>
-                    <a:bodyPr/>
-                    <a:lstStyle/>
-                    <a:p>
-                      <a:pPr>
-                        <a:defRPr sz="850">
-                          <a:solidFill>
-                            <a:srgbClr val="CBD5E1"/>
-                          </a:solidFill>
-                          <a:latin typeface="Segoe UI"/>
-                        </a:defRPr>
-                      </a:pPr>
-                      <a:r>
-                        <a:t>100.00</a:t>
-                      </a:r>
-                    </a:p>
-                  </a:txBody>
-                  <a:tcPr>
-                    <a:solidFill>
-                      <a:srgbClr val="1E293B"/>
-                    </a:solidFill>
-                  </a:tcPr>
-                </a:tc>
-                <a:tc>
-                  <a:txBody>
-                    <a:bodyPr/>
-                    <a:lstStyle/>
-                    <a:p>
-                      <a:pPr>
-                        <a:defRPr sz="850">
-                          <a:solidFill>
-                            <a:srgbClr val="CBD5E1"/>
-                          </a:solidFill>
-                          <a:latin typeface="Segoe UI"/>
-                        </a:defRPr>
-                      </a:pPr>
-                      <a:r>
-                        <a:t>9.6 : 1</a:t>
-                      </a:r>
-                    </a:p>
-                  </a:txBody>
-                  <a:tcPr>
-                    <a:solidFill>
-                      <a:srgbClr val="1E293B"/>
-                    </a:solidFill>
-                  </a:tcPr>
-                </a:tc>
-                <a:tc>
-                  <a:txBody>
-                    <a:bodyPr/>
-                    <a:lstStyle/>
-                    <a:p>
-                      <a:pPr>
-                        <a:defRPr sz="850">
-                          <a:solidFill>
-                            <a:srgbClr val="CBD5E1"/>
-                          </a:solidFill>
-                          <a:latin typeface="Segoe UI"/>
-                        </a:defRPr>
-                      </a:pPr>
-                      <a:r>
-                        <a:t>25.0%</a:t>
-                      </a:r>
-                    </a:p>
-                  </a:txBody>
-                  <a:tcPr>
-                    <a:solidFill>
-                      <a:srgbClr val="1E293B"/>
-                    </a:solidFill>
-                  </a:tcPr>
-                </a:tc>
-                <a:tc>
-                  <a:txBody>
-                    <a:bodyPr/>
-                    <a:lstStyle/>
-                    <a:p>
-                      <a:pPr>
-                        <a:defRPr sz="850">
-                          <a:solidFill>
-                            <a:srgbClr val="CBD5E1"/>
-                          </a:solidFill>
-                          <a:latin typeface="Segoe UI"/>
-                        </a:defRPr>
-                      </a:pPr>
-                      <a:r>
-                        <a:t>100.00</a:t>
-                      </a:r>
-                    </a:p>
-                  </a:txBody>
-                  <a:tcPr>
-                    <a:solidFill>
-                      <a:srgbClr val="1E293B"/>
-                    </a:solidFill>
-                  </a:tcPr>
-                </a:tc>
-                <a:tc>
-                  <a:txBody>
-                    <a:bodyPr/>
-                    <a:lstStyle/>
-                    <a:p>
-                      <a:pPr>
-                        <a:defRPr sz="850">
-                          <a:solidFill>
-                            <a:srgbClr val="F8FAFC"/>
-                          </a:solidFill>
-                          <a:latin typeface="Segoe UI"/>
-                        </a:defRPr>
-                      </a:pPr>
-                      <a:r>
-                        <a:t>99.87</a:t>
-                      </a:r>
-                    </a:p>
-                  </a:txBody>
-                  <a:tcPr>
-                    <a:solidFill>
-                      <a:srgbClr val="1E293B"/>
-                    </a:solidFill>
-                  </a:tcPr>
-                </a:tc>
-                <a:extLst>
-                  <a:ext uri="{0D108BD9-81ED-4DB2-BD59-A6C34878D82A}">
-                    <a16:rowId xmlns:a16="http://schemas.microsoft.com/office/drawing/2014/main" val="10004"/>
-                  </a:ext>
-                </a:extLst>
-              </a:tr>
-              <a:tr h="436880">
-                <a:tc>
-                  <a:txBody>
-                    <a:bodyPr/>
-                    <a:lstStyle/>
-                    <a:p>
-                      <a:pPr>
-                        <a:defRPr sz="850">
-                          <a:solidFill>
-                            <a:srgbClr val="F8FAFC"/>
-                          </a:solidFill>
-                          <a:latin typeface="Segoe UI"/>
-                        </a:defRPr>
-                      </a:pPr>
-                      <a:r>
-                        <a:t>University of Cambridge</a:t>
-                      </a:r>
-                    </a:p>
-                  </a:txBody>
-                  <a:tcPr>
-                    <a:solidFill>
-                      <a:srgbClr val="1E293B"/>
-                    </a:solidFill>
-                  </a:tcPr>
-                </a:tc>
-                <a:tc>
-                  <a:txBody>
-                    <a:bodyPr/>
-                    <a:lstStyle/>
-                    <a:p>
-                      <a:pPr>
-                        <a:defRPr sz="850">
-                          <a:solidFill>
-                            <a:srgbClr val="CBD5E1"/>
-                          </a:solidFill>
-                          <a:latin typeface="Segoe UI"/>
-                        </a:defRPr>
-                      </a:pPr>
-                      <a:r>
-                        <a:t>5</a:t>
-                      </a:r>
-                    </a:p>
-                  </a:txBody>
-                  <a:tcPr>
-                    <a:solidFill>
-                      <a:srgbClr val="1E293B"/>
-                    </a:solidFill>
-                  </a:tcPr>
-                </a:tc>
-                <a:tc>
-                  <a:txBody>
-                    <a:bodyPr/>
-                    <a:lstStyle/>
-                    <a:p>
-                      <a:pPr>
-                        <a:defRPr sz="850">
-                          <a:solidFill>
-                            <a:srgbClr val="CBD5E1"/>
-                          </a:solidFill>
-                          <a:latin typeface="Segoe UI"/>
-                        </a:defRPr>
-                      </a:pPr>
-                      <a:r>
-                        <a:t>96.70</a:t>
-                      </a:r>
-                    </a:p>
-                  </a:txBody>
-                  <a:tcPr>
-                    <a:solidFill>
-                      <a:srgbClr val="1E293B"/>
-                    </a:solidFill>
-                  </a:tcPr>
-                </a:tc>
-                <a:tc>
-                  <a:txBody>
-                    <a:bodyPr/>
-                    <a:lstStyle/>
-                    <a:p>
-                      <a:pPr>
-                        <a:defRPr sz="850">
-                          <a:solidFill>
-                            <a:srgbClr val="CBD5E1"/>
-                          </a:solidFill>
-                          <a:latin typeface="Segoe UI"/>
-                        </a:defRPr>
-                      </a:pPr>
-                      <a:r>
-                        <a:t>84.60</a:t>
-                      </a:r>
-                    </a:p>
-                  </a:txBody>
-                  <a:tcPr>
-                    <a:solidFill>
-                      <a:srgbClr val="1E293B"/>
-                    </a:solidFill>
-                  </a:tcPr>
-                </a:tc>
-                <a:tc>
-                  <a:txBody>
-                    <a:bodyPr/>
-                    <a:lstStyle/>
-                    <a:p>
-                      <a:pPr>
-                        <a:defRPr sz="850">
-                          <a:solidFill>
-                            <a:srgbClr val="CBD5E1"/>
-                          </a:solidFill>
-                          <a:latin typeface="Segoe UI"/>
-                        </a:defRPr>
-                      </a:pPr>
-                      <a:r>
-                        <a:t>11.3 : 1</a:t>
-                      </a:r>
-                    </a:p>
-                  </a:txBody>
-                  <a:tcPr>
-                    <a:solidFill>
-                      <a:srgbClr val="1E293B"/>
-                    </a:solidFill>
-                  </a:tcPr>
-                </a:tc>
-                <a:tc>
-                  <a:txBody>
-                    <a:bodyPr/>
-                    <a:lstStyle/>
-                    <a:p>
-                      <a:pPr>
-                        <a:defRPr sz="850">
-                          <a:solidFill>
-                            <a:srgbClr val="CBD5E1"/>
-                          </a:solidFill>
-                          <a:latin typeface="Segoe UI"/>
-                        </a:defRPr>
-                      </a:pPr>
-                      <a:r>
-                        <a:t>39.0%</a:t>
-                      </a:r>
-                    </a:p>
-                  </a:txBody>
-                  <a:tcPr>
-                    <a:solidFill>
-                      <a:srgbClr val="1E293B"/>
-                    </a:solidFill>
-                  </a:tcPr>
-                </a:tc>
-                <a:tc>
-                  <a:txBody>
-                    <a:bodyPr/>
-                    <a:lstStyle/>
-                    <a:p>
-                      <a:pPr>
-                        <a:defRPr sz="850">
-                          <a:solidFill>
-                            <a:srgbClr val="CBD5E1"/>
-                          </a:solidFill>
-                          <a:latin typeface="Segoe UI"/>
-                        </a:defRPr>
-                      </a:pPr>
-                      <a:r>
-                        <a:t>100.00</a:t>
-                      </a:r>
-                    </a:p>
-                  </a:txBody>
-                  <a:tcPr>
-                    <a:solidFill>
-                      <a:srgbClr val="1E293B"/>
-                    </a:solidFill>
-                  </a:tcPr>
-                </a:tc>
-                <a:tc>
-                  <a:txBody>
-                    <a:bodyPr/>
-                    <a:lstStyle/>
-                    <a:p>
-                      <a:pPr>
-                        <a:defRPr sz="850">
-                          <a:solidFill>
-                            <a:srgbClr val="F8FAFC"/>
-                          </a:solidFill>
-                          <a:latin typeface="Segoe UI"/>
-                        </a:defRPr>
-                      </a:pPr>
-                      <a:r>
-                        <a:t>95.24</a:t>
-                      </a:r>
-                    </a:p>
-                  </a:txBody>
-                  <a:tcPr>
-                    <a:solidFill>
-                      <a:srgbClr val="1E293B"/>
-                    </a:solidFill>
-                  </a:tcPr>
-                </a:tc>
-                <a:extLst>
-                  <a:ext uri="{0D108BD9-81ED-4DB2-BD59-A6C34878D82A}">
-                    <a16:rowId xmlns:a16="http://schemas.microsoft.com/office/drawing/2014/main" val="10005"/>
-                  </a:ext>
-                </a:extLst>
-              </a:tr>
-              <a:tr h="436880">
-                <a:tc>
-                  <a:txBody>
-                    <a:bodyPr/>
-                    <a:lstStyle/>
-                    <a:p>
-                      <a:pPr>
-                        <a:defRPr sz="850">
-                          <a:solidFill>
-                            <a:srgbClr val="F8FAFC"/>
-                          </a:solidFill>
-                          <a:latin typeface="Segoe UI"/>
-                        </a:defRPr>
-                      </a:pPr>
-                      <a:r>
-                        <a:t>Stanford University</a:t>
-                      </a:r>
-                    </a:p>
-                  </a:txBody>
-                  <a:tcPr>
-                    <a:solidFill>
-                      <a:srgbClr val="1E293B"/>
-                    </a:solidFill>
-                  </a:tcPr>
-                </a:tc>
-                <a:tc>
-                  <a:txBody>
-                    <a:bodyPr/>
-                    <a:lstStyle/>
-                    <a:p>
-                      <a:pPr>
-                        <a:defRPr sz="850">
-                          <a:solidFill>
-                            <a:srgbClr val="CBD5E1"/>
-                          </a:solidFill>
-                          <a:latin typeface="Segoe UI"/>
-                        </a:defRPr>
-                      </a:pPr>
-                      <a:r>
-                        <a:t>6</a:t>
-                      </a:r>
-                    </a:p>
-                  </a:txBody>
-                  <a:tcPr>
-                    <a:solidFill>
-                      <a:srgbClr val="1E293B"/>
-                    </a:solidFill>
-                  </a:tcPr>
-                </a:tc>
-                <a:tc>
-                  <a:txBody>
-                    <a:bodyPr/>
-                    <a:lstStyle/>
-                    <a:p>
-                      <a:pPr>
-                        <a:defRPr sz="850">
-                          <a:solidFill>
-                            <a:srgbClr val="CBD5E1"/>
-                          </a:solidFill>
-                          <a:latin typeface="Segoe UI"/>
-                        </a:defRPr>
-                      </a:pPr>
-                      <a:r>
-                        <a:t>96.10</a:t>
-                      </a:r>
-                    </a:p>
-                  </a:txBody>
-                  <a:tcPr>
-                    <a:solidFill>
-                      <a:srgbClr val="1E293B"/>
-                    </a:solidFill>
-                  </a:tcPr>
-                </a:tc>
-                <a:tc>
-                  <a:txBody>
-                    <a:bodyPr/>
-                    <a:lstStyle/>
-                    <a:p>
-                      <a:pPr>
-                        <a:defRPr sz="850">
-                          <a:solidFill>
-                            <a:srgbClr val="CBD5E1"/>
-                          </a:solidFill>
-                          <a:latin typeface="Segoe UI"/>
-                        </a:defRPr>
-                      </a:pPr>
-                      <a:r>
-                        <a:t>99.90</a:t>
-                      </a:r>
-                    </a:p>
-                  </a:txBody>
-                  <a:tcPr>
-                    <a:solidFill>
-                      <a:srgbClr val="1E293B"/>
-                    </a:solidFill>
-                  </a:tcPr>
-                </a:tc>
-                <a:tc>
-                  <a:txBody>
-                    <a:bodyPr/>
-                    <a:lstStyle/>
-                    <a:p>
-                      <a:pPr>
-                        <a:defRPr sz="850">
-                          <a:solidFill>
-                            <a:srgbClr val="CBD5E1"/>
-                          </a:solidFill>
-                          <a:latin typeface="Segoe UI"/>
-                        </a:defRPr>
-                      </a:pPr>
-                      <a:r>
-                        <a:t>12.0 : 1</a:t>
-                      </a:r>
-                    </a:p>
-                  </a:txBody>
-                  <a:tcPr>
-                    <a:solidFill>
-                      <a:srgbClr val="1E293B"/>
-                    </a:solidFill>
-                  </a:tcPr>
-                </a:tc>
-                <a:tc>
-                  <a:txBody>
-                    <a:bodyPr/>
-                    <a:lstStyle/>
-                    <a:p>
-                      <a:pPr>
-                        <a:defRPr sz="850">
-                          <a:solidFill>
-                            <a:srgbClr val="CBD5E1"/>
-                          </a:solidFill>
-                          <a:latin typeface="Segoe UI"/>
-                        </a:defRPr>
-                      </a:pPr>
-                      <a:r>
-                        <a:t>24.0%</a:t>
-                      </a:r>
-                    </a:p>
-                  </a:txBody>
-                  <a:tcPr>
-                    <a:solidFill>
-                      <a:srgbClr val="1E293B"/>
-                    </a:solidFill>
-                  </a:tcPr>
-                </a:tc>
-                <a:tc>
-                  <a:txBody>
-                    <a:bodyPr/>
-                    <a:lstStyle/>
-                    <a:p>
-                      <a:pPr>
-                        <a:defRPr sz="850">
-                          <a:solidFill>
-                            <a:srgbClr val="CBD5E1"/>
-                          </a:solidFill>
-                          <a:latin typeface="Segoe UI"/>
-                        </a:defRPr>
-                      </a:pPr>
-                      <a:r>
-                        <a:t>100.00</a:t>
-                      </a:r>
-                    </a:p>
-                  </a:txBody>
-                  <a:tcPr>
-                    <a:solidFill>
-                      <a:srgbClr val="1E293B"/>
-                    </a:solidFill>
-                  </a:tcPr>
-                </a:tc>
-                <a:tc>
-                  <a:txBody>
-                    <a:bodyPr/>
-                    <a:lstStyle/>
-                    <a:p>
-                      <a:pPr>
-                        <a:defRPr sz="850">
-                          <a:solidFill>
-                            <a:srgbClr val="F8FAFC"/>
-                          </a:solidFill>
-                          <a:latin typeface="Segoe UI"/>
-                        </a:defRPr>
-                      </a:pPr>
-                      <a:r>
-                        <a:t>98.20</a:t>
-                      </a:r>
-                    </a:p>
-                  </a:txBody>
-                  <a:tcPr>
-                    <a:solidFill>
-                      <a:srgbClr val="1E293B"/>
-                    </a:solidFill>
-                  </a:tcPr>
-                </a:tc>
-                <a:extLst>
-                  <a:ext uri="{0D108BD9-81ED-4DB2-BD59-A6C34878D82A}">
-                    <a16:rowId xmlns:a16="http://schemas.microsoft.com/office/drawing/2014/main" val="10006"/>
-                  </a:ext>
-                </a:extLst>
-              </a:tr>
-              <a:tr h="436880">
-                <a:tc>
-                  <a:txBody>
-                    <a:bodyPr/>
-                    <a:lstStyle/>
-                    <a:p>
-                      <a:pPr>
-                        <a:defRPr sz="850">
-                          <a:solidFill>
-                            <a:srgbClr val="F8FAFC"/>
-                          </a:solidFill>
-                          <a:latin typeface="Segoe UI"/>
-                        </a:defRPr>
-                      </a:pPr>
-                      <a:r>
-                        <a:t>ETH Zurich</a:t>
-                      </a:r>
-                    </a:p>
-                  </a:txBody>
-                  <a:tcPr>
-                    <a:solidFill>
-                      <a:srgbClr val="1E293B"/>
-                    </a:solidFill>
-                  </a:tcPr>
-                </a:tc>
-                <a:tc>
-                  <a:txBody>
-                    <a:bodyPr/>
-                    <a:lstStyle/>
-                    <a:p>
-                      <a:pPr>
-                        <a:defRPr sz="850">
-                          <a:solidFill>
-                            <a:srgbClr val="CBD5E1"/>
-                          </a:solidFill>
-                          <a:latin typeface="Segoe UI"/>
-                        </a:defRPr>
-                      </a:pPr>
-                      <a:r>
-                        <a:t>7</a:t>
-                      </a:r>
-                    </a:p>
-                  </a:txBody>
-                  <a:tcPr>
-                    <a:solidFill>
-                      <a:srgbClr val="1E293B"/>
-                    </a:solidFill>
-                  </a:tcPr>
-                </a:tc>
-                <a:tc>
-                  <a:txBody>
-                    <a:bodyPr/>
-                    <a:lstStyle/>
-                    <a:p>
-                      <a:pPr>
-                        <a:defRPr sz="850">
-                          <a:solidFill>
-                            <a:srgbClr val="CBD5E1"/>
-                          </a:solidFill>
-                          <a:latin typeface="Segoe UI"/>
-                        </a:defRPr>
-                      </a:pPr>
-                      <a:r>
-                        <a:t>93.90</a:t>
-                      </a:r>
-                    </a:p>
-                  </a:txBody>
-                  <a:tcPr>
-                    <a:solidFill>
-                      <a:srgbClr val="1E293B"/>
-                    </a:solidFill>
-                  </a:tcPr>
-                </a:tc>
-                <a:tc>
-                  <a:txBody>
-                    <a:bodyPr/>
-                    <a:lstStyle/>
-                    <a:p>
-                      <a:pPr>
-                        <a:defRPr sz="850">
-                          <a:solidFill>
-                            <a:srgbClr val="CBD5E1"/>
-                          </a:solidFill>
-                          <a:latin typeface="Segoe UI"/>
-                        </a:defRPr>
-                      </a:pPr>
-                      <a:r>
-                        <a:t>98.80</a:t>
-                      </a:r>
-                    </a:p>
-                  </a:txBody>
-                  <a:tcPr>
-                    <a:solidFill>
-                      <a:srgbClr val="1E293B"/>
-                    </a:solidFill>
-                  </a:tcPr>
-                </a:tc>
-                <a:tc>
-                  <a:txBody>
-                    <a:bodyPr/>
-                    <a:lstStyle/>
-                    <a:p>
-                      <a:pPr>
-                        <a:defRPr sz="850">
-                          <a:solidFill>
-                            <a:srgbClr val="CBD5E1"/>
-                          </a:solidFill>
-                          <a:latin typeface="Segoe UI"/>
-                        </a:defRPr>
-                      </a:pPr>
-                      <a:r>
-                        <a:t>14.8 : 1</a:t>
-                      </a:r>
-                    </a:p>
-                  </a:txBody>
-                  <a:tcPr>
-                    <a:solidFill>
-                      <a:srgbClr val="1E293B"/>
-                    </a:solidFill>
-                  </a:tcPr>
-                </a:tc>
-                <a:tc>
-                  <a:txBody>
-                    <a:bodyPr/>
-                    <a:lstStyle/>
-                    <a:p>
-                      <a:pPr>
-                        <a:defRPr sz="850">
-                          <a:solidFill>
-                            <a:srgbClr val="CBD5E1"/>
-                          </a:solidFill>
-                          <a:latin typeface="Segoe UI"/>
-                        </a:defRPr>
-                      </a:pPr>
-                      <a:r>
-                        <a:t>41.0%</a:t>
-                      </a:r>
-                    </a:p>
-                  </a:txBody>
-                  <a:tcPr>
-                    <a:solidFill>
-                      <a:srgbClr val="1E293B"/>
-                    </a:solidFill>
-                  </a:tcPr>
-                </a:tc>
-                <a:tc>
-                  <a:txBody>
-                    <a:bodyPr/>
-                    <a:lstStyle/>
-                    <a:p>
-                      <a:pPr>
-                        <a:defRPr sz="850">
-                          <a:solidFill>
-                            <a:srgbClr val="CBD5E1"/>
-                          </a:solidFill>
-                          <a:latin typeface="Segoe UI"/>
-                        </a:defRPr>
-                      </a:pPr>
-                      <a:r>
-                        <a:t>98.90</a:t>
-                      </a:r>
-                    </a:p>
-                  </a:txBody>
-                  <a:tcPr>
-                    <a:solidFill>
-                      <a:srgbClr val="1E293B"/>
-                    </a:solidFill>
-                  </a:tcPr>
-                </a:tc>
-                <a:tc>
-                  <a:txBody>
-                    <a:bodyPr/>
-                    <a:lstStyle/>
-                    <a:p>
-                      <a:pPr>
-                        <a:defRPr sz="850">
-                          <a:solidFill>
-                            <a:srgbClr val="F8FAFC"/>
-                          </a:solidFill>
-                          <a:latin typeface="Segoe UI"/>
-                        </a:defRPr>
-                      </a:pPr>
-                      <a:r>
-                        <a:t>94.10</a:t>
-                      </a:r>
-                    </a:p>
-                  </a:txBody>
-                  <a:tcPr>
-                    <a:solidFill>
-                      <a:srgbClr val="1E293B"/>
-                    </a:solidFill>
-                  </a:tcPr>
-                </a:tc>
-                <a:extLst>
-                  <a:ext uri="{0D108BD9-81ED-4DB2-BD59-A6C34878D82A}">
-                    <a16:rowId xmlns:a16="http://schemas.microsoft.com/office/drawing/2014/main" val="10007"/>
-                  </a:ext>
-                </a:extLst>
-              </a:tr>
-              <a:tr h="436880">
-                <a:tc>
-                  <a:txBody>
-                    <a:bodyPr/>
-                    <a:lstStyle/>
-                    <a:p>
-                      <a:pPr>
-                        <a:defRPr sz="850">
-                          <a:solidFill>
-                            <a:srgbClr val="F8FAFC"/>
-                          </a:solidFill>
-                          <a:latin typeface="Segoe UI"/>
-                        </a:defRPr>
-                      </a:pPr>
-                      <a:r>
-                        <a:t>National University of Singapore (NUS)</a:t>
-                      </a:r>
-                    </a:p>
-                  </a:txBody>
-                  <a:tcPr>
-                    <a:solidFill>
-                      <a:srgbClr val="1E293B"/>
-                    </a:solidFill>
-                  </a:tcPr>
-                </a:tc>
-                <a:tc>
-                  <a:txBody>
-                    <a:bodyPr/>
-                    <a:lstStyle/>
-                    <a:p>
-                      <a:pPr>
-                        <a:defRPr sz="850">
-                          <a:solidFill>
-                            <a:srgbClr val="CBD5E1"/>
-                          </a:solidFill>
-                          <a:latin typeface="Segoe UI"/>
-                        </a:defRPr>
-                      </a:pPr>
-                      <a:r>
-                        <a:t>8</a:t>
-                      </a:r>
-                    </a:p>
-                  </a:txBody>
-                  <a:tcPr>
-                    <a:solidFill>
-                      <a:srgbClr val="1E293B"/>
-                    </a:solidFill>
-                  </a:tcPr>
-                </a:tc>
-                <a:tc>
-                  <a:txBody>
-                    <a:bodyPr/>
-                    <a:lstStyle/>
-                    <a:p>
-                      <a:pPr>
-                        <a:defRPr sz="850">
-                          <a:solidFill>
-                            <a:srgbClr val="CBD5E1"/>
-                          </a:solidFill>
-                          <a:latin typeface="Segoe UI"/>
-                        </a:defRPr>
-                      </a:pPr>
-                      <a:r>
-                        <a:t>93.70</a:t>
-                      </a:r>
-                    </a:p>
-                  </a:txBody>
-                  <a:tcPr>
-                    <a:solidFill>
-                      <a:srgbClr val="1E293B"/>
-                    </a:solidFill>
-                  </a:tcPr>
-                </a:tc>
-                <a:tc>
-                  <a:txBody>
-                    <a:bodyPr/>
-                    <a:lstStyle/>
-                    <a:p>
-                      <a:pPr>
-                        <a:defRPr sz="850">
-                          <a:solidFill>
-                            <a:srgbClr val="CBD5E1"/>
-                          </a:solidFill>
-                          <a:latin typeface="Segoe UI"/>
-                        </a:defRPr>
-                      </a:pPr>
-                      <a:r>
-                        <a:t>89.20</a:t>
-                      </a:r>
-                    </a:p>
-                  </a:txBody>
-                  <a:tcPr>
-                    <a:solidFill>
-                      <a:srgbClr val="1E293B"/>
-                    </a:solidFill>
-                  </a:tcPr>
-                </a:tc>
-                <a:tc>
-                  <a:txBody>
-                    <a:bodyPr/>
-                    <a:lstStyle/>
-                    <a:p>
-                      <a:pPr>
-                        <a:defRPr sz="850">
-                          <a:solidFill>
-                            <a:srgbClr val="CBD5E1"/>
-                          </a:solidFill>
-                          <a:latin typeface="Segoe UI"/>
-                        </a:defRPr>
-                      </a:pPr>
-                      <a:r>
-                        <a:t>16.5 : 1</a:t>
-                      </a:r>
-                    </a:p>
-                  </a:txBody>
-                  <a:tcPr>
-                    <a:solidFill>
-                      <a:srgbClr val="1E293B"/>
-                    </a:solidFill>
-                  </a:tcPr>
-                </a:tc>
-                <a:tc>
-                  <a:txBody>
-                    <a:bodyPr/>
-                    <a:lstStyle/>
-                    <a:p>
-                      <a:pPr>
-                        <a:defRPr sz="850">
-                          <a:solidFill>
-                            <a:srgbClr val="CBD5E1"/>
-                          </a:solidFill>
-                          <a:latin typeface="Segoe UI"/>
-                        </a:defRPr>
-                      </a:pPr>
-                      <a:r>
-                        <a:t>34.0%</a:t>
-                      </a:r>
-                    </a:p>
-                  </a:txBody>
-                  <a:tcPr>
-                    <a:solidFill>
-                      <a:srgbClr val="1E293B"/>
-                    </a:solidFill>
-                  </a:tcPr>
-                </a:tc>
-                <a:tc>
-                  <a:txBody>
-                    <a:bodyPr/>
-                    <a:lstStyle/>
-                    <a:p>
-                      <a:pPr>
-                        <a:defRPr sz="850">
-                          <a:solidFill>
-                            <a:srgbClr val="CBD5E1"/>
-                          </a:solidFill>
-                          <a:latin typeface="Segoe UI"/>
-                        </a:defRPr>
-                      </a:pPr>
-                      <a:r>
-                        <a:t>99.50</a:t>
-                      </a:r>
-                    </a:p>
-                  </a:txBody>
-                  <a:tcPr>
-                    <a:solidFill>
-                      <a:srgbClr val="1E293B"/>
-                    </a:solidFill>
-                  </a:tcPr>
-                </a:tc>
-                <a:tc>
-                  <a:txBody>
-                    <a:bodyPr/>
-                    <a:lstStyle/>
-                    <a:p>
-                      <a:pPr>
-                        <a:defRPr sz="850">
-                          <a:solidFill>
-                            <a:srgbClr val="F8FAFC"/>
-                          </a:solidFill>
-                          <a:latin typeface="Segoe UI"/>
-                        </a:defRPr>
-                      </a:pPr>
-                      <a:r>
-                        <a:t>93.80</a:t>
-                      </a:r>
-                    </a:p>
-                  </a:txBody>
-                  <a:tcPr>
-                    <a:solidFill>
-                      <a:srgbClr val="1E293B"/>
-                    </a:solidFill>
-                  </a:tcPr>
-                </a:tc>
-                <a:extLst>
-                  <a:ext uri="{0D108BD9-81ED-4DB2-BD59-A6C34878D82A}">
-                    <a16:rowId xmlns:a16="http://schemas.microsoft.com/office/drawing/2014/main" val="10008"/>
-                  </a:ext>
-                </a:extLst>
-              </a:tr>
-            </a:tbl>
-          </a:graphicData>
-        </a:graphic>
-      </p:graphicFrame>
-      <p:sp>
-        <p:nvSpPr>
-          <p:cNvPr id="8" name="Rounded Rectangle 7"/>
-          <p:cNvSpPr/>
-          <p:nvPr/>
-        </p:nvSpPr>
-        <p:spPr>
-          <a:xfrm>
-            <a:off x="731520" y="5486400"/>
-            <a:ext cx="10728655" cy="822960"/>
-          </a:xfrm>
-          <a:prstGeom prst="roundRect">
-            <a:avLst/>
-          </a:prstGeom>
-          <a:solidFill>
-            <a:srgbClr val="1E293B"/>
-          </a:solidFill>
-          <a:ln w="12700">
-            <a:solidFill>
-              <a:srgbClr val="334155"/>
-            </a:solidFill>
-          </a:ln>
-        </p:spPr>
-        <p:style>
-          <a:lnRef idx="1">
-            <a:schemeClr val="accent1"/>
-          </a:lnRef>
-          <a:fillRef idx="3">
-            <a:schemeClr val="accent1"/>
-          </a:fillRef>
-          <a:effectRef idx="2">
-            <a:schemeClr val="accent1"/>
-          </a:effectRef>
-          <a:fontRef idx="minor">
-            <a:schemeClr val="lt1"/>
-          </a:fontRef>
-        </p:style>
-        <p:txBody>
-          <a:bodyPr wrap="square" lIns="109728" tIns="109728" rIns="109728" bIns="109728" rtlCol="0" anchor="ctr"/>
-          <a:lstStyle/>
-          <a:p>
-            <a:pPr algn="ctr">
-              <a:defRPr sz="900">
-                <a:solidFill>
-                  <a:srgbClr val="10B981"/>
-                </a:solidFill>
-                <a:latin typeface="Segoe UI"/>
-              </a:defRPr>
-            </a:pPr>
-            <a:r>
-              <a:t>KEY OBSERVATIONS: MIT maintains the global #1 rank with 100.0 Overall Score and 8.2:1 faculty ratio. Imperial College London leads global diversity with 61.0% international students. Harvard University achieves the highest Research Productivity Index at 99.87.</a:t>
+              <a:t>Audit-compliant composite score combining scholarship metrics:</a:t>
+            </a:r>
+            <a:br/>
+            <a:br/>
+            <a:r>
+              <a:t>RPI = (0.50 * Research Score) + (0.30 * Citation Impact) + (0.20 * Intl Research Network)</a:t>
+            </a:r>
+            <a:br/>
+            <a:br/>
+            <a:r>
+              <a:t>Provides a multidimensional assessment of institutional research vitality.</a:t>
             </a:r>
           </a:p>
         </p:txBody>

--- a/EduVision_DV_Project_Presentation.pptx
+++ b/EduVision_DV_Project_Presentation.pptx
@@ -6077,6 +6077,12 @@
               </a:defRPr>
             </a:pPr>
             <a:r>
+              <a:rPr sz="1100" b="1">
+                <a:solidFill>
+                  <a:srgbClr val="10B981"/>
+                </a:solidFill>
+                <a:latin typeface="Segoe UI"/>
+              </a:rPr>
               <a:t>DASHBOARD 1: UNIVERSITY OVERVIEW</a:t>
             </a:r>
           </a:p>
@@ -6085,7 +6091,7 @@
               <a:spcBef>
                 <a:spcPts val="800"/>
               </a:spcBef>
-              <a:defRPr sz="900">
+              <a:defRPr sz="850">
                 <a:solidFill>
                   <a:srgbClr val="CBD5E1"/>
                 </a:solidFill>
@@ -6097,15 +6103,19 @@
             </a:r>
             <a:br/>
             <a:r>
-              <a:t>• Landing scorecard displaying top global rankings and geographic footprint.</a:t>
-            </a:r>
-            <a:br/>
-            <a:r>
-              <a:t>• Features 6 top KPI cards, ranked horizontal bar chart, reputation vs score scatter, and choropleth map.</a:t>
-            </a:r>
-            <a:br/>
-            <a:r>
-              <a:t>• Interlinking: Passes university_id to Dashboards 2 &amp; 3; passes country_id to Dashboard 4.</a:t>
+              <a:t>• Executive landing scorecard with Left Sidebar Navigation &amp; Filter Suite.</a:t>
+            </a:r>
+            <a:br/>
+            <a:r>
+              <a:t>• Features 6 Circular Badge KPI Cards (MIT #1, 1,503 Univs, 72.6 Avg Score, 28.7% Intl, 1:17.3 Ratio, 2.45M Pubs).</a:t>
+            </a:r>
+            <a:br/>
+            <a:r>
+              <a:t>• Visualization Suite: Ranked Bars, Multi-Line Trends, Regional Share Donut, Volume Bars, Geo Map, and Column Ratios.</a:t>
+            </a:r>
+            <a:br/>
+            <a:r>
+              <a:t>• Interlinking: Passes university_id to Dashboards 2 &amp; 3; passes country_id to Dashboard 4; 1-click Reset Filters.</a:t>
             </a:r>
           </a:p>
         </p:txBody>
@@ -6160,6 +6170,12 @@
               </a:defRPr>
             </a:pPr>
             <a:r>
+              <a:rPr sz="1100" b="1">
+                <a:solidFill>
+                  <a:srgbClr val="10B981"/>
+                </a:solidFill>
+                <a:latin typeface="Segoe UI"/>
+              </a:rPr>
               <a:t>DASHBOARD 2: RESEARCH ANALYTICS</a:t>
             </a:r>
           </a:p>
@@ -6168,7 +6184,7 @@
               <a:spcBef>
                 <a:spcPts val="800"/>
               </a:spcBef>
-              <a:defRPr sz="900">
+              <a:defRPr sz="850">
                 <a:solidFill>
                   <a:srgbClr val="CBD5E1"/>
                 </a:solidFill>
@@ -6180,15 +6196,19 @@
             </a:r>
             <a:br/>
             <a:r>
-              <a:t>• Deep-dive into institutional research environment, citations, and collaboration networks.</a:t>
-            </a:r>
-            <a:br/>
-            <a:r>
-              <a:t>• Features Research Productivity Index rankings and citation vs research scatter plot.</a:t>
-            </a:r>
-            <a:br/>
-            <a:r>
-              <a:t>• Interlinking: Pre-filtered for active university with peer benchmark reference lines.</a:t>
+              <a:t>• Deep-dive research intelligence with Left Sidebar Navigation &amp; Top Header.</a:t>
+            </a:r>
+            <a:br/>
+            <a:r>
+              <a:t>• Features 6 Circular KPI Badges (82.4 Research Score, 86.1 Velocity, 84.9 Productivity, 78.2 Collaboration, Harvard Hub, 2.45M Pubs).</a:t>
+            </a:r>
+            <a:br/>
+            <a:r>
+              <a:t>• Visualization Suite: Productivity Bars, Velocity Multi-Line, Regional Share Donut, Citation vs Score Scatter, Network Map, Regional Columns.</a:t>
+            </a:r>
+            <a:br/>
+            <a:r>
+              <a:t>• Interlinking: Pre-filtered for active university with peer benchmark reference lines; 1-click Reset Filters.</a:t>
             </a:r>
           </a:p>
         </p:txBody>
@@ -6243,6 +6263,12 @@
               </a:defRPr>
             </a:pPr>
             <a:r>
+              <a:rPr sz="1100" b="1">
+                <a:solidFill>
+                  <a:srgbClr val="10B981"/>
+                </a:solidFill>
+                <a:latin typeface="Segoe UI"/>
+              </a:rPr>
               <a:t>DASHBOARD 3: STUDENT ANALYTICS</a:t>
             </a:r>
           </a:p>
@@ -6251,7 +6277,7 @@
               <a:spcBef>
                 <a:spcPts val="800"/>
               </a:spcBef>
-              <a:defRPr sz="900">
+              <a:defRPr sz="850">
                 <a:solidFill>
                   <a:srgbClr val="CBD5E1"/>
                 </a:solidFill>
@@ -6263,15 +6289,19 @@
             </a:r>
             <a:br/>
             <a:r>
-              <a:t>• Explores campus diversity, actual faculty-to-student ratios, and gender breakdowns.</a:t>
-            </a:r>
-            <a:br/>
-            <a:r>
-              <a:t>• Features international student % histogram and students-per-staff benchmarking.</a:t>
-            </a:r>
-            <a:br/>
-            <a:r>
-              <a:t>• Interlinking: Pre-filtered for active university; cross-links to national context.</a:t>
+              <a:t>• Campus diversity &amp; faculty capacity intelligence with Left Sidebar Navigation.</a:t>
+            </a:r>
+            <a:br/>
+            <a:r>
+              <a:t>• Features 6 Circular KPI Badges (28.7% Intl Students, 1:17.3 Staff Ratio, 18.4M Total Enrollment, 51:49 Gender Parity, Macau Hub, Caltech Mentorship).</a:t>
+            </a:r>
+            <a:br/>
+            <a:r>
+              <a:t>• Visualization Suite: Diversity Leader Bars, Mobility Multi-Line, Student Share Donut, Diversity vs Score Scatter, Mobility Map, Faculty Ratio Columns.</a:t>
+            </a:r>
+            <a:br/>
+            <a:r>
+              <a:t>• Interlinking: Pre-filtered for active university; cross-links to national context; 1-click Reset Filters.</a:t>
             </a:r>
           </a:p>
         </p:txBody>
@@ -6326,6 +6356,12 @@
               </a:defRPr>
             </a:pPr>
             <a:r>
+              <a:rPr sz="1100" b="1">
+                <a:solidFill>
+                  <a:srgbClr val="10B981"/>
+                </a:solidFill>
+                <a:latin typeface="Segoe UI"/>
+              </a:rPr>
               <a:t>DASHBOARD 4: COUNTRY COMPARISON</a:t>
             </a:r>
           </a:p>
@@ -6334,7 +6370,7 @@
               <a:spcBef>
                 <a:spcPts val="800"/>
               </a:spcBef>
-              <a:defRPr sz="900">
+              <a:defRPr sz="850">
                 <a:solidFill>
                   <a:srgbClr val="CBD5E1"/>
                 </a:solidFill>
@@ -6346,15 +6382,19 @@
             </a:r>
             <a:br/>
             <a:r>
-              <a:t>• Country-level education benchmarking using World Bank EdStats indicators.</a:t>
-            </a:r>
-            <a:br/>
-            <a:r>
-              <a:t>• Features national capacity bar chart, public spend (% GDP) vs score, and enrollment trends.</a:t>
-            </a:r>
-            <a:br/>
-            <a:r>
-              <a:t>• Interlinking: Receives country_id from preceding dashboards; multi-country filter.</a:t>
+              <a:t>• Country-level macroeconomic education benchmarking with Left Sidebar Navigation.</a:t>
+            </a:r>
+            <a:br/>
+            <a:r>
+              <a:t>• Features 6 Circular KPI Badges (USA 197 Capacity, 58.4 Avg Score, 4.82% Spend % GDP, 62.4% Tertiary Rate, UK Leader, China Leader).</a:t>
+            </a:r>
+            <a:br/>
+            <a:r>
+              <a:t>• Visualization Suite: Capacity Bars, Gross Enrollment Multi-Line, Regional Share Donut, Public Spend vs Score Scatter, World Bank Systems Map, National Column Benchmarks.</a:t>
+            </a:r>
+            <a:br/>
+            <a:r>
+              <a:t>• Interlinking: Receives country_id from preceding dashboards; multi-country filter; 1-click Reset Filters.</a:t>
             </a:r>
           </a:p>
         </p:txBody>
@@ -6658,103 +6698,207 @@
               </a:defRPr>
             </a:pPr>
             <a:r>
+              <a:rPr sz="1050" b="1">
+                <a:solidFill>
+                  <a:srgbClr val="10B981"/>
+                </a:solidFill>
+                <a:latin typeface="Segoe UI"/>
+              </a:rPr>
               <a:t>DASHBOARD 1 ARCHITECTURE</a:t>
             </a:r>
           </a:p>
           <a:p>
             <a:pPr>
               <a:spcBef>
-                <a:spcPts val="800"/>
+                <a:spcPts val="600"/>
               </a:spcBef>
-              <a:defRPr sz="850">
+            </a:pPr>
+            <a:r>
+              <a:rPr sz="780" b="1">
+                <a:solidFill>
+                  <a:srgbClr val="F1F5F9"/>
+                </a:solidFill>
+                <a:latin typeface="Segoe UI"/>
+              </a:rPr>
+              <a:t>Core Business Purpose:</a:t>
+            </a:r>
+            <a:br/>
+            <a:r>
+              <a:rPr sz="750">
                 <a:solidFill>
                   <a:srgbClr val="CBD5E1"/>
                 </a:solidFill>
                 <a:latin typeface="Segoe UI"/>
-              </a:defRPr>
-            </a:pPr>
-            <a:r>
-              <a:t>Core Business Purpose:</a:t>
-            </a:r>
-            <a:br/>
-            <a:r>
-              <a:t>Executive landing page and institutional benchmark scorecard.</a:t>
+              </a:rPr>
+              <a:t>Executive landing page and institutional benchmark scorecard with persistent Left Sidebar Navigation and Top Quick Filters.</a:t>
             </a:r>
           </a:p>
           <a:p>
             <a:pPr>
               <a:spcBef>
-                <a:spcPts val="800"/>
+                <a:spcPts val="500"/>
               </a:spcBef>
-              <a:defRPr sz="850">
+            </a:pPr>
+            <a:r>
+              <a:rPr sz="780" b="1">
+                <a:solidFill>
+                  <a:srgbClr val="F1F5F9"/>
+                </a:solidFill>
+                <a:latin typeface="Segoe UI"/>
+              </a:rPr>
+              <a:t>Visual Components:</a:t>
+            </a:r>
+            <a:br/>
+            <a:r>
+              <a:rPr sz="700">
                 <a:solidFill>
                   <a:srgbClr val="CBD5E1"/>
                 </a:solidFill>
                 <a:latin typeface="Segoe UI"/>
-              </a:defRPr>
-            </a:pPr>
-            <a:r>
-              <a:t>Visual Components:</a:t>
-            </a:r>
-            <a:br/>
-            <a:r>
-              <a:t>• 6 Top KPI Executive Metric Cards</a:t>
-            </a:r>
-            <a:br/>
-            <a:r>
-              <a:t>• Global Choropleth Distribution Map</a:t>
-            </a:r>
-            <a:br/>
-            <a:r>
-              <a:t>• Ranked Horizontal Bar Chart</a:t>
-            </a:r>
-            <a:br/>
-            <a:r>
-              <a:t>• Academic Reputation vs. Overall Score Scatter Plot</a:t>
+              </a:rPr>
+              <a:t>• Left Sidebar: Active navigation pills, Year/Region/Country/Subject filters, and Reset Filters button</a:t>
+            </a:r>
+            <a:br/>
+            <a:r>
+              <a:rPr sz="700">
+                <a:solidFill>
+                  <a:srgbClr val="CBD5E1"/>
+                </a:solidFill>
+                <a:latin typeface="Segoe UI"/>
+              </a:rPr>
+              <a:t>• 6 Circular Badge KPI Cards: #1 MIT Rank, 1,503 Ranked Univs, 72.6 Avg Score, 28.7% Intl Students, 1:17.3 Ratio, 2.45M Publications</a:t>
+            </a:r>
+            <a:br/>
+            <a:r>
+              <a:rPr sz="700">
+                <a:solidFill>
+                  <a:srgbClr val="CBD5E1"/>
+                </a:solidFill>
+                <a:latin typeface="Segoe UI"/>
+              </a:rPr>
+              <a:t>• Top 10 Universities by Global Ranking (Ranked Horizontal Bars)</a:t>
+            </a:r>
+            <a:br/>
+            <a:r>
+              <a:rPr sz="700">
+                <a:solidFill>
+                  <a:srgbClr val="CBD5E1"/>
+                </a:solidFill>
+                <a:latin typeface="Segoe UI"/>
+              </a:rPr>
+              <a:t>• Top 10 Universities by Overall Score Trend (Multi-Line Chart 2020-2024)</a:t>
+            </a:r>
+            <a:br/>
+            <a:r>
+              <a:rPr sz="700">
+                <a:solidFill>
+                  <a:srgbClr val="CBD5E1"/>
+                </a:solidFill>
+                <a:latin typeface="Segoe UI"/>
+              </a:rPr>
+              <a:t>• Universities by Region (Regional Share Donut Chart with Center Total)</a:t>
+            </a:r>
+            <a:br/>
+            <a:r>
+              <a:rPr sz="700">
+                <a:solidFill>
+                  <a:srgbClr val="CBD5E1"/>
+                </a:solidFill>
+                <a:latin typeface="Segoe UI"/>
+              </a:rPr>
+              <a:t>• Publications by Top 5 Universities (Horizontal Volume Bars)</a:t>
+            </a:r>
+            <a:br/>
+            <a:r>
+              <a:rPr sz="700">
+                <a:solidFill>
+                  <a:srgbClr val="CBD5E1"/>
+                </a:solidFill>
+                <a:latin typeface="Segoe UI"/>
+              </a:rPr>
+              <a:t>• International Students % by Region (Interactive Geographic Map)</a:t>
+            </a:r>
+            <a:br/>
+            <a:r>
+              <a:rPr sz="700">
+                <a:solidFill>
+                  <a:srgbClr val="CBD5E1"/>
+                </a:solidFill>
+                <a:latin typeface="Segoe UI"/>
+              </a:rPr>
+              <a:t>• Faculty-to-Student Ratio by Region (Vertical Column Chart)</a:t>
             </a:r>
           </a:p>
           <a:p>
             <a:pPr>
               <a:spcBef>
-                <a:spcPts val="800"/>
+                <a:spcPts val="500"/>
               </a:spcBef>
-              <a:defRPr sz="850">
+            </a:pPr>
+            <a:r>
+              <a:rPr sz="780" b="1">
+                <a:solidFill>
+                  <a:srgbClr val="F1F5F9"/>
+                </a:solidFill>
+                <a:latin typeface="Segoe UI"/>
+              </a:rPr>
+              <a:t>Interactivity &amp; Filter Actions:</a:t>
+            </a:r>
+            <a:br/>
+            <a:r>
+              <a:rPr sz="700">
                 <a:solidFill>
                   <a:srgbClr val="CBD5E1"/>
                 </a:solidFill>
                 <a:latin typeface="Segoe UI"/>
-              </a:defRPr>
-            </a:pPr>
-            <a:r>
-              <a:t>Interactivity &amp; Filter Actions:</a:t>
-            </a:r>
-            <a:br/>
-            <a:r>
+              </a:rPr>
+              <a:t>• Left sidebar single/multi-select dropdowns filter all 6 views dynamically.</a:t>
+            </a:r>
+            <a:br/>
+            <a:r>
+              <a:rPr sz="700">
+                <a:solidFill>
+                  <a:srgbClr val="CBD5E1"/>
+                </a:solidFill>
+                <a:latin typeface="Segoe UI"/>
+              </a:rPr>
               <a:t>• Clicking any university filters all charts and passes university_id to Dashboards 2 &amp; 3.</a:t>
             </a:r>
             <a:br/>
             <a:r>
-              <a:t>• Regional dropdown parameter allows continuous geographic slice-and-dice.</a:t>
+              <a:rPr sz="700">
+                <a:solidFill>
+                  <a:srgbClr val="CBD5E1"/>
+                </a:solidFill>
+                <a:latin typeface="Segoe UI"/>
+              </a:rPr>
+              <a:t>• 1-click ↺ Reset Filters button restores full global view instantly.</a:t>
             </a:r>
           </a:p>
           <a:p>
             <a:pPr>
               <a:spcBef>
-                <a:spcPts val="800"/>
+                <a:spcPts val="500"/>
               </a:spcBef>
-              <a:defRPr sz="850">
+            </a:pPr>
+            <a:r>
+              <a:rPr sz="780" b="1">
+                <a:solidFill>
+                  <a:srgbClr val="F1F5F9"/>
+                </a:solidFill>
+                <a:latin typeface="Segoe UI"/>
+              </a:rPr>
+              <a:t>Analytical Finding:</a:t>
+            </a:r>
+            <a:br/>
+            <a:r>
+              <a:rPr sz="720">
                 <a:solidFill>
                   <a:srgbClr val="CBD5E1"/>
                 </a:solidFill>
                 <a:latin typeface="Segoe UI"/>
-              </a:defRPr>
-            </a:pPr>
-            <a:r>
-              <a:t>Analytical Finding:</a:t>
-            </a:r>
-            <a:br/>
-            <a:r>
-              <a:t>MIT, Imperial, and Oxford dominate top overall scores, with 40% of top 50 institutions concentrated in North America.</a:t>
+              </a:rPr>
+              <a:t>MIT, Cambridge, and Oxford lead global rankings; North America and Europe host &gt;65% of top institutions; faculty ratios range from 1:12.6 in South America to 1:21.4 in North America.</a:t>
             </a:r>
           </a:p>
         </p:txBody>
@@ -7058,103 +7202,207 @@
               </a:defRPr>
             </a:pPr>
             <a:r>
+              <a:rPr sz="1050" b="1">
+                <a:solidFill>
+                  <a:srgbClr val="0284C7"/>
+                </a:solidFill>
+                <a:latin typeface="Segoe UI"/>
+              </a:rPr>
               <a:t>DASHBOARD 2 ARCHITECTURE</a:t>
             </a:r>
           </a:p>
           <a:p>
             <a:pPr>
               <a:spcBef>
-                <a:spcPts val="800"/>
+                <a:spcPts val="600"/>
               </a:spcBef>
-              <a:defRPr sz="850">
+            </a:pPr>
+            <a:r>
+              <a:rPr sz="780" b="1">
+                <a:solidFill>
+                  <a:srgbClr val="F1F5F9"/>
+                </a:solidFill>
+                <a:latin typeface="Segoe UI"/>
+              </a:rPr>
+              <a:t>Core Business Purpose:</a:t>
+            </a:r>
+            <a:br/>
+            <a:r>
+              <a:rPr sz="750">
                 <a:solidFill>
                   <a:srgbClr val="CBD5E1"/>
                 </a:solidFill>
                 <a:latin typeface="Segoe UI"/>
-              </a:defRPr>
-            </a:pPr>
-            <a:r>
-              <a:t>Core Business Purpose:</a:t>
-            </a:r>
-            <a:br/>
-            <a:r>
-              <a:t>Deep-dive evaluation of scholarly research output and citation velocity.</a:t>
+              </a:rPr>
+              <a:t>Deep-dive research intelligence evaluating scholarly productivity, citation velocity, and cross-border research networks.</a:t>
             </a:r>
           </a:p>
           <a:p>
             <a:pPr>
               <a:spcBef>
-                <a:spcPts val="800"/>
+                <a:spcPts val="500"/>
               </a:spcBef>
-              <a:defRPr sz="850">
+            </a:pPr>
+            <a:r>
+              <a:rPr sz="780" b="1">
+                <a:solidFill>
+                  <a:srgbClr val="F1F5F9"/>
+                </a:solidFill>
+                <a:latin typeface="Segoe UI"/>
+              </a:rPr>
+              <a:t>Visual Components:</a:t>
+            </a:r>
+            <a:br/>
+            <a:r>
+              <a:rPr sz="700">
                 <a:solidFill>
                   <a:srgbClr val="CBD5E1"/>
                 </a:solidFill>
                 <a:latin typeface="Segoe UI"/>
-              </a:defRPr>
-            </a:pPr>
-            <a:r>
-              <a:t>Visual Components:</a:t>
-            </a:r>
-            <a:br/>
-            <a:r>
-              <a:t>• Top 15 Research Productivity Index Rankings</a:t>
-            </a:r>
-            <a:br/>
-            <a:r>
-              <a:t>• Citations per Faculty vs. Research Score Scatter Plot</a:t>
-            </a:r>
-            <a:br/>
-            <a:r>
-              <a:t>• International Research Network Collaboration Quadrant</a:t>
-            </a:r>
-            <a:br/>
-            <a:r>
-              <a:t>• Industry Income Metric Benchmarking</a:t>
+              </a:rPr>
+              <a:t>• Left Sidebar: Active navigation pills, Year/Region/Country/Subject filters, and Reset Filters button</a:t>
+            </a:r>
+            <a:br/>
+            <a:r>
+              <a:rPr sz="700">
+                <a:solidFill>
+                  <a:srgbClr val="CBD5E1"/>
+                </a:solidFill>
+                <a:latin typeface="Segoe UI"/>
+              </a:rPr>
+              <a:t>• 6 Circular KPI Badges: 82.4 Research Score, 86.1 Citation Velocity, 84.9 Productivity, 78.2 Collaboration, Harvard Hub, 2.45M Publications</a:t>
+            </a:r>
+            <a:br/>
+            <a:r>
+              <a:rPr sz="700">
+                <a:solidFill>
+                  <a:srgbClr val="CBD5E1"/>
+                </a:solidFill>
+                <a:latin typeface="Segoe UI"/>
+              </a:rPr>
+              <a:t>• Top Research Institutions by Productivity (Horizontal Bars)</a:t>
+            </a:r>
+            <a:br/>
+            <a:r>
+              <a:rPr sz="700">
+                <a:solidFill>
+                  <a:srgbClr val="CBD5E1"/>
+                </a:solidFill>
+                <a:latin typeface="Segoe UI"/>
+              </a:rPr>
+              <a:t>• Scholarly Citations Velocity Trend (Multi-Line Chart 2020-2024)</a:t>
+            </a:r>
+            <a:br/>
+            <a:r>
+              <a:rPr sz="700">
+                <a:solidFill>
+                  <a:srgbClr val="CBD5E1"/>
+                </a:solidFill>
+                <a:latin typeface="Segoe UI"/>
+              </a:rPr>
+              <a:t>• Scholarly Citations Share by Region (Donut Chart with Center Total)</a:t>
+            </a:r>
+            <a:br/>
+            <a:r>
+              <a:rPr sz="700">
+                <a:solidFill>
+                  <a:srgbClr val="CBD5E1"/>
+                </a:solidFill>
+                <a:latin typeface="Segoe UI"/>
+              </a:rPr>
+              <a:t>• Citation Impact vs Research Score (Scatter / Bubble Plot with Trendline)</a:t>
+            </a:r>
+            <a:br/>
+            <a:r>
+              <a:rPr sz="700">
+                <a:solidFill>
+                  <a:srgbClr val="CBD5E1"/>
+                </a:solidFill>
+                <a:latin typeface="Segoe UI"/>
+              </a:rPr>
+              <a:t>• Global Research Network Collaboration Map (Interactive Geographic Map)</a:t>
+            </a:r>
+            <a:br/>
+            <a:r>
+              <a:rPr sz="700">
+                <a:solidFill>
+                  <a:srgbClr val="CBD5E1"/>
+                </a:solidFill>
+                <a:latin typeface="Segoe UI"/>
+              </a:rPr>
+              <a:t>• Average Citations Score by Region (Vertical Column Benchmarks)</a:t>
             </a:r>
           </a:p>
           <a:p>
             <a:pPr>
               <a:spcBef>
-                <a:spcPts val="800"/>
+                <a:spcPts val="500"/>
               </a:spcBef>
-              <a:defRPr sz="850">
+            </a:pPr>
+            <a:r>
+              <a:rPr sz="780" b="1">
+                <a:solidFill>
+                  <a:srgbClr val="F1F5F9"/>
+                </a:solidFill>
+                <a:latin typeface="Segoe UI"/>
+              </a:rPr>
+              <a:t>Interactivity &amp; Filter Actions:</a:t>
+            </a:r>
+            <a:br/>
+            <a:r>
+              <a:rPr sz="700">
                 <a:solidFill>
                   <a:srgbClr val="CBD5E1"/>
                 </a:solidFill>
                 <a:latin typeface="Segoe UI"/>
-              </a:defRPr>
-            </a:pPr>
-            <a:r>
-              <a:t>Interactivity &amp; Filter Actions:</a:t>
-            </a:r>
-            <a:br/>
-            <a:r>
+              </a:rPr>
               <a:t>• University selection from Dashboard 1 highlights institution against global regression trendline.</a:t>
             </a:r>
             <a:br/>
             <a:r>
-              <a:t>• Citations slider isolates high-velocity scholarly hubs.</a:t>
+              <a:rPr sz="700">
+                <a:solidFill>
+                  <a:srgbClr val="CBD5E1"/>
+                </a:solidFill>
+                <a:latin typeface="Segoe UI"/>
+              </a:rPr>
+              <a:t>• Left sidebar filters and top quick navigation allow seamless drill-down.</a:t>
+            </a:r>
+            <a:br/>
+            <a:r>
+              <a:rPr sz="700">
+                <a:solidFill>
+                  <a:srgbClr val="CBD5E1"/>
+                </a:solidFill>
+                <a:latin typeface="Segoe UI"/>
+              </a:rPr>
+              <a:t>• 1-click ↺ Reset Filters button restores full global view instantly.</a:t>
             </a:r>
           </a:p>
           <a:p>
             <a:pPr>
               <a:spcBef>
-                <a:spcPts val="800"/>
+                <a:spcPts val="500"/>
               </a:spcBef>
-              <a:defRPr sz="850">
+            </a:pPr>
+            <a:r>
+              <a:rPr sz="780" b="1">
+                <a:solidFill>
+                  <a:srgbClr val="F1F5F9"/>
+                </a:solidFill>
+                <a:latin typeface="Segoe UI"/>
+              </a:rPr>
+              <a:t>Analytical Finding:</a:t>
+            </a:r>
+            <a:br/>
+            <a:r>
+              <a:rPr sz="720">
                 <a:solidFill>
                   <a:srgbClr val="CBD5E1"/>
                 </a:solidFill>
                 <a:latin typeface="Segoe UI"/>
-              </a:defRPr>
-            </a:pPr>
-            <a:r>
-              <a:t>Analytical Finding:</a:t>
-            </a:r>
-            <a:br/>
-            <a:r>
-              <a:t>Normalized citations per faculty reveal elite research density in specialized institutions like Caltech and ETH Zurich.</a:t>
+              </a:rPr>
+              <a:t>Harvard and MIT exhibit exponential citation velocity (&gt;98.0); Europe accounts for 38% of global citations; scatter analysis confirms strong positive correlation between baseline research productivity and citations per paper.</a:t>
             </a:r>
           </a:p>
         </p:txBody>
@@ -7458,103 +7706,207 @@
               </a:defRPr>
             </a:pPr>
             <a:r>
+              <a:rPr sz="1050" b="1">
+                <a:solidFill>
+                  <a:srgbClr val="EA580C"/>
+                </a:solidFill>
+                <a:latin typeface="Segoe UI"/>
+              </a:rPr>
               <a:t>DASHBOARD 3 ARCHITECTURE</a:t>
             </a:r>
           </a:p>
           <a:p>
             <a:pPr>
               <a:spcBef>
-                <a:spcPts val="800"/>
+                <a:spcPts val="600"/>
               </a:spcBef>
-              <a:defRPr sz="850">
+            </a:pPr>
+            <a:r>
+              <a:rPr sz="780" b="1">
+                <a:solidFill>
+                  <a:srgbClr val="F1F5F9"/>
+                </a:solidFill>
+                <a:latin typeface="Segoe UI"/>
+              </a:rPr>
+              <a:t>Core Business Purpose:</a:t>
+            </a:r>
+            <a:br/>
+            <a:r>
+              <a:rPr sz="750">
                 <a:solidFill>
                   <a:srgbClr val="CBD5E1"/>
                 </a:solidFill>
                 <a:latin typeface="Segoe UI"/>
-              </a:defRPr>
-            </a:pPr>
-            <a:r>
-              <a:t>Core Business Purpose:</a:t>
-            </a:r>
-            <a:br/>
-            <a:r>
-              <a:t>Analysis of student enrollment demographics, internationalization, and faculty capacity.</a:t>
+              </a:rPr>
+              <a:t>Comprehensive analysis of student enrollment demographics, internationalization mobility, and faculty mentorship capacity.</a:t>
             </a:r>
           </a:p>
           <a:p>
             <a:pPr>
               <a:spcBef>
-                <a:spcPts val="800"/>
+                <a:spcPts val="500"/>
               </a:spcBef>
-              <a:defRPr sz="850">
+            </a:pPr>
+            <a:r>
+              <a:rPr sz="780" b="1">
+                <a:solidFill>
+                  <a:srgbClr val="F1F5F9"/>
+                </a:solidFill>
+                <a:latin typeface="Segoe UI"/>
+              </a:rPr>
+              <a:t>Visual Components:</a:t>
+            </a:r>
+            <a:br/>
+            <a:r>
+              <a:rPr sz="700">
                 <a:solidFill>
                   <a:srgbClr val="CBD5E1"/>
                 </a:solidFill>
                 <a:latin typeface="Segoe UI"/>
-              </a:defRPr>
-            </a:pPr>
-            <a:r>
-              <a:t>Visual Components:</a:t>
-            </a:r>
-            <a:br/>
-            <a:r>
-              <a:t>• International Student Percentage Distribution</a:t>
-            </a:r>
-            <a:br/>
-            <a:r>
-              <a:t>• Students-per-Staff Faculty Ratio Benchmark</a:t>
-            </a:r>
-            <a:br/>
-            <a:r>
-              <a:t>• Female-to-Male Student Ratio Dumbbell Chart</a:t>
-            </a:r>
-            <a:br/>
-            <a:r>
-              <a:t>• Total FTE Student Headcount Distribution</a:t>
+              </a:rPr>
+              <a:t>• Left Sidebar: Active navigation pills, Year/Region/Country/Subject filters, and Reset Filters button</a:t>
+            </a:r>
+            <a:br/>
+            <a:r>
+              <a:rPr sz="700">
+                <a:solidFill>
+                  <a:srgbClr val="CBD5E1"/>
+                </a:solidFill>
+                <a:latin typeface="Segoe UI"/>
+              </a:rPr>
+              <a:t>• 6 Circular KPI Badges: 28.7% Intl Students, 1:17.3 Students/Staff, 18.4M Total Enrollment, 51:49 Gender Parity, Macau Hub, Caltech Mentorship</a:t>
+            </a:r>
+            <a:br/>
+            <a:r>
+              <a:rPr sz="700">
+                <a:solidFill>
+                  <a:srgbClr val="CBD5E1"/>
+                </a:solidFill>
+                <a:latin typeface="Segoe UI"/>
+              </a:rPr>
+              <a:t>• Top 5 Campus Diversity Leaders (Horizontal Bars)</a:t>
+            </a:r>
+            <a:br/>
+            <a:r>
+              <a:rPr sz="700">
+                <a:solidFill>
+                  <a:srgbClr val="CBD5E1"/>
+                </a:solidFill>
+                <a:latin typeface="Segoe UI"/>
+              </a:rPr>
+              <a:t>• International Mobility Enrollment Trend (Multi-Line Chart 2020-2024)</a:t>
+            </a:r>
+            <a:br/>
+            <a:r>
+              <a:rPr sz="700">
+                <a:solidFill>
+                  <a:srgbClr val="CBD5E1"/>
+                </a:solidFill>
+                <a:latin typeface="Segoe UI"/>
+              </a:rPr>
+              <a:t>• Total Enrolled Students Share by Region (Donut Chart with Center Total)</a:t>
+            </a:r>
+            <a:br/>
+            <a:r>
+              <a:rPr sz="700">
+                <a:solidFill>
+                  <a:srgbClr val="CBD5E1"/>
+                </a:solidFill>
+                <a:latin typeface="Segoe UI"/>
+              </a:rPr>
+              <a:t>• Campus Diversity vs Overall Score (Scatter / Bubble Plot)</a:t>
+            </a:r>
+            <a:br/>
+            <a:r>
+              <a:rPr sz="700">
+                <a:solidFill>
+                  <a:srgbClr val="CBD5E1"/>
+                </a:solidFill>
+                <a:latin typeface="Segoe UI"/>
+              </a:rPr>
+              <a:t>• International Student Mobility Footprint (Interactive Geographic Map)</a:t>
+            </a:r>
+            <a:br/>
+            <a:r>
+              <a:rPr sz="700">
+                <a:solidFill>
+                  <a:srgbClr val="CBD5E1"/>
+                </a:solidFill>
+                <a:latin typeface="Segoe UI"/>
+              </a:rPr>
+              <a:t>• Faculty-to-Student Ratio by Region (Vertical Column Benchmarks)</a:t>
             </a:r>
           </a:p>
           <a:p>
             <a:pPr>
               <a:spcBef>
-                <a:spcPts val="800"/>
+                <a:spcPts val="500"/>
               </a:spcBef>
-              <a:defRPr sz="850">
+            </a:pPr>
+            <a:r>
+              <a:rPr sz="780" b="1">
+                <a:solidFill>
+                  <a:srgbClr val="F1F5F9"/>
+                </a:solidFill>
+                <a:latin typeface="Segoe UI"/>
+              </a:rPr>
+              <a:t>Interactivity &amp; Filter Actions:</a:t>
+            </a:r>
+            <a:br/>
+            <a:r>
+              <a:rPr sz="700">
                 <a:solidFill>
                   <a:srgbClr val="CBD5E1"/>
                 </a:solidFill>
                 <a:latin typeface="Segoe UI"/>
-              </a:defRPr>
-            </a:pPr>
-            <a:r>
-              <a:t>Interactivity &amp; Filter Actions:</a:t>
-            </a:r>
-            <a:br/>
-            <a:r>
-              <a:t>• Cross-filter by institution size (Small, Medium, Mega).</a:t>
-            </a:r>
-            <a:br/>
-            <a:r>
+              </a:rPr>
+              <a:t>• Cross-filter by institution size, region, and academic tier.</a:t>
+            </a:r>
+            <a:br/>
+            <a:r>
+              <a:rPr sz="700">
+                <a:solidFill>
+                  <a:srgbClr val="CBD5E1"/>
+                </a:solidFill>
+                <a:latin typeface="Segoe UI"/>
+              </a:rPr>
               <a:t>• Drill-down from global distribution to individual university mentorship ratio.</a:t>
+            </a:r>
+            <a:br/>
+            <a:r>
+              <a:rPr sz="700">
+                <a:solidFill>
+                  <a:srgbClr val="CBD5E1"/>
+                </a:solidFill>
+                <a:latin typeface="Segoe UI"/>
+              </a:rPr>
+              <a:t>• 1-click ↺ Reset Filters button restores full global view instantly.</a:t>
             </a:r>
           </a:p>
           <a:p>
             <a:pPr>
               <a:spcBef>
-                <a:spcPts val="800"/>
+                <a:spcPts val="500"/>
               </a:spcBef>
-              <a:defRPr sz="850">
+            </a:pPr>
+            <a:r>
+              <a:rPr sz="780" b="1">
+                <a:solidFill>
+                  <a:srgbClr val="F1F5F9"/>
+                </a:solidFill>
+                <a:latin typeface="Segoe UI"/>
+              </a:rPr>
+              <a:t>Analytical Finding:</a:t>
+            </a:r>
+            <a:br/>
+            <a:r>
+              <a:rPr sz="720">
                 <a:solidFill>
                   <a:srgbClr val="CBD5E1"/>
                 </a:solidFill>
                 <a:latin typeface="Segoe UI"/>
-              </a:defRPr>
-            </a:pPr>
-            <a:r>
-              <a:t>Analytical Finding:</a:t>
-            </a:r>
-            <a:br/>
-            <a:r>
-              <a:t>UK universities demonstrate the highest international student representation (&gt;50%), while US institutions prioritize low student-to-staff ratios.</a:t>
+              </a:rPr>
+              <a:t>Global student mobility has grown +1.8% annually; leading institutions in Macau and UK demonstrate over 70% international students; intensive mentorship (lower student-to-staff ratios) directly correlates with elite academic performance tiers.</a:t>
             </a:r>
           </a:p>
         </p:txBody>
@@ -7858,103 +8210,207 @@
               </a:defRPr>
             </a:pPr>
             <a:r>
+              <a:rPr sz="1050" b="1">
+                <a:solidFill>
+                  <a:srgbClr val="8B5CF6"/>
+                </a:solidFill>
+                <a:latin typeface="Segoe UI"/>
+              </a:rPr>
               <a:t>DASHBOARD 4 ARCHITECTURE</a:t>
             </a:r>
           </a:p>
           <a:p>
             <a:pPr>
               <a:spcBef>
-                <a:spcPts val="800"/>
+                <a:spcPts val="600"/>
               </a:spcBef>
-              <a:defRPr sz="850">
+            </a:pPr>
+            <a:r>
+              <a:rPr sz="780" b="1">
+                <a:solidFill>
+                  <a:srgbClr val="F1F5F9"/>
+                </a:solidFill>
+                <a:latin typeface="Segoe UI"/>
+              </a:rPr>
+              <a:t>Core Business Purpose:</a:t>
+            </a:r>
+            <a:br/>
+            <a:r>
+              <a:rPr sz="750">
                 <a:solidFill>
                   <a:srgbClr val="CBD5E1"/>
                 </a:solidFill>
                 <a:latin typeface="Segoe UI"/>
-              </a:defRPr>
-            </a:pPr>
-            <a:r>
-              <a:t>Core Business Purpose:</a:t>
-            </a:r>
-            <a:br/>
-            <a:r>
-              <a:t>Macroeconomic evaluation linking national educational expenditure to global university performance.</a:t>
+              </a:rPr>
+              <a:t>Macroeconomic evaluation linking national educational expenditure to global university performance and capacity.</a:t>
             </a:r>
           </a:p>
           <a:p>
             <a:pPr>
               <a:spcBef>
-                <a:spcPts val="800"/>
+                <a:spcPts val="500"/>
               </a:spcBef>
-              <a:defRPr sz="850">
+            </a:pPr>
+            <a:r>
+              <a:rPr sz="780" b="1">
+                <a:solidFill>
+                  <a:srgbClr val="F1F5F9"/>
+                </a:solidFill>
+                <a:latin typeface="Segoe UI"/>
+              </a:rPr>
+              <a:t>Visual Components:</a:t>
+            </a:r>
+            <a:br/>
+            <a:r>
+              <a:rPr sz="700">
                 <a:solidFill>
                   <a:srgbClr val="CBD5E1"/>
                 </a:solidFill>
                 <a:latin typeface="Segoe UI"/>
-              </a:defRPr>
-            </a:pPr>
-            <a:r>
-              <a:t>Visual Components:</a:t>
-            </a:r>
-            <a:br/>
-            <a:r>
-              <a:t>• National Higher Education Capacity Bar Chart</a:t>
-            </a:r>
-            <a:br/>
-            <a:r>
-              <a:t>• Public Expenditure on Education (% of GDP) vs. University Score</a:t>
-            </a:r>
-            <a:br/>
-            <a:r>
-              <a:t>• Gross Tertiary School Enrollment Trends (2010–2023)</a:t>
-            </a:r>
-            <a:br/>
-            <a:r>
-              <a:t>• World Bank Country Comparison Matrix</a:t>
+              </a:rPr>
+              <a:t>• Left Sidebar: Active navigation pills, Year/Region/Country/Subject filters, and Reset Filters button</a:t>
+            </a:r>
+            <a:br/>
+            <a:r>
+              <a:rPr sz="700">
+                <a:solidFill>
+                  <a:srgbClr val="CBD5E1"/>
+                </a:solidFill>
+                <a:latin typeface="Segoe UI"/>
+              </a:rPr>
+              <a:t>• 6 Circular KPI Badges: USA 197 Capacity, 58.4 Avg Score, 4.82% Spend % GDP, 62.4% Tertiary Rate, UK Leader, China Leader</a:t>
+            </a:r>
+            <a:br/>
+            <a:r>
+              <a:rPr sz="700">
+                <a:solidFill>
+                  <a:srgbClr val="CBD5E1"/>
+                </a:solidFill>
+                <a:latin typeface="Segoe UI"/>
+              </a:rPr>
+              <a:t>• Top 5 Nations by University Capacity (Horizontal Bars)</a:t>
+            </a:r>
+            <a:br/>
+            <a:r>
+              <a:rPr sz="700">
+                <a:solidFill>
+                  <a:srgbClr val="CBD5E1"/>
+                </a:solidFill>
+                <a:latin typeface="Segoe UI"/>
+              </a:rPr>
+              <a:t>• Gross Tertiary Enrolment Rate Trend % (Multi-Line Chart 2020-2024)</a:t>
+            </a:r>
+            <a:br/>
+            <a:r>
+              <a:rPr sz="700">
+                <a:solidFill>
+                  <a:srgbClr val="CBD5E1"/>
+                </a:solidFill>
+                <a:latin typeface="Segoe UI"/>
+              </a:rPr>
+              <a:t>• Ranked Universities by Region (Donut Chart with Center Total)</a:t>
+            </a:r>
+            <a:br/>
+            <a:r>
+              <a:rPr sz="700">
+                <a:solidFill>
+                  <a:srgbClr val="CBD5E1"/>
+                </a:solidFill>
+                <a:latin typeface="Segoe UI"/>
+              </a:rPr>
+              <a:t>• Govt Education Spend (% GDP) vs Score (Scatter / Bubble Plot)</a:t>
+            </a:r>
+            <a:br/>
+            <a:r>
+              <a:rPr sz="700">
+                <a:solidFill>
+                  <a:srgbClr val="CBD5E1"/>
+                </a:solidFill>
+                <a:latin typeface="Segoe UI"/>
+              </a:rPr>
+              <a:t>• World Bank Education Systems Map (Interactive Geographic Map)</a:t>
+            </a:r>
+            <a:br/>
+            <a:r>
+              <a:rPr sz="700">
+                <a:solidFill>
+                  <a:srgbClr val="CBD5E1"/>
+                </a:solidFill>
+                <a:latin typeface="Segoe UI"/>
+              </a:rPr>
+              <a:t>• Average University Score by Top Nation (Vertical Column Benchmarks)</a:t>
             </a:r>
           </a:p>
           <a:p>
             <a:pPr>
               <a:spcBef>
-                <a:spcPts val="800"/>
+                <a:spcPts val="500"/>
               </a:spcBef>
-              <a:defRPr sz="850">
+            </a:pPr>
+            <a:r>
+              <a:rPr sz="780" b="1">
+                <a:solidFill>
+                  <a:srgbClr val="F1F5F9"/>
+                </a:solidFill>
+                <a:latin typeface="Segoe UI"/>
+              </a:rPr>
+              <a:t>Interactivity &amp; Filter Actions:</a:t>
+            </a:r>
+            <a:br/>
+            <a:r>
+              <a:rPr sz="700">
                 <a:solidFill>
                   <a:srgbClr val="CBD5E1"/>
                 </a:solidFill>
                 <a:latin typeface="Segoe UI"/>
-              </a:defRPr>
-            </a:pPr>
-            <a:r>
-              <a:t>Interactivity &amp; Filter Actions:</a:t>
-            </a:r>
-            <a:br/>
-            <a:r>
+              </a:rPr>
               <a:t>• Clicking country on Dashboard 1 filters Dashboard 4 to national profile.</a:t>
             </a:r>
             <a:br/>
             <a:r>
+              <a:rPr sz="700">
+                <a:solidFill>
+                  <a:srgbClr val="CBD5E1"/>
+                </a:solidFill>
+                <a:latin typeface="Segoe UI"/>
+              </a:rPr>
               <a:t>• Multi-country selector enables side-by-side OECD policy comparisons.</a:t>
+            </a:r>
+            <a:br/>
+            <a:r>
+              <a:rPr sz="700">
+                <a:solidFill>
+                  <a:srgbClr val="CBD5E1"/>
+                </a:solidFill>
+                <a:latin typeface="Segoe UI"/>
+              </a:rPr>
+              <a:t>• 1-click ↺ Reset Filters button restores full global view instantly.</a:t>
             </a:r>
           </a:p>
           <a:p>
             <a:pPr>
               <a:spcBef>
-                <a:spcPts val="800"/>
+                <a:spcPts val="500"/>
               </a:spcBef>
-              <a:defRPr sz="850">
+            </a:pPr>
+            <a:r>
+              <a:rPr sz="780" b="1">
+                <a:solidFill>
+                  <a:srgbClr val="F1F5F9"/>
+                </a:solidFill>
+                <a:latin typeface="Segoe UI"/>
+              </a:rPr>
+              <a:t>Analytical Finding:</a:t>
+            </a:r>
+            <a:br/>
+            <a:r>
+              <a:rPr sz="720">
                 <a:solidFill>
                   <a:srgbClr val="CBD5E1"/>
                 </a:solidFill>
                 <a:latin typeface="Segoe UI"/>
-              </a:defRPr>
-            </a:pPr>
-            <a:r>
-              <a:t>Analytical Finding:</a:t>
-            </a:r>
-            <a:br/>
-            <a:r>
-              <a:t>High public spending (&gt;5% GDP) correlates with broad tertiary access, but elite top-50 concentration requires dedicated research funding.</a:t>
+              </a:rPr>
+              <a:t>Public tertiary education spend (&gt;4.5% GDP) correlates with higher national gross enrollment (&gt;60%); USA and UK lead in top-tier capacity, while China demonstrates the fastest rate of institutional ranking gains over 2020-2024.</a:t>
             </a:r>
           </a:p>
         </p:txBody>
@@ -8234,15 +8690,21 @@
               </a:defRPr>
             </a:pPr>
             <a:r>
+              <a:rPr sz="1100" b="1">
+                <a:solidFill>
+                  <a:srgbClr val="10B981"/>
+                </a:solidFill>
+                <a:latin typeface="Segoe UI"/>
+              </a:rPr>
               <a:t>TIER 1: MACRO DISCOVERY</a:t>
             </a:r>
           </a:p>
           <a:p>
             <a:pPr>
               <a:spcBef>
-                <a:spcPts val="1200"/>
+                <a:spcPts val="800"/>
               </a:spcBef>
-              <a:defRPr sz="950">
+              <a:defRPr sz="850">
                 <a:solidFill>
                   <a:srgbClr val="CBD5E1"/>
                 </a:solidFill>
@@ -8250,20 +8712,19 @@
               </a:defRPr>
             </a:pPr>
             <a:r>
-              <a:t>Dashboard 1: University Overview</a:t>
-            </a:r>
-            <a:br/>
-            <a:br/>
-            <a:r>
-              <a:t>• User selects region or country (e.g. 'United Kingdom').</a:t>
-            </a:r>
-            <a:br/>
-            <a:r>
-              <a:t>• Scorecard displays national averages and top institutions.</a:t>
-            </a:r>
-            <a:br/>
-            <a:r>
-              <a:t>• User clicks on a specific university (e.g. 'Imperial College London').</a:t>
+              <a:t>• Dashboard 1: University Overview</a:t>
+            </a:r>
+            <a:br/>
+            <a:r>
+              <a:t>• User selects region, country, or subject area via persistent Left Sidebar.</a:t>
+            </a:r>
+            <a:br/>
+            <a:r>
+              <a:t>• Scorecard displays top institutions, global geographic share, and KPI badges.</a:t>
+            </a:r>
+            <a:br/>
+            <a:r>
+              <a:t>• Clicking any institution filters the suite and sets active context for Tier 2.</a:t>
             </a:r>
           </a:p>
         </p:txBody>
@@ -8318,15 +8779,21 @@
               </a:defRPr>
             </a:pPr>
             <a:r>
+              <a:rPr sz="1100" b="1">
+                <a:solidFill>
+                  <a:srgbClr val="10B981"/>
+                </a:solidFill>
+                <a:latin typeface="Segoe UI"/>
+              </a:rPr>
               <a:t>TIER 2: RESEARCH DEEP DIVE</a:t>
             </a:r>
           </a:p>
           <a:p>
             <a:pPr>
               <a:spcBef>
-                <a:spcPts val="1200"/>
+                <a:spcPts val="800"/>
               </a:spcBef>
-              <a:defRPr sz="950">
+              <a:defRPr sz="850">
                 <a:solidFill>
                   <a:srgbClr val="CBD5E1"/>
                 </a:solidFill>
@@ -8334,20 +8801,19 @@
               </a:defRPr>
             </a:pPr>
             <a:r>
-              <a:t>Dashboard 2: Research Analytics</a:t>
-            </a:r>
-            <a:br/>
-            <a:br/>
-            <a:r>
-              <a:t>• Filter action automatically passes university_id.</a:t>
-            </a:r>
-            <a:br/>
-            <a:r>
-              <a:t>• Highlights Imperial's 98.3 citations score on the regression line.</a:t>
-            </a:r>
-            <a:br/>
-            <a:r>
-              <a:t>• Analyzes international collaboration networks and faculty impact.</a:t>
+              <a:t>• Dashboard 2: Research Analytics</a:t>
+            </a:r>
+            <a:br/>
+            <a:r>
+              <a:t>• Filter action automatically passes university_id to evaluate citations and output.</a:t>
+            </a:r>
+            <a:br/>
+            <a:r>
+              <a:t>• Highlights institution on citation velocity trend and scatter regression plot.</a:t>
+            </a:r>
+            <a:br/>
+            <a:r>
+              <a:t>• Scholarly publication volume benchmarks institution against regional peers.</a:t>
             </a:r>
           </a:p>
         </p:txBody>
@@ -8402,15 +8868,21 @@
               </a:defRPr>
             </a:pPr>
             <a:r>
+              <a:rPr sz="1100" b="1">
+                <a:solidFill>
+                  <a:srgbClr val="10B981"/>
+                </a:solidFill>
+                <a:latin typeface="Segoe UI"/>
+              </a:rPr>
               <a:t>TIER 3: CAMPUS EXPERIENCE</a:t>
             </a:r>
           </a:p>
           <a:p>
             <a:pPr>
               <a:spcBef>
-                <a:spcPts val="1200"/>
+                <a:spcPts val="800"/>
               </a:spcBef>
-              <a:defRPr sz="950">
+              <a:defRPr sz="850">
                 <a:solidFill>
                   <a:srgbClr val="CBD5E1"/>
                 </a:solidFill>
@@ -8418,20 +8890,19 @@
               </a:defRPr>
             </a:pPr>
             <a:r>
-              <a:t>Dashboard 3: Student Analytics</a:t>
-            </a:r>
-            <a:br/>
-            <a:br/>
-            <a:r>
-              <a:t>• Evaluates mentorship capacity: Imperial's 11.4:1 student-to-staff ratio.</a:t>
-            </a:r>
-            <a:br/>
-            <a:r>
-              <a:t>• Examines student diversity: 61.0% international enrollment.</a:t>
-            </a:r>
-            <a:br/>
-            <a:r>
-              <a:t>• Assesses gender balance across student body.</a:t>
+              <a:t>• Dashboard 3: Student Analytics</a:t>
+            </a:r>
+            <a:br/>
+            <a:r>
+              <a:t>• Evaluates campus mentorship capacity and international mobility demographics.</a:t>
+            </a:r>
+            <a:br/>
+            <a:r>
+              <a:t>• Benchmarks student-to-staff ratios against global averages (1:17.3 baseline).</a:t>
+            </a:r>
+            <a:br/>
+            <a:r>
+              <a:t>• Provides detailed gender parity indices and global student share distributions.</a:t>
             </a:r>
           </a:p>
         </p:txBody>
@@ -8486,15 +8957,21 @@
               </a:defRPr>
             </a:pPr>
             <a:r>
+              <a:rPr sz="1100" b="1">
+                <a:solidFill>
+                  <a:srgbClr val="10B981"/>
+                </a:solidFill>
+                <a:latin typeface="Segoe UI"/>
+              </a:rPr>
               <a:t>TIER 4: POLICY BENCHMARK</a:t>
             </a:r>
           </a:p>
           <a:p>
             <a:pPr>
               <a:spcBef>
-                <a:spcPts val="1200"/>
+                <a:spcPts val="800"/>
               </a:spcBef>
-              <a:defRPr sz="950">
+              <a:defRPr sz="850">
                 <a:solidFill>
                   <a:srgbClr val="CBD5E1"/>
                 </a:solidFill>
@@ -8502,20 +8979,19 @@
               </a:defRPr>
             </a:pPr>
             <a:r>
-              <a:t>Dashboard 4: Country Comparison</a:t>
-            </a:r>
-            <a:br/>
-            <a:br/>
-            <a:r>
-              <a:t>• Cross-filters to the United Kingdom national profile.</a:t>
-            </a:r>
-            <a:br/>
-            <a:r>
-              <a:t>• Evaluates UK government education spending (% of GDP).</a:t>
-            </a:r>
-            <a:br/>
-            <a:r>
-              <a:t>• Compares UK tertiary gross enrollment trajectory against European peers.</a:t>
+              <a:t>• Dashboard 4: Country Comparison</a:t>
+            </a:r>
+            <a:br/>
+            <a:r>
+              <a:t>• Cross-filters to host country national profile with World Bank EdStats indicators.</a:t>
+            </a:r>
+            <a:br/>
+            <a:r>
+              <a:t>• Evaluates public tertiary spending (% of GDP) against national capacity.</a:t>
+            </a:r>
+            <a:br/>
+            <a:r>
+              <a:t>• 1-click ↺ Reset Filters button restores global cross-comparison across all views.</a:t>
             </a:r>
           </a:p>
         </p:txBody>

--- a/EduVision_DV_Project_Presentation.pptx
+++ b/EduVision_DV_Project_Presentation.pptx
@@ -5797,7 +5797,7 @@
               </a:defRPr>
             </a:pPr>
             <a:r>
-              <a:t>Empirical Finding: Top 10 institutions maintain staff ratios under 16:1 and average citations per faculty exceeding 95.0, reflecting intense faculty mentorship.</a:t>
+              <a:t>Empirical Finding: Top 10 institutions maintain staff ratios under 16:1 and average citations per faculty exceeding 95.0, reflecting intensive faculty advising.</a:t>
             </a:r>
           </a:p>
         </p:txBody>
@@ -6077,45 +6077,19 @@
               </a:defRPr>
             </a:pPr>
             <a:r>
-              <a:rPr sz="1100" b="1">
-                <a:solidFill>
-                  <a:srgbClr val="10B981"/>
-                </a:solidFill>
-                <a:latin typeface="Segoe UI"/>
-              </a:rPr>
               <a:t>DASHBOARD 1: UNIVERSITY OVERVIEW</a:t>
             </a:r>
           </a:p>
           <a:p>
             <a:pPr>
-              <a:spcBef>
-                <a:spcPts val="800"/>
-              </a:spcBef>
               <a:defRPr sz="850">
                 <a:solidFill>
-                  <a:srgbClr val="CBD5E1"/>
-                </a:solidFill>
-                <a:latin typeface="Segoe UI"/>
-              </a:defRPr>
-            </a:pPr>
-            <a:r>
-              <a:t>• Located in Milestone 3 / Module 5 &amp; Module 6.</a:t>
-            </a:r>
-            <a:br/>
-            <a:r>
-              <a:t>• Executive landing scorecard with Left Sidebar Navigation &amp; Filter Suite.</a:t>
-            </a:r>
-            <a:br/>
-            <a:r>
-              <a:t>• Features 6 Circular Badge KPI Cards (MIT #1, 1,503 Univs, 72.6 Avg Score, 28.7% Intl, 1:17.3 Ratio, 2.45M Pubs).</a:t>
-            </a:r>
-            <a:br/>
-            <a:r>
-              <a:t>• Visualization Suite: Ranked Bars, Multi-Line Trends, Regional Share Donut, Volume Bars, Geo Map, and Column Ratios.</a:t>
-            </a:r>
-            <a:br/>
-            <a:r>
-              <a:t>• Interlinking: Passes university_id to Dashboards 2 &amp; 3; passes country_id to Dashboard 4; 1-click Reset Filters.</a:t>
+                  <a:srgbClr val="E2E8F0"/>
+                </a:solidFill>
+              </a:defRPr>
+            </a:pPr>
+            <a:r>
+              <a:t>• Located in Milestone 3 / Module 5 &amp; Module 6. • Executive landing scorecard with Top Header Navigation &amp; KPI Suite. • Features 6 Executive KPI Cards (#1 MIT, 1,503 Univs, 72.6 Avg Score, 28.7% Intl Students, 1:11.2 Faculty Ratio, 84.3 Research Impact). • Visualization Quadrants: Top 10 Global Rankings (Ranked Bars), Academic Reputation vs Score (Top 50 Scatter), Global University Footprint (Regional Bars), National Capacity Benchmark. • Interlinking: Scoped action filters with exclude parameter protect macro charts while filtering detail views.</a:t>
             </a:r>
           </a:p>
         </p:txBody>
@@ -6164,51 +6138,25 @@
             <a:pPr algn="ctr">
               <a:defRPr sz="1100" b="1">
                 <a:solidFill>
-                  <a:srgbClr val="06B6D4"/>
-                </a:solidFill>
-                <a:latin typeface="Segoe UI"/>
-              </a:defRPr>
-            </a:pPr>
-            <a:r>
-              <a:rPr sz="1100" b="1">
-                <a:solidFill>
                   <a:srgbClr val="10B981"/>
                 </a:solidFill>
                 <a:latin typeface="Segoe UI"/>
-              </a:rPr>
+              </a:defRPr>
+            </a:pPr>
+            <a:r>
               <a:t>DASHBOARD 2: RESEARCH ANALYTICS</a:t>
             </a:r>
           </a:p>
           <a:p>
             <a:pPr>
-              <a:spcBef>
-                <a:spcPts val="800"/>
-              </a:spcBef>
               <a:defRPr sz="850">
                 <a:solidFill>
-                  <a:srgbClr val="CBD5E1"/>
-                </a:solidFill>
-                <a:latin typeface="Segoe UI"/>
-              </a:defRPr>
-            </a:pPr>
-            <a:r>
-              <a:t>• Located in Milestone 3 / Module 5 &amp; Module 6.</a:t>
-            </a:r>
-            <a:br/>
-            <a:r>
-              <a:t>• Deep-dive research intelligence with Left Sidebar Navigation &amp; Top Header.</a:t>
-            </a:r>
-            <a:br/>
-            <a:r>
-              <a:t>• Features 6 Circular KPI Badges (82.4 Research Score, 86.1 Velocity, 84.9 Productivity, 78.2 Collaboration, Harvard Hub, 2.45M Pubs).</a:t>
-            </a:r>
-            <a:br/>
-            <a:r>
-              <a:t>• Visualization Suite: Productivity Bars, Velocity Multi-Line, Regional Share Donut, Citation vs Score Scatter, Network Map, Regional Columns.</a:t>
-            </a:r>
-            <a:br/>
-            <a:r>
-              <a:t>• Interlinking: Pre-filtered for active university with peer benchmark reference lines; 1-click Reset Filters.</a:t>
+                  <a:srgbClr val="E2E8F0"/>
+                </a:solidFill>
+              </a:defRPr>
+            </a:pPr>
+            <a:r>
+              <a:t>• Located in Milestone 3 / Module 5 &amp; Module 6. • Deep-dive research intelligence with Top Header Navigation. • Features 6 Research KPI Scorecards (82.4 Research Score, 86.1 Citation Impact, 84.9 Productivity Index, 78.2 Intl Collab, Harvard Hub, 99.87 Citations Leader). • Visualization Quadrants: Research Productivity Rankings (Horizontal Bars), Citation Impact vs Productivity (Top 50 Scatter), Regional Academic Performance, Regional Research Performance. • Interlinking: Seamlessly cross-filters scholarly metrics across institutional tiers.</a:t>
             </a:r>
           </a:p>
         </p:txBody>
@@ -6257,51 +6205,25 @@
             <a:pPr algn="ctr">
               <a:defRPr sz="1100" b="1">
                 <a:solidFill>
-                  <a:srgbClr val="F59E0B"/>
-                </a:solidFill>
-                <a:latin typeface="Segoe UI"/>
-              </a:defRPr>
-            </a:pPr>
-            <a:r>
-              <a:rPr sz="1100" b="1">
-                <a:solidFill>
                   <a:srgbClr val="10B981"/>
                 </a:solidFill>
                 <a:latin typeface="Segoe UI"/>
-              </a:rPr>
+              </a:defRPr>
+            </a:pPr>
+            <a:r>
               <a:t>DASHBOARD 3: STUDENT ANALYTICS</a:t>
             </a:r>
           </a:p>
           <a:p>
             <a:pPr>
-              <a:spcBef>
-                <a:spcPts val="800"/>
-              </a:spcBef>
               <a:defRPr sz="850">
                 <a:solidFill>
-                  <a:srgbClr val="CBD5E1"/>
-                </a:solidFill>
-                <a:latin typeface="Segoe UI"/>
-              </a:defRPr>
-            </a:pPr>
-            <a:r>
-              <a:t>• Located in Milestone 3 / Module 6.</a:t>
-            </a:r>
-            <a:br/>
-            <a:r>
-              <a:t>• Campus diversity &amp; faculty capacity intelligence with Left Sidebar Navigation.</a:t>
-            </a:r>
-            <a:br/>
-            <a:r>
-              <a:t>• Features 6 Circular KPI Badges (28.7% Intl Students, 1:17.3 Staff Ratio, 18.4M Total Enrollment, 51:49 Gender Parity, Macau Hub, Caltech Mentorship).</a:t>
-            </a:r>
-            <a:br/>
-            <a:r>
-              <a:t>• Visualization Suite: Diversity Leader Bars, Mobility Multi-Line, Student Share Donut, Diversity vs Score Scatter, Mobility Map, Faculty Ratio Columns.</a:t>
-            </a:r>
-            <a:br/>
-            <a:r>
-              <a:t>• Interlinking: Pre-filtered for active university; cross-links to national context; 1-click Reset Filters.</a:t>
+                  <a:srgbClr val="E2E8F0"/>
+                </a:solidFill>
+              </a:defRPr>
+            </a:pPr>
+            <a:r>
+              <a:t>• Located in Milestone 3 / Module 6. • Campus diversity &amp; faculty capacity intelligence with Top Header Navigation. • Features 6 Student KPI Cards (28.7% Intl Students, 1:11.2 Faculty Ratio, 18.4M Total Enrollment, 51:49 Gender Parity, Macau Diversity Hub, Caltech Faculty Ratio). • Visualization Quadrants: Top 10 Campus Diversity (Ranked Bars), Students Per Faculty Benchmark, International Student Percentage by Region, Regional Academic Performance. • Interlinking: Evaluates institutional diversity and academic guidance across global cohorts.</a:t>
             </a:r>
           </a:p>
         </p:txBody>
@@ -6350,51 +6272,25 @@
             <a:pPr algn="ctr">
               <a:defRPr sz="1100" b="1">
                 <a:solidFill>
-                  <a:srgbClr val="8B5CF6"/>
-                </a:solidFill>
-                <a:latin typeface="Segoe UI"/>
-              </a:defRPr>
-            </a:pPr>
-            <a:r>
-              <a:rPr sz="1100" b="1">
-                <a:solidFill>
                   <a:srgbClr val="10B981"/>
                 </a:solidFill>
                 <a:latin typeface="Segoe UI"/>
-              </a:rPr>
+              </a:defRPr>
+            </a:pPr>
+            <a:r>
               <a:t>DASHBOARD 4: COUNTRY COMPARISON</a:t>
             </a:r>
           </a:p>
           <a:p>
             <a:pPr>
-              <a:spcBef>
-                <a:spcPts val="800"/>
-              </a:spcBef>
               <a:defRPr sz="850">
                 <a:solidFill>
-                  <a:srgbClr val="CBD5E1"/>
-                </a:solidFill>
-                <a:latin typeface="Segoe UI"/>
-              </a:defRPr>
-            </a:pPr>
-            <a:r>
-              <a:t>• Located in Milestone 3 / Module 6.</a:t>
-            </a:r>
-            <a:br/>
-            <a:r>
-              <a:t>• Country-level macroeconomic education benchmarking with Left Sidebar Navigation.</a:t>
-            </a:r>
-            <a:br/>
-            <a:r>
-              <a:t>• Features 6 Circular KPI Badges (USA 197 Capacity, 58.4 Avg Score, 4.82% Spend % GDP, 62.4% Tertiary Rate, UK Leader, China Leader).</a:t>
-            </a:r>
-            <a:br/>
-            <a:r>
-              <a:t>• Visualization Suite: Capacity Bars, Gross Enrollment Multi-Line, Regional Share Donut, Public Spend vs Score Scatter, World Bank Systems Map, National Column Benchmarks.</a:t>
-            </a:r>
-            <a:br/>
-            <a:r>
-              <a:t>• Interlinking: Receives country_id from preceding dashboards; multi-country filter; 1-click Reset Filters.</a:t>
+                  <a:srgbClr val="E2E8F0"/>
+                </a:solidFill>
+              </a:defRPr>
+            </a:pPr>
+            <a:r>
+              <a:t>• Located in Milestone 3 / Module 6. • Country-level macroeconomic education benchmarking with Top Header Navigation. • Features 6 Policy KPI Cards (US 197 Capacity, 58.4 Avg Score, 4.82% Spend % GDP, 62.4% Tertiary Rate, UK Leader, China Leader). • Visualization Quadrants: Top Nations by Number of Ranked Universities (National Capacity Bars), Average University Score by Top Nation (Quality Bars), Global University Footprint, Regional Academic Performance. • Interlinking: Evaluates public investment and university density across nations.</a:t>
             </a:r>
           </a:p>
         </p:txBody>
@@ -6624,30 +6520,6 @@
           </a:p>
         </p:txBody>
       </p:sp>
-      <p:pic>
-        <p:nvPicPr>
-          <p:cNvPr id="7" name="Picture 6" descr="dashboard_1_university_overview.png"/>
-          <p:cNvPicPr>
-            <a:picLocks noChangeAspect="1"/>
-          </p:cNvPicPr>
-          <p:nvPr/>
-        </p:nvPicPr>
-        <p:blipFill>
-          <a:blip r:embed="rId2"/>
-          <a:stretch>
-            <a:fillRect/>
-          </a:stretch>
-        </p:blipFill>
-        <p:spPr>
-          <a:xfrm>
-            <a:off x="731520" y="1371600"/>
-            <a:ext cx="6949440" cy="4343400"/>
-          </a:xfrm>
-          <a:prstGeom prst="rect">
-            <a:avLst/>
-          </a:prstGeom>
-        </p:spPr>
-      </p:pic>
       <p:sp>
         <p:nvSpPr>
           <p:cNvPr id="8" name="Rounded Rectangle 7"/>
@@ -6698,211 +6570,83 @@
               </a:defRPr>
             </a:pPr>
             <a:r>
-              <a:rPr sz="1050" b="1">
-                <a:solidFill>
-                  <a:srgbClr val="10B981"/>
-                </a:solidFill>
-                <a:latin typeface="Segoe UI"/>
-              </a:rPr>
               <a:t>DASHBOARD 1 ARCHITECTURE</a:t>
             </a:r>
           </a:p>
           <a:p>
             <a:pPr>
-              <a:spcBef>
-                <a:spcPts val="600"/>
-              </a:spcBef>
-            </a:pPr>
-            <a:r>
-              <a:rPr sz="780" b="1">
-                <a:solidFill>
-                  <a:srgbClr val="F1F5F9"/>
-                </a:solidFill>
-                <a:latin typeface="Segoe UI"/>
-              </a:rPr>
-              <a:t>Core Business Purpose:</a:t>
-            </a:r>
-            <a:br/>
-            <a:r>
-              <a:rPr sz="750">
-                <a:solidFill>
-                  <a:srgbClr val="CBD5E1"/>
-                </a:solidFill>
-                <a:latin typeface="Segoe UI"/>
-              </a:rPr>
-              <a:t>Executive landing page and institutional benchmark scorecard with persistent Left Sidebar Navigation and Top Quick Filters.</a:t>
+              <a:defRPr sz="850">
+                <a:solidFill>
+                  <a:srgbClr val="E2E8F0"/>
+                </a:solidFill>
+              </a:defRPr>
+            </a:pPr>
+            <a:r>
+              <a:t>Core Business Purpose: Executive landing scorecard providing institutional benchmarks, overall score evaluations, and global higher education footprints.</a:t>
             </a:r>
           </a:p>
           <a:p>
             <a:pPr>
-              <a:spcBef>
-                <a:spcPts val="500"/>
-              </a:spcBef>
-            </a:pPr>
-            <a:r>
-              <a:rPr sz="780" b="1">
-                <a:solidFill>
-                  <a:srgbClr val="F1F5F9"/>
-                </a:solidFill>
-                <a:latin typeface="Segoe UI"/>
-              </a:rPr>
-              <a:t>Visual Components:</a:t>
-            </a:r>
-            <a:br/>
-            <a:r>
-              <a:rPr sz="700">
-                <a:solidFill>
-                  <a:srgbClr val="CBD5E1"/>
-                </a:solidFill>
-                <a:latin typeface="Segoe UI"/>
-              </a:rPr>
-              <a:t>• Left Sidebar: Active navigation pills, Year/Region/Country/Subject filters, and Reset Filters button</a:t>
-            </a:r>
-            <a:br/>
-            <a:r>
-              <a:rPr sz="700">
-                <a:solidFill>
-                  <a:srgbClr val="CBD5E1"/>
-                </a:solidFill>
-                <a:latin typeface="Segoe UI"/>
-              </a:rPr>
-              <a:t>• 6 Circular Badge KPI Cards: #1 MIT Rank, 1,503 Ranked Univs, 72.6 Avg Score, 28.7% Intl Students, 1:17.3 Ratio, 2.45M Publications</a:t>
-            </a:r>
-            <a:br/>
-            <a:r>
-              <a:rPr sz="700">
-                <a:solidFill>
-                  <a:srgbClr val="CBD5E1"/>
-                </a:solidFill>
-                <a:latin typeface="Segoe UI"/>
-              </a:rPr>
-              <a:t>• Top 10 Universities by Global Ranking (Ranked Horizontal Bars)</a:t>
-            </a:r>
-            <a:br/>
-            <a:r>
-              <a:rPr sz="700">
-                <a:solidFill>
-                  <a:srgbClr val="CBD5E1"/>
-                </a:solidFill>
-                <a:latin typeface="Segoe UI"/>
-              </a:rPr>
-              <a:t>• Top 10 Universities by Overall Score Trend (Multi-Line Chart 2020-2024)</a:t>
-            </a:r>
-            <a:br/>
-            <a:r>
-              <a:rPr sz="700">
-                <a:solidFill>
-                  <a:srgbClr val="CBD5E1"/>
-                </a:solidFill>
-                <a:latin typeface="Segoe UI"/>
-              </a:rPr>
-              <a:t>• Universities by Region (Regional Share Donut Chart with Center Total)</a:t>
-            </a:r>
-            <a:br/>
-            <a:r>
-              <a:rPr sz="700">
-                <a:solidFill>
-                  <a:srgbClr val="CBD5E1"/>
-                </a:solidFill>
-                <a:latin typeface="Segoe UI"/>
-              </a:rPr>
-              <a:t>• Publications by Top 5 Universities (Horizontal Volume Bars)</a:t>
-            </a:r>
-            <a:br/>
-            <a:r>
-              <a:rPr sz="700">
-                <a:solidFill>
-                  <a:srgbClr val="CBD5E1"/>
-                </a:solidFill>
-                <a:latin typeface="Segoe UI"/>
-              </a:rPr>
-              <a:t>• International Students % by Region (Interactive Geographic Map)</a:t>
-            </a:r>
-            <a:br/>
-            <a:r>
-              <a:rPr sz="700">
-                <a:solidFill>
-                  <a:srgbClr val="CBD5E1"/>
-                </a:solidFill>
-                <a:latin typeface="Segoe UI"/>
-              </a:rPr>
-              <a:t>• Faculty-to-Student Ratio by Region (Vertical Column Chart)</a:t>
+              <a:defRPr sz="850">
+                <a:solidFill>
+                  <a:srgbClr val="E2E8F0"/>
+                </a:solidFill>
+              </a:defRPr>
+            </a:pPr>
+            <a:r>
+              <a:t>Visual Components: • Top Executive Header: Persistent navigation tabs across all 4 dashboards • 6 KPI Scorecards: #1 (MIT), 1,503 Total Universities, 72.6 Avg Score, 28.7% Intl Students, 1:11.2 Faculty Ratio, 84.3 Research Impact • Top Global Universities by Overall Score (Ranked Horizontal Bars) • Academic Reputation vs Research Citations (Scatter Plot Top 50) • Global University Distribution by Region (Horizontal Bars) • Top Nations by Number of Ranked Universities (National Capacity Bars)</a:t>
             </a:r>
           </a:p>
           <a:p>
             <a:pPr>
-              <a:spcBef>
-                <a:spcPts val="500"/>
-              </a:spcBef>
-            </a:pPr>
-            <a:r>
-              <a:rPr sz="780" b="1">
-                <a:solidFill>
-                  <a:srgbClr val="F1F5F9"/>
-                </a:solidFill>
-                <a:latin typeface="Segoe UI"/>
-              </a:rPr>
-              <a:t>Interactivity &amp; Filter Actions:</a:t>
-            </a:r>
-            <a:br/>
-            <a:r>
-              <a:rPr sz="700">
-                <a:solidFill>
-                  <a:srgbClr val="CBD5E1"/>
-                </a:solidFill>
-                <a:latin typeface="Segoe UI"/>
-              </a:rPr>
-              <a:t>• Left sidebar single/multi-select dropdowns filter all 6 views dynamically.</a:t>
-            </a:r>
-            <a:br/>
-            <a:r>
-              <a:rPr sz="700">
-                <a:solidFill>
-                  <a:srgbClr val="CBD5E1"/>
-                </a:solidFill>
-                <a:latin typeface="Segoe UI"/>
-              </a:rPr>
-              <a:t>• Clicking any university filters all charts and passes university_id to Dashboards 2 &amp; 3.</a:t>
-            </a:r>
-            <a:br/>
-            <a:r>
-              <a:rPr sz="700">
-                <a:solidFill>
-                  <a:srgbClr val="CBD5E1"/>
-                </a:solidFill>
-                <a:latin typeface="Segoe UI"/>
-              </a:rPr>
-              <a:t>• 1-click ↺ Reset Filters button restores full global view instantly.</a:t>
+              <a:defRPr sz="850">
+                <a:solidFill>
+                  <a:srgbClr val="E2E8F0"/>
+                </a:solidFill>
+              </a:defRPr>
+            </a:pPr>
+            <a:r>
+              <a:t>Interactivity &amp; Filter Actions: • Scoped action filters with explicit exclude parameter prevent macro charts from blanking out. Selecting a university dynamically isolates the institution on the scatter plot while preserving the regional and national benchmark bars intact.</a:t>
             </a:r>
           </a:p>
           <a:p>
             <a:pPr>
-              <a:spcBef>
-                <a:spcPts val="500"/>
-              </a:spcBef>
-            </a:pPr>
-            <a:r>
-              <a:rPr sz="780" b="1">
-                <a:solidFill>
-                  <a:srgbClr val="F1F5F9"/>
-                </a:solidFill>
-                <a:latin typeface="Segoe UI"/>
-              </a:rPr>
-              <a:t>Analytical Finding:</a:t>
-            </a:r>
-            <a:br/>
-            <a:r>
-              <a:rPr sz="720">
-                <a:solidFill>
-                  <a:srgbClr val="CBD5E1"/>
-                </a:solidFill>
-                <a:latin typeface="Segoe UI"/>
-              </a:rPr>
-              <a:t>MIT, Cambridge, and Oxford lead global rankings; North America and Europe host &gt;65% of top institutions; faculty ratios range from 1:12.6 in South America to 1:21.4 in North America.</a:t>
-            </a:r>
-          </a:p>
-        </p:txBody>
-      </p:sp>
+              <a:defRPr sz="850">
+                <a:solidFill>
+                  <a:srgbClr val="E2E8F0"/>
+                </a:solidFill>
+              </a:defRPr>
+            </a:pPr>
+            <a:r>
+              <a:t>Analytical Finding: MIT (#1), Imperial College London, and Oxford lead global rankings; North America and Europe host &gt;60% of top institutions, while Asia demonstrates rapid score acceleration.</a:t>
+            </a:r>
+          </a:p>
+        </p:txBody>
+      </p:sp>
+      <p:pic>
+        <p:nvPicPr>
+          <p:cNvPr id="9" name="Picture 8" descr="dashboard_1_university_overview.png"/>
+          <p:cNvPicPr>
+            <a:picLocks noChangeAspect="1"/>
+          </p:cNvPicPr>
+          <p:nvPr/>
+        </p:nvPicPr>
+        <p:blipFill>
+          <a:blip r:embed="rId3"/>
+          <a:stretch>
+            <a:fillRect/>
+          </a:stretch>
+        </p:blipFill>
+        <p:spPr>
+          <a:xfrm>
+            <a:off x="731520" y="1371600"/>
+            <a:ext cx="6949440" cy="4343400"/>
+          </a:xfrm>
+          <a:prstGeom prst="rect">
+            <a:avLst/>
+          </a:prstGeom>
+        </p:spPr>
+      </p:pic>
     </p:spTree>
   </p:cSld>
   <p:clrMapOvr>
@@ -7128,30 +6872,6 @@
           </a:p>
         </p:txBody>
       </p:sp>
-      <p:pic>
-        <p:nvPicPr>
-          <p:cNvPr id="7" name="Picture 6" descr="dashboard_2_research_analytics.png"/>
-          <p:cNvPicPr>
-            <a:picLocks noChangeAspect="1"/>
-          </p:cNvPicPr>
-          <p:nvPr/>
-        </p:nvPicPr>
-        <p:blipFill>
-          <a:blip r:embed="rId2"/>
-          <a:stretch>
-            <a:fillRect/>
-          </a:stretch>
-        </p:blipFill>
-        <p:spPr>
-          <a:xfrm>
-            <a:off x="731520" y="1371600"/>
-            <a:ext cx="6949440" cy="4343400"/>
-          </a:xfrm>
-          <a:prstGeom prst="rect">
-            <a:avLst/>
-          </a:prstGeom>
-        </p:spPr>
-      </p:pic>
       <p:sp>
         <p:nvSpPr>
           <p:cNvPr id="8" name="Rounded Rectangle 7"/>
@@ -7196,217 +6916,89 @@
             <a:pPr algn="ctr">
               <a:defRPr sz="1100" b="1">
                 <a:solidFill>
-                  <a:srgbClr val="06B6D4"/>
-                </a:solidFill>
-                <a:latin typeface="Segoe UI"/>
-              </a:defRPr>
-            </a:pPr>
-            <a:r>
-              <a:rPr sz="1050" b="1">
-                <a:solidFill>
-                  <a:srgbClr val="0284C7"/>
-                </a:solidFill>
-                <a:latin typeface="Segoe UI"/>
-              </a:rPr>
+                  <a:srgbClr val="10B981"/>
+                </a:solidFill>
+                <a:latin typeface="Segoe UI"/>
+              </a:defRPr>
+            </a:pPr>
+            <a:r>
               <a:t>DASHBOARD 2 ARCHITECTURE</a:t>
             </a:r>
           </a:p>
           <a:p>
             <a:pPr>
-              <a:spcBef>
-                <a:spcPts val="600"/>
-              </a:spcBef>
-            </a:pPr>
-            <a:r>
-              <a:rPr sz="780" b="1">
-                <a:solidFill>
-                  <a:srgbClr val="F1F5F9"/>
-                </a:solidFill>
-                <a:latin typeface="Segoe UI"/>
-              </a:rPr>
-              <a:t>Core Business Purpose:</a:t>
-            </a:r>
-            <a:br/>
-            <a:r>
-              <a:rPr sz="750">
-                <a:solidFill>
-                  <a:srgbClr val="CBD5E1"/>
-                </a:solidFill>
-                <a:latin typeface="Segoe UI"/>
-              </a:rPr>
-              <a:t>Deep-dive research intelligence evaluating scholarly productivity, citation velocity, and cross-border research networks.</a:t>
+              <a:defRPr sz="850">
+                <a:solidFill>
+                  <a:srgbClr val="E2E8F0"/>
+                </a:solidFill>
+              </a:defRPr>
+            </a:pPr>
+            <a:r>
+              <a:t>Core Business Purpose: Deep-dive research intelligence evaluating scholarly productivity, citation velocity, and international research collaborations across global institutions.</a:t>
             </a:r>
           </a:p>
           <a:p>
             <a:pPr>
-              <a:spcBef>
-                <a:spcPts val="500"/>
-              </a:spcBef>
-            </a:pPr>
-            <a:r>
-              <a:rPr sz="780" b="1">
-                <a:solidFill>
-                  <a:srgbClr val="F1F5F9"/>
-                </a:solidFill>
-                <a:latin typeface="Segoe UI"/>
-              </a:rPr>
-              <a:t>Visual Components:</a:t>
-            </a:r>
-            <a:br/>
-            <a:r>
-              <a:rPr sz="700">
-                <a:solidFill>
-                  <a:srgbClr val="CBD5E1"/>
-                </a:solidFill>
-                <a:latin typeface="Segoe UI"/>
-              </a:rPr>
-              <a:t>• Left Sidebar: Active navigation pills, Year/Region/Country/Subject filters, and Reset Filters button</a:t>
-            </a:r>
-            <a:br/>
-            <a:r>
-              <a:rPr sz="700">
-                <a:solidFill>
-                  <a:srgbClr val="CBD5E1"/>
-                </a:solidFill>
-                <a:latin typeface="Segoe UI"/>
-              </a:rPr>
-              <a:t>• 6 Circular KPI Badges: 82.4 Research Score, 86.1 Citation Velocity, 84.9 Productivity, 78.2 Collaboration, Harvard Hub, 2.45M Publications</a:t>
-            </a:r>
-            <a:br/>
-            <a:r>
-              <a:rPr sz="700">
-                <a:solidFill>
-                  <a:srgbClr val="CBD5E1"/>
-                </a:solidFill>
-                <a:latin typeface="Segoe UI"/>
-              </a:rPr>
-              <a:t>• Top Research Institutions by Productivity (Horizontal Bars)</a:t>
-            </a:r>
-            <a:br/>
-            <a:r>
-              <a:rPr sz="700">
-                <a:solidFill>
-                  <a:srgbClr val="CBD5E1"/>
-                </a:solidFill>
-                <a:latin typeface="Segoe UI"/>
-              </a:rPr>
-              <a:t>• Scholarly Citations Velocity Trend (Multi-Line Chart 2020-2024)</a:t>
-            </a:r>
-            <a:br/>
-            <a:r>
-              <a:rPr sz="700">
-                <a:solidFill>
-                  <a:srgbClr val="CBD5E1"/>
-                </a:solidFill>
-                <a:latin typeface="Segoe UI"/>
-              </a:rPr>
-              <a:t>• Scholarly Citations Share by Region (Donut Chart with Center Total)</a:t>
-            </a:r>
-            <a:br/>
-            <a:r>
-              <a:rPr sz="700">
-                <a:solidFill>
-                  <a:srgbClr val="CBD5E1"/>
-                </a:solidFill>
-                <a:latin typeface="Segoe UI"/>
-              </a:rPr>
-              <a:t>• Citation Impact vs Research Score (Scatter / Bubble Plot with Trendline)</a:t>
-            </a:r>
-            <a:br/>
-            <a:r>
-              <a:rPr sz="700">
-                <a:solidFill>
-                  <a:srgbClr val="CBD5E1"/>
-                </a:solidFill>
-                <a:latin typeface="Segoe UI"/>
-              </a:rPr>
-              <a:t>• Global Research Network Collaboration Map (Interactive Geographic Map)</a:t>
-            </a:r>
-            <a:br/>
-            <a:r>
-              <a:rPr sz="700">
-                <a:solidFill>
-                  <a:srgbClr val="CBD5E1"/>
-                </a:solidFill>
-                <a:latin typeface="Segoe UI"/>
-              </a:rPr>
-              <a:t>• Average Citations Score by Region (Vertical Column Benchmarks)</a:t>
+              <a:defRPr sz="850">
+                <a:solidFill>
+                  <a:srgbClr val="E2E8F0"/>
+                </a:solidFill>
+              </a:defRPr>
+            </a:pPr>
+            <a:r>
+              <a:t>Visual Components: • Top Executive Header: Persistent navigation tabs across all 4 dashboards • 6 Research KPI Scorecards: 82.4 Avg Research Score, 86.1 Avg Citation Impact, 84.9 Productivity Index, 78.2 Intl Collab, Harvard Peak Hub, 99.87 Citations Leader • Top Research Institutions by Productivity Index (Ranked Horizontal Bars) • Research Citation Impact vs Productivity (Scatter Plot Top 50) • Regional Academic Performance (Horizontal Bars) • Regional Research Performance (Research Citation Score by Region)</a:t>
             </a:r>
           </a:p>
           <a:p>
             <a:pPr>
-              <a:spcBef>
-                <a:spcPts val="500"/>
-              </a:spcBef>
-            </a:pPr>
-            <a:r>
-              <a:rPr sz="780" b="1">
-                <a:solidFill>
-                  <a:srgbClr val="F1F5F9"/>
-                </a:solidFill>
-                <a:latin typeface="Segoe UI"/>
-              </a:rPr>
-              <a:t>Interactivity &amp; Filter Actions:</a:t>
-            </a:r>
-            <a:br/>
-            <a:r>
-              <a:rPr sz="700">
-                <a:solidFill>
-                  <a:srgbClr val="CBD5E1"/>
-                </a:solidFill>
-                <a:latin typeface="Segoe UI"/>
-              </a:rPr>
-              <a:t>• University selection from Dashboard 1 highlights institution against global regression trendline.</a:t>
-            </a:r>
-            <a:br/>
-            <a:r>
-              <a:rPr sz="700">
-                <a:solidFill>
-                  <a:srgbClr val="CBD5E1"/>
-                </a:solidFill>
-                <a:latin typeface="Segoe UI"/>
-              </a:rPr>
-              <a:t>• Left sidebar filters and top quick navigation allow seamless drill-down.</a:t>
-            </a:r>
-            <a:br/>
-            <a:r>
-              <a:rPr sz="700">
-                <a:solidFill>
-                  <a:srgbClr val="CBD5E1"/>
-                </a:solidFill>
-                <a:latin typeface="Segoe UI"/>
-              </a:rPr>
-              <a:t>• 1-click ↺ Reset Filters button restores full global view instantly.</a:t>
+              <a:defRPr sz="850">
+                <a:solidFill>
+                  <a:srgbClr val="E2E8F0"/>
+                </a:solidFill>
+              </a:defRPr>
+            </a:pPr>
+            <a:r>
+              <a:t>Interactivity &amp; Filter Actions: • University selection highlights research productivity and citation impact. Cross-filtering by region isolates continent-level performance benchmarks without blanking out adjacent charts.</a:t>
             </a:r>
           </a:p>
           <a:p>
             <a:pPr>
-              <a:spcBef>
-                <a:spcPts val="500"/>
-              </a:spcBef>
-            </a:pPr>
-            <a:r>
-              <a:rPr sz="780" b="1">
-                <a:solidFill>
-                  <a:srgbClr val="F1F5F9"/>
-                </a:solidFill>
-                <a:latin typeface="Segoe UI"/>
-              </a:rPr>
-              <a:t>Analytical Finding:</a:t>
-            </a:r>
-            <a:br/>
-            <a:r>
-              <a:rPr sz="720">
-                <a:solidFill>
-                  <a:srgbClr val="CBD5E1"/>
-                </a:solidFill>
-                <a:latin typeface="Segoe UI"/>
-              </a:rPr>
-              <a:t>Harvard and MIT exhibit exponential citation velocity (&gt;98.0); Europe accounts for 38% of global citations; scatter analysis confirms strong positive correlation between baseline research productivity and citations per paper.</a:t>
-            </a:r>
-          </a:p>
-        </p:txBody>
-      </p:sp>
+              <a:defRPr sz="850">
+                <a:solidFill>
+                  <a:srgbClr val="E2E8F0"/>
+                </a:solidFill>
+              </a:defRPr>
+            </a:pPr>
+            <a:r>
+              <a:t>Analytical Finding: Harvard and MIT lead citation impact (&gt;98.0); European institutions demonstrate highest cross-border international research network scores (&gt;88.0).</a:t>
+            </a:r>
+          </a:p>
+        </p:txBody>
+      </p:sp>
+      <p:pic>
+        <p:nvPicPr>
+          <p:cNvPr id="9" name="Picture 8" descr="dashboard_2_research_analytics.png"/>
+          <p:cNvPicPr>
+            <a:picLocks noChangeAspect="1"/>
+          </p:cNvPicPr>
+          <p:nvPr/>
+        </p:nvPicPr>
+        <p:blipFill>
+          <a:blip r:embed="rId3"/>
+          <a:stretch>
+            <a:fillRect/>
+          </a:stretch>
+        </p:blipFill>
+        <p:spPr>
+          <a:xfrm>
+            <a:off x="731520" y="1371600"/>
+            <a:ext cx="6949440" cy="4343400"/>
+          </a:xfrm>
+          <a:prstGeom prst="rect">
+            <a:avLst/>
+          </a:prstGeom>
+        </p:spPr>
+      </p:pic>
     </p:spTree>
   </p:cSld>
   <p:clrMapOvr>
@@ -7632,30 +7224,6 @@
           </a:p>
         </p:txBody>
       </p:sp>
-      <p:pic>
-        <p:nvPicPr>
-          <p:cNvPr id="7" name="Picture 6" descr="dashboard_3_student_analytics.png"/>
-          <p:cNvPicPr>
-            <a:picLocks noChangeAspect="1"/>
-          </p:cNvPicPr>
-          <p:nvPr/>
-        </p:nvPicPr>
-        <p:blipFill>
-          <a:blip r:embed="rId2"/>
-          <a:stretch>
-            <a:fillRect/>
-          </a:stretch>
-        </p:blipFill>
-        <p:spPr>
-          <a:xfrm>
-            <a:off x="731520" y="1371600"/>
-            <a:ext cx="6949440" cy="4343400"/>
-          </a:xfrm>
-          <a:prstGeom prst="rect">
-            <a:avLst/>
-          </a:prstGeom>
-        </p:spPr>
-      </p:pic>
       <p:sp>
         <p:nvSpPr>
           <p:cNvPr id="8" name="Rounded Rectangle 7"/>
@@ -7700,217 +7268,89 @@
             <a:pPr algn="ctr">
               <a:defRPr sz="1100" b="1">
                 <a:solidFill>
-                  <a:srgbClr val="F59E0B"/>
-                </a:solidFill>
-                <a:latin typeface="Segoe UI"/>
-              </a:defRPr>
-            </a:pPr>
-            <a:r>
-              <a:rPr sz="1050" b="1">
-                <a:solidFill>
-                  <a:srgbClr val="EA580C"/>
-                </a:solidFill>
-                <a:latin typeface="Segoe UI"/>
-              </a:rPr>
+                  <a:srgbClr val="10B981"/>
+                </a:solidFill>
+                <a:latin typeface="Segoe UI"/>
+              </a:defRPr>
+            </a:pPr>
+            <a:r>
               <a:t>DASHBOARD 3 ARCHITECTURE</a:t>
             </a:r>
           </a:p>
           <a:p>
             <a:pPr>
-              <a:spcBef>
-                <a:spcPts val="600"/>
-              </a:spcBef>
-            </a:pPr>
-            <a:r>
-              <a:rPr sz="780" b="1">
-                <a:solidFill>
-                  <a:srgbClr val="F1F5F9"/>
-                </a:solidFill>
-                <a:latin typeface="Segoe UI"/>
-              </a:rPr>
-              <a:t>Core Business Purpose:</a:t>
-            </a:r>
-            <a:br/>
-            <a:r>
-              <a:rPr sz="750">
-                <a:solidFill>
-                  <a:srgbClr val="CBD5E1"/>
-                </a:solidFill>
-                <a:latin typeface="Segoe UI"/>
-              </a:rPr>
-              <a:t>Comprehensive analysis of student enrollment demographics, internationalization mobility, and faculty mentorship capacity.</a:t>
+              <a:defRPr sz="850">
+                <a:solidFill>
+                  <a:srgbClr val="E2E8F0"/>
+                </a:solidFill>
+              </a:defRPr>
+            </a:pPr>
+            <a:r>
+              <a:t>Core Business Purpose: Comprehensive analysis of student enrollment demographics, internationalization mobility, and academic faculty staffing capacity.</a:t>
             </a:r>
           </a:p>
           <a:p>
             <a:pPr>
-              <a:spcBef>
-                <a:spcPts val="500"/>
-              </a:spcBef>
-            </a:pPr>
-            <a:r>
-              <a:rPr sz="780" b="1">
-                <a:solidFill>
-                  <a:srgbClr val="F1F5F9"/>
-                </a:solidFill>
-                <a:latin typeface="Segoe UI"/>
-              </a:rPr>
-              <a:t>Visual Components:</a:t>
-            </a:r>
-            <a:br/>
-            <a:r>
-              <a:rPr sz="700">
-                <a:solidFill>
-                  <a:srgbClr val="CBD5E1"/>
-                </a:solidFill>
-                <a:latin typeface="Segoe UI"/>
-              </a:rPr>
-              <a:t>• Left Sidebar: Active navigation pills, Year/Region/Country/Subject filters, and Reset Filters button</a:t>
-            </a:r>
-            <a:br/>
-            <a:r>
-              <a:rPr sz="700">
-                <a:solidFill>
-                  <a:srgbClr val="CBD5E1"/>
-                </a:solidFill>
-                <a:latin typeface="Segoe UI"/>
-              </a:rPr>
-              <a:t>• 6 Circular KPI Badges: 28.7% Intl Students, 1:17.3 Students/Staff, 18.4M Total Enrollment, 51:49 Gender Parity, Macau Hub, Caltech Mentorship</a:t>
-            </a:r>
-            <a:br/>
-            <a:r>
-              <a:rPr sz="700">
-                <a:solidFill>
-                  <a:srgbClr val="CBD5E1"/>
-                </a:solidFill>
-                <a:latin typeface="Segoe UI"/>
-              </a:rPr>
-              <a:t>• Top 5 Campus Diversity Leaders (Horizontal Bars)</a:t>
-            </a:r>
-            <a:br/>
-            <a:r>
-              <a:rPr sz="700">
-                <a:solidFill>
-                  <a:srgbClr val="CBD5E1"/>
-                </a:solidFill>
-                <a:latin typeface="Segoe UI"/>
-              </a:rPr>
-              <a:t>• International Mobility Enrollment Trend (Multi-Line Chart 2020-2024)</a:t>
-            </a:r>
-            <a:br/>
-            <a:r>
-              <a:rPr sz="700">
-                <a:solidFill>
-                  <a:srgbClr val="CBD5E1"/>
-                </a:solidFill>
-                <a:latin typeface="Segoe UI"/>
-              </a:rPr>
-              <a:t>• Total Enrolled Students Share by Region (Donut Chart with Center Total)</a:t>
-            </a:r>
-            <a:br/>
-            <a:r>
-              <a:rPr sz="700">
-                <a:solidFill>
-                  <a:srgbClr val="CBD5E1"/>
-                </a:solidFill>
-                <a:latin typeface="Segoe UI"/>
-              </a:rPr>
-              <a:t>• Campus Diversity vs Overall Score (Scatter / Bubble Plot)</a:t>
-            </a:r>
-            <a:br/>
-            <a:r>
-              <a:rPr sz="700">
-                <a:solidFill>
-                  <a:srgbClr val="CBD5E1"/>
-                </a:solidFill>
-                <a:latin typeface="Segoe UI"/>
-              </a:rPr>
-              <a:t>• International Student Mobility Footprint (Interactive Geographic Map)</a:t>
-            </a:r>
-            <a:br/>
-            <a:r>
-              <a:rPr sz="700">
-                <a:solidFill>
-                  <a:srgbClr val="CBD5E1"/>
-                </a:solidFill>
-                <a:latin typeface="Segoe UI"/>
-              </a:rPr>
-              <a:t>• Faculty-to-Student Ratio by Region (Vertical Column Benchmarks)</a:t>
+              <a:defRPr sz="850">
+                <a:solidFill>
+                  <a:srgbClr val="E2E8F0"/>
+                </a:solidFill>
+              </a:defRPr>
+            </a:pPr>
+            <a:r>
+              <a:t>Visual Components: • Top Executive Header: Persistent navigation tabs across all 4 dashboards • 6 Student KPI Scorecards: 28.7% Intl Students, 1:11.2 Faculty Ratio, 18.4M Total Enrollment, 51:49 Gender Parity, Macau Diversity Hub (91%), Caltech Faculty Ratio (3.8:1) • Top Institutions by International Student Percentage (Horizontal Bars) • Students Per Faculty Benchmark by Region (Horizontal Bars) • International Student Percentage by Region (Horizontal Bars) • Regional Academic Performance (Horizontal Bars)</a:t>
             </a:r>
           </a:p>
           <a:p>
             <a:pPr>
-              <a:spcBef>
-                <a:spcPts val="500"/>
-              </a:spcBef>
-            </a:pPr>
-            <a:r>
-              <a:rPr sz="780" b="1">
-                <a:solidFill>
-                  <a:srgbClr val="F1F5F9"/>
-                </a:solidFill>
-                <a:latin typeface="Segoe UI"/>
-              </a:rPr>
-              <a:t>Interactivity &amp; Filter Actions:</a:t>
-            </a:r>
-            <a:br/>
-            <a:r>
-              <a:rPr sz="700">
-                <a:solidFill>
-                  <a:srgbClr val="CBD5E1"/>
-                </a:solidFill>
-                <a:latin typeface="Segoe UI"/>
-              </a:rPr>
-              <a:t>• Cross-filter by institution size, region, and academic tier.</a:t>
-            </a:r>
-            <a:br/>
-            <a:r>
-              <a:rPr sz="700">
-                <a:solidFill>
-                  <a:srgbClr val="CBD5E1"/>
-                </a:solidFill>
-                <a:latin typeface="Segoe UI"/>
-              </a:rPr>
-              <a:t>• Drill-down from global distribution to individual university mentorship ratio.</a:t>
-            </a:r>
-            <a:br/>
-            <a:r>
-              <a:rPr sz="700">
-                <a:solidFill>
-                  <a:srgbClr val="CBD5E1"/>
-                </a:solidFill>
-                <a:latin typeface="Segoe UI"/>
-              </a:rPr>
-              <a:t>• 1-click ↺ Reset Filters button restores full global view instantly.</a:t>
+              <a:defRPr sz="850">
+                <a:solidFill>
+                  <a:srgbClr val="E2E8F0"/>
+                </a:solidFill>
+              </a:defRPr>
+            </a:pPr>
+            <a:r>
+              <a:t>Interactivity &amp; Filter Actions: • Regional filtering dynamically compares campus diversity and faculty burden. Protected action scoping maintains full visibility across all regional benchmarks.</a:t>
             </a:r>
           </a:p>
           <a:p>
             <a:pPr>
-              <a:spcBef>
-                <a:spcPts val="500"/>
-              </a:spcBef>
-            </a:pPr>
-            <a:r>
-              <a:rPr sz="780" b="1">
-                <a:solidFill>
-                  <a:srgbClr val="F1F5F9"/>
-                </a:solidFill>
-                <a:latin typeface="Segoe UI"/>
-              </a:rPr>
-              <a:t>Analytical Finding:</a:t>
-            </a:r>
-            <a:br/>
-            <a:r>
-              <a:rPr sz="720">
-                <a:solidFill>
-                  <a:srgbClr val="CBD5E1"/>
-                </a:solidFill>
-                <a:latin typeface="Segoe UI"/>
-              </a:rPr>
-              <a:t>Global student mobility has grown +1.8% annually; leading institutions in Macau and UK demonstrate over 70% international students; intensive mentorship (lower student-to-staff ratios) directly correlates with elite academic performance tiers.</a:t>
-            </a:r>
-          </a:p>
-        </p:txBody>
-      </p:sp>
+              <a:defRPr sz="850">
+                <a:solidFill>
+                  <a:srgbClr val="E2E8F0"/>
+                </a:solidFill>
+              </a:defRPr>
+            </a:pPr>
+            <a:r>
+              <a:t>Analytical Finding: Global student mobility averages 28.7%; specialized institutions in Macau and London exceed 70% international students; elite institutions maintain favorable faculty ratios under 8:1.</a:t>
+            </a:r>
+          </a:p>
+        </p:txBody>
+      </p:sp>
+      <p:pic>
+        <p:nvPicPr>
+          <p:cNvPr id="9" name="Picture 8" descr="dashboard_3_student_analytics.png"/>
+          <p:cNvPicPr>
+            <a:picLocks noChangeAspect="1"/>
+          </p:cNvPicPr>
+          <p:nvPr/>
+        </p:nvPicPr>
+        <p:blipFill>
+          <a:blip r:embed="rId3"/>
+          <a:stretch>
+            <a:fillRect/>
+          </a:stretch>
+        </p:blipFill>
+        <p:spPr>
+          <a:xfrm>
+            <a:off x="731520" y="1371600"/>
+            <a:ext cx="6949440" cy="4343400"/>
+          </a:xfrm>
+          <a:prstGeom prst="rect">
+            <a:avLst/>
+          </a:prstGeom>
+        </p:spPr>
+      </p:pic>
     </p:spTree>
   </p:cSld>
   <p:clrMapOvr>
@@ -8136,30 +7576,6 @@
           </a:p>
         </p:txBody>
       </p:sp>
-      <p:pic>
-        <p:nvPicPr>
-          <p:cNvPr id="7" name="Picture 6" descr="dashboard_4_country_comparison.png"/>
-          <p:cNvPicPr>
-            <a:picLocks noChangeAspect="1"/>
-          </p:cNvPicPr>
-          <p:nvPr/>
-        </p:nvPicPr>
-        <p:blipFill>
-          <a:blip r:embed="rId2"/>
-          <a:stretch>
-            <a:fillRect/>
-          </a:stretch>
-        </p:blipFill>
-        <p:spPr>
-          <a:xfrm>
-            <a:off x="731520" y="1371600"/>
-            <a:ext cx="6949440" cy="4343400"/>
-          </a:xfrm>
-          <a:prstGeom prst="rect">
-            <a:avLst/>
-          </a:prstGeom>
-        </p:spPr>
-      </p:pic>
       <p:sp>
         <p:nvSpPr>
           <p:cNvPr id="8" name="Rounded Rectangle 7"/>
@@ -8204,217 +7620,89 @@
             <a:pPr algn="ctr">
               <a:defRPr sz="1100" b="1">
                 <a:solidFill>
-                  <a:srgbClr val="8B5CF6"/>
-                </a:solidFill>
-                <a:latin typeface="Segoe UI"/>
-              </a:defRPr>
-            </a:pPr>
-            <a:r>
-              <a:rPr sz="1050" b="1">
-                <a:solidFill>
-                  <a:srgbClr val="8B5CF6"/>
-                </a:solidFill>
-                <a:latin typeface="Segoe UI"/>
-              </a:rPr>
+                  <a:srgbClr val="10B981"/>
+                </a:solidFill>
+                <a:latin typeface="Segoe UI"/>
+              </a:defRPr>
+            </a:pPr>
+            <a:r>
               <a:t>DASHBOARD 4 ARCHITECTURE</a:t>
             </a:r>
           </a:p>
           <a:p>
             <a:pPr>
-              <a:spcBef>
-                <a:spcPts val="600"/>
-              </a:spcBef>
-            </a:pPr>
-            <a:r>
-              <a:rPr sz="780" b="1">
-                <a:solidFill>
-                  <a:srgbClr val="F1F5F9"/>
-                </a:solidFill>
-                <a:latin typeface="Segoe UI"/>
-              </a:rPr>
-              <a:t>Core Business Purpose:</a:t>
-            </a:r>
-            <a:br/>
-            <a:r>
-              <a:rPr sz="750">
-                <a:solidFill>
-                  <a:srgbClr val="CBD5E1"/>
-                </a:solidFill>
-                <a:latin typeface="Segoe UI"/>
-              </a:rPr>
-              <a:t>Macroeconomic evaluation linking national educational expenditure to global university performance and capacity.</a:t>
+              <a:defRPr sz="850">
+                <a:solidFill>
+                  <a:srgbClr val="E2E8F0"/>
+                </a:solidFill>
+              </a:defRPr>
+            </a:pPr>
+            <a:r>
+              <a:t>Core Business Purpose: Macroeconomic evaluation linking national education capacity, government funding, and higher education quality benchmarks.</a:t>
             </a:r>
           </a:p>
           <a:p>
             <a:pPr>
-              <a:spcBef>
-                <a:spcPts val="500"/>
-              </a:spcBef>
-            </a:pPr>
-            <a:r>
-              <a:rPr sz="780" b="1">
-                <a:solidFill>
-                  <a:srgbClr val="F1F5F9"/>
-                </a:solidFill>
-                <a:latin typeface="Segoe UI"/>
-              </a:rPr>
-              <a:t>Visual Components:</a:t>
-            </a:r>
-            <a:br/>
-            <a:r>
-              <a:rPr sz="700">
-                <a:solidFill>
-                  <a:srgbClr val="CBD5E1"/>
-                </a:solidFill>
-                <a:latin typeface="Segoe UI"/>
-              </a:rPr>
-              <a:t>• Left Sidebar: Active navigation pills, Year/Region/Country/Subject filters, and Reset Filters button</a:t>
-            </a:r>
-            <a:br/>
-            <a:r>
-              <a:rPr sz="700">
-                <a:solidFill>
-                  <a:srgbClr val="CBD5E1"/>
-                </a:solidFill>
-                <a:latin typeface="Segoe UI"/>
-              </a:rPr>
-              <a:t>• 6 Circular KPI Badges: USA 197 Capacity, 58.4 Avg Score, 4.82% Spend % GDP, 62.4% Tertiary Rate, UK Leader, China Leader</a:t>
-            </a:r>
-            <a:br/>
-            <a:r>
-              <a:rPr sz="700">
-                <a:solidFill>
-                  <a:srgbClr val="CBD5E1"/>
-                </a:solidFill>
-                <a:latin typeface="Segoe UI"/>
-              </a:rPr>
-              <a:t>• Top 5 Nations by University Capacity (Horizontal Bars)</a:t>
-            </a:r>
-            <a:br/>
-            <a:r>
-              <a:rPr sz="700">
-                <a:solidFill>
-                  <a:srgbClr val="CBD5E1"/>
-                </a:solidFill>
-                <a:latin typeface="Segoe UI"/>
-              </a:rPr>
-              <a:t>• Gross Tertiary Enrolment Rate Trend % (Multi-Line Chart 2020-2024)</a:t>
-            </a:r>
-            <a:br/>
-            <a:r>
-              <a:rPr sz="700">
-                <a:solidFill>
-                  <a:srgbClr val="CBD5E1"/>
-                </a:solidFill>
-                <a:latin typeface="Segoe UI"/>
-              </a:rPr>
-              <a:t>• Ranked Universities by Region (Donut Chart with Center Total)</a:t>
-            </a:r>
-            <a:br/>
-            <a:r>
-              <a:rPr sz="700">
-                <a:solidFill>
-                  <a:srgbClr val="CBD5E1"/>
-                </a:solidFill>
-                <a:latin typeface="Segoe UI"/>
-              </a:rPr>
-              <a:t>• Govt Education Spend (% GDP) vs Score (Scatter / Bubble Plot)</a:t>
-            </a:r>
-            <a:br/>
-            <a:r>
-              <a:rPr sz="700">
-                <a:solidFill>
-                  <a:srgbClr val="CBD5E1"/>
-                </a:solidFill>
-                <a:latin typeface="Segoe UI"/>
-              </a:rPr>
-              <a:t>• World Bank Education Systems Map (Interactive Geographic Map)</a:t>
-            </a:r>
-            <a:br/>
-            <a:r>
-              <a:rPr sz="700">
-                <a:solidFill>
-                  <a:srgbClr val="CBD5E1"/>
-                </a:solidFill>
-                <a:latin typeface="Segoe UI"/>
-              </a:rPr>
-              <a:t>• Average University Score by Top Nation (Vertical Column Benchmarks)</a:t>
+              <a:defRPr sz="850">
+                <a:solidFill>
+                  <a:srgbClr val="E2E8F0"/>
+                </a:solidFill>
+              </a:defRPr>
+            </a:pPr>
+            <a:r>
+              <a:t>Visual Components: • Top Executive Header: Persistent navigation tabs across all 4 dashboards • 6 Policy KPI Scorecards: US Top Capacity (197 Univs), 58.4 Avg National Score, 4.82% Spend % GDP, 62.4% Tertiary Rate, UK Europe Leader (90), China Asia Leader (71) • Top Nations by Number of Ranked Universities (National Capacity Bars) • Average University Score by Top Nation (National Quality Bars) • Global University Distribution by Region (Horizontal Bars) • Regional Academic Performance (Horizontal Bars)</a:t>
             </a:r>
           </a:p>
           <a:p>
             <a:pPr>
-              <a:spcBef>
-                <a:spcPts val="500"/>
-              </a:spcBef>
-            </a:pPr>
-            <a:r>
-              <a:rPr sz="780" b="1">
-                <a:solidFill>
-                  <a:srgbClr val="F1F5F9"/>
-                </a:solidFill>
-                <a:latin typeface="Segoe UI"/>
-              </a:rPr>
-              <a:t>Interactivity &amp; Filter Actions:</a:t>
-            </a:r>
-            <a:br/>
-            <a:r>
-              <a:rPr sz="700">
-                <a:solidFill>
-                  <a:srgbClr val="CBD5E1"/>
-                </a:solidFill>
-                <a:latin typeface="Segoe UI"/>
-              </a:rPr>
-              <a:t>• Clicking country on Dashboard 1 filters Dashboard 4 to national profile.</a:t>
-            </a:r>
-            <a:br/>
-            <a:r>
-              <a:rPr sz="700">
-                <a:solidFill>
-                  <a:srgbClr val="CBD5E1"/>
-                </a:solidFill>
-                <a:latin typeface="Segoe UI"/>
-              </a:rPr>
-              <a:t>• Multi-country selector enables side-by-side OECD policy comparisons.</a:t>
-            </a:r>
-            <a:br/>
-            <a:r>
-              <a:rPr sz="700">
-                <a:solidFill>
-                  <a:srgbClr val="CBD5E1"/>
-                </a:solidFill>
-                <a:latin typeface="Segoe UI"/>
-              </a:rPr>
-              <a:t>• 1-click ↺ Reset Filters button restores full global view instantly.</a:t>
+              <a:defRPr sz="850">
+                <a:solidFill>
+                  <a:srgbClr val="E2E8F0"/>
+                </a:solidFill>
+              </a:defRPr>
+            </a:pPr>
+            <a:r>
+              <a:t>Interactivity &amp; Filter Actions: • Country-level selection cross-filters national capacity and institutional quality scores. Multi-region selection reveals macroeconomic funding dynamics.</a:t>
             </a:r>
           </a:p>
           <a:p>
             <a:pPr>
-              <a:spcBef>
-                <a:spcPts val="500"/>
-              </a:spcBef>
-            </a:pPr>
-            <a:r>
-              <a:rPr sz="780" b="1">
-                <a:solidFill>
-                  <a:srgbClr val="F1F5F9"/>
-                </a:solidFill>
-                <a:latin typeface="Segoe UI"/>
-              </a:rPr>
-              <a:t>Analytical Finding:</a:t>
-            </a:r>
-            <a:br/>
-            <a:r>
-              <a:rPr sz="720">
-                <a:solidFill>
-                  <a:srgbClr val="CBD5E1"/>
-                </a:solidFill>
-                <a:latin typeface="Segoe UI"/>
-              </a:rPr>
-              <a:t>Public tertiary education spend (&gt;4.5% GDP) correlates with higher national gross enrollment (&gt;60%); USA and UK lead in top-tier capacity, while China demonstrates the fastest rate of institutional ranking gains over 2020-2024.</a:t>
-            </a:r>
-          </a:p>
-        </p:txBody>
-      </p:sp>
+              <a:defRPr sz="850">
+                <a:solidFill>
+                  <a:srgbClr val="E2E8F0"/>
+                </a:solidFill>
+              </a:defRPr>
+            </a:pPr>
+            <a:r>
+              <a:t>Analytical Finding: Public tertiary education spend (&gt;4.5% GDP) strongly correlates with top-tier university capacity; the US and UK lead institutional volume, while East Asia shows steepest enrollment growth.</a:t>
+            </a:r>
+          </a:p>
+        </p:txBody>
+      </p:sp>
+      <p:pic>
+        <p:nvPicPr>
+          <p:cNvPr id="9" name="Picture 8" descr="dashboard_4_country_comparison.png"/>
+          <p:cNvPicPr>
+            <a:picLocks noChangeAspect="1"/>
+          </p:cNvPicPr>
+          <p:nvPr/>
+        </p:nvPicPr>
+        <p:blipFill>
+          <a:blip r:embed="rId3"/>
+          <a:stretch>
+            <a:fillRect/>
+          </a:stretch>
+        </p:blipFill>
+        <p:spPr>
+          <a:xfrm>
+            <a:off x="731520" y="1371600"/>
+            <a:ext cx="6949440" cy="4343400"/>
+          </a:xfrm>
+          <a:prstGeom prst="rect">
+            <a:avLst/>
+          </a:prstGeom>
+        </p:spPr>
+      </p:pic>
     </p:spTree>
   </p:cSld>
   <p:clrMapOvr>
@@ -8690,41 +7978,19 @@
               </a:defRPr>
             </a:pPr>
             <a:r>
-              <a:rPr sz="1100" b="1">
-                <a:solidFill>
-                  <a:srgbClr val="10B981"/>
-                </a:solidFill>
-                <a:latin typeface="Segoe UI"/>
-              </a:rPr>
               <a:t>TIER 1: MACRO DISCOVERY</a:t>
             </a:r>
           </a:p>
           <a:p>
             <a:pPr>
-              <a:spcBef>
-                <a:spcPts val="800"/>
-              </a:spcBef>
               <a:defRPr sz="850">
                 <a:solidFill>
-                  <a:srgbClr val="CBD5E1"/>
-                </a:solidFill>
-                <a:latin typeface="Segoe UI"/>
-              </a:defRPr>
-            </a:pPr>
-            <a:r>
-              <a:t>• Dashboard 1: University Overview</a:t>
-            </a:r>
-            <a:br/>
-            <a:r>
-              <a:t>• User selects region, country, or subject area via persistent Left Sidebar.</a:t>
-            </a:r>
-            <a:br/>
-            <a:r>
-              <a:t>• Scorecard displays top institutions, global geographic share, and KPI badges.</a:t>
-            </a:r>
-            <a:br/>
-            <a:r>
-              <a:t>• Clicking any institution filters the suite and sets active context for Tier 2.</a:t>
+                  <a:srgbClr val="E2E8F0"/>
+                </a:solidFill>
+              </a:defRPr>
+            </a:pPr>
+            <a:r>
+              <a:t>• Dashboard 1: University Overview • User explores global higher education landscape via Top Navigation Tabs. • Scorecard displays top institutions, global geographic share, and 6 executive KPI cards. • Clicking an institution filters detail views while scoped exclude protection keeps macro charts intact.</a:t>
             </a:r>
           </a:p>
         </p:txBody>
@@ -8773,47 +8039,25 @@
             <a:pPr algn="ctr">
               <a:defRPr sz="1100" b="1">
                 <a:solidFill>
-                  <a:srgbClr val="06B6D4"/>
-                </a:solidFill>
-                <a:latin typeface="Segoe UI"/>
-              </a:defRPr>
-            </a:pPr>
-            <a:r>
-              <a:rPr sz="1100" b="1">
-                <a:solidFill>
                   <a:srgbClr val="10B981"/>
                 </a:solidFill>
                 <a:latin typeface="Segoe UI"/>
-              </a:rPr>
+              </a:defRPr>
+            </a:pPr>
+            <a:r>
               <a:t>TIER 2: RESEARCH DEEP DIVE</a:t>
             </a:r>
           </a:p>
           <a:p>
             <a:pPr>
-              <a:spcBef>
-                <a:spcPts val="800"/>
-              </a:spcBef>
               <a:defRPr sz="850">
                 <a:solidFill>
-                  <a:srgbClr val="CBD5E1"/>
-                </a:solidFill>
-                <a:latin typeface="Segoe UI"/>
-              </a:defRPr>
-            </a:pPr>
-            <a:r>
-              <a:t>• Dashboard 2: Research Analytics</a:t>
-            </a:r>
-            <a:br/>
-            <a:r>
-              <a:t>• Filter action automatically passes university_id to evaluate citations and output.</a:t>
-            </a:r>
-            <a:br/>
-            <a:r>
-              <a:t>• Highlights institution on citation velocity trend and scatter regression plot.</a:t>
-            </a:r>
-            <a:br/>
-            <a:r>
-              <a:t>• Scholarly publication volume benchmarks institution against regional peers.</a:t>
+                  <a:srgbClr val="E2E8F0"/>
+                </a:solidFill>
+              </a:defRPr>
+            </a:pPr>
+            <a:r>
+              <a:t>• Dashboard 2: Research Analytics • Cross-filtering evaluates research productivity and citation impact. • Highlights institution on the citation impact vs productivity scatter plot. • Regional benchmarks evaluate scholarly performance across continental peers.</a:t>
             </a:r>
           </a:p>
         </p:txBody>
@@ -8862,47 +8106,25 @@
             <a:pPr algn="ctr">
               <a:defRPr sz="1100" b="1">
                 <a:solidFill>
-                  <a:srgbClr val="F59E0B"/>
-                </a:solidFill>
-                <a:latin typeface="Segoe UI"/>
-              </a:defRPr>
-            </a:pPr>
-            <a:r>
-              <a:rPr sz="1100" b="1">
-                <a:solidFill>
                   <a:srgbClr val="10B981"/>
                 </a:solidFill>
                 <a:latin typeface="Segoe UI"/>
-              </a:rPr>
+              </a:defRPr>
+            </a:pPr>
+            <a:r>
               <a:t>TIER 3: CAMPUS EXPERIENCE</a:t>
             </a:r>
           </a:p>
           <a:p>
             <a:pPr>
-              <a:spcBef>
-                <a:spcPts val="800"/>
-              </a:spcBef>
               <a:defRPr sz="850">
                 <a:solidFill>
-                  <a:srgbClr val="CBD5E1"/>
-                </a:solidFill>
-                <a:latin typeface="Segoe UI"/>
-              </a:defRPr>
-            </a:pPr>
-            <a:r>
-              <a:t>• Dashboard 3: Student Analytics</a:t>
-            </a:r>
-            <a:br/>
-            <a:r>
-              <a:t>• Evaluates campus mentorship capacity and international mobility demographics.</a:t>
-            </a:r>
-            <a:br/>
-            <a:r>
-              <a:t>• Benchmarks student-to-staff ratios against global averages (1:17.3 baseline).</a:t>
-            </a:r>
-            <a:br/>
-            <a:r>
-              <a:t>• Provides detailed gender parity indices and global student share distributions.</a:t>
+                  <a:srgbClr val="E2E8F0"/>
+                </a:solidFill>
+              </a:defRPr>
+            </a:pPr>
+            <a:r>
+              <a:t>• Dashboard 3: Student Analytics • Evaluates campus faculty capacity and international mobility demographics. • Benchmarks faculty-to-student ratios against global benchmarks (1:11.2 baseline). • Analyzes student diversity indices and continental student distributions.</a:t>
             </a:r>
           </a:p>
         </p:txBody>
@@ -8951,47 +8173,25 @@
             <a:pPr algn="ctr">
               <a:defRPr sz="1100" b="1">
                 <a:solidFill>
-                  <a:srgbClr val="8B5CF6"/>
-                </a:solidFill>
-                <a:latin typeface="Segoe UI"/>
-              </a:defRPr>
-            </a:pPr>
-            <a:r>
-              <a:rPr sz="1100" b="1">
-                <a:solidFill>
                   <a:srgbClr val="10B981"/>
                 </a:solidFill>
                 <a:latin typeface="Segoe UI"/>
-              </a:rPr>
+              </a:defRPr>
+            </a:pPr>
+            <a:r>
               <a:t>TIER 4: POLICY BENCHMARK</a:t>
             </a:r>
           </a:p>
           <a:p>
             <a:pPr>
-              <a:spcBef>
-                <a:spcPts val="800"/>
-              </a:spcBef>
               <a:defRPr sz="850">
                 <a:solidFill>
-                  <a:srgbClr val="CBD5E1"/>
-                </a:solidFill>
-                <a:latin typeface="Segoe UI"/>
-              </a:defRPr>
-            </a:pPr>
-            <a:r>
-              <a:t>• Dashboard 4: Country Comparison</a:t>
-            </a:r>
-            <a:br/>
-            <a:r>
-              <a:t>• Cross-filters to host country national profile with World Bank EdStats indicators.</a:t>
-            </a:r>
-            <a:br/>
-            <a:r>
-              <a:t>• Evaluates public tertiary spending (% of GDP) against national capacity.</a:t>
-            </a:r>
-            <a:br/>
-            <a:r>
-              <a:t>• 1-click ↺ Reset Filters button restores global cross-comparison across all views.</a:t>
+                  <a:srgbClr val="E2E8F0"/>
+                </a:solidFill>
+              </a:defRPr>
+            </a:pPr>
+            <a:r>
+              <a:t>• Dashboard 4: Country Comparison • Cross-filters to host country national profile with macroeconomic indicators. • Evaluates public tertiary spending against top national university capacity. • Persistent top navigation allows instant transitions across all analytical tiers.</a:t>
             </a:r>
           </a:p>
         </p:txBody>
@@ -13029,7 +12229,7 @@
               </a:defRPr>
             </a:pPr>
             <a:r>
-              <a:t>• Academic leaders lack unified intelligence to evaluate research impact alongside student mentorship capacity.</a:t>
+              <a:t>• Academic leaders lack unified intelligence to evaluate research impact alongside faculty advising capacity.</a:t>
             </a:r>
             <a:br/>
             <a:r>
@@ -16695,7 +15895,7 @@
             <a:br/>
             <a:br/>
             <a:r>
-              <a:t>A lower ratio indicates intensive faculty mentorship and smaller tutorial class cohorts (e.g., Caltech: 6.4:1).</a:t>
+              <a:t>A lower ratio indicates intensive faculty advising and smaller tutorial class cohorts (e.g., Caltech: 6.4:1).</a:t>
             </a:r>
           </a:p>
         </p:txBody>
